--- a/output/wordlabs-lock-3day.pptx
+++ b/output/wordlabs-lock-3day.pptx
@@ -4279,7 +4279,7 @@
                 <a:ea typeface="Calibri" pitchFamily="34" charset="-122"/>
                 <a:cs typeface="Calibri" pitchFamily="34" charset="-120"/>
               </a:rPr>
-              <a:t>Origin: Latin: locus</a:t>
+              <a:t>Origin: Latin: locare</a:t>
             </a:r>
             <a:endParaRPr lang="en-US" sz="1300" dirty="0"/>
           </a:p>
@@ -6040,7 +6040,7 @@
                 <a:ea typeface="Calibri" pitchFamily="34" charset="-122"/>
                 <a:cs typeface="Calibri" pitchFamily="34" charset="-120"/>
               </a:rPr>
-              <a:t>She used her key to </a:t>
+              <a:t>She needed to </a:t>
             </a:r>
             <a:pPr algn="l" indent="0" marL="0">
               <a:buNone/>
@@ -6088,7 +6088,7 @@
                 <a:ea typeface="Calibri" pitchFamily="34" charset="-122"/>
                 <a:cs typeface="Calibri" pitchFamily="34" charset="-120"/>
               </a:rPr>
-              <a:t>locker</a:t>
+              <a:t>padlock</a:t>
             </a:r>
             <a:pPr algn="l" indent="0" marL="0">
               <a:buNone/>
@@ -6102,7 +6102,7 @@
                 <a:ea typeface="Calibri" pitchFamily="34" charset="-122"/>
                 <a:cs typeface="Calibri" pitchFamily="34" charset="-120"/>
               </a:rPr>
-              <a:t> before the swimming carnival began.</a:t>
+              <a:t> before she could get her bike out of the shed.</a:t>
             </a:r>
             <a:endParaRPr lang="en-US" sz="1800" dirty="0"/>
           </a:p>
@@ -6385,7 +6385,7 @@
                 <a:ea typeface="Trebuchet MS" pitchFamily="34" charset="-122"/>
                 <a:cs typeface="Trebuchet MS" pitchFamily="34" charset="-120"/>
               </a:rPr>
-              <a:t>locker</a:t>
+              <a:t>padlock</a:t>
             </a:r>
             <a:endParaRPr lang="en-US" sz="1400" dirty="0"/>
           </a:p>
@@ -7860,7 +7860,7 @@
                 <a:ea typeface="Calibri" pitchFamily="34" charset="-122"/>
                 <a:cs typeface="Calibri" pitchFamily="34" charset="-120"/>
               </a:rPr>
-              <a:t>reverse or not</a:t>
+              <a:t>not / reverse the action</a:t>
             </a:r>
             <a:endParaRPr lang="en-US" sz="850" dirty="0"/>
           </a:p>
@@ -7972,7 +7972,7 @@
                 <a:ea typeface="Calibri" pitchFamily="34" charset="-122"/>
                 <a:cs typeface="Calibri" pitchFamily="34" charset="-120"/>
               </a:rPr>
-              <a:t>to fasten shut</a:t>
+              <a:t>to fasten or secure shut</a:t>
             </a:r>
             <a:endParaRPr lang="en-US" sz="850" dirty="0"/>
           </a:p>
@@ -8845,7 +8845,7 @@
                 <a:ea typeface="Calibri" pitchFamily="34" charset="-122"/>
                 <a:cs typeface="Calibri" pitchFamily="34" charset="-120"/>
               </a:rPr>
-              <a:t>reverse or not</a:t>
+              <a:t>not / reverse the action</a:t>
             </a:r>
             <a:endParaRPr lang="en-US" sz="850" dirty="0"/>
           </a:p>
@@ -8957,7 +8957,7 @@
                 <a:ea typeface="Calibri" pitchFamily="34" charset="-122"/>
                 <a:cs typeface="Calibri" pitchFamily="34" charset="-120"/>
               </a:rPr>
-              <a:t>to fasten shut</a:t>
+              <a:t>to fasten or secure shut</a:t>
             </a:r>
             <a:endParaRPr lang="en-US" sz="850" dirty="0"/>
           </a:p>
@@ -9962,7 +9962,7 @@
                 <a:ea typeface="Calibri" pitchFamily="34" charset="-122"/>
                 <a:cs typeface="Calibri" pitchFamily="34" charset="-120"/>
               </a:rPr>
-              <a:t>reverse or not</a:t>
+              <a:t>not / reverse the action</a:t>
             </a:r>
             <a:endParaRPr lang="en-US" sz="850" dirty="0"/>
           </a:p>
@@ -10074,7 +10074,7 @@
                 <a:ea typeface="Calibri" pitchFamily="34" charset="-122"/>
                 <a:cs typeface="Calibri" pitchFamily="34" charset="-120"/>
               </a:rPr>
-              <a:t>to fasten shut</a:t>
+              <a:t>to fasten or secure shut</a:t>
             </a:r>
             <a:endParaRPr lang="en-US" sz="850" dirty="0"/>
           </a:p>
@@ -11192,7 +11192,7 @@
                 <a:ea typeface="Trebuchet MS" pitchFamily="34" charset="-122"/>
                 <a:cs typeface="Trebuchet MS" pitchFamily="34" charset="-120"/>
               </a:rPr>
-              <a:t>locker</a:t>
+              <a:t>padlock</a:t>
             </a:r>
             <a:endParaRPr lang="en-US" sz="2800" dirty="0"/>
           </a:p>
@@ -12019,7 +12019,7 @@
                 <a:ea typeface="Trebuchet MS" pitchFamily="34" charset="-122"/>
                 <a:cs typeface="Trebuchet MS" pitchFamily="34" charset="-120"/>
               </a:rPr>
-              <a:t>locker</a:t>
+              <a:t>padlock</a:t>
             </a:r>
             <a:endParaRPr lang="en-US" sz="2800" dirty="0"/>
           </a:p>
@@ -12108,11 +12108,11 @@
             </a:avLst>
           </a:prstGeom>
           <a:solidFill>
-            <a:srgbClr val="CCFBF1"/>
+            <a:srgbClr val="DDD6FE"/>
           </a:solidFill>
           <a:ln w="19050">
             <a:solidFill>
-              <a:srgbClr val="0D9488"/>
+              <a:srgbClr val="7C3AED"/>
             </a:solidFill>
             <a:prstDash val="solid"/>
           </a:ln>
@@ -12152,13 +12152,13 @@
             <a:r>
               <a:rPr lang="en-US" sz="1300" b="1" dirty="0">
                 <a:solidFill>
-                  <a:srgbClr val="0F766E"/>
+                  <a:srgbClr val="4C1D95"/>
                 </a:solidFill>
                 <a:latin typeface="Trebuchet MS" pitchFamily="34" charset="0"/>
                 <a:ea typeface="Trebuchet MS" pitchFamily="34" charset="-122"/>
                 <a:cs typeface="Trebuchet MS" pitchFamily="34" charset="-120"/>
               </a:rPr>
-              <a:t>lock</a:t>
+              <a:t>pad</a:t>
             </a:r>
             <a:endParaRPr lang="en-US" sz="1300" dirty="0"/>
           </a:p>
@@ -12197,7 +12197,7 @@
                 <a:ea typeface="Calibri" pitchFamily="34" charset="-122"/>
                 <a:cs typeface="Calibri" pitchFamily="34" charset="-120"/>
               </a:rPr>
-              <a:t>to fasten shut</a:t>
+              <a:t>flat portable panel</a:t>
             </a:r>
             <a:endParaRPr lang="en-US" sz="850" dirty="0"/>
           </a:p>
@@ -12220,11 +12220,11 @@
             </a:avLst>
           </a:prstGeom>
           <a:solidFill>
-            <a:srgbClr val="FCE7F3"/>
+            <a:srgbClr val="CCFBF1"/>
           </a:solidFill>
           <a:ln w="19050">
             <a:solidFill>
-              <a:srgbClr val="DB2777"/>
+              <a:srgbClr val="0D9488"/>
             </a:solidFill>
             <a:prstDash val="solid"/>
           </a:ln>
@@ -12264,13 +12264,13 @@
             <a:r>
               <a:rPr lang="en-US" sz="1300" b="1" dirty="0">
                 <a:solidFill>
-                  <a:srgbClr val="9D174D"/>
+                  <a:srgbClr val="0F766E"/>
                 </a:solidFill>
                 <a:latin typeface="Trebuchet MS" pitchFamily="34" charset="0"/>
                 <a:ea typeface="Trebuchet MS" pitchFamily="34" charset="-122"/>
                 <a:cs typeface="Trebuchet MS" pitchFamily="34" charset="-120"/>
               </a:rPr>
-              <a:t>er</a:t>
+              <a:t>lock</a:t>
             </a:r>
             <a:endParaRPr lang="en-US" sz="1300" dirty="0"/>
           </a:p>
@@ -12309,7 +12309,7 @@
                 <a:ea typeface="Calibri" pitchFamily="34" charset="-122"/>
                 <a:cs typeface="Calibri" pitchFamily="34" charset="-120"/>
               </a:rPr>
-              <a:t>a person or thing that does</a:t>
+              <a:t>to fasten or secure shut</a:t>
             </a:r>
             <a:endParaRPr lang="en-US" sz="850" dirty="0"/>
           </a:p>
@@ -13004,7 +13004,7 @@
                 <a:ea typeface="Trebuchet MS" pitchFamily="34" charset="-122"/>
                 <a:cs typeface="Trebuchet MS" pitchFamily="34" charset="-120"/>
               </a:rPr>
-              <a:t>locker</a:t>
+              <a:t>padlock</a:t>
             </a:r>
             <a:endParaRPr lang="en-US" sz="2800" dirty="0"/>
           </a:p>
@@ -13093,11 +13093,11 @@
             </a:avLst>
           </a:prstGeom>
           <a:solidFill>
-            <a:srgbClr val="CCFBF1"/>
+            <a:srgbClr val="DDD6FE"/>
           </a:solidFill>
           <a:ln w="19050">
             <a:solidFill>
-              <a:srgbClr val="0D9488"/>
+              <a:srgbClr val="7C3AED"/>
             </a:solidFill>
             <a:prstDash val="solid"/>
           </a:ln>
@@ -13137,13 +13137,13 @@
             <a:r>
               <a:rPr lang="en-US" sz="1300" b="1" dirty="0">
                 <a:solidFill>
-                  <a:srgbClr val="0F766E"/>
+                  <a:srgbClr val="4C1D95"/>
                 </a:solidFill>
                 <a:latin typeface="Trebuchet MS" pitchFamily="34" charset="0"/>
                 <a:ea typeface="Trebuchet MS" pitchFamily="34" charset="-122"/>
                 <a:cs typeface="Trebuchet MS" pitchFamily="34" charset="-120"/>
               </a:rPr>
-              <a:t>lock</a:t>
+              <a:t>pad</a:t>
             </a:r>
             <a:endParaRPr lang="en-US" sz="1300" dirty="0"/>
           </a:p>
@@ -13182,7 +13182,7 @@
                 <a:ea typeface="Calibri" pitchFamily="34" charset="-122"/>
                 <a:cs typeface="Calibri" pitchFamily="34" charset="-120"/>
               </a:rPr>
-              <a:t>to fasten shut</a:t>
+              <a:t>flat portable panel</a:t>
             </a:r>
             <a:endParaRPr lang="en-US" sz="850" dirty="0"/>
           </a:p>
@@ -13205,11 +13205,11 @@
             </a:avLst>
           </a:prstGeom>
           <a:solidFill>
-            <a:srgbClr val="FCE7F3"/>
+            <a:srgbClr val="CCFBF1"/>
           </a:solidFill>
           <a:ln w="19050">
             <a:solidFill>
-              <a:srgbClr val="DB2777"/>
+              <a:srgbClr val="0D9488"/>
             </a:solidFill>
             <a:prstDash val="solid"/>
           </a:ln>
@@ -13249,13 +13249,13 @@
             <a:r>
               <a:rPr lang="en-US" sz="1300" b="1" dirty="0">
                 <a:solidFill>
-                  <a:srgbClr val="9D174D"/>
+                  <a:srgbClr val="0F766E"/>
                 </a:solidFill>
                 <a:latin typeface="Trebuchet MS" pitchFamily="34" charset="0"/>
                 <a:ea typeface="Trebuchet MS" pitchFamily="34" charset="-122"/>
                 <a:cs typeface="Trebuchet MS" pitchFamily="34" charset="-120"/>
               </a:rPr>
-              <a:t>er</a:t>
+              <a:t>lock</a:t>
             </a:r>
             <a:endParaRPr lang="en-US" sz="1300" dirty="0"/>
           </a:p>
@@ -13294,7 +13294,7 @@
                 <a:ea typeface="Calibri" pitchFamily="34" charset="-122"/>
                 <a:cs typeface="Calibri" pitchFamily="34" charset="-120"/>
               </a:rPr>
-              <a:t>a person or thing that does</a:t>
+              <a:t>to fasten or secure shut</a:t>
             </a:r>
             <a:endParaRPr lang="en-US" sz="850" dirty="0"/>
           </a:p>
@@ -13453,7 +13453,7 @@
                 <a:ea typeface="Trebuchet MS" pitchFamily="34" charset="-122"/>
                 <a:cs typeface="Trebuchet MS" pitchFamily="34" charset="-120"/>
               </a:rPr>
-              <a:t>lock</a:t>
+              <a:t>pad</a:t>
             </a:r>
             <a:endParaRPr lang="en-US" sz="1400" dirty="0"/>
           </a:p>
@@ -13558,7 +13558,7 @@
                 <a:ea typeface="Trebuchet MS" pitchFamily="34" charset="-122"/>
                 <a:cs typeface="Trebuchet MS" pitchFamily="34" charset="-120"/>
               </a:rPr>
-              <a:t>er</a:t>
+              <a:t>lock</a:t>
             </a:r>
             <a:endParaRPr lang="en-US" sz="1400" dirty="0"/>
           </a:p>
@@ -14386,7 +14386,7 @@
                 <a:ea typeface="Trebuchet MS" pitchFamily="34" charset="-122"/>
                 <a:cs typeface="Trebuchet MS" pitchFamily="34" charset="-120"/>
               </a:rPr>
-              <a:t>locker</a:t>
+              <a:t>padlock</a:t>
             </a:r>
             <a:endParaRPr lang="en-US" sz="2800" dirty="0"/>
           </a:p>
@@ -14475,11 +14475,11 @@
             </a:avLst>
           </a:prstGeom>
           <a:solidFill>
-            <a:srgbClr val="CCFBF1"/>
+            <a:srgbClr val="DDD6FE"/>
           </a:solidFill>
           <a:ln w="19050">
             <a:solidFill>
-              <a:srgbClr val="0D9488"/>
+              <a:srgbClr val="7C3AED"/>
             </a:solidFill>
             <a:prstDash val="solid"/>
           </a:ln>
@@ -14519,13 +14519,13 @@
             <a:r>
               <a:rPr lang="en-US" sz="1300" b="1" dirty="0">
                 <a:solidFill>
-                  <a:srgbClr val="0F766E"/>
+                  <a:srgbClr val="4C1D95"/>
                 </a:solidFill>
                 <a:latin typeface="Trebuchet MS" pitchFamily="34" charset="0"/>
                 <a:ea typeface="Trebuchet MS" pitchFamily="34" charset="-122"/>
                 <a:cs typeface="Trebuchet MS" pitchFamily="34" charset="-120"/>
               </a:rPr>
-              <a:t>lock</a:t>
+              <a:t>pad</a:t>
             </a:r>
             <a:endParaRPr lang="en-US" sz="1300" dirty="0"/>
           </a:p>
@@ -14564,7 +14564,7 @@
                 <a:ea typeface="Calibri" pitchFamily="34" charset="-122"/>
                 <a:cs typeface="Calibri" pitchFamily="34" charset="-120"/>
               </a:rPr>
-              <a:t>to fasten shut</a:t>
+              <a:t>flat portable panel</a:t>
             </a:r>
             <a:endParaRPr lang="en-US" sz="850" dirty="0"/>
           </a:p>
@@ -14587,11 +14587,11 @@
             </a:avLst>
           </a:prstGeom>
           <a:solidFill>
-            <a:srgbClr val="FCE7F3"/>
+            <a:srgbClr val="CCFBF1"/>
           </a:solidFill>
           <a:ln w="19050">
             <a:solidFill>
-              <a:srgbClr val="DB2777"/>
+              <a:srgbClr val="0D9488"/>
             </a:solidFill>
             <a:prstDash val="solid"/>
           </a:ln>
@@ -14631,13 +14631,13 @@
             <a:r>
               <a:rPr lang="en-US" sz="1300" b="1" dirty="0">
                 <a:solidFill>
-                  <a:srgbClr val="9D174D"/>
+                  <a:srgbClr val="0F766E"/>
                 </a:solidFill>
                 <a:latin typeface="Trebuchet MS" pitchFamily="34" charset="0"/>
                 <a:ea typeface="Trebuchet MS" pitchFamily="34" charset="-122"/>
                 <a:cs typeface="Trebuchet MS" pitchFamily="34" charset="-120"/>
               </a:rPr>
-              <a:t>er</a:t>
+              <a:t>lock</a:t>
             </a:r>
             <a:endParaRPr lang="en-US" sz="1300" dirty="0"/>
           </a:p>
@@ -14676,7 +14676,7 @@
                 <a:ea typeface="Calibri" pitchFamily="34" charset="-122"/>
                 <a:cs typeface="Calibri" pitchFamily="34" charset="-120"/>
               </a:rPr>
-              <a:t>a person or thing that does</a:t>
+              <a:t>to fasten or secure shut</a:t>
             </a:r>
             <a:endParaRPr lang="en-US" sz="850" dirty="0"/>
           </a:p>
@@ -14835,7 +14835,7 @@
                 <a:ea typeface="Trebuchet MS" pitchFamily="34" charset="-122"/>
                 <a:cs typeface="Trebuchet MS" pitchFamily="34" charset="-120"/>
               </a:rPr>
-              <a:t>lock</a:t>
+              <a:t>pad</a:t>
             </a:r>
             <a:endParaRPr lang="en-US" sz="1400" dirty="0"/>
           </a:p>
@@ -14940,7 +14940,7 @@
                 <a:ea typeface="Trebuchet MS" pitchFamily="34" charset="-122"/>
                 <a:cs typeface="Trebuchet MS" pitchFamily="34" charset="-120"/>
               </a:rPr>
-              <a:t>er</a:t>
+              <a:t>lock</a:t>
             </a:r>
             <a:endParaRPr lang="en-US" sz="1400" dirty="0"/>
           </a:p>
@@ -15047,7 +15047,7 @@
         </p:nvSpPr>
         <p:spPr>
           <a:xfrm>
-            <a:off x="2670048" y="4169664"/>
+            <a:off x="2254649" y="4169664"/>
             <a:ext cx="685800" cy="475488"/>
           </a:xfrm>
           <a:prstGeom prst="rect">
@@ -15074,7 +15074,7 @@
         </p:nvSpPr>
         <p:spPr>
           <a:xfrm>
-            <a:off x="2670048" y="4169664"/>
+            <a:off x="2254649" y="4169664"/>
             <a:ext cx="685800" cy="475488"/>
           </a:xfrm>
           <a:prstGeom prst="rect">
@@ -15099,7 +15099,7 @@
                 <a:ea typeface="Trebuchet MS" pitchFamily="34" charset="-122"/>
                 <a:cs typeface="Trebuchet MS" pitchFamily="34" charset="-120"/>
               </a:rPr>
-              <a:t>l</a:t>
+              <a:t>p</a:t>
             </a:r>
             <a:endParaRPr lang="en-US" sz="900" dirty="0"/>
           </a:p>
@@ -15113,7 +15113,7 @@
         </p:nvSpPr>
         <p:spPr>
           <a:xfrm>
-            <a:off x="4123944" y="4169664"/>
+            <a:off x="3293146" y="4169664"/>
             <a:ext cx="685800" cy="475488"/>
           </a:xfrm>
           <a:prstGeom prst="rect">
@@ -15140,7 +15140,7 @@
         </p:nvSpPr>
         <p:spPr>
           <a:xfrm>
-            <a:off x="4123944" y="4169664"/>
+            <a:off x="3293146" y="4169664"/>
             <a:ext cx="685800" cy="475488"/>
           </a:xfrm>
           <a:prstGeom prst="rect">
@@ -15165,7 +15165,7 @@
                 <a:ea typeface="Trebuchet MS" pitchFamily="34" charset="-122"/>
                 <a:cs typeface="Trebuchet MS" pitchFamily="34" charset="-120"/>
               </a:rPr>
-              <a:t>o</a:t>
+              <a:t>a</a:t>
             </a:r>
             <a:endParaRPr lang="en-US" sz="900" dirty="0"/>
           </a:p>
@@ -15179,7 +15179,7 @@
         </p:nvSpPr>
         <p:spPr>
           <a:xfrm>
-            <a:off x="5577840" y="4169664"/>
+            <a:off x="4331643" y="4169664"/>
             <a:ext cx="685800" cy="475488"/>
           </a:xfrm>
           <a:prstGeom prst="rect">
@@ -15206,7 +15206,7 @@
         </p:nvSpPr>
         <p:spPr>
           <a:xfrm>
-            <a:off x="5577840" y="4169664"/>
+            <a:off x="4331643" y="4169664"/>
             <a:ext cx="685800" cy="475488"/>
           </a:xfrm>
           <a:prstGeom prst="rect">
@@ -15231,7 +15231,7 @@
                 <a:ea typeface="Trebuchet MS" pitchFamily="34" charset="-122"/>
                 <a:cs typeface="Trebuchet MS" pitchFamily="34" charset="-120"/>
               </a:rPr>
-              <a:t>ck</a:t>
+              <a:t>d</a:t>
             </a:r>
             <a:endParaRPr lang="en-US" sz="900" dirty="0"/>
           </a:p>
@@ -15245,7 +15245,7 @@
         </p:nvSpPr>
         <p:spPr>
           <a:xfrm>
-            <a:off x="7031736" y="4169664"/>
+            <a:off x="5370141" y="4169664"/>
             <a:ext cx="685800" cy="475488"/>
           </a:xfrm>
           <a:prstGeom prst="rect">
@@ -15272,7 +15272,7 @@
         </p:nvSpPr>
         <p:spPr>
           <a:xfrm>
-            <a:off x="7031736" y="4169664"/>
+            <a:off x="5370141" y="4169664"/>
             <a:ext cx="685800" cy="475488"/>
           </a:xfrm>
           <a:prstGeom prst="rect">
@@ -15297,7 +15297,139 @@
                 <a:ea typeface="Trebuchet MS" pitchFamily="34" charset="-122"/>
                 <a:cs typeface="Trebuchet MS" pitchFamily="34" charset="-120"/>
               </a:rPr>
-              <a:t>er</a:t>
+              <a:t>l</a:t>
+            </a:r>
+            <a:endParaRPr lang="en-US" sz="900" dirty="0"/>
+          </a:p>
+        </p:txBody>
+      </p:sp>
+      <p:sp>
+        <p:nvSpPr>
+          <p:cNvPr id="41" name="Shape 39"/>
+          <p:cNvSpPr/>
+          <p:nvPr/>
+        </p:nvSpPr>
+        <p:spPr>
+          <a:xfrm>
+            <a:off x="6408638" y="4169664"/>
+            <a:ext cx="685800" cy="475488"/>
+          </a:xfrm>
+          <a:prstGeom prst="rect">
+            <a:avLst>
+              <a:gd name="adj" fmla="val 7692"/>
+            </a:avLst>
+          </a:prstGeom>
+          <a:solidFill>
+            <a:srgbClr val="FFFFFF"/>
+          </a:solidFill>
+          <a:ln w="12700">
+            <a:solidFill>
+              <a:srgbClr val="DB2777"/>
+            </a:solidFill>
+            <a:prstDash val="solid"/>
+          </a:ln>
+        </p:spPr>
+      </p:sp>
+      <p:sp>
+        <p:nvSpPr>
+          <p:cNvPr id="42" name="Text 40"/>
+          <p:cNvSpPr/>
+          <p:nvPr/>
+        </p:nvSpPr>
+        <p:spPr>
+          <a:xfrm>
+            <a:off x="6408638" y="4169664"/>
+            <a:ext cx="685800" cy="475488"/>
+          </a:xfrm>
+          <a:prstGeom prst="rect">
+            <a:avLst/>
+          </a:prstGeom>
+          <a:noFill/>
+          <a:ln/>
+        </p:spPr>
+        <p:txBody>
+          <a:bodyPr wrap="square" lIns="0" tIns="0" rIns="0" bIns="0" rtlCol="0" anchor="ctr"/>
+          <a:lstStyle/>
+          <a:p>
+            <a:pPr algn="ctr" indent="0" marL="0">
+              <a:buNone/>
+            </a:pPr>
+            <a:r>
+              <a:rPr lang="en-US" sz="900" b="1" dirty="0">
+                <a:solidFill>
+                  <a:srgbClr val="9D174D"/>
+                </a:solidFill>
+                <a:latin typeface="Trebuchet MS" pitchFamily="34" charset="0"/>
+                <a:ea typeface="Trebuchet MS" pitchFamily="34" charset="-122"/>
+                <a:cs typeface="Trebuchet MS" pitchFamily="34" charset="-120"/>
+              </a:rPr>
+              <a:t>o</a:t>
+            </a:r>
+            <a:endParaRPr lang="en-US" sz="900" dirty="0"/>
+          </a:p>
+        </p:txBody>
+      </p:sp>
+      <p:sp>
+        <p:nvSpPr>
+          <p:cNvPr id="43" name="Shape 41"/>
+          <p:cNvSpPr/>
+          <p:nvPr/>
+        </p:nvSpPr>
+        <p:spPr>
+          <a:xfrm>
+            <a:off x="7447135" y="4169664"/>
+            <a:ext cx="685800" cy="475488"/>
+          </a:xfrm>
+          <a:prstGeom prst="rect">
+            <a:avLst>
+              <a:gd name="adj" fmla="val 7692"/>
+            </a:avLst>
+          </a:prstGeom>
+          <a:solidFill>
+            <a:srgbClr val="FFFFFF"/>
+          </a:solidFill>
+          <a:ln w="12700">
+            <a:solidFill>
+              <a:srgbClr val="DB2777"/>
+            </a:solidFill>
+            <a:prstDash val="solid"/>
+          </a:ln>
+        </p:spPr>
+      </p:sp>
+      <p:sp>
+        <p:nvSpPr>
+          <p:cNvPr id="44" name="Text 42"/>
+          <p:cNvSpPr/>
+          <p:nvPr/>
+        </p:nvSpPr>
+        <p:spPr>
+          <a:xfrm>
+            <a:off x="7447135" y="4169664"/>
+            <a:ext cx="685800" cy="475488"/>
+          </a:xfrm>
+          <a:prstGeom prst="rect">
+            <a:avLst/>
+          </a:prstGeom>
+          <a:noFill/>
+          <a:ln/>
+        </p:spPr>
+        <p:txBody>
+          <a:bodyPr wrap="square" lIns="0" tIns="0" rIns="0" bIns="0" rtlCol="0" anchor="ctr"/>
+          <a:lstStyle/>
+          <a:p>
+            <a:pPr algn="ctr" indent="0" marL="0">
+              <a:buNone/>
+            </a:pPr>
+            <a:r>
+              <a:rPr lang="en-US" sz="900" b="1" dirty="0">
+                <a:solidFill>
+                  <a:srgbClr val="9D174D"/>
+                </a:solidFill>
+                <a:latin typeface="Trebuchet MS" pitchFamily="34" charset="0"/>
+                <a:ea typeface="Trebuchet MS" pitchFamily="34" charset="-122"/>
+                <a:cs typeface="Trebuchet MS" pitchFamily="34" charset="-120"/>
+              </a:rPr>
+              <a:t>ck</a:t>
             </a:r>
             <a:endParaRPr lang="en-US" sz="900" dirty="0"/>
           </a:p>
@@ -16205,7 +16337,7 @@
                 <a:ea typeface="Trebuchet MS" pitchFamily="34" charset="-122"/>
                 <a:cs typeface="Trebuchet MS" pitchFamily="34" charset="-120"/>
               </a:rPr>
-              <a:t>1</a:t>
+              <a:t>2</a:t>
             </a:r>
             <a:pPr algn="ctr" indent="0" marL="0">
               <a:buNone/>
@@ -16219,7 +16351,7 @@
                 <a:ea typeface="Trebuchet MS" pitchFamily="34" charset="-122"/>
                 <a:cs typeface="Trebuchet MS" pitchFamily="34" charset="-120"/>
               </a:rPr>
-              <a:t>  punctuation mark</a:t>
+              <a:t>  punctuation marks</a:t>
             </a:r>
             <a:endParaRPr lang="en-US" sz="2800" dirty="0"/>
           </a:p>
@@ -16640,7 +16772,7 @@
                 <a:ea typeface="Calibri" pitchFamily="34" charset="-122"/>
                 <a:cs typeface="Calibri" pitchFamily="34" charset="-120"/>
               </a:rPr>
-              <a:t>locksmith</a:t>
+              <a:t>gridlock</a:t>
             </a:r>
             <a:pPr algn="l" indent="0" marL="0">
               <a:buNone/>
@@ -16654,7 +16786,7 @@
                 <a:ea typeface="Calibri" pitchFamily="34" charset="-122"/>
                 <a:cs typeface="Calibri" pitchFamily="34" charset="-120"/>
               </a:rPr>
-              <a:t> had to </a:t>
+              <a:t> on the highway made us late, so Dad put the </a:t>
             </a:r>
             <a:pPr algn="l" indent="0" marL="0">
               <a:buNone/>
@@ -16671,7 +16803,7 @@
                 <a:ea typeface="Calibri" pitchFamily="34" charset="-122"/>
                 <a:cs typeface="Calibri" pitchFamily="34" charset="-120"/>
               </a:rPr>
-              <a:t>unlock</a:t>
+              <a:t>deadlock</a:t>
             </a:r>
             <a:pPr algn="l" indent="0" marL="0">
               <a:buNone/>
@@ -16685,7 +16817,7 @@
                 <a:ea typeface="Calibri" pitchFamily="34" charset="-122"/>
                 <a:cs typeface="Calibri" pitchFamily="34" charset="-120"/>
               </a:rPr>
-              <a:t> the </a:t>
+              <a:t> on, and we were completely </a:t>
             </a:r>
             <a:pPr algn="l" indent="0" marL="0">
               <a:buNone/>
@@ -16702,7 +16834,7 @@
                 <a:ea typeface="Calibri" pitchFamily="34" charset="-122"/>
                 <a:cs typeface="Calibri" pitchFamily="34" charset="-120"/>
               </a:rPr>
-              <a:t>deadlock</a:t>
+              <a:t>locked</a:t>
             </a:r>
             <a:pPr algn="l" indent="0" marL="0">
               <a:buNone/>
@@ -16716,7 +16848,7 @@
                 <a:ea typeface="Calibri" pitchFamily="34" charset="-122"/>
                 <a:cs typeface="Calibri" pitchFamily="34" charset="-120"/>
               </a:rPr>
-              <a:t> after the family lost their keys!</a:t>
+              <a:t> out of getting home quickly.</a:t>
             </a:r>
             <a:endParaRPr lang="en-US" sz="1800" dirty="0"/>
           </a:p>
@@ -16871,7 +17003,7 @@
                 <a:ea typeface="Trebuchet MS" pitchFamily="34" charset="-122"/>
                 <a:cs typeface="Trebuchet MS" pitchFamily="34" charset="-120"/>
               </a:rPr>
-              <a:t>locksmith</a:t>
+              <a:t>gridlock</a:t>
             </a:r>
             <a:endParaRPr lang="en-US" sz="1400" dirty="0"/>
           </a:p>
@@ -16999,7 +17131,7 @@
                 <a:ea typeface="Trebuchet MS" pitchFamily="34" charset="-122"/>
                 <a:cs typeface="Trebuchet MS" pitchFamily="34" charset="-120"/>
               </a:rPr>
-              <a:t>unlock</a:t>
+              <a:t>deadlock</a:t>
             </a:r>
             <a:endParaRPr lang="en-US" sz="1400" dirty="0"/>
           </a:p>
@@ -17127,7 +17259,7 @@
                 <a:ea typeface="Trebuchet MS" pitchFamily="34" charset="-122"/>
                 <a:cs typeface="Trebuchet MS" pitchFamily="34" charset="-120"/>
               </a:rPr>
-              <a:t>deadlock</a:t>
+              <a:t>locked</a:t>
             </a:r>
             <a:endParaRPr lang="en-US" sz="1400" dirty="0"/>
           </a:p>
@@ -17597,7 +17729,7 @@
                 <a:ea typeface="Trebuchet MS" pitchFamily="34" charset="-122"/>
                 <a:cs typeface="Trebuchet MS" pitchFamily="34" charset="-120"/>
               </a:rPr>
-              <a:t>locksmith</a:t>
+              <a:t>gridlock</a:t>
             </a:r>
             <a:endParaRPr lang="en-US" sz="2800" dirty="0"/>
           </a:p>
@@ -18424,7 +18556,7 @@
                 <a:ea typeface="Trebuchet MS" pitchFamily="34" charset="-122"/>
                 <a:cs typeface="Trebuchet MS" pitchFamily="34" charset="-120"/>
               </a:rPr>
-              <a:t>locksmith</a:t>
+              <a:t>gridlock</a:t>
             </a:r>
             <a:endParaRPr lang="en-US" sz="2800" dirty="0"/>
           </a:p>
@@ -18513,11 +18645,11 @@
             </a:avLst>
           </a:prstGeom>
           <a:solidFill>
-            <a:srgbClr val="CCFBF1"/>
+            <a:srgbClr val="DDD6FE"/>
           </a:solidFill>
           <a:ln w="19050">
             <a:solidFill>
-              <a:srgbClr val="0D9488"/>
+              <a:srgbClr val="7C3AED"/>
             </a:solidFill>
             <a:prstDash val="solid"/>
           </a:ln>
@@ -18557,13 +18689,13 @@
             <a:r>
               <a:rPr lang="en-US" sz="1300" b="1" dirty="0">
                 <a:solidFill>
-                  <a:srgbClr val="0F766E"/>
+                  <a:srgbClr val="4C1D95"/>
                 </a:solidFill>
                 <a:latin typeface="Trebuchet MS" pitchFamily="34" charset="0"/>
                 <a:ea typeface="Trebuchet MS" pitchFamily="34" charset="-122"/>
                 <a:cs typeface="Trebuchet MS" pitchFamily="34" charset="-120"/>
               </a:rPr>
-              <a:t>lock</a:t>
+              <a:t>grid</a:t>
             </a:r>
             <a:endParaRPr lang="en-US" sz="1300" dirty="0"/>
           </a:p>
@@ -18602,7 +18734,7 @@
                 <a:ea typeface="Calibri" pitchFamily="34" charset="-122"/>
                 <a:cs typeface="Calibri" pitchFamily="34" charset="-120"/>
               </a:rPr>
-              <a:t>to fasten shut</a:t>
+              <a:t>a pattern of crossing lines</a:t>
             </a:r>
             <a:endParaRPr lang="en-US" sz="850" dirty="0"/>
           </a:p>
@@ -18625,11 +18757,11 @@
             </a:avLst>
           </a:prstGeom>
           <a:solidFill>
-            <a:srgbClr val="FCE7F3"/>
+            <a:srgbClr val="CCFBF1"/>
           </a:solidFill>
           <a:ln w="19050">
             <a:solidFill>
-              <a:srgbClr val="DB2777"/>
+              <a:srgbClr val="0D9488"/>
             </a:solidFill>
             <a:prstDash val="solid"/>
           </a:ln>
@@ -18669,13 +18801,13 @@
             <a:r>
               <a:rPr lang="en-US" sz="1300" b="1" dirty="0">
                 <a:solidFill>
-                  <a:srgbClr val="9D174D"/>
+                  <a:srgbClr val="0F766E"/>
                 </a:solidFill>
                 <a:latin typeface="Trebuchet MS" pitchFamily="34" charset="0"/>
                 <a:ea typeface="Trebuchet MS" pitchFamily="34" charset="-122"/>
                 <a:cs typeface="Trebuchet MS" pitchFamily="34" charset="-120"/>
               </a:rPr>
-              <a:t>smith</a:t>
+              <a:t>lock</a:t>
             </a:r>
             <a:endParaRPr lang="en-US" sz="1300" dirty="0"/>
           </a:p>
@@ -18714,7 +18846,7 @@
                 <a:ea typeface="Calibri" pitchFamily="34" charset="-122"/>
                 <a:cs typeface="Calibri" pitchFamily="34" charset="-120"/>
               </a:rPr>
-              <a:t>a skilled maker or worker</a:t>
+              <a:t>to fasten or secure shut</a:t>
             </a:r>
             <a:endParaRPr lang="en-US" sz="850" dirty="0"/>
           </a:p>
@@ -19409,7 +19541,7 @@
                 <a:ea typeface="Trebuchet MS" pitchFamily="34" charset="-122"/>
                 <a:cs typeface="Trebuchet MS" pitchFamily="34" charset="-120"/>
               </a:rPr>
-              <a:t>locksmith</a:t>
+              <a:t>gridlock</a:t>
             </a:r>
             <a:endParaRPr lang="en-US" sz="2800" dirty="0"/>
           </a:p>
@@ -19498,11 +19630,11 @@
             </a:avLst>
           </a:prstGeom>
           <a:solidFill>
-            <a:srgbClr val="CCFBF1"/>
+            <a:srgbClr val="DDD6FE"/>
           </a:solidFill>
           <a:ln w="19050">
             <a:solidFill>
-              <a:srgbClr val="0D9488"/>
+              <a:srgbClr val="7C3AED"/>
             </a:solidFill>
             <a:prstDash val="solid"/>
           </a:ln>
@@ -19542,13 +19674,13 @@
             <a:r>
               <a:rPr lang="en-US" sz="1300" b="1" dirty="0">
                 <a:solidFill>
-                  <a:srgbClr val="0F766E"/>
+                  <a:srgbClr val="4C1D95"/>
                 </a:solidFill>
                 <a:latin typeface="Trebuchet MS" pitchFamily="34" charset="0"/>
                 <a:ea typeface="Trebuchet MS" pitchFamily="34" charset="-122"/>
                 <a:cs typeface="Trebuchet MS" pitchFamily="34" charset="-120"/>
               </a:rPr>
-              <a:t>lock</a:t>
+              <a:t>grid</a:t>
             </a:r>
             <a:endParaRPr lang="en-US" sz="1300" dirty="0"/>
           </a:p>
@@ -19587,7 +19719,7 @@
                 <a:ea typeface="Calibri" pitchFamily="34" charset="-122"/>
                 <a:cs typeface="Calibri" pitchFamily="34" charset="-120"/>
               </a:rPr>
-              <a:t>to fasten shut</a:t>
+              <a:t>a pattern of crossing lines</a:t>
             </a:r>
             <a:endParaRPr lang="en-US" sz="850" dirty="0"/>
           </a:p>
@@ -19610,11 +19742,11 @@
             </a:avLst>
           </a:prstGeom>
           <a:solidFill>
-            <a:srgbClr val="FCE7F3"/>
+            <a:srgbClr val="CCFBF1"/>
           </a:solidFill>
           <a:ln w="19050">
             <a:solidFill>
-              <a:srgbClr val="DB2777"/>
+              <a:srgbClr val="0D9488"/>
             </a:solidFill>
             <a:prstDash val="solid"/>
           </a:ln>
@@ -19654,13 +19786,13 @@
             <a:r>
               <a:rPr lang="en-US" sz="1300" b="1" dirty="0">
                 <a:solidFill>
-                  <a:srgbClr val="9D174D"/>
+                  <a:srgbClr val="0F766E"/>
                 </a:solidFill>
                 <a:latin typeface="Trebuchet MS" pitchFamily="34" charset="0"/>
                 <a:ea typeface="Trebuchet MS" pitchFamily="34" charset="-122"/>
                 <a:cs typeface="Trebuchet MS" pitchFamily="34" charset="-120"/>
               </a:rPr>
-              <a:t>smith</a:t>
+              <a:t>lock</a:t>
             </a:r>
             <a:endParaRPr lang="en-US" sz="1300" dirty="0"/>
           </a:p>
@@ -19699,7 +19831,7 @@
                 <a:ea typeface="Calibri" pitchFamily="34" charset="-122"/>
                 <a:cs typeface="Calibri" pitchFamily="34" charset="-120"/>
               </a:rPr>
-              <a:t>a skilled maker or worker</a:t>
+              <a:t>to fasten or secure shut</a:t>
             </a:r>
             <a:endParaRPr lang="en-US" sz="850" dirty="0"/>
           </a:p>
@@ -19858,7 +19990,7 @@
                 <a:ea typeface="Trebuchet MS" pitchFamily="34" charset="-122"/>
                 <a:cs typeface="Trebuchet MS" pitchFamily="34" charset="-120"/>
               </a:rPr>
-              <a:t>lock</a:t>
+              <a:t>grid</a:t>
             </a:r>
             <a:endParaRPr lang="en-US" sz="1400" dirty="0"/>
           </a:p>
@@ -19963,7 +20095,7 @@
                 <a:ea typeface="Trebuchet MS" pitchFamily="34" charset="-122"/>
                 <a:cs typeface="Trebuchet MS" pitchFamily="34" charset="-120"/>
               </a:rPr>
-              <a:t>smith</a:t>
+              <a:t>lock</a:t>
             </a:r>
             <a:endParaRPr lang="en-US" sz="1400" dirty="0"/>
           </a:p>
@@ -20526,7 +20658,7 @@
                 <a:ea typeface="Trebuchet MS" pitchFamily="34" charset="-122"/>
                 <a:cs typeface="Trebuchet MS" pitchFamily="34" charset="-120"/>
               </a:rPr>
-              <a:t>locksmith</a:t>
+              <a:t>gridlock</a:t>
             </a:r>
             <a:endParaRPr lang="en-US" sz="2800" dirty="0"/>
           </a:p>
@@ -20615,11 +20747,11 @@
             </a:avLst>
           </a:prstGeom>
           <a:solidFill>
-            <a:srgbClr val="CCFBF1"/>
+            <a:srgbClr val="DDD6FE"/>
           </a:solidFill>
           <a:ln w="19050">
             <a:solidFill>
-              <a:srgbClr val="0D9488"/>
+              <a:srgbClr val="7C3AED"/>
             </a:solidFill>
             <a:prstDash val="solid"/>
           </a:ln>
@@ -20659,13 +20791,13 @@
             <a:r>
               <a:rPr lang="en-US" sz="1300" b="1" dirty="0">
                 <a:solidFill>
-                  <a:srgbClr val="0F766E"/>
+                  <a:srgbClr val="4C1D95"/>
                 </a:solidFill>
                 <a:latin typeface="Trebuchet MS" pitchFamily="34" charset="0"/>
                 <a:ea typeface="Trebuchet MS" pitchFamily="34" charset="-122"/>
                 <a:cs typeface="Trebuchet MS" pitchFamily="34" charset="-120"/>
               </a:rPr>
-              <a:t>lock</a:t>
+              <a:t>grid</a:t>
             </a:r>
             <a:endParaRPr lang="en-US" sz="1300" dirty="0"/>
           </a:p>
@@ -20704,7 +20836,7 @@
                 <a:ea typeface="Calibri" pitchFamily="34" charset="-122"/>
                 <a:cs typeface="Calibri" pitchFamily="34" charset="-120"/>
               </a:rPr>
-              <a:t>to fasten shut</a:t>
+              <a:t>a pattern of crossing lines</a:t>
             </a:r>
             <a:endParaRPr lang="en-US" sz="850" dirty="0"/>
           </a:p>
@@ -20727,11 +20859,11 @@
             </a:avLst>
           </a:prstGeom>
           <a:solidFill>
-            <a:srgbClr val="FCE7F3"/>
+            <a:srgbClr val="CCFBF1"/>
           </a:solidFill>
           <a:ln w="19050">
             <a:solidFill>
-              <a:srgbClr val="DB2777"/>
+              <a:srgbClr val="0D9488"/>
             </a:solidFill>
             <a:prstDash val="solid"/>
           </a:ln>
@@ -20771,13 +20903,13 @@
             <a:r>
               <a:rPr lang="en-US" sz="1300" b="1" dirty="0">
                 <a:solidFill>
-                  <a:srgbClr val="9D174D"/>
+                  <a:srgbClr val="0F766E"/>
                 </a:solidFill>
                 <a:latin typeface="Trebuchet MS" pitchFamily="34" charset="0"/>
                 <a:ea typeface="Trebuchet MS" pitchFamily="34" charset="-122"/>
                 <a:cs typeface="Trebuchet MS" pitchFamily="34" charset="-120"/>
               </a:rPr>
-              <a:t>smith</a:t>
+              <a:t>lock</a:t>
             </a:r>
             <a:endParaRPr lang="en-US" sz="1300" dirty="0"/>
           </a:p>
@@ -20816,7 +20948,7 @@
                 <a:ea typeface="Calibri" pitchFamily="34" charset="-122"/>
                 <a:cs typeface="Calibri" pitchFamily="34" charset="-120"/>
               </a:rPr>
-              <a:t>a skilled maker or worker</a:t>
+              <a:t>to fasten or secure shut</a:t>
             </a:r>
             <a:endParaRPr lang="en-US" sz="850" dirty="0"/>
           </a:p>
@@ -20975,7 +21107,7 @@
                 <a:ea typeface="Trebuchet MS" pitchFamily="34" charset="-122"/>
                 <a:cs typeface="Trebuchet MS" pitchFamily="34" charset="-120"/>
               </a:rPr>
-              <a:t>lock</a:t>
+              <a:t>grid</a:t>
             </a:r>
             <a:endParaRPr lang="en-US" sz="1400" dirty="0"/>
           </a:p>
@@ -21080,7 +21212,7 @@
                 <a:ea typeface="Trebuchet MS" pitchFamily="34" charset="-122"/>
                 <a:cs typeface="Trebuchet MS" pitchFamily="34" charset="-120"/>
               </a:rPr>
-              <a:t>smith</a:t>
+              <a:t>lock</a:t>
             </a:r>
             <a:endParaRPr lang="en-US" sz="1400" dirty="0"/>
           </a:p>
@@ -21239,7 +21371,7 @@
                 <a:ea typeface="Trebuchet MS" pitchFamily="34" charset="-122"/>
                 <a:cs typeface="Trebuchet MS" pitchFamily="34" charset="-120"/>
               </a:rPr>
-              <a:t>l</a:t>
+              <a:t>g</a:t>
             </a:r>
             <a:endParaRPr lang="en-US" sz="900" dirty="0"/>
           </a:p>
@@ -21305,7 +21437,7 @@
                 <a:ea typeface="Trebuchet MS" pitchFamily="34" charset="-122"/>
                 <a:cs typeface="Trebuchet MS" pitchFamily="34" charset="-120"/>
               </a:rPr>
-              <a:t>o</a:t>
+              <a:t>r</a:t>
             </a:r>
             <a:endParaRPr lang="en-US" sz="900" dirty="0"/>
           </a:p>
@@ -21371,7 +21503,7 @@
                 <a:ea typeface="Trebuchet MS" pitchFamily="34" charset="-122"/>
                 <a:cs typeface="Trebuchet MS" pitchFamily="34" charset="-120"/>
               </a:rPr>
-              <a:t>ck</a:t>
+              <a:t>i</a:t>
             </a:r>
             <a:endParaRPr lang="en-US" sz="900" dirty="0"/>
           </a:p>
@@ -21437,7 +21569,7 @@
                 <a:ea typeface="Trebuchet MS" pitchFamily="34" charset="-122"/>
                 <a:cs typeface="Trebuchet MS" pitchFamily="34" charset="-120"/>
               </a:rPr>
-              <a:t>s</a:t>
+              <a:t>d</a:t>
             </a:r>
             <a:endParaRPr lang="en-US" sz="900" dirty="0"/>
           </a:p>
@@ -21503,7 +21635,7 @@
                 <a:ea typeface="Trebuchet MS" pitchFamily="34" charset="-122"/>
                 <a:cs typeface="Trebuchet MS" pitchFamily="34" charset="-120"/>
               </a:rPr>
-              <a:t>m</a:t>
+              <a:t>l</a:t>
             </a:r>
             <a:endParaRPr lang="en-US" sz="900" dirty="0"/>
           </a:p>
@@ -21569,7 +21701,7 @@
                 <a:ea typeface="Trebuchet MS" pitchFamily="34" charset="-122"/>
                 <a:cs typeface="Trebuchet MS" pitchFamily="34" charset="-120"/>
               </a:rPr>
-              <a:t>i</a:t>
+              <a:t>o</a:t>
             </a:r>
             <a:endParaRPr lang="en-US" sz="900" dirty="0"/>
           </a:p>
@@ -21635,7 +21767,7 @@
                 <a:ea typeface="Trebuchet MS" pitchFamily="34" charset="-122"/>
                 <a:cs typeface="Trebuchet MS" pitchFamily="34" charset="-120"/>
               </a:rPr>
-              <a:t>th</a:t>
+              <a:t>ck</a:t>
             </a:r>
             <a:endParaRPr lang="en-US" sz="900" dirty="0"/>
           </a:p>
@@ -22066,7 +22198,7 @@
                 <a:ea typeface="Trebuchet MS" pitchFamily="34" charset="-122"/>
                 <a:cs typeface="Trebuchet MS" pitchFamily="34" charset="-120"/>
               </a:rPr>
-              <a:t>unlock</a:t>
+              <a:t>deadlock</a:t>
             </a:r>
             <a:endParaRPr lang="en-US" sz="2800" dirty="0"/>
           </a:p>
@@ -22893,7 +23025,7 @@
                 <a:ea typeface="Trebuchet MS" pitchFamily="34" charset="-122"/>
                 <a:cs typeface="Trebuchet MS" pitchFamily="34" charset="-120"/>
               </a:rPr>
-              <a:t>unlock</a:t>
+              <a:t>deadlock</a:t>
             </a:r>
             <a:endParaRPr lang="en-US" sz="2800" dirty="0"/>
           </a:p>
@@ -23032,7 +23164,7 @@
                 <a:ea typeface="Trebuchet MS" pitchFamily="34" charset="-122"/>
                 <a:cs typeface="Trebuchet MS" pitchFamily="34" charset="-120"/>
               </a:rPr>
-              <a:t>un</a:t>
+              <a:t>dead</a:t>
             </a:r>
             <a:endParaRPr lang="en-US" sz="1300" dirty="0"/>
           </a:p>
@@ -23071,7 +23203,7 @@
                 <a:ea typeface="Calibri" pitchFamily="34" charset="-122"/>
                 <a:cs typeface="Calibri" pitchFamily="34" charset="-120"/>
               </a:rPr>
-              <a:t>reverse or not</a:t>
+              <a:t>completely stopped or stuck</a:t>
             </a:r>
             <a:endParaRPr lang="en-US" sz="850" dirty="0"/>
           </a:p>
@@ -23183,7 +23315,7 @@
                 <a:ea typeface="Calibri" pitchFamily="34" charset="-122"/>
                 <a:cs typeface="Calibri" pitchFamily="34" charset="-120"/>
               </a:rPr>
-              <a:t>to fasten shut</a:t>
+              <a:t>to fasten or secure shut</a:t>
             </a:r>
             <a:endParaRPr lang="en-US" sz="850" dirty="0"/>
           </a:p>
@@ -24597,7 +24729,7 @@
                 <a:ea typeface="Trebuchet MS" pitchFamily="34" charset="-122"/>
                 <a:cs typeface="Trebuchet MS" pitchFamily="34" charset="-120"/>
               </a:rPr>
-              <a:t>unlock</a:t>
+              <a:t>deadlock</a:t>
             </a:r>
             <a:endParaRPr lang="en-US" sz="2800" dirty="0"/>
           </a:p>
@@ -24736,7 +24868,7 @@
                 <a:ea typeface="Trebuchet MS" pitchFamily="34" charset="-122"/>
                 <a:cs typeface="Trebuchet MS" pitchFamily="34" charset="-120"/>
               </a:rPr>
-              <a:t>un</a:t>
+              <a:t>dead</a:t>
             </a:r>
             <a:endParaRPr lang="en-US" sz="1300" dirty="0"/>
           </a:p>
@@ -24775,7 +24907,7 @@
                 <a:ea typeface="Calibri" pitchFamily="34" charset="-122"/>
                 <a:cs typeface="Calibri" pitchFamily="34" charset="-120"/>
               </a:rPr>
-              <a:t>reverse or not</a:t>
+              <a:t>completely stopped or stuck</a:t>
             </a:r>
             <a:endParaRPr lang="en-US" sz="850" dirty="0"/>
           </a:p>
@@ -24887,7 +25019,7 @@
                 <a:ea typeface="Calibri" pitchFamily="34" charset="-122"/>
                 <a:cs typeface="Calibri" pitchFamily="34" charset="-120"/>
               </a:rPr>
-              <a:t>to fasten shut</a:t>
+              <a:t>to fasten or secure shut</a:t>
             </a:r>
             <a:endParaRPr lang="en-US" sz="850" dirty="0"/>
           </a:p>
@@ -25046,7 +25178,7 @@
                 <a:ea typeface="Trebuchet MS" pitchFamily="34" charset="-122"/>
                 <a:cs typeface="Trebuchet MS" pitchFamily="34" charset="-120"/>
               </a:rPr>
-              <a:t>un</a:t>
+              <a:t>dead</a:t>
             </a:r>
             <a:endParaRPr lang="en-US" sz="1400" dirty="0"/>
           </a:p>
@@ -25714,7 +25846,7 @@
                 <a:ea typeface="Trebuchet MS" pitchFamily="34" charset="-122"/>
                 <a:cs typeface="Trebuchet MS" pitchFamily="34" charset="-120"/>
               </a:rPr>
-              <a:t>unlock</a:t>
+              <a:t>deadlock</a:t>
             </a:r>
             <a:endParaRPr lang="en-US" sz="2800" dirty="0"/>
           </a:p>
@@ -25853,7 +25985,7 @@
                 <a:ea typeface="Trebuchet MS" pitchFamily="34" charset="-122"/>
                 <a:cs typeface="Trebuchet MS" pitchFamily="34" charset="-120"/>
               </a:rPr>
-              <a:t>un</a:t>
+              <a:t>dead</a:t>
             </a:r>
             <a:endParaRPr lang="en-US" sz="1300" dirty="0"/>
           </a:p>
@@ -25892,7 +26024,7 @@
                 <a:ea typeface="Calibri" pitchFamily="34" charset="-122"/>
                 <a:cs typeface="Calibri" pitchFamily="34" charset="-120"/>
               </a:rPr>
-              <a:t>reverse or not</a:t>
+              <a:t>completely stopped or stuck</a:t>
             </a:r>
             <a:endParaRPr lang="en-US" sz="850" dirty="0"/>
           </a:p>
@@ -26004,7 +26136,7 @@
                 <a:ea typeface="Calibri" pitchFamily="34" charset="-122"/>
                 <a:cs typeface="Calibri" pitchFamily="34" charset="-120"/>
               </a:rPr>
-              <a:t>to fasten shut</a:t>
+              <a:t>to fasten or secure shut</a:t>
             </a:r>
             <a:endParaRPr lang="en-US" sz="850" dirty="0"/>
           </a:p>
@@ -26163,7 +26295,7 @@
                 <a:ea typeface="Trebuchet MS" pitchFamily="34" charset="-122"/>
                 <a:cs typeface="Trebuchet MS" pitchFamily="34" charset="-120"/>
               </a:rPr>
-              <a:t>un</a:t>
+              <a:t>dead</a:t>
             </a:r>
             <a:endParaRPr lang="en-US" sz="1400" dirty="0"/>
           </a:p>
@@ -26375,7 +26507,7 @@
         </p:nvSpPr>
         <p:spPr>
           <a:xfrm>
-            <a:off x="2427732" y="4169664"/>
+            <a:off x="2254649" y="4169664"/>
             <a:ext cx="685800" cy="475488"/>
           </a:xfrm>
           <a:prstGeom prst="rect">
@@ -26402,7 +26534,7 @@
         </p:nvSpPr>
         <p:spPr>
           <a:xfrm>
-            <a:off x="2427732" y="4169664"/>
+            <a:off x="2254649" y="4169664"/>
             <a:ext cx="685800" cy="475488"/>
           </a:xfrm>
           <a:prstGeom prst="rect">
@@ -26427,7 +26559,7 @@
                 <a:ea typeface="Trebuchet MS" pitchFamily="34" charset="-122"/>
                 <a:cs typeface="Trebuchet MS" pitchFamily="34" charset="-120"/>
               </a:rPr>
-              <a:t>u</a:t>
+              <a:t>d</a:t>
             </a:r>
             <a:endParaRPr lang="en-US" sz="900" dirty="0"/>
           </a:p>
@@ -26441,7 +26573,7 @@
         </p:nvSpPr>
         <p:spPr>
           <a:xfrm>
-            <a:off x="3639312" y="4169664"/>
+            <a:off x="3293146" y="4169664"/>
             <a:ext cx="685800" cy="475488"/>
           </a:xfrm>
           <a:prstGeom prst="rect">
@@ -26468,7 +26600,7 @@
         </p:nvSpPr>
         <p:spPr>
           <a:xfrm>
-            <a:off x="3639312" y="4169664"/>
+            <a:off x="3293146" y="4169664"/>
             <a:ext cx="685800" cy="475488"/>
           </a:xfrm>
           <a:prstGeom prst="rect">
@@ -26493,7 +26625,7 @@
                 <a:ea typeface="Trebuchet MS" pitchFamily="34" charset="-122"/>
                 <a:cs typeface="Trebuchet MS" pitchFamily="34" charset="-120"/>
               </a:rPr>
-              <a:t>n</a:t>
+              <a:t>ea</a:t>
             </a:r>
             <a:endParaRPr lang="en-US" sz="900" dirty="0"/>
           </a:p>
@@ -26507,7 +26639,7 @@
         </p:nvSpPr>
         <p:spPr>
           <a:xfrm>
-            <a:off x="4850892" y="4169664"/>
+            <a:off x="4331643" y="4169664"/>
             <a:ext cx="685800" cy="475488"/>
           </a:xfrm>
           <a:prstGeom prst="rect">
@@ -26534,7 +26666,7 @@
         </p:nvSpPr>
         <p:spPr>
           <a:xfrm>
-            <a:off x="4850892" y="4169664"/>
+            <a:off x="4331643" y="4169664"/>
             <a:ext cx="685800" cy="475488"/>
           </a:xfrm>
           <a:prstGeom prst="rect">
@@ -26559,7 +26691,7 @@
                 <a:ea typeface="Trebuchet MS" pitchFamily="34" charset="-122"/>
                 <a:cs typeface="Trebuchet MS" pitchFamily="34" charset="-120"/>
               </a:rPr>
-              <a:t>l</a:t>
+              <a:t>d</a:t>
             </a:r>
             <a:endParaRPr lang="en-US" sz="900" dirty="0"/>
           </a:p>
@@ -26573,7 +26705,7 @@
         </p:nvSpPr>
         <p:spPr>
           <a:xfrm>
-            <a:off x="6062472" y="4169664"/>
+            <a:off x="5370141" y="4169664"/>
             <a:ext cx="685800" cy="475488"/>
           </a:xfrm>
           <a:prstGeom prst="rect">
@@ -26600,7 +26732,7 @@
         </p:nvSpPr>
         <p:spPr>
           <a:xfrm>
-            <a:off x="6062472" y="4169664"/>
+            <a:off x="5370141" y="4169664"/>
             <a:ext cx="685800" cy="475488"/>
           </a:xfrm>
           <a:prstGeom prst="rect">
@@ -26625,7 +26757,7 @@
                 <a:ea typeface="Trebuchet MS" pitchFamily="34" charset="-122"/>
                 <a:cs typeface="Trebuchet MS" pitchFamily="34" charset="-120"/>
               </a:rPr>
-              <a:t>o</a:t>
+              <a:t>l</a:t>
             </a:r>
             <a:endParaRPr lang="en-US" sz="900" dirty="0"/>
           </a:p>
@@ -26639,7 +26771,7 @@
         </p:nvSpPr>
         <p:spPr>
           <a:xfrm>
-            <a:off x="7274052" y="4169664"/>
+            <a:off x="6408638" y="4169664"/>
             <a:ext cx="685800" cy="475488"/>
           </a:xfrm>
           <a:prstGeom prst="rect">
@@ -26666,7 +26798,73 @@
         </p:nvSpPr>
         <p:spPr>
           <a:xfrm>
-            <a:off x="7274052" y="4169664"/>
+            <a:off x="6408638" y="4169664"/>
+            <a:ext cx="685800" cy="475488"/>
+          </a:xfrm>
+          <a:prstGeom prst="rect">
+            <a:avLst/>
+          </a:prstGeom>
+          <a:noFill/>
+          <a:ln/>
+        </p:spPr>
+        <p:txBody>
+          <a:bodyPr wrap="square" lIns="0" tIns="0" rIns="0" bIns="0" rtlCol="0" anchor="ctr"/>
+          <a:lstStyle/>
+          <a:p>
+            <a:pPr algn="ctr" indent="0" marL="0">
+              <a:buNone/>
+            </a:pPr>
+            <a:r>
+              <a:rPr lang="en-US" sz="900" b="1" dirty="0">
+                <a:solidFill>
+                  <a:srgbClr val="9D174D"/>
+                </a:solidFill>
+                <a:latin typeface="Trebuchet MS" pitchFamily="34" charset="0"/>
+                <a:ea typeface="Trebuchet MS" pitchFamily="34" charset="-122"/>
+                <a:cs typeface="Trebuchet MS" pitchFamily="34" charset="-120"/>
+              </a:rPr>
+              <a:t>o</a:t>
+            </a:r>
+            <a:endParaRPr lang="en-US" sz="900" dirty="0"/>
+          </a:p>
+        </p:txBody>
+      </p:sp>
+      <p:sp>
+        <p:nvSpPr>
+          <p:cNvPr id="43" name="Shape 41"/>
+          <p:cNvSpPr/>
+          <p:nvPr/>
+        </p:nvSpPr>
+        <p:spPr>
+          <a:xfrm>
+            <a:off x="7447135" y="4169664"/>
+            <a:ext cx="685800" cy="475488"/>
+          </a:xfrm>
+          <a:prstGeom prst="rect">
+            <a:avLst>
+              <a:gd name="adj" fmla="val 7692"/>
+            </a:avLst>
+          </a:prstGeom>
+          <a:solidFill>
+            <a:srgbClr val="FFFFFF"/>
+          </a:solidFill>
+          <a:ln w="12700">
+            <a:solidFill>
+              <a:srgbClr val="DB2777"/>
+            </a:solidFill>
+            <a:prstDash val="solid"/>
+          </a:ln>
+        </p:spPr>
+      </p:sp>
+      <p:sp>
+        <p:nvSpPr>
+          <p:cNvPr id="44" name="Text 42"/>
+          <p:cNvSpPr/>
+          <p:nvPr/>
+        </p:nvSpPr>
+        <p:spPr>
+          <a:xfrm>
+            <a:off x="7447135" y="4169664"/>
             <a:ext cx="685800" cy="475488"/>
           </a:xfrm>
           <a:prstGeom prst="rect">
@@ -27122,7 +27320,7 @@
                 <a:ea typeface="Trebuchet MS" pitchFamily="34" charset="-122"/>
                 <a:cs typeface="Trebuchet MS" pitchFamily="34" charset="-120"/>
               </a:rPr>
-              <a:t>deadlock</a:t>
+              <a:t>locked</a:t>
             </a:r>
             <a:endParaRPr lang="en-US" sz="2800" dirty="0"/>
           </a:p>
@@ -27949,7 +28147,7 @@
                 <a:ea typeface="Trebuchet MS" pitchFamily="34" charset="-122"/>
                 <a:cs typeface="Trebuchet MS" pitchFamily="34" charset="-120"/>
               </a:rPr>
-              <a:t>deadlock</a:t>
+              <a:t>locked</a:t>
             </a:r>
             <a:endParaRPr lang="en-US" sz="2800" dirty="0"/>
           </a:p>
@@ -28038,11 +28236,11 @@
             </a:avLst>
           </a:prstGeom>
           <a:solidFill>
-            <a:srgbClr val="DDD6FE"/>
+            <a:srgbClr val="CCFBF1"/>
           </a:solidFill>
           <a:ln w="19050">
             <a:solidFill>
-              <a:srgbClr val="7C3AED"/>
+              <a:srgbClr val="0D9488"/>
             </a:solidFill>
             <a:prstDash val="solid"/>
           </a:ln>
@@ -28082,13 +28280,13 @@
             <a:r>
               <a:rPr lang="en-US" sz="1300" b="1" dirty="0">
                 <a:solidFill>
-                  <a:srgbClr val="4C1D95"/>
+                  <a:srgbClr val="0F766E"/>
                 </a:solidFill>
                 <a:latin typeface="Trebuchet MS" pitchFamily="34" charset="0"/>
                 <a:ea typeface="Trebuchet MS" pitchFamily="34" charset="-122"/>
                 <a:cs typeface="Trebuchet MS" pitchFamily="34" charset="-120"/>
               </a:rPr>
-              <a:t>dead</a:t>
+              <a:t>lock</a:t>
             </a:r>
             <a:endParaRPr lang="en-US" sz="1300" dirty="0"/>
           </a:p>
@@ -28127,7 +28325,7 @@
                 <a:ea typeface="Calibri" pitchFamily="34" charset="-122"/>
                 <a:cs typeface="Calibri" pitchFamily="34" charset="-120"/>
               </a:rPr>
-              <a:t>completely stopped or still</a:t>
+              <a:t>to fasten or secure shut</a:t>
             </a:r>
             <a:endParaRPr lang="en-US" sz="850" dirty="0"/>
           </a:p>
@@ -28150,11 +28348,11 @@
             </a:avLst>
           </a:prstGeom>
           <a:solidFill>
-            <a:srgbClr val="CCFBF1"/>
+            <a:srgbClr val="FCE7F3"/>
           </a:solidFill>
           <a:ln w="19050">
             <a:solidFill>
-              <a:srgbClr val="0D9488"/>
+              <a:srgbClr val="DB2777"/>
             </a:solidFill>
             <a:prstDash val="solid"/>
           </a:ln>
@@ -28194,13 +28392,13 @@
             <a:r>
               <a:rPr lang="en-US" sz="1300" b="1" dirty="0">
                 <a:solidFill>
-                  <a:srgbClr val="0F766E"/>
+                  <a:srgbClr val="9D174D"/>
                 </a:solidFill>
                 <a:latin typeface="Trebuchet MS" pitchFamily="34" charset="0"/>
                 <a:ea typeface="Trebuchet MS" pitchFamily="34" charset="-122"/>
                 <a:cs typeface="Trebuchet MS" pitchFamily="34" charset="-120"/>
               </a:rPr>
-              <a:t>lock</a:t>
+              <a:t>ed</a:t>
             </a:r>
             <a:endParaRPr lang="en-US" sz="1300" dirty="0"/>
           </a:p>
@@ -28239,7 +28437,7 @@
                 <a:ea typeface="Calibri" pitchFamily="34" charset="-122"/>
                 <a:cs typeface="Calibri" pitchFamily="34" charset="-120"/>
               </a:rPr>
-              <a:t>to fasten shut</a:t>
+              <a:t>past tense</a:t>
             </a:r>
             <a:endParaRPr lang="en-US" sz="850" dirty="0"/>
           </a:p>
@@ -28934,7 +29132,7 @@
                 <a:ea typeface="Trebuchet MS" pitchFamily="34" charset="-122"/>
                 <a:cs typeface="Trebuchet MS" pitchFamily="34" charset="-120"/>
               </a:rPr>
-              <a:t>deadlock</a:t>
+              <a:t>locked</a:t>
             </a:r>
             <a:endParaRPr lang="en-US" sz="2800" dirty="0"/>
           </a:p>
@@ -29023,11 +29221,11 @@
             </a:avLst>
           </a:prstGeom>
           <a:solidFill>
-            <a:srgbClr val="DDD6FE"/>
+            <a:srgbClr val="CCFBF1"/>
           </a:solidFill>
           <a:ln w="19050">
             <a:solidFill>
-              <a:srgbClr val="7C3AED"/>
+              <a:srgbClr val="0D9488"/>
             </a:solidFill>
             <a:prstDash val="solid"/>
           </a:ln>
@@ -29067,13 +29265,13 @@
             <a:r>
               <a:rPr lang="en-US" sz="1300" b="1" dirty="0">
                 <a:solidFill>
-                  <a:srgbClr val="4C1D95"/>
+                  <a:srgbClr val="0F766E"/>
                 </a:solidFill>
                 <a:latin typeface="Trebuchet MS" pitchFamily="34" charset="0"/>
                 <a:ea typeface="Trebuchet MS" pitchFamily="34" charset="-122"/>
                 <a:cs typeface="Trebuchet MS" pitchFamily="34" charset="-120"/>
               </a:rPr>
-              <a:t>dead</a:t>
+              <a:t>lock</a:t>
             </a:r>
             <a:endParaRPr lang="en-US" sz="1300" dirty="0"/>
           </a:p>
@@ -29112,7 +29310,7 @@
                 <a:ea typeface="Calibri" pitchFamily="34" charset="-122"/>
                 <a:cs typeface="Calibri" pitchFamily="34" charset="-120"/>
               </a:rPr>
-              <a:t>completely stopped or still</a:t>
+              <a:t>to fasten or secure shut</a:t>
             </a:r>
             <a:endParaRPr lang="en-US" sz="850" dirty="0"/>
           </a:p>
@@ -29135,11 +29333,11 @@
             </a:avLst>
           </a:prstGeom>
           <a:solidFill>
-            <a:srgbClr val="CCFBF1"/>
+            <a:srgbClr val="FCE7F3"/>
           </a:solidFill>
           <a:ln w="19050">
             <a:solidFill>
-              <a:srgbClr val="0D9488"/>
+              <a:srgbClr val="DB2777"/>
             </a:solidFill>
             <a:prstDash val="solid"/>
           </a:ln>
@@ -29179,13 +29377,13 @@
             <a:r>
               <a:rPr lang="en-US" sz="1300" b="1" dirty="0">
                 <a:solidFill>
-                  <a:srgbClr val="0F766E"/>
+                  <a:srgbClr val="9D174D"/>
                 </a:solidFill>
                 <a:latin typeface="Trebuchet MS" pitchFamily="34" charset="0"/>
                 <a:ea typeface="Trebuchet MS" pitchFamily="34" charset="-122"/>
                 <a:cs typeface="Trebuchet MS" pitchFamily="34" charset="-120"/>
               </a:rPr>
-              <a:t>lock</a:t>
+              <a:t>ed</a:t>
             </a:r>
             <a:endParaRPr lang="en-US" sz="1300" dirty="0"/>
           </a:p>
@@ -29224,7 +29422,7 @@
                 <a:ea typeface="Calibri" pitchFamily="34" charset="-122"/>
                 <a:cs typeface="Calibri" pitchFamily="34" charset="-120"/>
               </a:rPr>
-              <a:t>to fasten shut</a:t>
+              <a:t>past tense</a:t>
             </a:r>
             <a:endParaRPr lang="en-US" sz="850" dirty="0"/>
           </a:p>
@@ -29331,7 +29529,7 @@
         </p:nvSpPr>
         <p:spPr>
           <a:xfrm>
-            <a:off x="2999232" y="3364992"/>
+            <a:off x="4370832" y="3364992"/>
             <a:ext cx="1645920" cy="475488"/>
           </a:xfrm>
           <a:prstGeom prst="rect">
@@ -29358,7 +29556,7 @@
         </p:nvSpPr>
         <p:spPr>
           <a:xfrm>
-            <a:off x="2999232" y="3364992"/>
+            <a:off x="4370832" y="3364992"/>
             <a:ext cx="1645920" cy="475488"/>
           </a:xfrm>
           <a:prstGeom prst="rect">
@@ -29383,7 +29581,7 @@
                 <a:ea typeface="Trebuchet MS" pitchFamily="34" charset="-122"/>
                 <a:cs typeface="Trebuchet MS" pitchFamily="34" charset="-120"/>
               </a:rPr>
-              <a:t>dead</a:t>
+              <a:t>locked</a:t>
             </a:r>
             <a:endParaRPr lang="en-US" sz="1400" dirty="0"/>
           </a:p>
@@ -29391,14 +29589,41 @@
       </p:sp>
       <p:sp>
         <p:nvSpPr>
-          <p:cNvPr id="27" name="Text 25"/>
-          <p:cNvSpPr/>
-          <p:nvPr/>
-        </p:nvSpPr>
-        <p:spPr>
-          <a:xfrm>
-            <a:off x="4645152" y="3364992"/>
-            <a:ext cx="1097280" cy="475488"/>
+          <p:cNvPr id="27" name="Shape 25"/>
+          <p:cNvSpPr/>
+          <p:nvPr/>
+        </p:nvSpPr>
+        <p:spPr>
+          <a:xfrm>
+            <a:off x="365760" y="4096512"/>
+            <a:ext cx="1371600" cy="804672"/>
+          </a:xfrm>
+          <a:prstGeom prst="rect">
+            <a:avLst>
+              <a:gd name="adj" fmla="val 6818"/>
+            </a:avLst>
+          </a:prstGeom>
+          <a:solidFill>
+            <a:srgbClr val="E2E8F0"/>
+          </a:solidFill>
+          <a:ln w="12700">
+            <a:solidFill>
+              <a:srgbClr val="E2E8F0"/>
+            </a:solidFill>
+            <a:prstDash val="solid"/>
+          </a:ln>
+        </p:spPr>
+      </p:sp>
+      <p:sp>
+        <p:nvSpPr>
+          <p:cNvPr id="28" name="Text 26"/>
+          <p:cNvSpPr/>
+          <p:nvPr/>
+        </p:nvSpPr>
+        <p:spPr>
+          <a:xfrm>
+            <a:off x="365760" y="4096512"/>
+            <a:ext cx="1371600" cy="804672"/>
           </a:xfrm>
           <a:prstGeom prst="rect">
             <a:avLst/>
@@ -29414,96 +29639,30 @@
               <a:buNone/>
             </a:pPr>
             <a:r>
-              <a:rPr lang="en-US" sz="1600" b="1" dirty="0">
-                <a:solidFill>
-                  <a:srgbClr val="0D9488"/>
+              <a:rPr lang="en-US" sz="1100" b="1" dirty="0">
+                <a:solidFill>
+                  <a:srgbClr val="475569"/>
                 </a:solidFill>
                 <a:latin typeface="Trebuchet MS" pitchFamily="34" charset="0"/>
                 <a:ea typeface="Trebuchet MS" pitchFamily="34" charset="-122"/>
                 <a:cs typeface="Trebuchet MS" pitchFamily="34" charset="-120"/>
               </a:rPr>
-              <a:t>·</a:t>
-            </a:r>
-            <a:endParaRPr lang="en-US" sz="1600" dirty="0"/>
-          </a:p>
-        </p:txBody>
-      </p:sp>
-      <p:sp>
-        <p:nvSpPr>
-          <p:cNvPr id="28" name="Shape 26"/>
-          <p:cNvSpPr/>
-          <p:nvPr/>
-        </p:nvSpPr>
-        <p:spPr>
-          <a:xfrm>
-            <a:off x="5742432" y="3364992"/>
-            <a:ext cx="1645920" cy="475488"/>
-          </a:xfrm>
-          <a:prstGeom prst="rect">
-            <a:avLst>
-              <a:gd name="adj" fmla="val 9615"/>
-            </a:avLst>
-          </a:prstGeom>
-          <a:solidFill>
-            <a:srgbClr val="FFFFFF"/>
-          </a:solidFill>
-          <a:ln w="12700">
-            <a:solidFill>
-              <a:srgbClr val="0D9488"/>
-            </a:solidFill>
-            <a:prstDash val="solid"/>
-          </a:ln>
-        </p:spPr>
-      </p:sp>
-      <p:sp>
-        <p:nvSpPr>
-          <p:cNvPr id="29" name="Text 27"/>
-          <p:cNvSpPr/>
-          <p:nvPr/>
-        </p:nvSpPr>
-        <p:spPr>
-          <a:xfrm>
-            <a:off x="5742432" y="3364992"/>
-            <a:ext cx="1645920" cy="475488"/>
-          </a:xfrm>
-          <a:prstGeom prst="rect">
-            <a:avLst/>
-          </a:prstGeom>
-          <a:noFill/>
-          <a:ln/>
-        </p:spPr>
-        <p:txBody>
-          <a:bodyPr wrap="square" lIns="0" tIns="0" rIns="0" bIns="0" rtlCol="0" anchor="ctr"/>
-          <a:lstStyle/>
-          <a:p>
-            <a:pPr algn="ctr" indent="0" marL="0">
-              <a:buNone/>
-            </a:pPr>
-            <a:r>
-              <a:rPr lang="en-US" sz="1400" b="1" dirty="0">
-                <a:solidFill>
-                  <a:srgbClr val="0D9488"/>
-                </a:solidFill>
-                <a:latin typeface="Trebuchet MS" pitchFamily="34" charset="0"/>
-                <a:ea typeface="Trebuchet MS" pitchFamily="34" charset="-122"/>
-                <a:cs typeface="Trebuchet MS" pitchFamily="34" charset="-120"/>
-              </a:rPr>
-              <a:t>lock</a:t>
-            </a:r>
-            <a:endParaRPr lang="en-US" sz="1400" dirty="0"/>
-          </a:p>
-        </p:txBody>
-      </p:sp>
-      <p:sp>
-        <p:nvSpPr>
-          <p:cNvPr id="30" name="Shape 28"/>
-          <p:cNvSpPr/>
-          <p:nvPr/>
-        </p:nvSpPr>
-        <p:spPr>
-          <a:xfrm>
-            <a:off x="365760" y="4096512"/>
-            <a:ext cx="1371600" cy="804672"/>
+              <a:t>Phonemes</a:t>
+            </a:r>
+            <a:endParaRPr lang="en-US" sz="1100" dirty="0"/>
+          </a:p>
+        </p:txBody>
+      </p:sp>
+      <p:sp>
+        <p:nvSpPr>
+          <p:cNvPr id="29" name="Shape 27"/>
+          <p:cNvSpPr/>
+          <p:nvPr/>
+        </p:nvSpPr>
+        <p:spPr>
+          <a:xfrm>
+            <a:off x="1874520" y="4096512"/>
+            <a:ext cx="6903720" cy="804672"/>
           </a:xfrm>
           <a:prstGeom prst="rect">
             <a:avLst>
@@ -29511,85 +29670,19 @@
             </a:avLst>
           </a:prstGeom>
           <a:solidFill>
-            <a:srgbClr val="E2E8F0"/>
+            <a:srgbClr val="F8FAFC"/>
           </a:solidFill>
           <a:ln w="12700">
             <a:solidFill>
               <a:srgbClr val="E2E8F0"/>
             </a:solidFill>
-            <a:prstDash val="solid"/>
-          </a:ln>
-        </p:spPr>
-      </p:sp>
-      <p:sp>
-        <p:nvSpPr>
-          <p:cNvPr id="31" name="Text 29"/>
-          <p:cNvSpPr/>
-          <p:nvPr/>
-        </p:nvSpPr>
-        <p:spPr>
-          <a:xfrm>
-            <a:off x="365760" y="4096512"/>
-            <a:ext cx="1371600" cy="804672"/>
-          </a:xfrm>
-          <a:prstGeom prst="rect">
-            <a:avLst/>
-          </a:prstGeom>
-          <a:noFill/>
-          <a:ln/>
-        </p:spPr>
-        <p:txBody>
-          <a:bodyPr wrap="square" lIns="0" tIns="0" rIns="0" bIns="0" rtlCol="0" anchor="ctr"/>
-          <a:lstStyle/>
-          <a:p>
-            <a:pPr algn="ctr" indent="0" marL="0">
-              <a:buNone/>
-            </a:pPr>
-            <a:r>
-              <a:rPr lang="en-US" sz="1100" b="1" dirty="0">
-                <a:solidFill>
-                  <a:srgbClr val="475569"/>
-                </a:solidFill>
-                <a:latin typeface="Trebuchet MS" pitchFamily="34" charset="0"/>
-                <a:ea typeface="Trebuchet MS" pitchFamily="34" charset="-122"/>
-                <a:cs typeface="Trebuchet MS" pitchFamily="34" charset="-120"/>
-              </a:rPr>
-              <a:t>Phonemes</a:t>
-            </a:r>
-            <a:endParaRPr lang="en-US" sz="1100" dirty="0"/>
-          </a:p>
-        </p:txBody>
-      </p:sp>
-      <p:sp>
-        <p:nvSpPr>
-          <p:cNvPr id="32" name="Shape 30"/>
-          <p:cNvSpPr/>
-          <p:nvPr/>
-        </p:nvSpPr>
-        <p:spPr>
-          <a:xfrm>
-            <a:off x="1874520" y="4096512"/>
-            <a:ext cx="6903720" cy="804672"/>
-          </a:xfrm>
-          <a:prstGeom prst="rect">
-            <a:avLst>
-              <a:gd name="adj" fmla="val 6818"/>
-            </a:avLst>
-          </a:prstGeom>
-          <a:solidFill>
-            <a:srgbClr val="F8FAFC"/>
-          </a:solidFill>
-          <a:ln w="12700">
-            <a:solidFill>
-              <a:srgbClr val="E2E8F0"/>
-            </a:solidFill>
             <a:prstDash val="dash"/>
           </a:ln>
         </p:spPr>
       </p:sp>
       <p:sp>
         <p:nvSpPr>
-          <p:cNvPr id="33" name="Text 31"/>
+          <p:cNvPr id="30" name="Text 28"/>
           <p:cNvSpPr/>
           <p:nvPr/>
         </p:nvSpPr>
@@ -30051,7 +30144,7 @@
                 <a:ea typeface="Trebuchet MS" pitchFamily="34" charset="-122"/>
                 <a:cs typeface="Trebuchet MS" pitchFamily="34" charset="-120"/>
               </a:rPr>
-              <a:t>deadlock</a:t>
+              <a:t>locked</a:t>
             </a:r>
             <a:endParaRPr lang="en-US" sz="2800" dirty="0"/>
           </a:p>
@@ -30140,11 +30233,11 @@
             </a:avLst>
           </a:prstGeom>
           <a:solidFill>
-            <a:srgbClr val="DDD6FE"/>
+            <a:srgbClr val="CCFBF1"/>
           </a:solidFill>
           <a:ln w="19050">
             <a:solidFill>
-              <a:srgbClr val="7C3AED"/>
+              <a:srgbClr val="0D9488"/>
             </a:solidFill>
             <a:prstDash val="solid"/>
           </a:ln>
@@ -30184,13 +30277,13 @@
             <a:r>
               <a:rPr lang="en-US" sz="1300" b="1" dirty="0">
                 <a:solidFill>
-                  <a:srgbClr val="4C1D95"/>
+                  <a:srgbClr val="0F766E"/>
                 </a:solidFill>
                 <a:latin typeface="Trebuchet MS" pitchFamily="34" charset="0"/>
                 <a:ea typeface="Trebuchet MS" pitchFamily="34" charset="-122"/>
                 <a:cs typeface="Trebuchet MS" pitchFamily="34" charset="-120"/>
               </a:rPr>
-              <a:t>dead</a:t>
+              <a:t>lock</a:t>
             </a:r>
             <a:endParaRPr lang="en-US" sz="1300" dirty="0"/>
           </a:p>
@@ -30229,7 +30322,7 @@
                 <a:ea typeface="Calibri" pitchFamily="34" charset="-122"/>
                 <a:cs typeface="Calibri" pitchFamily="34" charset="-120"/>
               </a:rPr>
-              <a:t>completely stopped or still</a:t>
+              <a:t>to fasten or secure shut</a:t>
             </a:r>
             <a:endParaRPr lang="en-US" sz="850" dirty="0"/>
           </a:p>
@@ -30252,11 +30345,11 @@
             </a:avLst>
           </a:prstGeom>
           <a:solidFill>
-            <a:srgbClr val="CCFBF1"/>
+            <a:srgbClr val="FCE7F3"/>
           </a:solidFill>
           <a:ln w="19050">
             <a:solidFill>
-              <a:srgbClr val="0D9488"/>
+              <a:srgbClr val="DB2777"/>
             </a:solidFill>
             <a:prstDash val="solid"/>
           </a:ln>
@@ -30296,13 +30389,13 @@
             <a:r>
               <a:rPr lang="en-US" sz="1300" b="1" dirty="0">
                 <a:solidFill>
-                  <a:srgbClr val="0F766E"/>
+                  <a:srgbClr val="9D174D"/>
                 </a:solidFill>
                 <a:latin typeface="Trebuchet MS" pitchFamily="34" charset="0"/>
                 <a:ea typeface="Trebuchet MS" pitchFamily="34" charset="-122"/>
                 <a:cs typeface="Trebuchet MS" pitchFamily="34" charset="-120"/>
               </a:rPr>
-              <a:t>lock</a:t>
+              <a:t>ed</a:t>
             </a:r>
             <a:endParaRPr lang="en-US" sz="1300" dirty="0"/>
           </a:p>
@@ -30341,7 +30434,7 @@
                 <a:ea typeface="Calibri" pitchFamily="34" charset="-122"/>
                 <a:cs typeface="Calibri" pitchFamily="34" charset="-120"/>
               </a:rPr>
-              <a:t>to fasten shut</a:t>
+              <a:t>past tense</a:t>
             </a:r>
             <a:endParaRPr lang="en-US" sz="850" dirty="0"/>
           </a:p>
@@ -30448,7 +30541,7 @@
         </p:nvSpPr>
         <p:spPr>
           <a:xfrm>
-            <a:off x="2999232" y="3364992"/>
+            <a:off x="4370832" y="3364992"/>
             <a:ext cx="1645920" cy="475488"/>
           </a:xfrm>
           <a:prstGeom prst="rect">
@@ -30475,7 +30568,7 @@
         </p:nvSpPr>
         <p:spPr>
           <a:xfrm>
-            <a:off x="2999232" y="3364992"/>
+            <a:off x="4370832" y="3364992"/>
             <a:ext cx="1645920" cy="475488"/>
           </a:xfrm>
           <a:prstGeom prst="rect">
@@ -30500,7 +30593,7 @@
                 <a:ea typeface="Trebuchet MS" pitchFamily="34" charset="-122"/>
                 <a:cs typeface="Trebuchet MS" pitchFamily="34" charset="-120"/>
               </a:rPr>
-              <a:t>dead</a:t>
+              <a:t>locked</a:t>
             </a:r>
             <a:endParaRPr lang="en-US" sz="1400" dirty="0"/>
           </a:p>
@@ -30508,14 +30601,41 @@
       </p:sp>
       <p:sp>
         <p:nvSpPr>
-          <p:cNvPr id="27" name="Text 25"/>
-          <p:cNvSpPr/>
-          <p:nvPr/>
-        </p:nvSpPr>
-        <p:spPr>
-          <a:xfrm>
-            <a:off x="4645152" y="3364992"/>
-            <a:ext cx="1097280" cy="475488"/>
+          <p:cNvPr id="27" name="Shape 25"/>
+          <p:cNvSpPr/>
+          <p:nvPr/>
+        </p:nvSpPr>
+        <p:spPr>
+          <a:xfrm>
+            <a:off x="365760" y="4096512"/>
+            <a:ext cx="1371600" cy="804672"/>
+          </a:xfrm>
+          <a:prstGeom prst="rect">
+            <a:avLst>
+              <a:gd name="adj" fmla="val 6818"/>
+            </a:avLst>
+          </a:prstGeom>
+          <a:solidFill>
+            <a:srgbClr val="E2E8F0"/>
+          </a:solidFill>
+          <a:ln w="12700">
+            <a:solidFill>
+              <a:srgbClr val="E2E8F0"/>
+            </a:solidFill>
+            <a:prstDash val="solid"/>
+          </a:ln>
+        </p:spPr>
+      </p:sp>
+      <p:sp>
+        <p:nvSpPr>
+          <p:cNvPr id="28" name="Text 26"/>
+          <p:cNvSpPr/>
+          <p:nvPr/>
+        </p:nvSpPr>
+        <p:spPr>
+          <a:xfrm>
+            <a:off x="365760" y="4096512"/>
+            <a:ext cx="1371600" cy="804672"/>
           </a:xfrm>
           <a:prstGeom prst="rect">
             <a:avLst/>
@@ -30531,57 +30651,84 @@
               <a:buNone/>
             </a:pPr>
             <a:r>
-              <a:rPr lang="en-US" sz="1600" b="1" dirty="0">
-                <a:solidFill>
-                  <a:srgbClr val="0D9488"/>
+              <a:rPr lang="en-US" sz="1100" b="1" dirty="0">
+                <a:solidFill>
+                  <a:srgbClr val="475569"/>
                 </a:solidFill>
                 <a:latin typeface="Trebuchet MS" pitchFamily="34" charset="0"/>
                 <a:ea typeface="Trebuchet MS" pitchFamily="34" charset="-122"/>
                 <a:cs typeface="Trebuchet MS" pitchFamily="34" charset="-120"/>
               </a:rPr>
-              <a:t>·</a:t>
-            </a:r>
-            <a:endParaRPr lang="en-US" sz="1600" dirty="0"/>
-          </a:p>
-        </p:txBody>
-      </p:sp>
-      <p:sp>
-        <p:nvSpPr>
-          <p:cNvPr id="28" name="Shape 26"/>
-          <p:cNvSpPr/>
-          <p:nvPr/>
-        </p:nvSpPr>
-        <p:spPr>
-          <a:xfrm>
-            <a:off x="5742432" y="3364992"/>
-            <a:ext cx="1645920" cy="475488"/>
+              <a:t>Phonemes</a:t>
+            </a:r>
+            <a:endParaRPr lang="en-US" sz="1100" dirty="0"/>
+          </a:p>
+        </p:txBody>
+      </p:sp>
+      <p:sp>
+        <p:nvSpPr>
+          <p:cNvPr id="29" name="Shape 27"/>
+          <p:cNvSpPr/>
+          <p:nvPr/>
+        </p:nvSpPr>
+        <p:spPr>
+          <a:xfrm>
+            <a:off x="1874520" y="4096512"/>
+            <a:ext cx="6903720" cy="804672"/>
           </a:xfrm>
           <a:prstGeom prst="rect">
             <a:avLst>
-              <a:gd name="adj" fmla="val 9615"/>
+              <a:gd name="adj" fmla="val 6818"/>
             </a:avLst>
           </a:prstGeom>
           <a:solidFill>
+            <a:srgbClr val="FCE7F3"/>
+          </a:solidFill>
+          <a:ln w="12700">
+            <a:solidFill>
+              <a:srgbClr val="DB2777"/>
+            </a:solidFill>
+            <a:prstDash val="solid"/>
+          </a:ln>
+        </p:spPr>
+      </p:sp>
+      <p:sp>
+        <p:nvSpPr>
+          <p:cNvPr id="30" name="Shape 28"/>
+          <p:cNvSpPr/>
+          <p:nvPr/>
+        </p:nvSpPr>
+        <p:spPr>
+          <a:xfrm>
+            <a:off x="2670048" y="4169664"/>
+            <a:ext cx="685800" cy="384048"/>
+          </a:xfrm>
+          <a:prstGeom prst="rect">
+            <a:avLst>
+              <a:gd name="adj" fmla="val 9524"/>
+            </a:avLst>
+          </a:prstGeom>
+          <a:solidFill>
             <a:srgbClr val="FFFFFF"/>
           </a:solidFill>
           <a:ln w="12700">
             <a:solidFill>
-              <a:srgbClr val="0D9488"/>
-            </a:solidFill>
-            <a:prstDash val="solid"/>
-          </a:ln>
-        </p:spPr>
-      </p:sp>
-      <p:sp>
-        <p:nvSpPr>
-          <p:cNvPr id="29" name="Text 27"/>
-          <p:cNvSpPr/>
-          <p:nvPr/>
-        </p:nvSpPr>
-        <p:spPr>
-          <a:xfrm>
-            <a:off x="5742432" y="3364992"/>
-            <a:ext cx="1645920" cy="475488"/>
+              <a:srgbClr val="DB2777"/>
+            </a:solidFill>
+            <a:prstDash val="solid"/>
+          </a:ln>
+        </p:spPr>
+      </p:sp>
+      <p:sp>
+        <p:nvSpPr>
+          <p:cNvPr id="31" name="Text 29"/>
+          <p:cNvSpPr/>
+          <p:nvPr/>
+        </p:nvSpPr>
+        <p:spPr>
+          <a:xfrm>
+            <a:off x="2670048" y="4169664"/>
+            <a:ext cx="685800" cy="384048"/>
           </a:xfrm>
           <a:prstGeom prst="rect">
             <a:avLst/>
@@ -30597,57 +30744,57 @@
               <a:buNone/>
             </a:pPr>
             <a:r>
-              <a:rPr lang="en-US" sz="1400" b="1" dirty="0">
-                <a:solidFill>
-                  <a:srgbClr val="0D9488"/>
+              <a:rPr lang="en-US" sz="900" b="1" dirty="0">
+                <a:solidFill>
+                  <a:srgbClr val="9D174D"/>
                 </a:solidFill>
                 <a:latin typeface="Trebuchet MS" pitchFamily="34" charset="0"/>
                 <a:ea typeface="Trebuchet MS" pitchFamily="34" charset="-122"/>
                 <a:cs typeface="Trebuchet MS" pitchFamily="34" charset="-120"/>
               </a:rPr>
-              <a:t>lock</a:t>
-            </a:r>
-            <a:endParaRPr lang="en-US" sz="1400" dirty="0"/>
-          </a:p>
-        </p:txBody>
-      </p:sp>
-      <p:sp>
-        <p:nvSpPr>
-          <p:cNvPr id="30" name="Shape 28"/>
-          <p:cNvSpPr/>
-          <p:nvPr/>
-        </p:nvSpPr>
-        <p:spPr>
-          <a:xfrm>
-            <a:off x="365760" y="4096512"/>
-            <a:ext cx="1371600" cy="804672"/>
+              <a:t>l</a:t>
+            </a:r>
+            <a:endParaRPr lang="en-US" sz="900" dirty="0"/>
+          </a:p>
+        </p:txBody>
+      </p:sp>
+      <p:sp>
+        <p:nvSpPr>
+          <p:cNvPr id="32" name="Shape 30"/>
+          <p:cNvSpPr/>
+          <p:nvPr/>
+        </p:nvSpPr>
+        <p:spPr>
+          <a:xfrm>
+            <a:off x="4123944" y="4169664"/>
+            <a:ext cx="685800" cy="384048"/>
           </a:xfrm>
           <a:prstGeom prst="rect">
             <a:avLst>
-              <a:gd name="adj" fmla="val 6818"/>
+              <a:gd name="adj" fmla="val 9524"/>
             </a:avLst>
           </a:prstGeom>
           <a:solidFill>
-            <a:srgbClr val="E2E8F0"/>
-          </a:solidFill>
-          <a:ln w="12700">
-            <a:solidFill>
-              <a:srgbClr val="E2E8F0"/>
-            </a:solidFill>
-            <a:prstDash val="solid"/>
-          </a:ln>
-        </p:spPr>
-      </p:sp>
-      <p:sp>
-        <p:nvSpPr>
-          <p:cNvPr id="31" name="Text 29"/>
-          <p:cNvSpPr/>
-          <p:nvPr/>
-        </p:nvSpPr>
-        <p:spPr>
-          <a:xfrm>
-            <a:off x="365760" y="4096512"/>
-            <a:ext cx="1371600" cy="804672"/>
+            <a:srgbClr val="FFFFFF"/>
+          </a:solidFill>
+          <a:ln w="12700">
+            <a:solidFill>
+              <a:srgbClr val="DB2777"/>
+            </a:solidFill>
+            <a:prstDash val="solid"/>
+          </a:ln>
+        </p:spPr>
+      </p:sp>
+      <p:sp>
+        <p:nvSpPr>
+          <p:cNvPr id="33" name="Text 31"/>
+          <p:cNvSpPr/>
+          <p:nvPr/>
+        </p:nvSpPr>
+        <p:spPr>
+          <a:xfrm>
+            <a:off x="4123944" y="4169664"/>
+            <a:ext cx="685800" cy="384048"/>
           </a:xfrm>
           <a:prstGeom prst="rect">
             <a:avLst/>
@@ -30663,38 +30810,38 @@
               <a:buNone/>
             </a:pPr>
             <a:r>
-              <a:rPr lang="en-US" sz="1100" b="1" dirty="0">
-                <a:solidFill>
-                  <a:srgbClr val="475569"/>
+              <a:rPr lang="en-US" sz="900" b="1" dirty="0">
+                <a:solidFill>
+                  <a:srgbClr val="9D174D"/>
                 </a:solidFill>
                 <a:latin typeface="Trebuchet MS" pitchFamily="34" charset="0"/>
                 <a:ea typeface="Trebuchet MS" pitchFamily="34" charset="-122"/>
                 <a:cs typeface="Trebuchet MS" pitchFamily="34" charset="-120"/>
               </a:rPr>
-              <a:t>Phonemes</a:t>
-            </a:r>
-            <a:endParaRPr lang="en-US" sz="1100" dirty="0"/>
-          </a:p>
-        </p:txBody>
-      </p:sp>
-      <p:sp>
-        <p:nvSpPr>
-          <p:cNvPr id="32" name="Shape 30"/>
-          <p:cNvSpPr/>
-          <p:nvPr/>
-        </p:nvSpPr>
-        <p:spPr>
-          <a:xfrm>
-            <a:off x="1874520" y="4096512"/>
-            <a:ext cx="6903720" cy="658368"/>
+              <a:t>o</a:t>
+            </a:r>
+            <a:endParaRPr lang="en-US" sz="900" dirty="0"/>
+          </a:p>
+        </p:txBody>
+      </p:sp>
+      <p:sp>
+        <p:nvSpPr>
+          <p:cNvPr id="34" name="Shape 32"/>
+          <p:cNvSpPr/>
+          <p:nvPr/>
+        </p:nvSpPr>
+        <p:spPr>
+          <a:xfrm>
+            <a:off x="5577840" y="4169664"/>
+            <a:ext cx="685800" cy="384048"/>
           </a:xfrm>
           <a:prstGeom prst="rect">
             <a:avLst>
-              <a:gd name="adj" fmla="val 8333"/>
+              <a:gd name="adj" fmla="val 9524"/>
             </a:avLst>
           </a:prstGeom>
           <a:solidFill>
-            <a:srgbClr val="FCE7F3"/>
+            <a:srgbClr val="FFFFFF"/>
           </a:solidFill>
           <a:ln w="12700">
             <a:solidFill>
@@ -30706,41 +30853,14 @@
       </p:sp>
       <p:sp>
         <p:nvSpPr>
-          <p:cNvPr id="33" name="Shape 31"/>
-          <p:cNvSpPr/>
-          <p:nvPr/>
-        </p:nvSpPr>
-        <p:spPr>
-          <a:xfrm>
-            <a:off x="2254649" y="4169664"/>
-            <a:ext cx="685800" cy="475488"/>
-          </a:xfrm>
-          <a:prstGeom prst="rect">
-            <a:avLst>
-              <a:gd name="adj" fmla="val 7692"/>
-            </a:avLst>
-          </a:prstGeom>
-          <a:solidFill>
-            <a:srgbClr val="FFFFFF"/>
-          </a:solidFill>
-          <a:ln w="12700">
-            <a:solidFill>
-              <a:srgbClr val="DB2777"/>
-            </a:solidFill>
-            <a:prstDash val="solid"/>
-          </a:ln>
-        </p:spPr>
-      </p:sp>
-      <p:sp>
-        <p:nvSpPr>
-          <p:cNvPr id="34" name="Text 32"/>
-          <p:cNvSpPr/>
-          <p:nvPr/>
-        </p:nvSpPr>
-        <p:spPr>
-          <a:xfrm>
-            <a:off x="2254649" y="4169664"/>
-            <a:ext cx="685800" cy="475488"/>
+          <p:cNvPr id="35" name="Text 33"/>
+          <p:cNvSpPr/>
+          <p:nvPr/>
+        </p:nvSpPr>
+        <p:spPr>
+          <a:xfrm>
+            <a:off x="5577840" y="4169664"/>
+            <a:ext cx="685800" cy="384048"/>
           </a:xfrm>
           <a:prstGeom prst="rect">
             <a:avLst/>
@@ -30764,7 +30884,7 @@
                 <a:ea typeface="Trebuchet MS" pitchFamily="34" charset="-122"/>
                 <a:cs typeface="Trebuchet MS" pitchFamily="34" charset="-120"/>
               </a:rPr>
-              <a:t>d</a:t>
+              <a:t>ck</a:t>
             </a:r>
             <a:endParaRPr lang="en-US" sz="900" dirty="0"/>
           </a:p>
@@ -30772,18 +30892,18 @@
       </p:sp>
       <p:sp>
         <p:nvSpPr>
-          <p:cNvPr id="35" name="Shape 33"/>
-          <p:cNvSpPr/>
-          <p:nvPr/>
-        </p:nvSpPr>
-        <p:spPr>
-          <a:xfrm>
-            <a:off x="3293146" y="4169664"/>
-            <a:ext cx="685800" cy="475488"/>
+          <p:cNvPr id="36" name="Shape 34"/>
+          <p:cNvSpPr/>
+          <p:nvPr/>
+        </p:nvSpPr>
+        <p:spPr>
+          <a:xfrm>
+            <a:off x="7031736" y="4169664"/>
+            <a:ext cx="685800" cy="384048"/>
           </a:xfrm>
           <a:prstGeom prst="rect">
             <a:avLst>
-              <a:gd name="adj" fmla="val 7692"/>
+              <a:gd name="adj" fmla="val 9524"/>
             </a:avLst>
           </a:prstGeom>
           <a:solidFill>
@@ -30799,14 +30919,14 @@
       </p:sp>
       <p:sp>
         <p:nvSpPr>
-          <p:cNvPr id="36" name="Text 34"/>
-          <p:cNvSpPr/>
-          <p:nvPr/>
-        </p:nvSpPr>
-        <p:spPr>
-          <a:xfrm>
-            <a:off x="3293146" y="4169664"/>
-            <a:ext cx="685800" cy="475488"/>
+          <p:cNvPr id="37" name="Text 35"/>
+          <p:cNvSpPr/>
+          <p:nvPr/>
+        </p:nvSpPr>
+        <p:spPr>
+          <a:xfrm>
+            <a:off x="7031736" y="4169664"/>
+            <a:ext cx="685800" cy="384048"/>
           </a:xfrm>
           <a:prstGeom prst="rect">
             <a:avLst/>
@@ -30830,7 +30950,7 @@
                 <a:ea typeface="Trebuchet MS" pitchFamily="34" charset="-122"/>
                 <a:cs typeface="Trebuchet MS" pitchFamily="34" charset="-120"/>
               </a:rPr>
-              <a:t>ea</a:t>
+              <a:t>ed</a:t>
             </a:r>
             <a:endParaRPr lang="en-US" sz="900" dirty="0"/>
           </a:p>
@@ -30838,265 +30958,40 @@
       </p:sp>
       <p:sp>
         <p:nvSpPr>
-          <p:cNvPr id="37" name="Shape 35"/>
-          <p:cNvSpPr/>
-          <p:nvPr/>
-        </p:nvSpPr>
-        <p:spPr>
-          <a:xfrm>
-            <a:off x="4331643" y="4169664"/>
-            <a:ext cx="685800" cy="475488"/>
-          </a:xfrm>
-          <a:prstGeom prst="rect">
-            <a:avLst>
-              <a:gd name="adj" fmla="val 7692"/>
-            </a:avLst>
-          </a:prstGeom>
-          <a:solidFill>
-            <a:srgbClr val="FFFFFF"/>
-          </a:solidFill>
-          <a:ln w="12700">
-            <a:solidFill>
-              <a:srgbClr val="DB2777"/>
-            </a:solidFill>
-            <a:prstDash val="solid"/>
-          </a:ln>
-        </p:spPr>
-      </p:sp>
-      <p:sp>
-        <p:nvSpPr>
           <p:cNvPr id="38" name="Text 36"/>
           <p:cNvSpPr/>
           <p:nvPr/>
         </p:nvSpPr>
         <p:spPr>
           <a:xfrm>
-            <a:off x="4331643" y="4169664"/>
-            <a:ext cx="685800" cy="475488"/>
-          </a:xfrm>
-          <a:prstGeom prst="rect">
-            <a:avLst/>
-          </a:prstGeom>
-          <a:noFill/>
-          <a:ln/>
-        </p:spPr>
-        <p:txBody>
-          <a:bodyPr wrap="square" lIns="0" tIns="0" rIns="0" bIns="0" rtlCol="0" anchor="ctr"/>
-          <a:lstStyle/>
-          <a:p>
-            <a:pPr algn="ctr" indent="0" marL="0">
-              <a:buNone/>
-            </a:pPr>
-            <a:r>
-              <a:rPr lang="en-US" sz="900" b="1" dirty="0">
-                <a:solidFill>
-                  <a:srgbClr val="9D174D"/>
-                </a:solidFill>
-                <a:latin typeface="Trebuchet MS" pitchFamily="34" charset="0"/>
-                <a:ea typeface="Trebuchet MS" pitchFamily="34" charset="-122"/>
-                <a:cs typeface="Trebuchet MS" pitchFamily="34" charset="-120"/>
-              </a:rPr>
-              <a:t>d</a:t>
-            </a:r>
-            <a:endParaRPr lang="en-US" sz="900" dirty="0"/>
-          </a:p>
-        </p:txBody>
-      </p:sp>
-      <p:sp>
-        <p:nvSpPr>
-          <p:cNvPr id="39" name="Shape 37"/>
-          <p:cNvSpPr/>
-          <p:nvPr/>
-        </p:nvSpPr>
-        <p:spPr>
-          <a:xfrm>
-            <a:off x="5370141" y="4169664"/>
-            <a:ext cx="685800" cy="475488"/>
-          </a:xfrm>
-          <a:prstGeom prst="rect">
-            <a:avLst>
-              <a:gd name="adj" fmla="val 7692"/>
-            </a:avLst>
-          </a:prstGeom>
-          <a:solidFill>
-            <a:srgbClr val="FFFFFF"/>
-          </a:solidFill>
-          <a:ln w="12700">
-            <a:solidFill>
-              <a:srgbClr val="DB2777"/>
-            </a:solidFill>
-            <a:prstDash val="solid"/>
-          </a:ln>
-        </p:spPr>
-      </p:sp>
-      <p:sp>
-        <p:nvSpPr>
-          <p:cNvPr id="40" name="Text 38"/>
-          <p:cNvSpPr/>
-          <p:nvPr/>
-        </p:nvSpPr>
-        <p:spPr>
-          <a:xfrm>
-            <a:off x="5370141" y="4169664"/>
-            <a:ext cx="685800" cy="475488"/>
-          </a:xfrm>
-          <a:prstGeom prst="rect">
-            <a:avLst/>
-          </a:prstGeom>
-          <a:noFill/>
-          <a:ln/>
-        </p:spPr>
-        <p:txBody>
-          <a:bodyPr wrap="square" lIns="0" tIns="0" rIns="0" bIns="0" rtlCol="0" anchor="ctr"/>
-          <a:lstStyle/>
-          <a:p>
-            <a:pPr algn="ctr" indent="0" marL="0">
-              <a:buNone/>
-            </a:pPr>
-            <a:r>
-              <a:rPr lang="en-US" sz="900" b="1" dirty="0">
-                <a:solidFill>
-                  <a:srgbClr val="9D174D"/>
-                </a:solidFill>
-                <a:latin typeface="Trebuchet MS" pitchFamily="34" charset="0"/>
-                <a:ea typeface="Trebuchet MS" pitchFamily="34" charset="-122"/>
-                <a:cs typeface="Trebuchet MS" pitchFamily="34" charset="-120"/>
-              </a:rPr>
-              <a:t>l</a:t>
-            </a:r>
-            <a:endParaRPr lang="en-US" sz="900" dirty="0"/>
-          </a:p>
-        </p:txBody>
-      </p:sp>
-      <p:sp>
-        <p:nvSpPr>
-          <p:cNvPr id="41" name="Shape 39"/>
-          <p:cNvSpPr/>
-          <p:nvPr/>
-        </p:nvSpPr>
-        <p:spPr>
-          <a:xfrm>
-            <a:off x="6408638" y="4169664"/>
-            <a:ext cx="685800" cy="475488"/>
-          </a:xfrm>
-          <a:prstGeom prst="rect">
-            <a:avLst>
-              <a:gd name="adj" fmla="val 7692"/>
-            </a:avLst>
-          </a:prstGeom>
-          <a:solidFill>
-            <a:srgbClr val="FFFFFF"/>
-          </a:solidFill>
-          <a:ln w="12700">
-            <a:solidFill>
-              <a:srgbClr val="DB2777"/>
-            </a:solidFill>
-            <a:prstDash val="solid"/>
-          </a:ln>
-        </p:spPr>
-      </p:sp>
-      <p:sp>
-        <p:nvSpPr>
-          <p:cNvPr id="42" name="Text 40"/>
-          <p:cNvSpPr/>
-          <p:nvPr/>
-        </p:nvSpPr>
-        <p:spPr>
-          <a:xfrm>
-            <a:off x="6408638" y="4169664"/>
-            <a:ext cx="685800" cy="475488"/>
-          </a:xfrm>
-          <a:prstGeom prst="rect">
-            <a:avLst/>
-          </a:prstGeom>
-          <a:noFill/>
-          <a:ln/>
-        </p:spPr>
-        <p:txBody>
-          <a:bodyPr wrap="square" lIns="0" tIns="0" rIns="0" bIns="0" rtlCol="0" anchor="ctr"/>
-          <a:lstStyle/>
-          <a:p>
-            <a:pPr algn="ctr" indent="0" marL="0">
-              <a:buNone/>
-            </a:pPr>
-            <a:r>
-              <a:rPr lang="en-US" sz="900" b="1" dirty="0">
-                <a:solidFill>
-                  <a:srgbClr val="9D174D"/>
-                </a:solidFill>
-                <a:latin typeface="Trebuchet MS" pitchFamily="34" charset="0"/>
-                <a:ea typeface="Trebuchet MS" pitchFamily="34" charset="-122"/>
-                <a:cs typeface="Trebuchet MS" pitchFamily="34" charset="-120"/>
-              </a:rPr>
-              <a:t>o</a:t>
-            </a:r>
-            <a:endParaRPr lang="en-US" sz="900" dirty="0"/>
-          </a:p>
-        </p:txBody>
-      </p:sp>
-      <p:sp>
-        <p:nvSpPr>
-          <p:cNvPr id="43" name="Shape 41"/>
-          <p:cNvSpPr/>
-          <p:nvPr/>
-        </p:nvSpPr>
-        <p:spPr>
-          <a:xfrm>
-            <a:off x="7447135" y="4169664"/>
-            <a:ext cx="685800" cy="475488"/>
-          </a:xfrm>
-          <a:prstGeom prst="rect">
-            <a:avLst>
-              <a:gd name="adj" fmla="val 7692"/>
-            </a:avLst>
-          </a:prstGeom>
-          <a:solidFill>
-            <a:srgbClr val="FFFFFF"/>
-          </a:solidFill>
-          <a:ln w="12700">
-            <a:solidFill>
-              <a:srgbClr val="DB2777"/>
-            </a:solidFill>
-            <a:prstDash val="solid"/>
-          </a:ln>
-        </p:spPr>
-      </p:sp>
-      <p:sp>
-        <p:nvSpPr>
-          <p:cNvPr id="44" name="Text 42"/>
-          <p:cNvSpPr/>
-          <p:nvPr/>
-        </p:nvSpPr>
-        <p:spPr>
-          <a:xfrm>
-            <a:off x="7447135" y="4169664"/>
-            <a:ext cx="685800" cy="475488"/>
-          </a:xfrm>
-          <a:prstGeom prst="rect">
-            <a:avLst/>
-          </a:prstGeom>
-          <a:noFill/>
-          <a:ln/>
-        </p:spPr>
-        <p:txBody>
-          <a:bodyPr wrap="square" lIns="0" tIns="0" rIns="0" bIns="0" rtlCol="0" anchor="ctr"/>
-          <a:lstStyle/>
-          <a:p>
-            <a:pPr algn="ctr" indent="0" marL="0">
-              <a:buNone/>
-            </a:pPr>
-            <a:r>
-              <a:rPr lang="en-US" sz="900" b="1" dirty="0">
-                <a:solidFill>
-                  <a:srgbClr val="9D174D"/>
-                </a:solidFill>
-                <a:latin typeface="Trebuchet MS" pitchFamily="34" charset="0"/>
-                <a:ea typeface="Trebuchet MS" pitchFamily="34" charset="-122"/>
-                <a:cs typeface="Trebuchet MS" pitchFamily="34" charset="-120"/>
-              </a:rPr>
-              <a:t>ck</a:t>
-            </a:r>
-            <a:endParaRPr lang="en-US" sz="900" dirty="0"/>
+            <a:off x="7031736" y="4572000"/>
+            <a:ext cx="685800" cy="219456"/>
+          </a:xfrm>
+          <a:prstGeom prst="rect">
+            <a:avLst/>
+          </a:prstGeom>
+          <a:noFill/>
+          <a:ln/>
+        </p:spPr>
+        <p:txBody>
+          <a:bodyPr wrap="square" lIns="0" tIns="0" rIns="0" bIns="0" rtlCol="0" anchor="t"/>
+          <a:lstStyle/>
+          <a:p>
+            <a:pPr algn="ctr" indent="0" marL="0">
+              <a:buNone/>
+            </a:pPr>
+            <a:r>
+              <a:rPr lang="en-US" sz="750" i="1" dirty="0">
+                <a:solidFill>
+                  <a:srgbClr val="94A3B8"/>
+                </a:solidFill>
+                <a:latin typeface="Calibri" pitchFamily="34" charset="0"/>
+                <a:ea typeface="Calibri" pitchFamily="34" charset="-122"/>
+                <a:cs typeface="Calibri" pitchFamily="34" charset="-120"/>
+              </a:rPr>
+              <a:t>/t/</a:t>
+            </a:r>
+            <a:endParaRPr lang="en-US" sz="750" dirty="0"/>
           </a:p>
         </p:txBody>
       </p:sp>
@@ -33290,7 +33185,7 @@
                 <a:ea typeface="Trebuchet MS" pitchFamily="34" charset="-122"/>
                 <a:cs typeface="Trebuchet MS" pitchFamily="34" charset="-120"/>
               </a:rPr>
-              <a:t>-er</a:t>
+              <a:t>-s</a:t>
             </a:r>
             <a:endParaRPr lang="en-US" sz="1300" dirty="0"/>
           </a:p>
@@ -33443,7 +33338,7 @@
                 <a:ea typeface="Trebuchet MS" pitchFamily="34" charset="-122"/>
                 <a:cs typeface="Trebuchet MS" pitchFamily="34" charset="-120"/>
               </a:rPr>
-              <a:t>-out</a:t>
+              <a:t>-er</a:t>
             </a:r>
             <a:endParaRPr lang="en-US" sz="1300" dirty="0"/>
           </a:p>
@@ -33507,7 +33402,7 @@
                 <a:ea typeface="Trebuchet MS" pitchFamily="34" charset="-122"/>
                 <a:cs typeface="Trebuchet MS" pitchFamily="34" charset="-120"/>
               </a:rPr>
-              <a:t>inter-</a:t>
+              <a:t>hem-</a:t>
             </a:r>
             <a:endParaRPr lang="en-US" sz="1300" dirty="0"/>
           </a:p>
@@ -33596,7 +33491,7 @@
                 <a:ea typeface="Trebuchet MS" pitchFamily="34" charset="-122"/>
                 <a:cs typeface="Trebuchet MS" pitchFamily="34" charset="-120"/>
               </a:rPr>
-              <a:t>-smith</a:t>
+              <a:t>-out</a:t>
             </a:r>
             <a:endParaRPr lang="en-US" sz="1300" dirty="0"/>
           </a:p>
@@ -33899,7 +33794,7 @@
                 <a:ea typeface="Trebuchet MS" pitchFamily="34" charset="-122"/>
                 <a:cs typeface="Trebuchet MS" pitchFamily="34" charset="-120"/>
               </a:rPr>
-              <a:t>locker</a:t>
+              <a:t>lockout</a:t>
             </a:r>
             <a:endParaRPr lang="en-US" sz="1200" dirty="0"/>
           </a:p>
@@ -33965,7 +33860,7 @@
                 <a:ea typeface="Trebuchet MS" pitchFamily="34" charset="-122"/>
                 <a:cs typeface="Trebuchet MS" pitchFamily="34" charset="-120"/>
               </a:rPr>
-              <a:t>lockout</a:t>
+              <a:t>deadlock</a:t>
             </a:r>
             <a:endParaRPr lang="en-US" sz="1200" dirty="0"/>
           </a:p>
@@ -34031,7 +33926,7 @@
                 <a:ea typeface="Trebuchet MS" pitchFamily="34" charset="-122"/>
                 <a:cs typeface="Trebuchet MS" pitchFamily="34" charset="-120"/>
               </a:rPr>
-              <a:t>deadlock</a:t>
+              <a:t>padlock</a:t>
             </a:r>
             <a:endParaRPr lang="en-US" sz="1200" dirty="0"/>
           </a:p>
@@ -34097,7 +33992,7 @@
                 <a:ea typeface="Trebuchet MS" pitchFamily="34" charset="-122"/>
                 <a:cs typeface="Trebuchet MS" pitchFamily="34" charset="-120"/>
               </a:rPr>
-              <a:t>padlock</a:t>
+              <a:t>gridlock</a:t>
             </a:r>
             <a:endParaRPr lang="en-US" sz="1200" dirty="0"/>
           </a:p>
@@ -34163,7 +34058,7 @@
                 <a:ea typeface="Trebuchet MS" pitchFamily="34" charset="-122"/>
                 <a:cs typeface="Trebuchet MS" pitchFamily="34" charset="-120"/>
               </a:rPr>
-              <a:t>gridlock</a:t>
+              <a:t>locker</a:t>
             </a:r>
             <a:endParaRPr lang="en-US" sz="1200" dirty="0"/>
           </a:p>
@@ -35351,7 +35246,7 @@
                 <a:ea typeface="Calibri" pitchFamily="34" charset="-122"/>
                 <a:cs typeface="Calibri" pitchFamily="34" charset="-120"/>
               </a:rPr>
-              <a:t>1.  The word 'unlock' uses the prefix 'un-' meaning 'not' or 'reverse'.</a:t>
+              <a:t>1.  The word 'unlock' uses the prefix 'un-' to mean the opposite of locking.</a:t>
             </a:r>
             <a:endParaRPr lang="en-US" sz="1300" dirty="0"/>
           </a:p>
@@ -35490,7 +35385,7 @@
                 <a:ea typeface="Calibri" pitchFamily="34" charset="-122"/>
                 <a:cs typeface="Calibri" pitchFamily="34" charset="-120"/>
               </a:rPr>
-              <a:t>2.  A 'locker' is a type of food container used in kitchens.</a:t>
+              <a:t>2.  A 'padlock' is a real English word that contains the root 'lock'.</a:t>
             </a:r>
             <a:endParaRPr lang="en-US" sz="1300" dirty="0"/>
           </a:p>
@@ -35513,11 +35408,11 @@
             </a:avLst>
           </a:prstGeom>
           <a:solidFill>
-            <a:srgbClr val="FEE2E2"/>
-          </a:solidFill>
-          <a:ln w="12700">
-            <a:solidFill>
-              <a:srgbClr val="DC2626"/>
+            <a:srgbClr val="DCFCE7"/>
+          </a:solidFill>
+          <a:ln w="12700">
+            <a:solidFill>
+              <a:srgbClr val="16A34A"/>
             </a:solidFill>
             <a:prstDash val="solid"/>
           </a:ln>
@@ -35550,13 +35445,13 @@
             <a:r>
               <a:rPr lang="en-US" sz="1100" b="1" dirty="0">
                 <a:solidFill>
-                  <a:srgbClr val="DC2626"/>
+                  <a:srgbClr val="16A34A"/>
                 </a:solidFill>
                 <a:latin typeface="Trebuchet MS" pitchFamily="34" charset="0"/>
                 <a:ea typeface="Trebuchet MS" pitchFamily="34" charset="-122"/>
                 <a:cs typeface="Trebuchet MS" pitchFamily="34" charset="-120"/>
               </a:rPr>
-              <a:t>FALSE</a:t>
+              <a:t>TRUE</a:t>
             </a:r>
             <a:endParaRPr lang="en-US" sz="1100" dirty="0"/>
           </a:p>
@@ -35629,7 +35524,7 @@
                 <a:ea typeface="Calibri" pitchFamily="34" charset="-122"/>
                 <a:cs typeface="Calibri" pitchFamily="34" charset="-120"/>
               </a:rPr>
-              <a:t>3.  The root 'lock' means to fasten or secure something shut.</a:t>
+              <a:t>3.  Adding '-ing' to 'lock' changes the word so it no longer contains the root 'lock'.</a:t>
             </a:r>
             <a:endParaRPr lang="en-US" sz="1300" dirty="0"/>
           </a:p>
@@ -35652,11 +35547,11 @@
             </a:avLst>
           </a:prstGeom>
           <a:solidFill>
-            <a:srgbClr val="DCFCE7"/>
-          </a:solidFill>
-          <a:ln w="12700">
-            <a:solidFill>
-              <a:srgbClr val="16A34A"/>
+            <a:srgbClr val="FEE2E2"/>
+          </a:solidFill>
+          <a:ln w="12700">
+            <a:solidFill>
+              <a:srgbClr val="DC2626"/>
             </a:solidFill>
             <a:prstDash val="solid"/>
           </a:ln>
@@ -35689,13 +35584,13 @@
             <a:r>
               <a:rPr lang="en-US" sz="1100" b="1" dirty="0">
                 <a:solidFill>
-                  <a:srgbClr val="16A34A"/>
+                  <a:srgbClr val="DC2626"/>
                 </a:solidFill>
                 <a:latin typeface="Trebuchet MS" pitchFamily="34" charset="0"/>
                 <a:ea typeface="Trebuchet MS" pitchFamily="34" charset="-122"/>
                 <a:cs typeface="Trebuchet MS" pitchFamily="34" charset="-120"/>
               </a:rPr>
-              <a:t>TRUE</a:t>
+              <a:t>FALSE</a:t>
             </a:r>
             <a:endParaRPr lang="en-US" sz="1100" dirty="0"/>
           </a:p>
@@ -35768,7 +35663,7 @@
                 <a:ea typeface="Calibri" pitchFamily="34" charset="-122"/>
                 <a:cs typeface="Calibri" pitchFamily="34" charset="-120"/>
               </a:rPr>
-              <a:t>4.  The word 'padlock' contains the root 'lock' as a morpheme.</a:t>
+              <a:t>4.  The root 'lock' comes from a Greek word meaning 'to open'.</a:t>
             </a:r>
             <a:endParaRPr lang="en-US" sz="1300" dirty="0"/>
           </a:p>
@@ -35791,11 +35686,11 @@
             </a:avLst>
           </a:prstGeom>
           <a:solidFill>
-            <a:srgbClr val="DCFCE7"/>
-          </a:solidFill>
-          <a:ln w="12700">
-            <a:solidFill>
-              <a:srgbClr val="16A34A"/>
+            <a:srgbClr val="FEE2E2"/>
+          </a:solidFill>
+          <a:ln w="12700">
+            <a:solidFill>
+              <a:srgbClr val="DC2626"/>
             </a:solidFill>
             <a:prstDash val="solid"/>
           </a:ln>
@@ -35828,13 +35723,13 @@
             <a:r>
               <a:rPr lang="en-US" sz="1100" b="1" dirty="0">
                 <a:solidFill>
-                  <a:srgbClr val="16A34A"/>
+                  <a:srgbClr val="DC2626"/>
                 </a:solidFill>
                 <a:latin typeface="Trebuchet MS" pitchFamily="34" charset="0"/>
                 <a:ea typeface="Trebuchet MS" pitchFamily="34" charset="-122"/>
                 <a:cs typeface="Trebuchet MS" pitchFamily="34" charset="-120"/>
               </a:rPr>
-              <a:t>TRUE</a:t>
+              <a:t>FALSE</a:t>
             </a:r>
             <a:endParaRPr lang="en-US" sz="1100" dirty="0"/>
           </a:p>
@@ -35907,7 +35802,7 @@
                 <a:ea typeface="Calibri" pitchFamily="34" charset="-122"/>
                 <a:cs typeface="Calibri" pitchFamily="34" charset="-120"/>
               </a:rPr>
-              <a:t>5.  The word 'gridlock' has nothing to do with being stuck or blocked.</a:t>
+              <a:t>5.  The word 'gridlock' contains the root 'lock' and describes being completely stuck.</a:t>
             </a:r>
             <a:endParaRPr lang="en-US" sz="1300" dirty="0"/>
           </a:p>
@@ -35930,11 +35825,11 @@
             </a:avLst>
           </a:prstGeom>
           <a:solidFill>
-            <a:srgbClr val="FEE2E2"/>
-          </a:solidFill>
-          <a:ln w="12700">
-            <a:solidFill>
-              <a:srgbClr val="DC2626"/>
+            <a:srgbClr val="DCFCE7"/>
+          </a:solidFill>
+          <a:ln w="12700">
+            <a:solidFill>
+              <a:srgbClr val="16A34A"/>
             </a:solidFill>
             <a:prstDash val="solid"/>
           </a:ln>
@@ -35967,13 +35862,13 @@
             <a:r>
               <a:rPr lang="en-US" sz="1100" b="1" dirty="0">
                 <a:solidFill>
-                  <a:srgbClr val="DC2626"/>
+                  <a:srgbClr val="16A34A"/>
                 </a:solidFill>
                 <a:latin typeface="Trebuchet MS" pitchFamily="34" charset="0"/>
                 <a:ea typeface="Trebuchet MS" pitchFamily="34" charset="-122"/>
                 <a:cs typeface="Trebuchet MS" pitchFamily="34" charset="-120"/>
               </a:rPr>
-              <a:t>FALSE</a:t>
+              <a:t>TRUE</a:t>
             </a:r>
             <a:endParaRPr lang="en-US" sz="1100" dirty="0"/>
           </a:p>
@@ -36441,7 +36336,7 @@
                 <a:ea typeface="Calibri" pitchFamily="34" charset="-122"/>
                 <a:cs typeface="Calibri" pitchFamily="34" charset="-120"/>
               </a:rPr>
-              <a:t>Origin: Latin: locus</a:t>
+              <a:t>Origin: Latin: locare</a:t>
             </a:r>
             <a:endParaRPr lang="en-US" sz="1100" dirty="0"/>
           </a:p>
@@ -36744,7 +36639,7 @@
                 <a:ea typeface="Trebuchet MS" pitchFamily="34" charset="-122"/>
                 <a:cs typeface="Trebuchet MS" pitchFamily="34" charset="-120"/>
               </a:rPr>
-              <a:t>locker</a:t>
+              <a:t>lockout</a:t>
             </a:r>
             <a:endParaRPr lang="en-US" sz="1300" dirty="0"/>
           </a:p>
@@ -36810,7 +36705,7 @@
                 <a:ea typeface="Trebuchet MS" pitchFamily="34" charset="-122"/>
                 <a:cs typeface="Trebuchet MS" pitchFamily="34" charset="-120"/>
               </a:rPr>
-              <a:t>lockout</a:t>
+              <a:t>deadlock</a:t>
             </a:r>
             <a:endParaRPr lang="en-US" sz="1300" dirty="0"/>
           </a:p>
@@ -36876,7 +36771,7 @@
                 <a:ea typeface="Trebuchet MS" pitchFamily="34" charset="-122"/>
                 <a:cs typeface="Trebuchet MS" pitchFamily="34" charset="-120"/>
               </a:rPr>
-              <a:t>deadlock</a:t>
+              <a:t>padlock</a:t>
             </a:r>
             <a:endParaRPr lang="en-US" sz="1300" dirty="0"/>
           </a:p>
@@ -36942,7 +36837,7 @@
                 <a:ea typeface="Trebuchet MS" pitchFamily="34" charset="-122"/>
                 <a:cs typeface="Trebuchet MS" pitchFamily="34" charset="-120"/>
               </a:rPr>
-              <a:t>padlock</a:t>
+              <a:t>gridlock</a:t>
             </a:r>
             <a:endParaRPr lang="en-US" sz="1300" dirty="0"/>
           </a:p>
@@ -37969,7 +37864,7 @@
                 <a:ea typeface="Trebuchet MS" pitchFamily="34" charset="-122"/>
                 <a:cs typeface="Trebuchet MS" pitchFamily="34" charset="-120"/>
               </a:rPr>
-              <a:t>-er</a:t>
+              <a:t>-s</a:t>
             </a:r>
             <a:endParaRPr lang="en-US" sz="1300" dirty="0"/>
           </a:p>
@@ -38122,7 +38017,7 @@
                 <a:ea typeface="Trebuchet MS" pitchFamily="34" charset="-122"/>
                 <a:cs typeface="Trebuchet MS" pitchFamily="34" charset="-120"/>
               </a:rPr>
-              <a:t>-out</a:t>
+              <a:t>-er</a:t>
             </a:r>
             <a:endParaRPr lang="en-US" sz="1300" dirty="0"/>
           </a:p>
@@ -38186,7 +38081,7 @@
                 <a:ea typeface="Trebuchet MS" pitchFamily="34" charset="-122"/>
                 <a:cs typeface="Trebuchet MS" pitchFamily="34" charset="-120"/>
               </a:rPr>
-              <a:t>inter-</a:t>
+              <a:t>hem-</a:t>
             </a:r>
             <a:endParaRPr lang="en-US" sz="1300" dirty="0"/>
           </a:p>
@@ -38275,7 +38170,7 @@
                 <a:ea typeface="Trebuchet MS" pitchFamily="34" charset="-122"/>
                 <a:cs typeface="Trebuchet MS" pitchFamily="34" charset="-120"/>
               </a:rPr>
-              <a:t>-smith</a:t>
+              <a:t>-out</a:t>
             </a:r>
             <a:endParaRPr lang="en-US" sz="1300" dirty="0"/>
           </a:p>
@@ -39325,7 +39220,7 @@
                 <a:ea typeface="Calibri" pitchFamily="34" charset="-122"/>
                 <a:cs typeface="Calibri" pitchFamily="34" charset="-120"/>
               </a:rPr>
-              <a:t>A portable lock with a curved metal bar that clicks shut, used on gates or bikes.</a:t>
+              <a:t>When traffic is completely stuck and cannot move in any direction.</a:t>
             </a:r>
             <a:endParaRPr lang="en-US" sz="1200" dirty="0"/>
           </a:p>
@@ -39464,7 +39359,7 @@
                 <a:ea typeface="Calibri" pitchFamily="34" charset="-122"/>
                 <a:cs typeface="Calibri" pitchFamily="34" charset="-120"/>
               </a:rPr>
-              <a:t>The action of fastening something shut with a lock right now.</a:t>
+              <a:t>The action of fastening something shut with a lock.</a:t>
             </a:r>
             <a:endParaRPr lang="en-US" sz="1200" dirty="0"/>
           </a:p>
@@ -39537,7 +39432,7 @@
                 <a:ea typeface="Trebuchet MS" pitchFamily="34" charset="-122"/>
                 <a:cs typeface="Trebuchet MS" pitchFamily="34" charset="-120"/>
               </a:rPr>
-              <a:t>locker</a:t>
+              <a:t>lockout</a:t>
             </a:r>
             <a:endParaRPr lang="en-US" sz="1200" dirty="0"/>
           </a:p>
@@ -39603,7 +39498,7 @@
                 <a:ea typeface="Calibri" pitchFamily="34" charset="-122"/>
                 <a:cs typeface="Calibri" pitchFamily="34" charset="-120"/>
               </a:rPr>
-              <a:t>When someone is prevented from entering a place because the door is locked.</a:t>
+              <a:t>A situation where nobody can move forward or agree, like a tie with no winner.</a:t>
             </a:r>
             <a:endParaRPr lang="en-US" sz="1200" dirty="0"/>
           </a:p>
@@ -39676,7 +39571,7 @@
                 <a:ea typeface="Trebuchet MS" pitchFamily="34" charset="-122"/>
                 <a:cs typeface="Trebuchet MS" pitchFamily="34" charset="-120"/>
               </a:rPr>
-              <a:t>lockout</a:t>
+              <a:t>deadlock</a:t>
             </a:r>
             <a:endParaRPr lang="en-US" sz="1200" dirty="0"/>
           </a:p>
@@ -39742,7 +39637,7 @@
                 <a:ea typeface="Calibri" pitchFamily="34" charset="-122"/>
                 <a:cs typeface="Calibri" pitchFamily="34" charset="-120"/>
               </a:rPr>
-              <a:t>A small cupboard with a lock, often used at school or a gym to store your things.</a:t>
+              <a:t>When someone is prevented from getting into a place because it is locked.</a:t>
             </a:r>
             <a:endParaRPr lang="en-US" sz="1200" dirty="0"/>
           </a:p>
@@ -39815,7 +39710,7 @@
                 <a:ea typeface="Trebuchet MS" pitchFamily="34" charset="-122"/>
                 <a:cs typeface="Trebuchet MS" pitchFamily="34" charset="-120"/>
               </a:rPr>
-              <a:t>deadlock</a:t>
+              <a:t>padlock</a:t>
             </a:r>
             <a:endParaRPr lang="en-US" sz="1200" dirty="0"/>
           </a:p>
@@ -39881,7 +39776,7 @@
                 <a:ea typeface="Calibri" pitchFamily="34" charset="-122"/>
                 <a:cs typeface="Calibri" pitchFamily="34" charset="-120"/>
               </a:rPr>
-              <a:t>A situation where nothing can move forward, or a very strong type of lock on a door.</a:t>
+              <a:t>A small portable lock that you can clip onto a gate, locker, or chain.</a:t>
             </a:r>
             <a:endParaRPr lang="en-US" sz="1200" dirty="0"/>
           </a:p>
@@ -39954,7 +39849,7 @@
                 <a:ea typeface="Trebuchet MS" pitchFamily="34" charset="-122"/>
                 <a:cs typeface="Trebuchet MS" pitchFamily="34" charset="-120"/>
               </a:rPr>
-              <a:t>padlock</a:t>
+              <a:t>gridlock</a:t>
             </a:r>
             <a:endParaRPr lang="en-US" sz="1200" dirty="0"/>
           </a:p>
@@ -40020,7 +39915,7 @@
                 <a:ea typeface="Calibri" pitchFamily="34" charset="-122"/>
                 <a:cs typeface="Calibri" pitchFamily="34" charset="-120"/>
               </a:rPr>
-              <a:t>When something has been fastened shut so it cannot be opened without a key.</a:t>
+              <a:t>Fastened shut so it cannot be opened without a key.</a:t>
             </a:r>
             <a:endParaRPr lang="en-US" sz="1200" dirty="0"/>
           </a:p>
@@ -40515,7 +40410,7 @@
                 <a:ea typeface="Calibri" pitchFamily="34" charset="-122"/>
                 <a:cs typeface="Calibri" pitchFamily="34" charset="-120"/>
               </a:rPr>
-              <a:t>Remember to lock your locker after PE so that your belongings stay safe.</a:t>
+              <a:t>Remember to lock your locker before you go to the oval so none of your things go missing.</a:t>
             </a:r>
             <a:endParaRPr lang="en-US" sz="1500" dirty="0"/>
           </a:p>
@@ -40679,7 +40574,7 @@
                 <a:ea typeface="Calibri" pitchFamily="34" charset="-122"/>
                 <a:cs typeface="Calibri" pitchFamily="34" charset="-120"/>
               </a:rPr>
-              <a:t>The mechanic used a padlock to secure the gate at the workshop overnight.</a:t>
+              <a:t>The heavy traffic caused a gridlock on the main road, and no cars could move for over an hour.</a:t>
             </a:r>
             <a:endParaRPr lang="en-US" sz="1500" dirty="0"/>
           </a:p>
@@ -40843,7 +40738,7 @@
                 <a:ea typeface="Calibri" pitchFamily="34" charset="-122"/>
                 <a:cs typeface="Calibri" pitchFamily="34" charset="-120"/>
               </a:rPr>
-              <a:t>The city streets were in complete gridlock after the big footy match finished.</a:t>
+              <a:t>Mia used her key to unlock the gate and let everyone into the backyard for the party.</a:t>
             </a:r>
             <a:endParaRPr lang="en-US" sz="1500" dirty="0"/>
           </a:p>

--- a/output/wordlabs-lock-3day.pptx
+++ b/output/wordlabs-lock-3day.pptx
@@ -4240,7 +4240,7 @@
                 <a:ea typeface="Calibri" pitchFamily="34" charset="-122"/>
                 <a:cs typeface="Calibri" pitchFamily="34" charset="-120"/>
               </a:rPr>
-              <a:t>"to fasten or secure shut"</a:t>
+              <a:t>"to fasten with a key; a fastening device"</a:t>
             </a:r>
             <a:endParaRPr lang="en-US" sz="2200" dirty="0"/>
           </a:p>
@@ -4279,7 +4279,7 @@
                 <a:ea typeface="Calibri" pitchFamily="34" charset="-122"/>
                 <a:cs typeface="Calibri" pitchFamily="34" charset="-120"/>
               </a:rPr>
-              <a:t>Origin: Latin: locare</a:t>
+              <a:t>Origin: Anglo-Saxon (Old English) root</a:t>
             </a:r>
             <a:endParaRPr lang="en-US" sz="1300" dirty="0"/>
           </a:p>
@@ -5288,7 +5288,7 @@
                 <a:ea typeface="Calibri" pitchFamily="34" charset="-122"/>
                 <a:cs typeface="Calibri" pitchFamily="34" charset="-120"/>
               </a:rPr>
-              <a:t>Word Labs  •  wordlabs.app  •  Root: 'lock' = to fasten or secure shut</a:t>
+              <a:t>Word Labs  •  wordlabs.app  •  Root: 'lock' = to fasten with a key; a fastening device</a:t>
             </a:r>
             <a:endParaRPr lang="en-US" sz="800" dirty="0"/>
           </a:p>
@@ -5928,7 +5928,7 @@
                 <a:ea typeface="Calibri" pitchFamily="34" charset="-122"/>
                 <a:cs typeface="Calibri" pitchFamily="34" charset="-120"/>
               </a:rPr>
-              <a:t>Word Labs  •  wordlabs.app  •  Root: 'lock' = to fasten or secure shut</a:t>
+              <a:t>Word Labs  •  wordlabs.app  •  Root: 'lock' = to fasten with a key; a fastening device</a:t>
             </a:r>
             <a:endParaRPr lang="en-US" sz="800" dirty="0"/>
           </a:p>
@@ -6040,7 +6040,7 @@
                 <a:ea typeface="Calibri" pitchFamily="34" charset="-122"/>
                 <a:cs typeface="Calibri" pitchFamily="34" charset="-120"/>
               </a:rPr>
-              <a:t>She needed to </a:t>
+              <a:t>She used her key to </a:t>
             </a:r>
             <a:pPr algn="l" indent="0" marL="0">
               <a:buNone/>
@@ -6071,7 +6071,7 @@
                 <a:ea typeface="Calibri" pitchFamily="34" charset="-122"/>
                 <a:cs typeface="Calibri" pitchFamily="34" charset="-120"/>
               </a:rPr>
-              <a:t> the </a:t>
+              <a:t> the front door. The changing room has rows of metal </a:t>
             </a:r>
             <a:pPr algn="l" indent="0" marL="0">
               <a:buNone/>
@@ -6088,7 +6088,7 @@
                 <a:ea typeface="Calibri" pitchFamily="34" charset="-122"/>
                 <a:cs typeface="Calibri" pitchFamily="34" charset="-120"/>
               </a:rPr>
-              <a:t>padlock</a:t>
+              <a:t>lockers</a:t>
             </a:r>
             <a:pPr algn="l" indent="0" marL="0">
               <a:buNone/>
@@ -6102,7 +6102,7 @@
                 <a:ea typeface="Calibri" pitchFamily="34" charset="-122"/>
                 <a:cs typeface="Calibri" pitchFamily="34" charset="-120"/>
               </a:rPr>
-              <a:t> before she could get her bike out of the shed.</a:t>
+              <a:t>.</a:t>
             </a:r>
             <a:endParaRPr lang="en-US" sz="1800" dirty="0"/>
           </a:p>
@@ -6385,7 +6385,7 @@
                 <a:ea typeface="Trebuchet MS" pitchFamily="34" charset="-122"/>
                 <a:cs typeface="Trebuchet MS" pitchFamily="34" charset="-120"/>
               </a:rPr>
-              <a:t>padlock</a:t>
+              <a:t>lockers</a:t>
             </a:r>
             <a:endParaRPr lang="en-US" sz="1400" dirty="0"/>
           </a:p>
@@ -6716,7 +6716,7 @@
                 <a:ea typeface="Calibri" pitchFamily="34" charset="-122"/>
                 <a:cs typeface="Calibri" pitchFamily="34" charset="-120"/>
               </a:rPr>
-              <a:t>Word Labs  •  wordlabs.app  •  Root: 'lock' = to fasten or secure shut</a:t>
+              <a:t>Word Labs  •  wordlabs.app  •  Root: 'lock' = to fasten with a key; a fastening device</a:t>
             </a:r>
             <a:endParaRPr lang="en-US" sz="800" dirty="0"/>
           </a:p>
@@ -7543,7 +7543,7 @@
                 <a:ea typeface="Calibri" pitchFamily="34" charset="-122"/>
                 <a:cs typeface="Calibri" pitchFamily="34" charset="-120"/>
               </a:rPr>
-              <a:t>Word Labs  •  wordlabs.app  •  Root: 'lock' = to fasten or secure shut</a:t>
+              <a:t>Word Labs  •  wordlabs.app  •  Root: 'lock' = to fasten with a key; a fastening device</a:t>
             </a:r>
             <a:endParaRPr lang="en-US" sz="800" dirty="0"/>
           </a:p>
@@ -7860,7 +7860,7 @@
                 <a:ea typeface="Calibri" pitchFamily="34" charset="-122"/>
                 <a:cs typeface="Calibri" pitchFamily="34" charset="-120"/>
               </a:rPr>
-              <a:t>not / reverse the action</a:t>
+              <a:t>not</a:t>
             </a:r>
             <a:endParaRPr lang="en-US" sz="850" dirty="0"/>
           </a:p>
@@ -7972,7 +7972,7 @@
                 <a:ea typeface="Calibri" pitchFamily="34" charset="-122"/>
                 <a:cs typeface="Calibri" pitchFamily="34" charset="-120"/>
               </a:rPr>
-              <a:t>to fasten or secure shut</a:t>
+              <a:t>to fasten with a key; a fastening device</a:t>
             </a:r>
             <a:endParaRPr lang="en-US" sz="850" dirty="0"/>
           </a:p>
@@ -8528,7 +8528,7 @@
                 <a:ea typeface="Calibri" pitchFamily="34" charset="-122"/>
                 <a:cs typeface="Calibri" pitchFamily="34" charset="-120"/>
               </a:rPr>
-              <a:t>Word Labs  •  wordlabs.app  •  Root: 'lock' = to fasten or secure shut</a:t>
+              <a:t>Word Labs  •  wordlabs.app  •  Root: 'lock' = to fasten with a key; a fastening device</a:t>
             </a:r>
             <a:endParaRPr lang="en-US" sz="800" dirty="0"/>
           </a:p>
@@ -8845,7 +8845,7 @@
                 <a:ea typeface="Calibri" pitchFamily="34" charset="-122"/>
                 <a:cs typeface="Calibri" pitchFamily="34" charset="-120"/>
               </a:rPr>
-              <a:t>not / reverse the action</a:t>
+              <a:t>not</a:t>
             </a:r>
             <a:endParaRPr lang="en-US" sz="850" dirty="0"/>
           </a:p>
@@ -8957,7 +8957,7 @@
                 <a:ea typeface="Calibri" pitchFamily="34" charset="-122"/>
                 <a:cs typeface="Calibri" pitchFamily="34" charset="-120"/>
               </a:rPr>
-              <a:t>to fasten or secure shut</a:t>
+              <a:t>to fasten with a key; a fastening device</a:t>
             </a:r>
             <a:endParaRPr lang="en-US" sz="850" dirty="0"/>
           </a:p>
@@ -9645,7 +9645,7 @@
                 <a:ea typeface="Calibri" pitchFamily="34" charset="-122"/>
                 <a:cs typeface="Calibri" pitchFamily="34" charset="-120"/>
               </a:rPr>
-              <a:t>Word Labs  •  wordlabs.app  •  Root: 'lock' = to fasten or secure shut</a:t>
+              <a:t>Word Labs  •  wordlabs.app  •  Root: 'lock' = to fasten with a key; a fastening device</a:t>
             </a:r>
             <a:endParaRPr lang="en-US" sz="800" dirty="0"/>
           </a:p>
@@ -9962,7 +9962,7 @@
                 <a:ea typeface="Calibri" pitchFamily="34" charset="-122"/>
                 <a:cs typeface="Calibri" pitchFamily="34" charset="-120"/>
               </a:rPr>
-              <a:t>not / reverse the action</a:t>
+              <a:t>not</a:t>
             </a:r>
             <a:endParaRPr lang="en-US" sz="850" dirty="0"/>
           </a:p>
@@ -10074,7 +10074,7 @@
                 <a:ea typeface="Calibri" pitchFamily="34" charset="-122"/>
                 <a:cs typeface="Calibri" pitchFamily="34" charset="-120"/>
               </a:rPr>
-              <a:t>to fasten or secure shut</a:t>
+              <a:t>to fasten with a key; a fastening device</a:t>
             </a:r>
             <a:endParaRPr lang="en-US" sz="850" dirty="0"/>
           </a:p>
@@ -11053,7 +11053,7 @@
                 <a:ea typeface="Calibri" pitchFamily="34" charset="-122"/>
                 <a:cs typeface="Calibri" pitchFamily="34" charset="-120"/>
               </a:rPr>
-              <a:t>Word Labs  •  wordlabs.app  •  Root: 'lock' = to fasten or secure shut</a:t>
+              <a:t>Word Labs  •  wordlabs.app  •  Root: 'lock' = to fasten with a key; a fastening device</a:t>
             </a:r>
             <a:endParaRPr lang="en-US" sz="800" dirty="0"/>
           </a:p>
@@ -11192,7 +11192,7 @@
                 <a:ea typeface="Trebuchet MS" pitchFamily="34" charset="-122"/>
                 <a:cs typeface="Trebuchet MS" pitchFamily="34" charset="-120"/>
               </a:rPr>
-              <a:t>padlock</a:t>
+              <a:t>lockers</a:t>
             </a:r>
             <a:endParaRPr lang="en-US" sz="2800" dirty="0"/>
           </a:p>
@@ -11880,7 +11880,7 @@
                 <a:ea typeface="Calibri" pitchFamily="34" charset="-122"/>
                 <a:cs typeface="Calibri" pitchFamily="34" charset="-120"/>
               </a:rPr>
-              <a:t>Word Labs  •  wordlabs.app  •  Root: 'lock' = to fasten or secure shut</a:t>
+              <a:t>Word Labs  •  wordlabs.app  •  Root: 'lock' = to fasten with a key; a fastening device</a:t>
             </a:r>
             <a:endParaRPr lang="en-US" sz="800" dirty="0"/>
           </a:p>
@@ -12019,7 +12019,7 @@
                 <a:ea typeface="Trebuchet MS" pitchFamily="34" charset="-122"/>
                 <a:cs typeface="Trebuchet MS" pitchFamily="34" charset="-120"/>
               </a:rPr>
-              <a:t>padlock</a:t>
+              <a:t>lockers</a:t>
             </a:r>
             <a:endParaRPr lang="en-US" sz="2800" dirty="0"/>
           </a:p>
@@ -12099,7 +12099,7 @@
         </p:nvSpPr>
         <p:spPr>
           <a:xfrm>
-            <a:off x="2938272" y="2258568"/>
+            <a:off x="2221992" y="2258568"/>
             <a:ext cx="1828800" cy="292608"/>
           </a:xfrm>
           <a:prstGeom prst="rect">
@@ -12108,11 +12108,11 @@
             </a:avLst>
           </a:prstGeom>
           <a:solidFill>
-            <a:srgbClr val="DDD6FE"/>
+            <a:srgbClr val="CCFBF1"/>
           </a:solidFill>
           <a:ln w="19050">
             <a:solidFill>
-              <a:srgbClr val="7C3AED"/>
+              <a:srgbClr val="0D9488"/>
             </a:solidFill>
             <a:prstDash val="solid"/>
           </a:ln>
@@ -12133,7 +12133,7 @@
         </p:nvSpPr>
         <p:spPr>
           <a:xfrm>
-            <a:off x="2938272" y="2258568"/>
+            <a:off x="2221992" y="2258568"/>
             <a:ext cx="1828800" cy="292608"/>
           </a:xfrm>
           <a:prstGeom prst="rect">
@@ -12152,13 +12152,13 @@
             <a:r>
               <a:rPr lang="en-US" sz="1300" b="1" dirty="0">
                 <a:solidFill>
-                  <a:srgbClr val="4C1D95"/>
+                  <a:srgbClr val="0F766E"/>
                 </a:solidFill>
                 <a:latin typeface="Trebuchet MS" pitchFamily="34" charset="0"/>
                 <a:ea typeface="Trebuchet MS" pitchFamily="34" charset="-122"/>
                 <a:cs typeface="Trebuchet MS" pitchFamily="34" charset="-120"/>
               </a:rPr>
-              <a:t>pad</a:t>
+              <a:t>lock</a:t>
             </a:r>
             <a:endParaRPr lang="en-US" sz="1300" dirty="0"/>
           </a:p>
@@ -12172,7 +12172,7 @@
         </p:nvSpPr>
         <p:spPr>
           <a:xfrm>
-            <a:off x="2938272" y="2569464"/>
+            <a:off x="2221992" y="2569464"/>
             <a:ext cx="1828800" cy="201168"/>
           </a:xfrm>
           <a:prstGeom prst="rect">
@@ -12197,7 +12197,7 @@
                 <a:ea typeface="Calibri" pitchFamily="34" charset="-122"/>
                 <a:cs typeface="Calibri" pitchFamily="34" charset="-120"/>
               </a:rPr>
-              <a:t>flat portable panel</a:t>
+              <a:t>to fasten with a key; a fastening device</a:t>
             </a:r>
             <a:endParaRPr lang="en-US" sz="850" dirty="0"/>
           </a:p>
@@ -12211,7 +12211,7 @@
         </p:nvSpPr>
         <p:spPr>
           <a:xfrm>
-            <a:off x="5803392" y="2258568"/>
+            <a:off x="4370832" y="2258568"/>
             <a:ext cx="1828800" cy="292608"/>
           </a:xfrm>
           <a:prstGeom prst="rect">
@@ -12220,11 +12220,11 @@
             </a:avLst>
           </a:prstGeom>
           <a:solidFill>
-            <a:srgbClr val="CCFBF1"/>
+            <a:srgbClr val="FCE7F3"/>
           </a:solidFill>
           <a:ln w="19050">
             <a:solidFill>
-              <a:srgbClr val="0D9488"/>
+              <a:srgbClr val="DB2777"/>
             </a:solidFill>
             <a:prstDash val="solid"/>
           </a:ln>
@@ -12245,7 +12245,7 @@
         </p:nvSpPr>
         <p:spPr>
           <a:xfrm>
-            <a:off x="5803392" y="2258568"/>
+            <a:off x="4370832" y="2258568"/>
             <a:ext cx="1828800" cy="292608"/>
           </a:xfrm>
           <a:prstGeom prst="rect">
@@ -12264,13 +12264,13 @@
             <a:r>
               <a:rPr lang="en-US" sz="1300" b="1" dirty="0">
                 <a:solidFill>
-                  <a:srgbClr val="0F766E"/>
+                  <a:srgbClr val="9D174D"/>
                 </a:solidFill>
                 <a:latin typeface="Trebuchet MS" pitchFamily="34" charset="0"/>
                 <a:ea typeface="Trebuchet MS" pitchFamily="34" charset="-122"/>
                 <a:cs typeface="Trebuchet MS" pitchFamily="34" charset="-120"/>
               </a:rPr>
-              <a:t>lock</a:t>
+              <a:t>er</a:t>
             </a:r>
             <a:endParaRPr lang="en-US" sz="1300" dirty="0"/>
           </a:p>
@@ -12284,7 +12284,7 @@
         </p:nvSpPr>
         <p:spPr>
           <a:xfrm>
-            <a:off x="5803392" y="2569464"/>
+            <a:off x="4370832" y="2569464"/>
             <a:ext cx="1828800" cy="201168"/>
           </a:xfrm>
           <a:prstGeom prst="rect">
@@ -12309,7 +12309,7 @@
                 <a:ea typeface="Calibri" pitchFamily="34" charset="-122"/>
                 <a:cs typeface="Calibri" pitchFamily="34" charset="-120"/>
               </a:rPr>
-              <a:t>to fasten or secure shut</a:t>
+              <a:t>person who; more</a:t>
             </a:r>
             <a:endParaRPr lang="en-US" sz="850" dirty="0"/>
           </a:p>
@@ -12318,6 +12318,118 @@
       <p:sp>
         <p:nvSpPr>
           <p:cNvPr id="22" name="Shape 20"/>
+          <p:cNvSpPr/>
+          <p:nvPr/>
+        </p:nvSpPr>
+        <p:spPr>
+          <a:xfrm>
+            <a:off x="6519672" y="2258568"/>
+            <a:ext cx="1828800" cy="292608"/>
+          </a:xfrm>
+          <a:prstGeom prst="rect">
+            <a:avLst>
+              <a:gd name="adj" fmla="val 25000"/>
+            </a:avLst>
+          </a:prstGeom>
+          <a:solidFill>
+            <a:srgbClr val="FCE7F3"/>
+          </a:solidFill>
+          <a:ln w="19050">
+            <a:solidFill>
+              <a:srgbClr val="DB2777"/>
+            </a:solidFill>
+            <a:prstDash val="solid"/>
+          </a:ln>
+          <a:effectLst>
+            <a:outerShdw sx="100000" sy="100000" kx="0" ky="0" algn="bl" rotWithShape="0" blurRad="101600" dist="38100" dir="8100000">
+              <a:srgbClr val="000000">
+                <a:alpha val="12000"/>
+              </a:srgbClr>
+            </a:outerShdw>
+          </a:effectLst>
+        </p:spPr>
+      </p:sp>
+      <p:sp>
+        <p:nvSpPr>
+          <p:cNvPr id="23" name="Text 21"/>
+          <p:cNvSpPr/>
+          <p:nvPr/>
+        </p:nvSpPr>
+        <p:spPr>
+          <a:xfrm>
+            <a:off x="6519672" y="2258568"/>
+            <a:ext cx="1828800" cy="292608"/>
+          </a:xfrm>
+          <a:prstGeom prst="rect">
+            <a:avLst/>
+          </a:prstGeom>
+          <a:noFill/>
+          <a:ln/>
+        </p:spPr>
+        <p:txBody>
+          <a:bodyPr wrap="square" lIns="0" tIns="0" rIns="0" bIns="0" rtlCol="0" anchor="ctr"/>
+          <a:lstStyle/>
+          <a:p>
+            <a:pPr algn="ctr" indent="0" marL="0">
+              <a:buNone/>
+            </a:pPr>
+            <a:r>
+              <a:rPr lang="en-US" sz="1300" b="1" dirty="0">
+                <a:solidFill>
+                  <a:srgbClr val="9D174D"/>
+                </a:solidFill>
+                <a:latin typeface="Trebuchet MS" pitchFamily="34" charset="0"/>
+                <a:ea typeface="Trebuchet MS" pitchFamily="34" charset="-122"/>
+                <a:cs typeface="Trebuchet MS" pitchFamily="34" charset="-120"/>
+              </a:rPr>
+              <a:t>s</a:t>
+            </a:r>
+            <a:endParaRPr lang="en-US" sz="1300" dirty="0"/>
+          </a:p>
+        </p:txBody>
+      </p:sp>
+      <p:sp>
+        <p:nvSpPr>
+          <p:cNvPr id="24" name="Text 22"/>
+          <p:cNvSpPr/>
+          <p:nvPr/>
+        </p:nvSpPr>
+        <p:spPr>
+          <a:xfrm>
+            <a:off x="6519672" y="2569464"/>
+            <a:ext cx="1828800" cy="201168"/>
+          </a:xfrm>
+          <a:prstGeom prst="rect">
+            <a:avLst/>
+          </a:prstGeom>
+          <a:noFill/>
+          <a:ln/>
+        </p:spPr>
+        <p:txBody>
+          <a:bodyPr wrap="square" lIns="0" tIns="0" rIns="0" bIns="0" rtlCol="0" anchor="t"/>
+          <a:lstStyle/>
+          <a:p>
+            <a:pPr algn="ctr" indent="0" marL="0">
+              <a:buNone/>
+            </a:pPr>
+            <a:r>
+              <a:rPr lang="en-US" sz="850" dirty="0">
+                <a:solidFill>
+                  <a:srgbClr val="475569"/>
+                </a:solidFill>
+                <a:latin typeface="Calibri" pitchFamily="34" charset="0"/>
+                <a:ea typeface="Calibri" pitchFamily="34" charset="-122"/>
+                <a:cs typeface="Calibri" pitchFamily="34" charset="-120"/>
+              </a:rPr>
+              <a:t>plural or present tense</a:t>
+            </a:r>
+            <a:endParaRPr lang="en-US" sz="850" dirty="0"/>
+          </a:p>
+        </p:txBody>
+      </p:sp>
+      <p:sp>
+        <p:nvSpPr>
+          <p:cNvPr id="25" name="Shape 23"/>
           <p:cNvSpPr/>
           <p:nvPr/>
         </p:nvSpPr>
@@ -12344,7 +12456,7 @@
       </p:sp>
       <p:sp>
         <p:nvSpPr>
-          <p:cNvPr id="23" name="Text 21"/>
+          <p:cNvPr id="26" name="Text 24"/>
           <p:cNvSpPr/>
           <p:nvPr/>
         </p:nvSpPr>
@@ -12383,7 +12495,7 @@
       </p:sp>
       <p:sp>
         <p:nvSpPr>
-          <p:cNvPr id="24" name="Shape 22"/>
+          <p:cNvPr id="27" name="Shape 25"/>
           <p:cNvSpPr/>
           <p:nvPr/>
         </p:nvSpPr>
@@ -12410,7 +12522,7 @@
       </p:sp>
       <p:sp>
         <p:nvSpPr>
-          <p:cNvPr id="25" name="Text 23"/>
+          <p:cNvPr id="28" name="Text 26"/>
           <p:cNvSpPr/>
           <p:nvPr/>
         </p:nvSpPr>
@@ -12449,7 +12561,7 @@
       </p:sp>
       <p:sp>
         <p:nvSpPr>
-          <p:cNvPr id="26" name="Shape 24"/>
+          <p:cNvPr id="29" name="Shape 27"/>
           <p:cNvSpPr/>
           <p:nvPr/>
         </p:nvSpPr>
@@ -12476,7 +12588,7 @@
       </p:sp>
       <p:sp>
         <p:nvSpPr>
-          <p:cNvPr id="27" name="Text 25"/>
+          <p:cNvPr id="30" name="Text 28"/>
           <p:cNvSpPr/>
           <p:nvPr/>
         </p:nvSpPr>
@@ -12515,7 +12627,7 @@
       </p:sp>
       <p:sp>
         <p:nvSpPr>
-          <p:cNvPr id="28" name="Shape 26"/>
+          <p:cNvPr id="31" name="Shape 29"/>
           <p:cNvSpPr/>
           <p:nvPr/>
         </p:nvSpPr>
@@ -12542,7 +12654,7 @@
       </p:sp>
       <p:sp>
         <p:nvSpPr>
-          <p:cNvPr id="29" name="Text 27"/>
+          <p:cNvPr id="32" name="Text 30"/>
           <p:cNvSpPr/>
           <p:nvPr/>
         </p:nvSpPr>
@@ -12865,7 +12977,7 @@
                 <a:ea typeface="Calibri" pitchFamily="34" charset="-122"/>
                 <a:cs typeface="Calibri" pitchFamily="34" charset="-120"/>
               </a:rPr>
-              <a:t>Word Labs  •  wordlabs.app  •  Root: 'lock' = to fasten or secure shut</a:t>
+              <a:t>Word Labs  •  wordlabs.app  •  Root: 'lock' = to fasten with a key; a fastening device</a:t>
             </a:r>
             <a:endParaRPr lang="en-US" sz="800" dirty="0"/>
           </a:p>
@@ -13004,7 +13116,7 @@
                 <a:ea typeface="Trebuchet MS" pitchFamily="34" charset="-122"/>
                 <a:cs typeface="Trebuchet MS" pitchFamily="34" charset="-120"/>
               </a:rPr>
-              <a:t>padlock</a:t>
+              <a:t>lockers</a:t>
             </a:r>
             <a:endParaRPr lang="en-US" sz="2800" dirty="0"/>
           </a:p>
@@ -13084,7 +13196,7 @@
         </p:nvSpPr>
         <p:spPr>
           <a:xfrm>
-            <a:off x="2938272" y="2258568"/>
+            <a:off x="2221992" y="2258568"/>
             <a:ext cx="1828800" cy="292608"/>
           </a:xfrm>
           <a:prstGeom prst="rect">
@@ -13093,11 +13205,11 @@
             </a:avLst>
           </a:prstGeom>
           <a:solidFill>
-            <a:srgbClr val="DDD6FE"/>
+            <a:srgbClr val="CCFBF1"/>
           </a:solidFill>
           <a:ln w="19050">
             <a:solidFill>
-              <a:srgbClr val="7C3AED"/>
+              <a:srgbClr val="0D9488"/>
             </a:solidFill>
             <a:prstDash val="solid"/>
           </a:ln>
@@ -13118,7 +13230,7 @@
         </p:nvSpPr>
         <p:spPr>
           <a:xfrm>
-            <a:off x="2938272" y="2258568"/>
+            <a:off x="2221992" y="2258568"/>
             <a:ext cx="1828800" cy="292608"/>
           </a:xfrm>
           <a:prstGeom prst="rect">
@@ -13137,13 +13249,13 @@
             <a:r>
               <a:rPr lang="en-US" sz="1300" b="1" dirty="0">
                 <a:solidFill>
-                  <a:srgbClr val="4C1D95"/>
+                  <a:srgbClr val="0F766E"/>
                 </a:solidFill>
                 <a:latin typeface="Trebuchet MS" pitchFamily="34" charset="0"/>
                 <a:ea typeface="Trebuchet MS" pitchFamily="34" charset="-122"/>
                 <a:cs typeface="Trebuchet MS" pitchFamily="34" charset="-120"/>
               </a:rPr>
-              <a:t>pad</a:t>
+              <a:t>lock</a:t>
             </a:r>
             <a:endParaRPr lang="en-US" sz="1300" dirty="0"/>
           </a:p>
@@ -13157,7 +13269,7 @@
         </p:nvSpPr>
         <p:spPr>
           <a:xfrm>
-            <a:off x="2938272" y="2569464"/>
+            <a:off x="2221992" y="2569464"/>
             <a:ext cx="1828800" cy="201168"/>
           </a:xfrm>
           <a:prstGeom prst="rect">
@@ -13182,7 +13294,7 @@
                 <a:ea typeface="Calibri" pitchFamily="34" charset="-122"/>
                 <a:cs typeface="Calibri" pitchFamily="34" charset="-120"/>
               </a:rPr>
-              <a:t>flat portable panel</a:t>
+              <a:t>to fasten with a key; a fastening device</a:t>
             </a:r>
             <a:endParaRPr lang="en-US" sz="850" dirty="0"/>
           </a:p>
@@ -13196,7 +13308,7 @@
         </p:nvSpPr>
         <p:spPr>
           <a:xfrm>
-            <a:off x="5803392" y="2258568"/>
+            <a:off x="4370832" y="2258568"/>
             <a:ext cx="1828800" cy="292608"/>
           </a:xfrm>
           <a:prstGeom prst="rect">
@@ -13205,11 +13317,11 @@
             </a:avLst>
           </a:prstGeom>
           <a:solidFill>
-            <a:srgbClr val="CCFBF1"/>
+            <a:srgbClr val="FCE7F3"/>
           </a:solidFill>
           <a:ln w="19050">
             <a:solidFill>
-              <a:srgbClr val="0D9488"/>
+              <a:srgbClr val="DB2777"/>
             </a:solidFill>
             <a:prstDash val="solid"/>
           </a:ln>
@@ -13230,7 +13342,7 @@
         </p:nvSpPr>
         <p:spPr>
           <a:xfrm>
-            <a:off x="5803392" y="2258568"/>
+            <a:off x="4370832" y="2258568"/>
             <a:ext cx="1828800" cy="292608"/>
           </a:xfrm>
           <a:prstGeom prst="rect">
@@ -13249,13 +13361,13 @@
             <a:r>
               <a:rPr lang="en-US" sz="1300" b="1" dirty="0">
                 <a:solidFill>
-                  <a:srgbClr val="0F766E"/>
+                  <a:srgbClr val="9D174D"/>
                 </a:solidFill>
                 <a:latin typeface="Trebuchet MS" pitchFamily="34" charset="0"/>
                 <a:ea typeface="Trebuchet MS" pitchFamily="34" charset="-122"/>
                 <a:cs typeface="Trebuchet MS" pitchFamily="34" charset="-120"/>
               </a:rPr>
-              <a:t>lock</a:t>
+              <a:t>er</a:t>
             </a:r>
             <a:endParaRPr lang="en-US" sz="1300" dirty="0"/>
           </a:p>
@@ -13269,7 +13381,7 @@
         </p:nvSpPr>
         <p:spPr>
           <a:xfrm>
-            <a:off x="5803392" y="2569464"/>
+            <a:off x="4370832" y="2569464"/>
             <a:ext cx="1828800" cy="201168"/>
           </a:xfrm>
           <a:prstGeom prst="rect">
@@ -13294,7 +13406,7 @@
                 <a:ea typeface="Calibri" pitchFamily="34" charset="-122"/>
                 <a:cs typeface="Calibri" pitchFamily="34" charset="-120"/>
               </a:rPr>
-              <a:t>to fasten or secure shut</a:t>
+              <a:t>person who; more</a:t>
             </a:r>
             <a:endParaRPr lang="en-US" sz="850" dirty="0"/>
           </a:p>
@@ -13303,6 +13415,118 @@
       <p:sp>
         <p:nvSpPr>
           <p:cNvPr id="22" name="Shape 20"/>
+          <p:cNvSpPr/>
+          <p:nvPr/>
+        </p:nvSpPr>
+        <p:spPr>
+          <a:xfrm>
+            <a:off x="6519672" y="2258568"/>
+            <a:ext cx="1828800" cy="292608"/>
+          </a:xfrm>
+          <a:prstGeom prst="rect">
+            <a:avLst>
+              <a:gd name="adj" fmla="val 25000"/>
+            </a:avLst>
+          </a:prstGeom>
+          <a:solidFill>
+            <a:srgbClr val="FCE7F3"/>
+          </a:solidFill>
+          <a:ln w="19050">
+            <a:solidFill>
+              <a:srgbClr val="DB2777"/>
+            </a:solidFill>
+            <a:prstDash val="solid"/>
+          </a:ln>
+          <a:effectLst>
+            <a:outerShdw sx="100000" sy="100000" kx="0" ky="0" algn="bl" rotWithShape="0" blurRad="101600" dist="38100" dir="8100000">
+              <a:srgbClr val="000000">
+                <a:alpha val="12000"/>
+              </a:srgbClr>
+            </a:outerShdw>
+          </a:effectLst>
+        </p:spPr>
+      </p:sp>
+      <p:sp>
+        <p:nvSpPr>
+          <p:cNvPr id="23" name="Text 21"/>
+          <p:cNvSpPr/>
+          <p:nvPr/>
+        </p:nvSpPr>
+        <p:spPr>
+          <a:xfrm>
+            <a:off x="6519672" y="2258568"/>
+            <a:ext cx="1828800" cy="292608"/>
+          </a:xfrm>
+          <a:prstGeom prst="rect">
+            <a:avLst/>
+          </a:prstGeom>
+          <a:noFill/>
+          <a:ln/>
+        </p:spPr>
+        <p:txBody>
+          <a:bodyPr wrap="square" lIns="0" tIns="0" rIns="0" bIns="0" rtlCol="0" anchor="ctr"/>
+          <a:lstStyle/>
+          <a:p>
+            <a:pPr algn="ctr" indent="0" marL="0">
+              <a:buNone/>
+            </a:pPr>
+            <a:r>
+              <a:rPr lang="en-US" sz="1300" b="1" dirty="0">
+                <a:solidFill>
+                  <a:srgbClr val="9D174D"/>
+                </a:solidFill>
+                <a:latin typeface="Trebuchet MS" pitchFamily="34" charset="0"/>
+                <a:ea typeface="Trebuchet MS" pitchFamily="34" charset="-122"/>
+                <a:cs typeface="Trebuchet MS" pitchFamily="34" charset="-120"/>
+              </a:rPr>
+              <a:t>s</a:t>
+            </a:r>
+            <a:endParaRPr lang="en-US" sz="1300" dirty="0"/>
+          </a:p>
+        </p:txBody>
+      </p:sp>
+      <p:sp>
+        <p:nvSpPr>
+          <p:cNvPr id="24" name="Text 22"/>
+          <p:cNvSpPr/>
+          <p:nvPr/>
+        </p:nvSpPr>
+        <p:spPr>
+          <a:xfrm>
+            <a:off x="6519672" y="2569464"/>
+            <a:ext cx="1828800" cy="201168"/>
+          </a:xfrm>
+          <a:prstGeom prst="rect">
+            <a:avLst/>
+          </a:prstGeom>
+          <a:noFill/>
+          <a:ln/>
+        </p:spPr>
+        <p:txBody>
+          <a:bodyPr wrap="square" lIns="0" tIns="0" rIns="0" bIns="0" rtlCol="0" anchor="t"/>
+          <a:lstStyle/>
+          <a:p>
+            <a:pPr algn="ctr" indent="0" marL="0">
+              <a:buNone/>
+            </a:pPr>
+            <a:r>
+              <a:rPr lang="en-US" sz="850" dirty="0">
+                <a:solidFill>
+                  <a:srgbClr val="475569"/>
+                </a:solidFill>
+                <a:latin typeface="Calibri" pitchFamily="34" charset="0"/>
+                <a:ea typeface="Calibri" pitchFamily="34" charset="-122"/>
+                <a:cs typeface="Calibri" pitchFamily="34" charset="-120"/>
+              </a:rPr>
+              <a:t>plural or present tense</a:t>
+            </a:r>
+            <a:endParaRPr lang="en-US" sz="850" dirty="0"/>
+          </a:p>
+        </p:txBody>
+      </p:sp>
+      <p:sp>
+        <p:nvSpPr>
+          <p:cNvPr id="25" name="Shape 23"/>
           <p:cNvSpPr/>
           <p:nvPr/>
         </p:nvSpPr>
@@ -13329,7 +13553,7 @@
       </p:sp>
       <p:sp>
         <p:nvSpPr>
-          <p:cNvPr id="23" name="Text 21"/>
+          <p:cNvPr id="26" name="Text 24"/>
           <p:cNvSpPr/>
           <p:nvPr/>
         </p:nvSpPr>
@@ -13368,7 +13592,7 @@
       </p:sp>
       <p:sp>
         <p:nvSpPr>
-          <p:cNvPr id="24" name="Shape 22"/>
+          <p:cNvPr id="27" name="Shape 25"/>
           <p:cNvSpPr/>
           <p:nvPr/>
         </p:nvSpPr>
@@ -13395,7 +13619,7 @@
       </p:sp>
       <p:sp>
         <p:nvSpPr>
-          <p:cNvPr id="25" name="Shape 23"/>
+          <p:cNvPr id="28" name="Shape 26"/>
           <p:cNvSpPr/>
           <p:nvPr/>
         </p:nvSpPr>
@@ -13422,7 +13646,7 @@
       </p:sp>
       <p:sp>
         <p:nvSpPr>
-          <p:cNvPr id="26" name="Text 24"/>
+          <p:cNvPr id="29" name="Text 27"/>
           <p:cNvSpPr/>
           <p:nvPr/>
         </p:nvSpPr>
@@ -13453,7 +13677,7 @@
                 <a:ea typeface="Trebuchet MS" pitchFamily="34" charset="-122"/>
                 <a:cs typeface="Trebuchet MS" pitchFamily="34" charset="-120"/>
               </a:rPr>
-              <a:t>pad</a:t>
+              <a:t>lock</a:t>
             </a:r>
             <a:endParaRPr lang="en-US" sz="1400" dirty="0"/>
           </a:p>
@@ -13461,7 +13685,7 @@
       </p:sp>
       <p:sp>
         <p:nvSpPr>
-          <p:cNvPr id="27" name="Text 25"/>
+          <p:cNvPr id="30" name="Text 28"/>
           <p:cNvSpPr/>
           <p:nvPr/>
         </p:nvSpPr>
@@ -13500,7 +13724,7 @@
       </p:sp>
       <p:sp>
         <p:nvSpPr>
-          <p:cNvPr id="28" name="Shape 26"/>
+          <p:cNvPr id="31" name="Shape 29"/>
           <p:cNvSpPr/>
           <p:nvPr/>
         </p:nvSpPr>
@@ -13527,7 +13751,7 @@
       </p:sp>
       <p:sp>
         <p:nvSpPr>
-          <p:cNvPr id="29" name="Text 27"/>
+          <p:cNvPr id="32" name="Text 30"/>
           <p:cNvSpPr/>
           <p:nvPr/>
         </p:nvSpPr>
@@ -13558,7 +13782,7 @@
                 <a:ea typeface="Trebuchet MS" pitchFamily="34" charset="-122"/>
                 <a:cs typeface="Trebuchet MS" pitchFamily="34" charset="-120"/>
               </a:rPr>
-              <a:t>lock</a:t>
+              <a:t>ers</a:t>
             </a:r>
             <a:endParaRPr lang="en-US" sz="1400" dirty="0"/>
           </a:p>
@@ -13566,7 +13790,7 @@
       </p:sp>
       <p:sp>
         <p:nvSpPr>
-          <p:cNvPr id="30" name="Shape 28"/>
+          <p:cNvPr id="33" name="Shape 31"/>
           <p:cNvSpPr/>
           <p:nvPr/>
         </p:nvSpPr>
@@ -13593,7 +13817,7 @@
       </p:sp>
       <p:sp>
         <p:nvSpPr>
-          <p:cNvPr id="31" name="Text 29"/>
+          <p:cNvPr id="34" name="Text 32"/>
           <p:cNvSpPr/>
           <p:nvPr/>
         </p:nvSpPr>
@@ -13632,7 +13856,7 @@
       </p:sp>
       <p:sp>
         <p:nvSpPr>
-          <p:cNvPr id="32" name="Shape 30"/>
+          <p:cNvPr id="35" name="Shape 33"/>
           <p:cNvSpPr/>
           <p:nvPr/>
         </p:nvSpPr>
@@ -13659,7 +13883,7 @@
       </p:sp>
       <p:sp>
         <p:nvSpPr>
-          <p:cNvPr id="33" name="Text 31"/>
+          <p:cNvPr id="36" name="Text 34"/>
           <p:cNvSpPr/>
           <p:nvPr/>
         </p:nvSpPr>
@@ -13891,7 +14115,7 @@
                 <a:ea typeface="Calibri" pitchFamily="34" charset="-122"/>
                 <a:cs typeface="Calibri" pitchFamily="34" charset="-120"/>
               </a:rPr>
-              <a:t>Root 'lock' — to fasten or secure shut</a:t>
+              <a:t>Root 'lock' — to fasten with a key; a fastening device</a:t>
             </a:r>
             <a:endParaRPr lang="en-US" sz="1600" dirty="0"/>
           </a:p>
@@ -14247,7 +14471,7 @@
                 <a:ea typeface="Calibri" pitchFamily="34" charset="-122"/>
                 <a:cs typeface="Calibri" pitchFamily="34" charset="-120"/>
               </a:rPr>
-              <a:t>Word Labs  •  wordlabs.app  •  Root: 'lock' = to fasten or secure shut</a:t>
+              <a:t>Word Labs  •  wordlabs.app  •  Root: 'lock' = to fasten with a key; a fastening device</a:t>
             </a:r>
             <a:endParaRPr lang="en-US" sz="800" dirty="0"/>
           </a:p>
@@ -14386,7 +14610,7 @@
                 <a:ea typeface="Trebuchet MS" pitchFamily="34" charset="-122"/>
                 <a:cs typeface="Trebuchet MS" pitchFamily="34" charset="-120"/>
               </a:rPr>
-              <a:t>padlock</a:t>
+              <a:t>lockers</a:t>
             </a:r>
             <a:endParaRPr lang="en-US" sz="2800" dirty="0"/>
           </a:p>
@@ -14466,7 +14690,7 @@
         </p:nvSpPr>
         <p:spPr>
           <a:xfrm>
-            <a:off x="2938272" y="2258568"/>
+            <a:off x="2221992" y="2258568"/>
             <a:ext cx="1828800" cy="292608"/>
           </a:xfrm>
           <a:prstGeom prst="rect">
@@ -14475,11 +14699,11 @@
             </a:avLst>
           </a:prstGeom>
           <a:solidFill>
-            <a:srgbClr val="DDD6FE"/>
+            <a:srgbClr val="CCFBF1"/>
           </a:solidFill>
           <a:ln w="19050">
             <a:solidFill>
-              <a:srgbClr val="7C3AED"/>
+              <a:srgbClr val="0D9488"/>
             </a:solidFill>
             <a:prstDash val="solid"/>
           </a:ln>
@@ -14500,7 +14724,7 @@
         </p:nvSpPr>
         <p:spPr>
           <a:xfrm>
-            <a:off x="2938272" y="2258568"/>
+            <a:off x="2221992" y="2258568"/>
             <a:ext cx="1828800" cy="292608"/>
           </a:xfrm>
           <a:prstGeom prst="rect">
@@ -14519,13 +14743,13 @@
             <a:r>
               <a:rPr lang="en-US" sz="1300" b="1" dirty="0">
                 <a:solidFill>
-                  <a:srgbClr val="4C1D95"/>
+                  <a:srgbClr val="0F766E"/>
                 </a:solidFill>
                 <a:latin typeface="Trebuchet MS" pitchFamily="34" charset="0"/>
                 <a:ea typeface="Trebuchet MS" pitchFamily="34" charset="-122"/>
                 <a:cs typeface="Trebuchet MS" pitchFamily="34" charset="-120"/>
               </a:rPr>
-              <a:t>pad</a:t>
+              <a:t>lock</a:t>
             </a:r>
             <a:endParaRPr lang="en-US" sz="1300" dirty="0"/>
           </a:p>
@@ -14539,7 +14763,7 @@
         </p:nvSpPr>
         <p:spPr>
           <a:xfrm>
-            <a:off x="2938272" y="2569464"/>
+            <a:off x="2221992" y="2569464"/>
             <a:ext cx="1828800" cy="201168"/>
           </a:xfrm>
           <a:prstGeom prst="rect">
@@ -14564,7 +14788,7 @@
                 <a:ea typeface="Calibri" pitchFamily="34" charset="-122"/>
                 <a:cs typeface="Calibri" pitchFamily="34" charset="-120"/>
               </a:rPr>
-              <a:t>flat portable panel</a:t>
+              <a:t>to fasten with a key; a fastening device</a:t>
             </a:r>
             <a:endParaRPr lang="en-US" sz="850" dirty="0"/>
           </a:p>
@@ -14578,7 +14802,7 @@
         </p:nvSpPr>
         <p:spPr>
           <a:xfrm>
-            <a:off x="5803392" y="2258568"/>
+            <a:off x="4370832" y="2258568"/>
             <a:ext cx="1828800" cy="292608"/>
           </a:xfrm>
           <a:prstGeom prst="rect">
@@ -14587,11 +14811,11 @@
             </a:avLst>
           </a:prstGeom>
           <a:solidFill>
-            <a:srgbClr val="CCFBF1"/>
+            <a:srgbClr val="FCE7F3"/>
           </a:solidFill>
           <a:ln w="19050">
             <a:solidFill>
-              <a:srgbClr val="0D9488"/>
+              <a:srgbClr val="DB2777"/>
             </a:solidFill>
             <a:prstDash val="solid"/>
           </a:ln>
@@ -14612,7 +14836,7 @@
         </p:nvSpPr>
         <p:spPr>
           <a:xfrm>
-            <a:off x="5803392" y="2258568"/>
+            <a:off x="4370832" y="2258568"/>
             <a:ext cx="1828800" cy="292608"/>
           </a:xfrm>
           <a:prstGeom prst="rect">
@@ -14631,13 +14855,13 @@
             <a:r>
               <a:rPr lang="en-US" sz="1300" b="1" dirty="0">
                 <a:solidFill>
-                  <a:srgbClr val="0F766E"/>
+                  <a:srgbClr val="9D174D"/>
                 </a:solidFill>
                 <a:latin typeface="Trebuchet MS" pitchFamily="34" charset="0"/>
                 <a:ea typeface="Trebuchet MS" pitchFamily="34" charset="-122"/>
                 <a:cs typeface="Trebuchet MS" pitchFamily="34" charset="-120"/>
               </a:rPr>
-              <a:t>lock</a:t>
+              <a:t>er</a:t>
             </a:r>
             <a:endParaRPr lang="en-US" sz="1300" dirty="0"/>
           </a:p>
@@ -14651,7 +14875,7 @@
         </p:nvSpPr>
         <p:spPr>
           <a:xfrm>
-            <a:off x="5803392" y="2569464"/>
+            <a:off x="4370832" y="2569464"/>
             <a:ext cx="1828800" cy="201168"/>
           </a:xfrm>
           <a:prstGeom prst="rect">
@@ -14676,7 +14900,7 @@
                 <a:ea typeface="Calibri" pitchFamily="34" charset="-122"/>
                 <a:cs typeface="Calibri" pitchFamily="34" charset="-120"/>
               </a:rPr>
-              <a:t>to fasten or secure shut</a:t>
+              <a:t>person who; more</a:t>
             </a:r>
             <a:endParaRPr lang="en-US" sz="850" dirty="0"/>
           </a:p>
@@ -14685,6 +14909,118 @@
       <p:sp>
         <p:nvSpPr>
           <p:cNvPr id="22" name="Shape 20"/>
+          <p:cNvSpPr/>
+          <p:nvPr/>
+        </p:nvSpPr>
+        <p:spPr>
+          <a:xfrm>
+            <a:off x="6519672" y="2258568"/>
+            <a:ext cx="1828800" cy="292608"/>
+          </a:xfrm>
+          <a:prstGeom prst="rect">
+            <a:avLst>
+              <a:gd name="adj" fmla="val 25000"/>
+            </a:avLst>
+          </a:prstGeom>
+          <a:solidFill>
+            <a:srgbClr val="FCE7F3"/>
+          </a:solidFill>
+          <a:ln w="19050">
+            <a:solidFill>
+              <a:srgbClr val="DB2777"/>
+            </a:solidFill>
+            <a:prstDash val="solid"/>
+          </a:ln>
+          <a:effectLst>
+            <a:outerShdw sx="100000" sy="100000" kx="0" ky="0" algn="bl" rotWithShape="0" blurRad="101600" dist="38100" dir="8100000">
+              <a:srgbClr val="000000">
+                <a:alpha val="12000"/>
+              </a:srgbClr>
+            </a:outerShdw>
+          </a:effectLst>
+        </p:spPr>
+      </p:sp>
+      <p:sp>
+        <p:nvSpPr>
+          <p:cNvPr id="23" name="Text 21"/>
+          <p:cNvSpPr/>
+          <p:nvPr/>
+        </p:nvSpPr>
+        <p:spPr>
+          <a:xfrm>
+            <a:off x="6519672" y="2258568"/>
+            <a:ext cx="1828800" cy="292608"/>
+          </a:xfrm>
+          <a:prstGeom prst="rect">
+            <a:avLst/>
+          </a:prstGeom>
+          <a:noFill/>
+          <a:ln/>
+        </p:spPr>
+        <p:txBody>
+          <a:bodyPr wrap="square" lIns="0" tIns="0" rIns="0" bIns="0" rtlCol="0" anchor="ctr"/>
+          <a:lstStyle/>
+          <a:p>
+            <a:pPr algn="ctr" indent="0" marL="0">
+              <a:buNone/>
+            </a:pPr>
+            <a:r>
+              <a:rPr lang="en-US" sz="1300" b="1" dirty="0">
+                <a:solidFill>
+                  <a:srgbClr val="9D174D"/>
+                </a:solidFill>
+                <a:latin typeface="Trebuchet MS" pitchFamily="34" charset="0"/>
+                <a:ea typeface="Trebuchet MS" pitchFamily="34" charset="-122"/>
+                <a:cs typeface="Trebuchet MS" pitchFamily="34" charset="-120"/>
+              </a:rPr>
+              <a:t>s</a:t>
+            </a:r>
+            <a:endParaRPr lang="en-US" sz="1300" dirty="0"/>
+          </a:p>
+        </p:txBody>
+      </p:sp>
+      <p:sp>
+        <p:nvSpPr>
+          <p:cNvPr id="24" name="Text 22"/>
+          <p:cNvSpPr/>
+          <p:nvPr/>
+        </p:nvSpPr>
+        <p:spPr>
+          <a:xfrm>
+            <a:off x="6519672" y="2569464"/>
+            <a:ext cx="1828800" cy="201168"/>
+          </a:xfrm>
+          <a:prstGeom prst="rect">
+            <a:avLst/>
+          </a:prstGeom>
+          <a:noFill/>
+          <a:ln/>
+        </p:spPr>
+        <p:txBody>
+          <a:bodyPr wrap="square" lIns="0" tIns="0" rIns="0" bIns="0" rtlCol="0" anchor="t"/>
+          <a:lstStyle/>
+          <a:p>
+            <a:pPr algn="ctr" indent="0" marL="0">
+              <a:buNone/>
+            </a:pPr>
+            <a:r>
+              <a:rPr lang="en-US" sz="850" dirty="0">
+                <a:solidFill>
+                  <a:srgbClr val="475569"/>
+                </a:solidFill>
+                <a:latin typeface="Calibri" pitchFamily="34" charset="0"/>
+                <a:ea typeface="Calibri" pitchFamily="34" charset="-122"/>
+                <a:cs typeface="Calibri" pitchFamily="34" charset="-120"/>
+              </a:rPr>
+              <a:t>plural or present tense</a:t>
+            </a:r>
+            <a:endParaRPr lang="en-US" sz="850" dirty="0"/>
+          </a:p>
+        </p:txBody>
+      </p:sp>
+      <p:sp>
+        <p:nvSpPr>
+          <p:cNvPr id="25" name="Shape 23"/>
           <p:cNvSpPr/>
           <p:nvPr/>
         </p:nvSpPr>
@@ -14711,7 +15047,7 @@
       </p:sp>
       <p:sp>
         <p:nvSpPr>
-          <p:cNvPr id="23" name="Text 21"/>
+          <p:cNvPr id="26" name="Text 24"/>
           <p:cNvSpPr/>
           <p:nvPr/>
         </p:nvSpPr>
@@ -14750,7 +15086,7 @@
       </p:sp>
       <p:sp>
         <p:nvSpPr>
-          <p:cNvPr id="24" name="Shape 22"/>
+          <p:cNvPr id="27" name="Shape 25"/>
           <p:cNvSpPr/>
           <p:nvPr/>
         </p:nvSpPr>
@@ -14777,7 +15113,7 @@
       </p:sp>
       <p:sp>
         <p:nvSpPr>
-          <p:cNvPr id="25" name="Shape 23"/>
+          <p:cNvPr id="28" name="Shape 26"/>
           <p:cNvSpPr/>
           <p:nvPr/>
         </p:nvSpPr>
@@ -14804,7 +15140,7 @@
       </p:sp>
       <p:sp>
         <p:nvSpPr>
-          <p:cNvPr id="26" name="Text 24"/>
+          <p:cNvPr id="29" name="Text 27"/>
           <p:cNvSpPr/>
           <p:nvPr/>
         </p:nvSpPr>
@@ -14835,7 +15171,7 @@
                 <a:ea typeface="Trebuchet MS" pitchFamily="34" charset="-122"/>
                 <a:cs typeface="Trebuchet MS" pitchFamily="34" charset="-120"/>
               </a:rPr>
-              <a:t>pad</a:t>
+              <a:t>lock</a:t>
             </a:r>
             <a:endParaRPr lang="en-US" sz="1400" dirty="0"/>
           </a:p>
@@ -14843,7 +15179,7 @@
       </p:sp>
       <p:sp>
         <p:nvSpPr>
-          <p:cNvPr id="27" name="Text 25"/>
+          <p:cNvPr id="30" name="Text 28"/>
           <p:cNvSpPr/>
           <p:nvPr/>
         </p:nvSpPr>
@@ -14882,7 +15218,7 @@
       </p:sp>
       <p:sp>
         <p:nvSpPr>
-          <p:cNvPr id="28" name="Shape 26"/>
+          <p:cNvPr id="31" name="Shape 29"/>
           <p:cNvSpPr/>
           <p:nvPr/>
         </p:nvSpPr>
@@ -14909,7 +15245,7 @@
       </p:sp>
       <p:sp>
         <p:nvSpPr>
-          <p:cNvPr id="29" name="Text 27"/>
+          <p:cNvPr id="32" name="Text 30"/>
           <p:cNvSpPr/>
           <p:nvPr/>
         </p:nvSpPr>
@@ -14940,7 +15276,7 @@
                 <a:ea typeface="Trebuchet MS" pitchFamily="34" charset="-122"/>
                 <a:cs typeface="Trebuchet MS" pitchFamily="34" charset="-120"/>
               </a:rPr>
-              <a:t>lock</a:t>
+              <a:t>ers</a:t>
             </a:r>
             <a:endParaRPr lang="en-US" sz="1400" dirty="0"/>
           </a:p>
@@ -14948,7 +15284,7 @@
       </p:sp>
       <p:sp>
         <p:nvSpPr>
-          <p:cNvPr id="30" name="Shape 28"/>
+          <p:cNvPr id="33" name="Shape 31"/>
           <p:cNvSpPr/>
           <p:nvPr/>
         </p:nvSpPr>
@@ -14975,7 +15311,7 @@
       </p:sp>
       <p:sp>
         <p:nvSpPr>
-          <p:cNvPr id="31" name="Text 29"/>
+          <p:cNvPr id="34" name="Text 32"/>
           <p:cNvSpPr/>
           <p:nvPr/>
         </p:nvSpPr>
@@ -15014,7 +15350,7 @@
       </p:sp>
       <p:sp>
         <p:nvSpPr>
-          <p:cNvPr id="32" name="Shape 30"/>
+          <p:cNvPr id="35" name="Shape 33"/>
           <p:cNvSpPr/>
           <p:nvPr/>
         </p:nvSpPr>
@@ -15041,13 +15377,13 @@
       </p:sp>
       <p:sp>
         <p:nvSpPr>
-          <p:cNvPr id="33" name="Shape 31"/>
-          <p:cNvSpPr/>
-          <p:nvPr/>
-        </p:nvSpPr>
-        <p:spPr>
-          <a:xfrm>
-            <a:off x="2254649" y="4169664"/>
+          <p:cNvPr id="36" name="Shape 34"/>
+          <p:cNvSpPr/>
+          <p:nvPr/>
+        </p:nvSpPr>
+        <p:spPr>
+          <a:xfrm>
+            <a:off x="2427732" y="4169664"/>
             <a:ext cx="685800" cy="475488"/>
           </a:xfrm>
           <a:prstGeom prst="rect">
@@ -15068,13 +15404,13 @@
       </p:sp>
       <p:sp>
         <p:nvSpPr>
-          <p:cNvPr id="34" name="Text 32"/>
-          <p:cNvSpPr/>
-          <p:nvPr/>
-        </p:nvSpPr>
-        <p:spPr>
-          <a:xfrm>
-            <a:off x="2254649" y="4169664"/>
+          <p:cNvPr id="37" name="Text 35"/>
+          <p:cNvSpPr/>
+          <p:nvPr/>
+        </p:nvSpPr>
+        <p:spPr>
+          <a:xfrm>
+            <a:off x="2427732" y="4169664"/>
             <a:ext cx="685800" cy="475488"/>
           </a:xfrm>
           <a:prstGeom prst="rect">
@@ -15099,7 +15435,7 @@
                 <a:ea typeface="Trebuchet MS" pitchFamily="34" charset="-122"/>
                 <a:cs typeface="Trebuchet MS" pitchFamily="34" charset="-120"/>
               </a:rPr>
-              <a:t>p</a:t>
+              <a:t>l</a:t>
             </a:r>
             <a:endParaRPr lang="en-US" sz="900" dirty="0"/>
           </a:p>
@@ -15107,13 +15443,13 @@
       </p:sp>
       <p:sp>
         <p:nvSpPr>
-          <p:cNvPr id="35" name="Shape 33"/>
-          <p:cNvSpPr/>
-          <p:nvPr/>
-        </p:nvSpPr>
-        <p:spPr>
-          <a:xfrm>
-            <a:off x="3293146" y="4169664"/>
+          <p:cNvPr id="38" name="Shape 36"/>
+          <p:cNvSpPr/>
+          <p:nvPr/>
+        </p:nvSpPr>
+        <p:spPr>
+          <a:xfrm>
+            <a:off x="3639312" y="4169664"/>
             <a:ext cx="685800" cy="475488"/>
           </a:xfrm>
           <a:prstGeom prst="rect">
@@ -15134,13 +15470,13 @@
       </p:sp>
       <p:sp>
         <p:nvSpPr>
-          <p:cNvPr id="36" name="Text 34"/>
-          <p:cNvSpPr/>
-          <p:nvPr/>
-        </p:nvSpPr>
-        <p:spPr>
-          <a:xfrm>
-            <a:off x="3293146" y="4169664"/>
+          <p:cNvPr id="39" name="Text 37"/>
+          <p:cNvSpPr/>
+          <p:nvPr/>
+        </p:nvSpPr>
+        <p:spPr>
+          <a:xfrm>
+            <a:off x="3639312" y="4169664"/>
             <a:ext cx="685800" cy="475488"/>
           </a:xfrm>
           <a:prstGeom prst="rect">
@@ -15165,7 +15501,7 @@
                 <a:ea typeface="Trebuchet MS" pitchFamily="34" charset="-122"/>
                 <a:cs typeface="Trebuchet MS" pitchFamily="34" charset="-120"/>
               </a:rPr>
-              <a:t>a</a:t>
+              <a:t>o</a:t>
             </a:r>
             <a:endParaRPr lang="en-US" sz="900" dirty="0"/>
           </a:p>
@@ -15173,13 +15509,13 @@
       </p:sp>
       <p:sp>
         <p:nvSpPr>
-          <p:cNvPr id="37" name="Shape 35"/>
-          <p:cNvSpPr/>
-          <p:nvPr/>
-        </p:nvSpPr>
-        <p:spPr>
-          <a:xfrm>
-            <a:off x="4331643" y="4169664"/>
+          <p:cNvPr id="40" name="Shape 38"/>
+          <p:cNvSpPr/>
+          <p:nvPr/>
+        </p:nvSpPr>
+        <p:spPr>
+          <a:xfrm>
+            <a:off x="4850892" y="4169664"/>
             <a:ext cx="685800" cy="475488"/>
           </a:xfrm>
           <a:prstGeom prst="rect">
@@ -15200,13 +15536,13 @@
       </p:sp>
       <p:sp>
         <p:nvSpPr>
-          <p:cNvPr id="38" name="Text 36"/>
-          <p:cNvSpPr/>
-          <p:nvPr/>
-        </p:nvSpPr>
-        <p:spPr>
-          <a:xfrm>
-            <a:off x="4331643" y="4169664"/>
+          <p:cNvPr id="41" name="Text 39"/>
+          <p:cNvSpPr/>
+          <p:nvPr/>
+        </p:nvSpPr>
+        <p:spPr>
+          <a:xfrm>
+            <a:off x="4850892" y="4169664"/>
             <a:ext cx="685800" cy="475488"/>
           </a:xfrm>
           <a:prstGeom prst="rect">
@@ -15231,7 +15567,7 @@
                 <a:ea typeface="Trebuchet MS" pitchFamily="34" charset="-122"/>
                 <a:cs typeface="Trebuchet MS" pitchFamily="34" charset="-120"/>
               </a:rPr>
-              <a:t>d</a:t>
+              <a:t>ck</a:t>
             </a:r>
             <a:endParaRPr lang="en-US" sz="900" dirty="0"/>
           </a:p>
@@ -15239,13 +15575,13 @@
       </p:sp>
       <p:sp>
         <p:nvSpPr>
-          <p:cNvPr id="39" name="Shape 37"/>
-          <p:cNvSpPr/>
-          <p:nvPr/>
-        </p:nvSpPr>
-        <p:spPr>
-          <a:xfrm>
-            <a:off x="5370141" y="4169664"/>
+          <p:cNvPr id="42" name="Shape 40"/>
+          <p:cNvSpPr/>
+          <p:nvPr/>
+        </p:nvSpPr>
+        <p:spPr>
+          <a:xfrm>
+            <a:off x="6062472" y="4169664"/>
             <a:ext cx="685800" cy="475488"/>
           </a:xfrm>
           <a:prstGeom prst="rect">
@@ -15266,13 +15602,13 @@
       </p:sp>
       <p:sp>
         <p:nvSpPr>
-          <p:cNvPr id="40" name="Text 38"/>
-          <p:cNvSpPr/>
-          <p:nvPr/>
-        </p:nvSpPr>
-        <p:spPr>
-          <a:xfrm>
-            <a:off x="5370141" y="4169664"/>
+          <p:cNvPr id="43" name="Text 41"/>
+          <p:cNvSpPr/>
+          <p:nvPr/>
+        </p:nvSpPr>
+        <p:spPr>
+          <a:xfrm>
+            <a:off x="6062472" y="4169664"/>
             <a:ext cx="685800" cy="475488"/>
           </a:xfrm>
           <a:prstGeom prst="rect">
@@ -15297,7 +15633,7 @@
                 <a:ea typeface="Trebuchet MS" pitchFamily="34" charset="-122"/>
                 <a:cs typeface="Trebuchet MS" pitchFamily="34" charset="-120"/>
               </a:rPr>
-              <a:t>l</a:t>
+              <a:t>er</a:t>
             </a:r>
             <a:endParaRPr lang="en-US" sz="900" dirty="0"/>
           </a:p>
@@ -15305,13 +15641,13 @@
       </p:sp>
       <p:sp>
         <p:nvSpPr>
-          <p:cNvPr id="41" name="Shape 39"/>
-          <p:cNvSpPr/>
-          <p:nvPr/>
-        </p:nvSpPr>
-        <p:spPr>
-          <a:xfrm>
-            <a:off x="6408638" y="4169664"/>
+          <p:cNvPr id="44" name="Shape 42"/>
+          <p:cNvSpPr/>
+          <p:nvPr/>
+        </p:nvSpPr>
+        <p:spPr>
+          <a:xfrm>
+            <a:off x="7274052" y="4169664"/>
             <a:ext cx="685800" cy="475488"/>
           </a:xfrm>
           <a:prstGeom prst="rect">
@@ -15332,13 +15668,13 @@
       </p:sp>
       <p:sp>
         <p:nvSpPr>
-          <p:cNvPr id="42" name="Text 40"/>
-          <p:cNvSpPr/>
-          <p:nvPr/>
-        </p:nvSpPr>
-        <p:spPr>
-          <a:xfrm>
-            <a:off x="6408638" y="4169664"/>
+          <p:cNvPr id="45" name="Text 43"/>
+          <p:cNvSpPr/>
+          <p:nvPr/>
+        </p:nvSpPr>
+        <p:spPr>
+          <a:xfrm>
+            <a:off x="7274052" y="4169664"/>
             <a:ext cx="685800" cy="475488"/>
           </a:xfrm>
           <a:prstGeom prst="rect">
@@ -15363,73 +15699,7 @@
                 <a:ea typeface="Trebuchet MS" pitchFamily="34" charset="-122"/>
                 <a:cs typeface="Trebuchet MS" pitchFamily="34" charset="-120"/>
               </a:rPr>
-              <a:t>o</a:t>
-            </a:r>
-            <a:endParaRPr lang="en-US" sz="900" dirty="0"/>
-          </a:p>
-        </p:txBody>
-      </p:sp>
-      <p:sp>
-        <p:nvSpPr>
-          <p:cNvPr id="43" name="Shape 41"/>
-          <p:cNvSpPr/>
-          <p:nvPr/>
-        </p:nvSpPr>
-        <p:spPr>
-          <a:xfrm>
-            <a:off x="7447135" y="4169664"/>
-            <a:ext cx="685800" cy="475488"/>
-          </a:xfrm>
-          <a:prstGeom prst="rect">
-            <a:avLst>
-              <a:gd name="adj" fmla="val 7692"/>
-            </a:avLst>
-          </a:prstGeom>
-          <a:solidFill>
-            <a:srgbClr val="FFFFFF"/>
-          </a:solidFill>
-          <a:ln w="12700">
-            <a:solidFill>
-              <a:srgbClr val="DB2777"/>
-            </a:solidFill>
-            <a:prstDash val="solid"/>
-          </a:ln>
-        </p:spPr>
-      </p:sp>
-      <p:sp>
-        <p:nvSpPr>
-          <p:cNvPr id="44" name="Text 42"/>
-          <p:cNvSpPr/>
-          <p:nvPr/>
-        </p:nvSpPr>
-        <p:spPr>
-          <a:xfrm>
-            <a:off x="7447135" y="4169664"/>
-            <a:ext cx="685800" cy="475488"/>
-          </a:xfrm>
-          <a:prstGeom prst="rect">
-            <a:avLst/>
-          </a:prstGeom>
-          <a:noFill/>
-          <a:ln/>
-        </p:spPr>
-        <p:txBody>
-          <a:bodyPr wrap="square" lIns="0" tIns="0" rIns="0" bIns="0" rtlCol="0" anchor="ctr"/>
-          <a:lstStyle/>
-          <a:p>
-            <a:pPr algn="ctr" indent="0" marL="0">
-              <a:buNone/>
-            </a:pPr>
-            <a:r>
-              <a:rPr lang="en-US" sz="900" b="1" dirty="0">
-                <a:solidFill>
-                  <a:srgbClr val="9D174D"/>
-                </a:solidFill>
-                <a:latin typeface="Trebuchet MS" pitchFamily="34" charset="0"/>
-                <a:ea typeface="Trebuchet MS" pitchFamily="34" charset="-122"/>
-                <a:cs typeface="Trebuchet MS" pitchFamily="34" charset="-120"/>
-              </a:rPr>
-              <a:t>ck</a:t>
+              <a:t>s</a:t>
             </a:r>
             <a:endParaRPr lang="en-US" sz="900" dirty="0"/>
           </a:p>
@@ -16003,7 +16273,7 @@
                 <a:ea typeface="Calibri" pitchFamily="34" charset="-122"/>
                 <a:cs typeface="Calibri" pitchFamily="34" charset="-120"/>
               </a:rPr>
-              <a:t>Word Labs  •  wordlabs.app  •  Root: 'lock' = to fasten or secure shut</a:t>
+              <a:t>Word Labs  •  wordlabs.app  •  Root: 'lock' = to fasten with a key; a fastening device</a:t>
             </a:r>
             <a:endParaRPr lang="en-US" sz="800" dirty="0"/>
           </a:p>
@@ -16337,7 +16607,7 @@
                 <a:ea typeface="Trebuchet MS" pitchFamily="34" charset="-122"/>
                 <a:cs typeface="Trebuchet MS" pitchFamily="34" charset="-120"/>
               </a:rPr>
-              <a:t>2</a:t>
+              <a:t>0</a:t>
             </a:r>
             <a:pPr algn="ctr" indent="0" marL="0">
               <a:buNone/>
@@ -16351,7 +16621,7 @@
                 <a:ea typeface="Trebuchet MS" pitchFamily="34" charset="-122"/>
                 <a:cs typeface="Trebuchet MS" pitchFamily="34" charset="-120"/>
               </a:rPr>
-              <a:t>  punctuation marks</a:t>
+              <a:t>  punctuation mark</a:t>
             </a:r>
             <a:endParaRPr lang="en-US" sz="2800" dirty="0"/>
           </a:p>
@@ -16643,7 +16913,7 @@
                 <a:ea typeface="Calibri" pitchFamily="34" charset="-122"/>
                 <a:cs typeface="Calibri" pitchFamily="34" charset="-120"/>
               </a:rPr>
-              <a:t>Word Labs  •  wordlabs.app  •  Root: 'lock' = to fasten or secure shut</a:t>
+              <a:t>Word Labs  •  wordlabs.app  •  Root: 'lock' = to fasten with a key; a fastening device</a:t>
             </a:r>
             <a:endParaRPr lang="en-US" sz="800" dirty="0"/>
           </a:p>
@@ -16755,7 +17025,7 @@
                 <a:ea typeface="Calibri" pitchFamily="34" charset="-122"/>
                 <a:cs typeface="Calibri" pitchFamily="34" charset="-120"/>
               </a:rPr>
-              <a:t>The </a:t>
+              <a:t>She checked she was </a:t>
             </a:r>
             <a:pPr algn="l" indent="0" marL="0">
               <a:buNone/>
@@ -16772,7 +17042,7 @@
                 <a:ea typeface="Calibri" pitchFamily="34" charset="-122"/>
                 <a:cs typeface="Calibri" pitchFamily="34" charset="-120"/>
               </a:rPr>
-              <a:t>gridlock</a:t>
+              <a:t>locking</a:t>
             </a:r>
             <a:pPr algn="l" indent="0" marL="0">
               <a:buNone/>
@@ -16786,7 +17056,7 @@
                 <a:ea typeface="Calibri" pitchFamily="34" charset="-122"/>
                 <a:cs typeface="Calibri" pitchFamily="34" charset="-120"/>
               </a:rPr>
-              <a:t> on the highway made us late, so Dad put the </a:t>
+              <a:t> the front door properly. He </a:t>
             </a:r>
             <a:pPr algn="l" indent="0" marL="0">
               <a:buNone/>
@@ -16803,7 +17073,7 @@
                 <a:ea typeface="Calibri" pitchFamily="34" charset="-122"/>
                 <a:cs typeface="Calibri" pitchFamily="34" charset="-120"/>
               </a:rPr>
-              <a:t>deadlock</a:t>
+              <a:t>unlocked</a:t>
             </a:r>
             <a:pPr algn="l" indent="0" marL="0">
               <a:buNone/>
@@ -16817,7 +17087,7 @@
                 <a:ea typeface="Calibri" pitchFamily="34" charset="-122"/>
                 <a:cs typeface="Calibri" pitchFamily="34" charset="-120"/>
               </a:rPr>
-              <a:t> on, and we were completely </a:t>
+              <a:t> the gate and let the dog into the garden. </a:t>
             </a:r>
             <a:pPr algn="l" indent="0" marL="0">
               <a:buNone/>
@@ -16834,7 +17104,7 @@
                 <a:ea typeface="Calibri" pitchFamily="34" charset="-122"/>
                 <a:cs typeface="Calibri" pitchFamily="34" charset="-120"/>
               </a:rPr>
-              <a:t>locked</a:t>
+              <a:t>Unlocking</a:t>
             </a:r>
             <a:pPr algn="l" indent="0" marL="0">
               <a:buNone/>
@@ -16848,7 +17118,7 @@
                 <a:ea typeface="Calibri" pitchFamily="34" charset="-122"/>
                 <a:cs typeface="Calibri" pitchFamily="34" charset="-120"/>
               </a:rPr>
-              <a:t> out of getting home quickly.</a:t>
+              <a:t> the old chest revealed a pile of dusty letters.</a:t>
             </a:r>
             <a:endParaRPr lang="en-US" sz="1800" dirty="0"/>
           </a:p>
@@ -17003,7 +17273,7 @@
                 <a:ea typeface="Trebuchet MS" pitchFamily="34" charset="-122"/>
                 <a:cs typeface="Trebuchet MS" pitchFamily="34" charset="-120"/>
               </a:rPr>
-              <a:t>gridlock</a:t>
+              <a:t>locking</a:t>
             </a:r>
             <a:endParaRPr lang="en-US" sz="1400" dirty="0"/>
           </a:p>
@@ -17131,7 +17401,7 @@
                 <a:ea typeface="Trebuchet MS" pitchFamily="34" charset="-122"/>
                 <a:cs typeface="Trebuchet MS" pitchFamily="34" charset="-120"/>
               </a:rPr>
-              <a:t>deadlock</a:t>
+              <a:t>unlocked</a:t>
             </a:r>
             <a:endParaRPr lang="en-US" sz="1400" dirty="0"/>
           </a:p>
@@ -17259,7 +17529,7 @@
                 <a:ea typeface="Trebuchet MS" pitchFamily="34" charset="-122"/>
                 <a:cs typeface="Trebuchet MS" pitchFamily="34" charset="-120"/>
               </a:rPr>
-              <a:t>locked</a:t>
+              <a:t>unlocking</a:t>
             </a:r>
             <a:endParaRPr lang="en-US" sz="1400" dirty="0"/>
           </a:p>
@@ -17590,7 +17860,7 @@
                 <a:ea typeface="Calibri" pitchFamily="34" charset="-122"/>
                 <a:cs typeface="Calibri" pitchFamily="34" charset="-120"/>
               </a:rPr>
-              <a:t>Word Labs  •  wordlabs.app  •  Root: 'lock' = to fasten or secure shut</a:t>
+              <a:t>Word Labs  •  wordlabs.app  •  Root: 'lock' = to fasten with a key; a fastening device</a:t>
             </a:r>
             <a:endParaRPr lang="en-US" sz="800" dirty="0"/>
           </a:p>
@@ -17729,7 +17999,7 @@
                 <a:ea typeface="Trebuchet MS" pitchFamily="34" charset="-122"/>
                 <a:cs typeface="Trebuchet MS" pitchFamily="34" charset="-120"/>
               </a:rPr>
-              <a:t>gridlock</a:t>
+              <a:t>locking</a:t>
             </a:r>
             <a:endParaRPr lang="en-US" sz="2800" dirty="0"/>
           </a:p>
@@ -18417,7 +18687,7 @@
                 <a:ea typeface="Calibri" pitchFamily="34" charset="-122"/>
                 <a:cs typeface="Calibri" pitchFamily="34" charset="-120"/>
               </a:rPr>
-              <a:t>Word Labs  •  wordlabs.app  •  Root: 'lock' = to fasten or secure shut</a:t>
+              <a:t>Word Labs  •  wordlabs.app  •  Root: 'lock' = to fasten with a key; a fastening device</a:t>
             </a:r>
             <a:endParaRPr lang="en-US" sz="800" dirty="0"/>
           </a:p>
@@ -18556,7 +18826,7 @@
                 <a:ea typeface="Trebuchet MS" pitchFamily="34" charset="-122"/>
                 <a:cs typeface="Trebuchet MS" pitchFamily="34" charset="-120"/>
               </a:rPr>
-              <a:t>gridlock</a:t>
+              <a:t>locking</a:t>
             </a:r>
             <a:endParaRPr lang="en-US" sz="2800" dirty="0"/>
           </a:p>
@@ -18645,11 +18915,11 @@
             </a:avLst>
           </a:prstGeom>
           <a:solidFill>
-            <a:srgbClr val="DDD6FE"/>
+            <a:srgbClr val="CCFBF1"/>
           </a:solidFill>
           <a:ln w="19050">
             <a:solidFill>
-              <a:srgbClr val="7C3AED"/>
+              <a:srgbClr val="0D9488"/>
             </a:solidFill>
             <a:prstDash val="solid"/>
           </a:ln>
@@ -18689,13 +18959,13 @@
             <a:r>
               <a:rPr lang="en-US" sz="1300" b="1" dirty="0">
                 <a:solidFill>
-                  <a:srgbClr val="4C1D95"/>
+                  <a:srgbClr val="0F766E"/>
                 </a:solidFill>
                 <a:latin typeface="Trebuchet MS" pitchFamily="34" charset="0"/>
                 <a:ea typeface="Trebuchet MS" pitchFamily="34" charset="-122"/>
                 <a:cs typeface="Trebuchet MS" pitchFamily="34" charset="-120"/>
               </a:rPr>
-              <a:t>grid</a:t>
+              <a:t>lock</a:t>
             </a:r>
             <a:endParaRPr lang="en-US" sz="1300" dirty="0"/>
           </a:p>
@@ -18734,7 +19004,7 @@
                 <a:ea typeface="Calibri" pitchFamily="34" charset="-122"/>
                 <a:cs typeface="Calibri" pitchFamily="34" charset="-120"/>
               </a:rPr>
-              <a:t>a pattern of crossing lines</a:t>
+              <a:t>to fasten with a key; a fastening device</a:t>
             </a:r>
             <a:endParaRPr lang="en-US" sz="850" dirty="0"/>
           </a:p>
@@ -18757,11 +19027,11 @@
             </a:avLst>
           </a:prstGeom>
           <a:solidFill>
-            <a:srgbClr val="CCFBF1"/>
+            <a:srgbClr val="FCE7F3"/>
           </a:solidFill>
           <a:ln w="19050">
             <a:solidFill>
-              <a:srgbClr val="0D9488"/>
+              <a:srgbClr val="DB2777"/>
             </a:solidFill>
             <a:prstDash val="solid"/>
           </a:ln>
@@ -18801,13 +19071,13 @@
             <a:r>
               <a:rPr lang="en-US" sz="1300" b="1" dirty="0">
                 <a:solidFill>
-                  <a:srgbClr val="0F766E"/>
+                  <a:srgbClr val="9D174D"/>
                 </a:solidFill>
                 <a:latin typeface="Trebuchet MS" pitchFamily="34" charset="0"/>
                 <a:ea typeface="Trebuchet MS" pitchFamily="34" charset="-122"/>
                 <a:cs typeface="Trebuchet MS" pitchFamily="34" charset="-120"/>
               </a:rPr>
-              <a:t>lock</a:t>
+              <a:t>ing</a:t>
             </a:r>
             <a:endParaRPr lang="en-US" sz="1300" dirty="0"/>
           </a:p>
@@ -18846,7 +19116,7 @@
                 <a:ea typeface="Calibri" pitchFamily="34" charset="-122"/>
                 <a:cs typeface="Calibri" pitchFamily="34" charset="-120"/>
               </a:rPr>
-              <a:t>to fasten or secure shut</a:t>
+              <a:t>happening now</a:t>
             </a:r>
             <a:endParaRPr lang="en-US" sz="850" dirty="0"/>
           </a:p>
@@ -19402,7 +19672,7 @@
                 <a:ea typeface="Calibri" pitchFamily="34" charset="-122"/>
                 <a:cs typeface="Calibri" pitchFamily="34" charset="-120"/>
               </a:rPr>
-              <a:t>Word Labs  •  wordlabs.app  •  Root: 'lock' = to fasten or secure shut</a:t>
+              <a:t>Word Labs  •  wordlabs.app  •  Root: 'lock' = to fasten with a key; a fastening device</a:t>
             </a:r>
             <a:endParaRPr lang="en-US" sz="800" dirty="0"/>
           </a:p>
@@ -19541,7 +19811,7 @@
                 <a:ea typeface="Trebuchet MS" pitchFamily="34" charset="-122"/>
                 <a:cs typeface="Trebuchet MS" pitchFamily="34" charset="-120"/>
               </a:rPr>
-              <a:t>gridlock</a:t>
+              <a:t>locking</a:t>
             </a:r>
             <a:endParaRPr lang="en-US" sz="2800" dirty="0"/>
           </a:p>
@@ -19630,11 +19900,11 @@
             </a:avLst>
           </a:prstGeom>
           <a:solidFill>
-            <a:srgbClr val="DDD6FE"/>
+            <a:srgbClr val="CCFBF1"/>
           </a:solidFill>
           <a:ln w="19050">
             <a:solidFill>
-              <a:srgbClr val="7C3AED"/>
+              <a:srgbClr val="0D9488"/>
             </a:solidFill>
             <a:prstDash val="solid"/>
           </a:ln>
@@ -19674,13 +19944,13 @@
             <a:r>
               <a:rPr lang="en-US" sz="1300" b="1" dirty="0">
                 <a:solidFill>
-                  <a:srgbClr val="4C1D95"/>
+                  <a:srgbClr val="0F766E"/>
                 </a:solidFill>
                 <a:latin typeface="Trebuchet MS" pitchFamily="34" charset="0"/>
                 <a:ea typeface="Trebuchet MS" pitchFamily="34" charset="-122"/>
                 <a:cs typeface="Trebuchet MS" pitchFamily="34" charset="-120"/>
               </a:rPr>
-              <a:t>grid</a:t>
+              <a:t>lock</a:t>
             </a:r>
             <a:endParaRPr lang="en-US" sz="1300" dirty="0"/>
           </a:p>
@@ -19719,7 +19989,7 @@
                 <a:ea typeface="Calibri" pitchFamily="34" charset="-122"/>
                 <a:cs typeface="Calibri" pitchFamily="34" charset="-120"/>
               </a:rPr>
-              <a:t>a pattern of crossing lines</a:t>
+              <a:t>to fasten with a key; a fastening device</a:t>
             </a:r>
             <a:endParaRPr lang="en-US" sz="850" dirty="0"/>
           </a:p>
@@ -19742,11 +20012,11 @@
             </a:avLst>
           </a:prstGeom>
           <a:solidFill>
-            <a:srgbClr val="CCFBF1"/>
+            <a:srgbClr val="FCE7F3"/>
           </a:solidFill>
           <a:ln w="19050">
             <a:solidFill>
-              <a:srgbClr val="0D9488"/>
+              <a:srgbClr val="DB2777"/>
             </a:solidFill>
             <a:prstDash val="solid"/>
           </a:ln>
@@ -19786,13 +20056,13 @@
             <a:r>
               <a:rPr lang="en-US" sz="1300" b="1" dirty="0">
                 <a:solidFill>
-                  <a:srgbClr val="0F766E"/>
+                  <a:srgbClr val="9D174D"/>
                 </a:solidFill>
                 <a:latin typeface="Trebuchet MS" pitchFamily="34" charset="0"/>
                 <a:ea typeface="Trebuchet MS" pitchFamily="34" charset="-122"/>
                 <a:cs typeface="Trebuchet MS" pitchFamily="34" charset="-120"/>
               </a:rPr>
-              <a:t>lock</a:t>
+              <a:t>ing</a:t>
             </a:r>
             <a:endParaRPr lang="en-US" sz="1300" dirty="0"/>
           </a:p>
@@ -19831,7 +20101,7 @@
                 <a:ea typeface="Calibri" pitchFamily="34" charset="-122"/>
                 <a:cs typeface="Calibri" pitchFamily="34" charset="-120"/>
               </a:rPr>
-              <a:t>to fasten or secure shut</a:t>
+              <a:t>happening now</a:t>
             </a:r>
             <a:endParaRPr lang="en-US" sz="850" dirty="0"/>
           </a:p>
@@ -19990,7 +20260,7 @@
                 <a:ea typeface="Trebuchet MS" pitchFamily="34" charset="-122"/>
                 <a:cs typeface="Trebuchet MS" pitchFamily="34" charset="-120"/>
               </a:rPr>
-              <a:t>grid</a:t>
+              <a:t>lock</a:t>
             </a:r>
             <a:endParaRPr lang="en-US" sz="1400" dirty="0"/>
           </a:p>
@@ -20095,7 +20365,7 @@
                 <a:ea typeface="Trebuchet MS" pitchFamily="34" charset="-122"/>
                 <a:cs typeface="Trebuchet MS" pitchFamily="34" charset="-120"/>
               </a:rPr>
-              <a:t>lock</a:t>
+              <a:t>ing</a:t>
             </a:r>
             <a:endParaRPr lang="en-US" sz="1400" dirty="0"/>
           </a:p>
@@ -20519,7 +20789,7 @@
                 <a:ea typeface="Calibri" pitchFamily="34" charset="-122"/>
                 <a:cs typeface="Calibri" pitchFamily="34" charset="-120"/>
               </a:rPr>
-              <a:t>Word Labs  •  wordlabs.app  •  Root: 'lock' = to fasten or secure shut</a:t>
+              <a:t>Word Labs  •  wordlabs.app  •  Root: 'lock' = to fasten with a key; a fastening device</a:t>
             </a:r>
             <a:endParaRPr lang="en-US" sz="800" dirty="0"/>
           </a:p>
@@ -20658,7 +20928,7 @@
                 <a:ea typeface="Trebuchet MS" pitchFamily="34" charset="-122"/>
                 <a:cs typeface="Trebuchet MS" pitchFamily="34" charset="-120"/>
               </a:rPr>
-              <a:t>gridlock</a:t>
+              <a:t>locking</a:t>
             </a:r>
             <a:endParaRPr lang="en-US" sz="2800" dirty="0"/>
           </a:p>
@@ -20747,11 +21017,11 @@
             </a:avLst>
           </a:prstGeom>
           <a:solidFill>
-            <a:srgbClr val="DDD6FE"/>
+            <a:srgbClr val="CCFBF1"/>
           </a:solidFill>
           <a:ln w="19050">
             <a:solidFill>
-              <a:srgbClr val="7C3AED"/>
+              <a:srgbClr val="0D9488"/>
             </a:solidFill>
             <a:prstDash val="solid"/>
           </a:ln>
@@ -20791,13 +21061,13 @@
             <a:r>
               <a:rPr lang="en-US" sz="1300" b="1" dirty="0">
                 <a:solidFill>
-                  <a:srgbClr val="4C1D95"/>
+                  <a:srgbClr val="0F766E"/>
                 </a:solidFill>
                 <a:latin typeface="Trebuchet MS" pitchFamily="34" charset="0"/>
                 <a:ea typeface="Trebuchet MS" pitchFamily="34" charset="-122"/>
                 <a:cs typeface="Trebuchet MS" pitchFamily="34" charset="-120"/>
               </a:rPr>
-              <a:t>grid</a:t>
+              <a:t>lock</a:t>
             </a:r>
             <a:endParaRPr lang="en-US" sz="1300" dirty="0"/>
           </a:p>
@@ -20836,7 +21106,7 @@
                 <a:ea typeface="Calibri" pitchFamily="34" charset="-122"/>
                 <a:cs typeface="Calibri" pitchFamily="34" charset="-120"/>
               </a:rPr>
-              <a:t>a pattern of crossing lines</a:t>
+              <a:t>to fasten with a key; a fastening device</a:t>
             </a:r>
             <a:endParaRPr lang="en-US" sz="850" dirty="0"/>
           </a:p>
@@ -20859,11 +21129,11 @@
             </a:avLst>
           </a:prstGeom>
           <a:solidFill>
-            <a:srgbClr val="CCFBF1"/>
+            <a:srgbClr val="FCE7F3"/>
           </a:solidFill>
           <a:ln w="19050">
             <a:solidFill>
-              <a:srgbClr val="0D9488"/>
+              <a:srgbClr val="DB2777"/>
             </a:solidFill>
             <a:prstDash val="solid"/>
           </a:ln>
@@ -20903,13 +21173,13 @@
             <a:r>
               <a:rPr lang="en-US" sz="1300" b="1" dirty="0">
                 <a:solidFill>
-                  <a:srgbClr val="0F766E"/>
+                  <a:srgbClr val="9D174D"/>
                 </a:solidFill>
                 <a:latin typeface="Trebuchet MS" pitchFamily="34" charset="0"/>
                 <a:ea typeface="Trebuchet MS" pitchFamily="34" charset="-122"/>
                 <a:cs typeface="Trebuchet MS" pitchFamily="34" charset="-120"/>
               </a:rPr>
-              <a:t>lock</a:t>
+              <a:t>ing</a:t>
             </a:r>
             <a:endParaRPr lang="en-US" sz="1300" dirty="0"/>
           </a:p>
@@ -20948,7 +21218,7 @@
                 <a:ea typeface="Calibri" pitchFamily="34" charset="-122"/>
                 <a:cs typeface="Calibri" pitchFamily="34" charset="-120"/>
               </a:rPr>
-              <a:t>to fasten or secure shut</a:t>
+              <a:t>happening now</a:t>
             </a:r>
             <a:endParaRPr lang="en-US" sz="850" dirty="0"/>
           </a:p>
@@ -21107,7 +21377,7 @@
                 <a:ea typeface="Trebuchet MS" pitchFamily="34" charset="-122"/>
                 <a:cs typeface="Trebuchet MS" pitchFamily="34" charset="-120"/>
               </a:rPr>
-              <a:t>grid</a:t>
+              <a:t>lock</a:t>
             </a:r>
             <a:endParaRPr lang="en-US" sz="1400" dirty="0"/>
           </a:p>
@@ -21212,7 +21482,7 @@
                 <a:ea typeface="Trebuchet MS" pitchFamily="34" charset="-122"/>
                 <a:cs typeface="Trebuchet MS" pitchFamily="34" charset="-120"/>
               </a:rPr>
-              <a:t>lock</a:t>
+              <a:t>ing</a:t>
             </a:r>
             <a:endParaRPr lang="en-US" sz="1400" dirty="0"/>
           </a:p>
@@ -21319,7 +21589,7 @@
         </p:nvSpPr>
         <p:spPr>
           <a:xfrm>
-            <a:off x="2124837" y="4169664"/>
+            <a:off x="2427732" y="4169664"/>
             <a:ext cx="685800" cy="475488"/>
           </a:xfrm>
           <a:prstGeom prst="rect">
@@ -21346,7 +21616,7 @@
         </p:nvSpPr>
         <p:spPr>
           <a:xfrm>
-            <a:off x="2124837" y="4169664"/>
+            <a:off x="2427732" y="4169664"/>
             <a:ext cx="685800" cy="475488"/>
           </a:xfrm>
           <a:prstGeom prst="rect">
@@ -21371,7 +21641,7 @@
                 <a:ea typeface="Trebuchet MS" pitchFamily="34" charset="-122"/>
                 <a:cs typeface="Trebuchet MS" pitchFamily="34" charset="-120"/>
               </a:rPr>
-              <a:t>g</a:t>
+              <a:t>l</a:t>
             </a:r>
             <a:endParaRPr lang="en-US" sz="900" dirty="0"/>
           </a:p>
@@ -21385,7 +21655,7 @@
         </p:nvSpPr>
         <p:spPr>
           <a:xfrm>
-            <a:off x="3033522" y="4169664"/>
+            <a:off x="3639312" y="4169664"/>
             <a:ext cx="685800" cy="475488"/>
           </a:xfrm>
           <a:prstGeom prst="rect">
@@ -21412,7 +21682,7 @@
         </p:nvSpPr>
         <p:spPr>
           <a:xfrm>
-            <a:off x="3033522" y="4169664"/>
+            <a:off x="3639312" y="4169664"/>
             <a:ext cx="685800" cy="475488"/>
           </a:xfrm>
           <a:prstGeom prst="rect">
@@ -21437,7 +21707,7 @@
                 <a:ea typeface="Trebuchet MS" pitchFamily="34" charset="-122"/>
                 <a:cs typeface="Trebuchet MS" pitchFamily="34" charset="-120"/>
               </a:rPr>
-              <a:t>r</a:t>
+              <a:t>o</a:t>
             </a:r>
             <a:endParaRPr lang="en-US" sz="900" dirty="0"/>
           </a:p>
@@ -21451,7 +21721,7 @@
         </p:nvSpPr>
         <p:spPr>
           <a:xfrm>
-            <a:off x="3942207" y="4169664"/>
+            <a:off x="4850892" y="4169664"/>
             <a:ext cx="685800" cy="475488"/>
           </a:xfrm>
           <a:prstGeom prst="rect">
@@ -21478,7 +21748,7 @@
         </p:nvSpPr>
         <p:spPr>
           <a:xfrm>
-            <a:off x="3942207" y="4169664"/>
+            <a:off x="4850892" y="4169664"/>
             <a:ext cx="685800" cy="475488"/>
           </a:xfrm>
           <a:prstGeom prst="rect">
@@ -21503,7 +21773,7 @@
                 <a:ea typeface="Trebuchet MS" pitchFamily="34" charset="-122"/>
                 <a:cs typeface="Trebuchet MS" pitchFamily="34" charset="-120"/>
               </a:rPr>
-              <a:t>i</a:t>
+              <a:t>ck</a:t>
             </a:r>
             <a:endParaRPr lang="en-US" sz="900" dirty="0"/>
           </a:p>
@@ -21517,7 +21787,7 @@
         </p:nvSpPr>
         <p:spPr>
           <a:xfrm>
-            <a:off x="4850892" y="4169664"/>
+            <a:off x="6062472" y="4169664"/>
             <a:ext cx="685800" cy="475488"/>
           </a:xfrm>
           <a:prstGeom prst="rect">
@@ -21544,7 +21814,7 @@
         </p:nvSpPr>
         <p:spPr>
           <a:xfrm>
-            <a:off x="4850892" y="4169664"/>
+            <a:off x="6062472" y="4169664"/>
             <a:ext cx="685800" cy="475488"/>
           </a:xfrm>
           <a:prstGeom prst="rect">
@@ -21569,7 +21839,7 @@
                 <a:ea typeface="Trebuchet MS" pitchFamily="34" charset="-122"/>
                 <a:cs typeface="Trebuchet MS" pitchFamily="34" charset="-120"/>
               </a:rPr>
-              <a:t>d</a:t>
+              <a:t>i</a:t>
             </a:r>
             <a:endParaRPr lang="en-US" sz="900" dirty="0"/>
           </a:p>
@@ -21583,7 +21853,7 @@
         </p:nvSpPr>
         <p:spPr>
           <a:xfrm>
-            <a:off x="5759577" y="4169664"/>
+            <a:off x="7274052" y="4169664"/>
             <a:ext cx="685800" cy="475488"/>
           </a:xfrm>
           <a:prstGeom prst="rect">
@@ -21610,7 +21880,7 @@
         </p:nvSpPr>
         <p:spPr>
           <a:xfrm>
-            <a:off x="5759577" y="4169664"/>
+            <a:off x="7274052" y="4169664"/>
             <a:ext cx="685800" cy="475488"/>
           </a:xfrm>
           <a:prstGeom prst="rect">
@@ -21635,139 +21905,7 @@
                 <a:ea typeface="Trebuchet MS" pitchFamily="34" charset="-122"/>
                 <a:cs typeface="Trebuchet MS" pitchFamily="34" charset="-120"/>
               </a:rPr>
-              <a:t>l</a:t>
-            </a:r>
-            <a:endParaRPr lang="en-US" sz="900" dirty="0"/>
-          </a:p>
-        </p:txBody>
-      </p:sp>
-      <p:sp>
-        <p:nvSpPr>
-          <p:cNvPr id="43" name="Shape 41"/>
-          <p:cNvSpPr/>
-          <p:nvPr/>
-        </p:nvSpPr>
-        <p:spPr>
-          <a:xfrm>
-            <a:off x="6668262" y="4169664"/>
-            <a:ext cx="685800" cy="475488"/>
-          </a:xfrm>
-          <a:prstGeom prst="rect">
-            <a:avLst>
-              <a:gd name="adj" fmla="val 7692"/>
-            </a:avLst>
-          </a:prstGeom>
-          <a:solidFill>
-            <a:srgbClr val="FFFFFF"/>
-          </a:solidFill>
-          <a:ln w="12700">
-            <a:solidFill>
-              <a:srgbClr val="DB2777"/>
-            </a:solidFill>
-            <a:prstDash val="solid"/>
-          </a:ln>
-        </p:spPr>
-      </p:sp>
-      <p:sp>
-        <p:nvSpPr>
-          <p:cNvPr id="44" name="Text 42"/>
-          <p:cNvSpPr/>
-          <p:nvPr/>
-        </p:nvSpPr>
-        <p:spPr>
-          <a:xfrm>
-            <a:off x="6668262" y="4169664"/>
-            <a:ext cx="685800" cy="475488"/>
-          </a:xfrm>
-          <a:prstGeom prst="rect">
-            <a:avLst/>
-          </a:prstGeom>
-          <a:noFill/>
-          <a:ln/>
-        </p:spPr>
-        <p:txBody>
-          <a:bodyPr wrap="square" lIns="0" tIns="0" rIns="0" bIns="0" rtlCol="0" anchor="ctr"/>
-          <a:lstStyle/>
-          <a:p>
-            <a:pPr algn="ctr" indent="0" marL="0">
-              <a:buNone/>
-            </a:pPr>
-            <a:r>
-              <a:rPr lang="en-US" sz="900" b="1" dirty="0">
-                <a:solidFill>
-                  <a:srgbClr val="9D174D"/>
-                </a:solidFill>
-                <a:latin typeface="Trebuchet MS" pitchFamily="34" charset="0"/>
-                <a:ea typeface="Trebuchet MS" pitchFamily="34" charset="-122"/>
-                <a:cs typeface="Trebuchet MS" pitchFamily="34" charset="-120"/>
-              </a:rPr>
-              <a:t>o</a:t>
-            </a:r>
-            <a:endParaRPr lang="en-US" sz="900" dirty="0"/>
-          </a:p>
-        </p:txBody>
-      </p:sp>
-      <p:sp>
-        <p:nvSpPr>
-          <p:cNvPr id="45" name="Shape 43"/>
-          <p:cNvSpPr/>
-          <p:nvPr/>
-        </p:nvSpPr>
-        <p:spPr>
-          <a:xfrm>
-            <a:off x="7576947" y="4169664"/>
-            <a:ext cx="685800" cy="475488"/>
-          </a:xfrm>
-          <a:prstGeom prst="rect">
-            <a:avLst>
-              <a:gd name="adj" fmla="val 7692"/>
-            </a:avLst>
-          </a:prstGeom>
-          <a:solidFill>
-            <a:srgbClr val="FFFFFF"/>
-          </a:solidFill>
-          <a:ln w="12700">
-            <a:solidFill>
-              <a:srgbClr val="DB2777"/>
-            </a:solidFill>
-            <a:prstDash val="solid"/>
-          </a:ln>
-        </p:spPr>
-      </p:sp>
-      <p:sp>
-        <p:nvSpPr>
-          <p:cNvPr id="46" name="Text 44"/>
-          <p:cNvSpPr/>
-          <p:nvPr/>
-        </p:nvSpPr>
-        <p:spPr>
-          <a:xfrm>
-            <a:off x="7576947" y="4169664"/>
-            <a:ext cx="685800" cy="475488"/>
-          </a:xfrm>
-          <a:prstGeom prst="rect">
-            <a:avLst/>
-          </a:prstGeom>
-          <a:noFill/>
-          <a:ln/>
-        </p:spPr>
-        <p:txBody>
-          <a:bodyPr wrap="square" lIns="0" tIns="0" rIns="0" bIns="0" rtlCol="0" anchor="ctr"/>
-          <a:lstStyle/>
-          <a:p>
-            <a:pPr algn="ctr" indent="0" marL="0">
-              <a:buNone/>
-            </a:pPr>
-            <a:r>
-              <a:rPr lang="en-US" sz="900" b="1" dirty="0">
-                <a:solidFill>
-                  <a:srgbClr val="9D174D"/>
-                </a:solidFill>
-                <a:latin typeface="Trebuchet MS" pitchFamily="34" charset="0"/>
-                <a:ea typeface="Trebuchet MS" pitchFamily="34" charset="-122"/>
-                <a:cs typeface="Trebuchet MS" pitchFamily="34" charset="-120"/>
-              </a:rPr>
-              <a:t>ck</a:t>
+              <a:t>ng</a:t>
             </a:r>
             <a:endParaRPr lang="en-US" sz="900" dirty="0"/>
           </a:p>
@@ -22059,7 +22197,7 @@
                 <a:ea typeface="Calibri" pitchFamily="34" charset="-122"/>
                 <a:cs typeface="Calibri" pitchFamily="34" charset="-120"/>
               </a:rPr>
-              <a:t>Word Labs  •  wordlabs.app  •  Root: 'lock' = to fasten or secure shut</a:t>
+              <a:t>Word Labs  •  wordlabs.app  •  Root: 'lock' = to fasten with a key; a fastening device</a:t>
             </a:r>
             <a:endParaRPr lang="en-US" sz="800" dirty="0"/>
           </a:p>
@@ -22198,7 +22336,7 @@
                 <a:ea typeface="Trebuchet MS" pitchFamily="34" charset="-122"/>
                 <a:cs typeface="Trebuchet MS" pitchFamily="34" charset="-120"/>
               </a:rPr>
-              <a:t>deadlock</a:t>
+              <a:t>unlocked</a:t>
             </a:r>
             <a:endParaRPr lang="en-US" sz="2800" dirty="0"/>
           </a:p>
@@ -22886,7 +23024,7 @@
                 <a:ea typeface="Calibri" pitchFamily="34" charset="-122"/>
                 <a:cs typeface="Calibri" pitchFamily="34" charset="-120"/>
               </a:rPr>
-              <a:t>Word Labs  •  wordlabs.app  •  Root: 'lock' = to fasten or secure shut</a:t>
+              <a:t>Word Labs  •  wordlabs.app  •  Root: 'lock' = to fasten with a key; a fastening device</a:t>
             </a:r>
             <a:endParaRPr lang="en-US" sz="800" dirty="0"/>
           </a:p>
@@ -23025,7 +23163,7 @@
                 <a:ea typeface="Trebuchet MS" pitchFamily="34" charset="-122"/>
                 <a:cs typeface="Trebuchet MS" pitchFamily="34" charset="-120"/>
               </a:rPr>
-              <a:t>deadlock</a:t>
+              <a:t>unlocked</a:t>
             </a:r>
             <a:endParaRPr lang="en-US" sz="2800" dirty="0"/>
           </a:p>
@@ -23105,7 +23243,7 @@
         </p:nvSpPr>
         <p:spPr>
           <a:xfrm>
-            <a:off x="2938272" y="2258568"/>
+            <a:off x="2221992" y="2258568"/>
             <a:ext cx="1828800" cy="292608"/>
           </a:xfrm>
           <a:prstGeom prst="rect">
@@ -23139,7 +23277,7 @@
         </p:nvSpPr>
         <p:spPr>
           <a:xfrm>
-            <a:off x="2938272" y="2258568"/>
+            <a:off x="2221992" y="2258568"/>
             <a:ext cx="1828800" cy="292608"/>
           </a:xfrm>
           <a:prstGeom prst="rect">
@@ -23164,7 +23302,7 @@
                 <a:ea typeface="Trebuchet MS" pitchFamily="34" charset="-122"/>
                 <a:cs typeface="Trebuchet MS" pitchFamily="34" charset="-120"/>
               </a:rPr>
-              <a:t>dead</a:t>
+              <a:t>un</a:t>
             </a:r>
             <a:endParaRPr lang="en-US" sz="1300" dirty="0"/>
           </a:p>
@@ -23178,7 +23316,7 @@
         </p:nvSpPr>
         <p:spPr>
           <a:xfrm>
-            <a:off x="2938272" y="2569464"/>
+            <a:off x="2221992" y="2569464"/>
             <a:ext cx="1828800" cy="201168"/>
           </a:xfrm>
           <a:prstGeom prst="rect">
@@ -23203,7 +23341,7 @@
                 <a:ea typeface="Calibri" pitchFamily="34" charset="-122"/>
                 <a:cs typeface="Calibri" pitchFamily="34" charset="-120"/>
               </a:rPr>
-              <a:t>completely stopped or stuck</a:t>
+              <a:t>not</a:t>
             </a:r>
             <a:endParaRPr lang="en-US" sz="850" dirty="0"/>
           </a:p>
@@ -23217,7 +23355,7 @@
         </p:nvSpPr>
         <p:spPr>
           <a:xfrm>
-            <a:off x="5803392" y="2258568"/>
+            <a:off x="4370832" y="2258568"/>
             <a:ext cx="1828800" cy="292608"/>
           </a:xfrm>
           <a:prstGeom prst="rect">
@@ -23251,7 +23389,7 @@
         </p:nvSpPr>
         <p:spPr>
           <a:xfrm>
-            <a:off x="5803392" y="2258568"/>
+            <a:off x="4370832" y="2258568"/>
             <a:ext cx="1828800" cy="292608"/>
           </a:xfrm>
           <a:prstGeom prst="rect">
@@ -23290,7 +23428,7 @@
         </p:nvSpPr>
         <p:spPr>
           <a:xfrm>
-            <a:off x="5803392" y="2569464"/>
+            <a:off x="4370832" y="2569464"/>
             <a:ext cx="1828800" cy="201168"/>
           </a:xfrm>
           <a:prstGeom prst="rect">
@@ -23315,7 +23453,7 @@
                 <a:ea typeface="Calibri" pitchFamily="34" charset="-122"/>
                 <a:cs typeface="Calibri" pitchFamily="34" charset="-120"/>
               </a:rPr>
-              <a:t>to fasten or secure shut</a:t>
+              <a:t>to fasten with a key; a fastening device</a:t>
             </a:r>
             <a:endParaRPr lang="en-US" sz="850" dirty="0"/>
           </a:p>
@@ -23324,6 +23462,118 @@
       <p:sp>
         <p:nvSpPr>
           <p:cNvPr id="22" name="Shape 20"/>
+          <p:cNvSpPr/>
+          <p:nvPr/>
+        </p:nvSpPr>
+        <p:spPr>
+          <a:xfrm>
+            <a:off x="6519672" y="2258568"/>
+            <a:ext cx="1828800" cy="292608"/>
+          </a:xfrm>
+          <a:prstGeom prst="rect">
+            <a:avLst>
+              <a:gd name="adj" fmla="val 25000"/>
+            </a:avLst>
+          </a:prstGeom>
+          <a:solidFill>
+            <a:srgbClr val="FCE7F3"/>
+          </a:solidFill>
+          <a:ln w="19050">
+            <a:solidFill>
+              <a:srgbClr val="DB2777"/>
+            </a:solidFill>
+            <a:prstDash val="solid"/>
+          </a:ln>
+          <a:effectLst>
+            <a:outerShdw sx="100000" sy="100000" kx="0" ky="0" algn="bl" rotWithShape="0" blurRad="101600" dist="38100" dir="8100000">
+              <a:srgbClr val="000000">
+                <a:alpha val="12000"/>
+              </a:srgbClr>
+            </a:outerShdw>
+          </a:effectLst>
+        </p:spPr>
+      </p:sp>
+      <p:sp>
+        <p:nvSpPr>
+          <p:cNvPr id="23" name="Text 21"/>
+          <p:cNvSpPr/>
+          <p:nvPr/>
+        </p:nvSpPr>
+        <p:spPr>
+          <a:xfrm>
+            <a:off x="6519672" y="2258568"/>
+            <a:ext cx="1828800" cy="292608"/>
+          </a:xfrm>
+          <a:prstGeom prst="rect">
+            <a:avLst/>
+          </a:prstGeom>
+          <a:noFill/>
+          <a:ln/>
+        </p:spPr>
+        <p:txBody>
+          <a:bodyPr wrap="square" lIns="0" tIns="0" rIns="0" bIns="0" rtlCol="0" anchor="ctr"/>
+          <a:lstStyle/>
+          <a:p>
+            <a:pPr algn="ctr" indent="0" marL="0">
+              <a:buNone/>
+            </a:pPr>
+            <a:r>
+              <a:rPr lang="en-US" sz="1300" b="1" dirty="0">
+                <a:solidFill>
+                  <a:srgbClr val="9D174D"/>
+                </a:solidFill>
+                <a:latin typeface="Trebuchet MS" pitchFamily="34" charset="0"/>
+                <a:ea typeface="Trebuchet MS" pitchFamily="34" charset="-122"/>
+                <a:cs typeface="Trebuchet MS" pitchFamily="34" charset="-120"/>
+              </a:rPr>
+              <a:t>ed</a:t>
+            </a:r>
+            <a:endParaRPr lang="en-US" sz="1300" dirty="0"/>
+          </a:p>
+        </p:txBody>
+      </p:sp>
+      <p:sp>
+        <p:nvSpPr>
+          <p:cNvPr id="24" name="Text 22"/>
+          <p:cNvSpPr/>
+          <p:nvPr/>
+        </p:nvSpPr>
+        <p:spPr>
+          <a:xfrm>
+            <a:off x="6519672" y="2569464"/>
+            <a:ext cx="1828800" cy="201168"/>
+          </a:xfrm>
+          <a:prstGeom prst="rect">
+            <a:avLst/>
+          </a:prstGeom>
+          <a:noFill/>
+          <a:ln/>
+        </p:spPr>
+        <p:txBody>
+          <a:bodyPr wrap="square" lIns="0" tIns="0" rIns="0" bIns="0" rtlCol="0" anchor="t"/>
+          <a:lstStyle/>
+          <a:p>
+            <a:pPr algn="ctr" indent="0" marL="0">
+              <a:buNone/>
+            </a:pPr>
+            <a:r>
+              <a:rPr lang="en-US" sz="850" dirty="0">
+                <a:solidFill>
+                  <a:srgbClr val="475569"/>
+                </a:solidFill>
+                <a:latin typeface="Calibri" pitchFamily="34" charset="0"/>
+                <a:ea typeface="Calibri" pitchFamily="34" charset="-122"/>
+                <a:cs typeface="Calibri" pitchFamily="34" charset="-120"/>
+              </a:rPr>
+              <a:t>past tense</a:t>
+            </a:r>
+            <a:endParaRPr lang="en-US" sz="850" dirty="0"/>
+          </a:p>
+        </p:txBody>
+      </p:sp>
+      <p:sp>
+        <p:nvSpPr>
+          <p:cNvPr id="25" name="Shape 23"/>
           <p:cNvSpPr/>
           <p:nvPr/>
         </p:nvSpPr>
@@ -23350,7 +23600,7 @@
       </p:sp>
       <p:sp>
         <p:nvSpPr>
-          <p:cNvPr id="23" name="Text 21"/>
+          <p:cNvPr id="26" name="Text 24"/>
           <p:cNvSpPr/>
           <p:nvPr/>
         </p:nvSpPr>
@@ -23389,7 +23639,7 @@
       </p:sp>
       <p:sp>
         <p:nvSpPr>
-          <p:cNvPr id="24" name="Shape 22"/>
+          <p:cNvPr id="27" name="Shape 25"/>
           <p:cNvSpPr/>
           <p:nvPr/>
         </p:nvSpPr>
@@ -23416,7 +23666,7 @@
       </p:sp>
       <p:sp>
         <p:nvSpPr>
-          <p:cNvPr id="25" name="Text 23"/>
+          <p:cNvPr id="28" name="Text 26"/>
           <p:cNvSpPr/>
           <p:nvPr/>
         </p:nvSpPr>
@@ -23455,7 +23705,7 @@
       </p:sp>
       <p:sp>
         <p:nvSpPr>
-          <p:cNvPr id="26" name="Shape 24"/>
+          <p:cNvPr id="29" name="Shape 27"/>
           <p:cNvSpPr/>
           <p:nvPr/>
         </p:nvSpPr>
@@ -23482,7 +23732,7 @@
       </p:sp>
       <p:sp>
         <p:nvSpPr>
-          <p:cNvPr id="27" name="Text 25"/>
+          <p:cNvPr id="30" name="Text 28"/>
           <p:cNvSpPr/>
           <p:nvPr/>
         </p:nvSpPr>
@@ -23521,7 +23771,7 @@
       </p:sp>
       <p:sp>
         <p:nvSpPr>
-          <p:cNvPr id="28" name="Shape 26"/>
+          <p:cNvPr id="31" name="Shape 29"/>
           <p:cNvSpPr/>
           <p:nvPr/>
         </p:nvSpPr>
@@ -23548,7 +23798,7 @@
       </p:sp>
       <p:sp>
         <p:nvSpPr>
-          <p:cNvPr id="29" name="Text 27"/>
+          <p:cNvPr id="32" name="Text 30"/>
           <p:cNvSpPr/>
           <p:nvPr/>
         </p:nvSpPr>
@@ -23871,7 +24121,7 @@
                 <a:ea typeface="Calibri" pitchFamily="34" charset="-122"/>
                 <a:cs typeface="Calibri" pitchFamily="34" charset="-120"/>
               </a:rPr>
-              <a:t>Word Labs  •  wordlabs.app  •  Root: 'lock' = to fasten or secure shut</a:t>
+              <a:t>Word Labs  •  wordlabs.app  •  Root: 'lock' = to fasten with a key; a fastening device</a:t>
             </a:r>
             <a:endParaRPr lang="en-US" sz="800" dirty="0"/>
           </a:p>
@@ -23944,7 +24194,7 @@
                 <a:ea typeface="Trebuchet MS" pitchFamily="34" charset="-122"/>
                 <a:cs typeface="Trebuchet MS" pitchFamily="34" charset="-120"/>
               </a:rPr>
-              <a:t>We are learning that the root 'lock' means 'to fasten or secure shut'.</a:t>
+              <a:t>We are learning that the root 'lock' means 'to fasten with a key; a fastening device'.</a:t>
             </a:r>
             <a:endParaRPr lang="en-US" sz="2000" dirty="0"/>
           </a:p>
@@ -24590,7 +24840,7 @@
                 <a:ea typeface="Calibri" pitchFamily="34" charset="-122"/>
                 <a:cs typeface="Calibri" pitchFamily="34" charset="-120"/>
               </a:rPr>
-              <a:t>Word Labs  •  wordlabs.app  •  Root: 'lock' = to fasten or secure shut</a:t>
+              <a:t>Word Labs  •  wordlabs.app  •  Root: 'lock' = to fasten with a key; a fastening device</a:t>
             </a:r>
             <a:endParaRPr lang="en-US" sz="800" dirty="0"/>
           </a:p>
@@ -24729,7 +24979,7 @@
                 <a:ea typeface="Trebuchet MS" pitchFamily="34" charset="-122"/>
                 <a:cs typeface="Trebuchet MS" pitchFamily="34" charset="-120"/>
               </a:rPr>
-              <a:t>deadlock</a:t>
+              <a:t>unlocked</a:t>
             </a:r>
             <a:endParaRPr lang="en-US" sz="2800" dirty="0"/>
           </a:p>
@@ -24809,7 +25059,7 @@
         </p:nvSpPr>
         <p:spPr>
           <a:xfrm>
-            <a:off x="2938272" y="2258568"/>
+            <a:off x="2221992" y="2258568"/>
             <a:ext cx="1828800" cy="292608"/>
           </a:xfrm>
           <a:prstGeom prst="rect">
@@ -24843,7 +25093,7 @@
         </p:nvSpPr>
         <p:spPr>
           <a:xfrm>
-            <a:off x="2938272" y="2258568"/>
+            <a:off x="2221992" y="2258568"/>
             <a:ext cx="1828800" cy="292608"/>
           </a:xfrm>
           <a:prstGeom prst="rect">
@@ -24868,7 +25118,7 @@
                 <a:ea typeface="Trebuchet MS" pitchFamily="34" charset="-122"/>
                 <a:cs typeface="Trebuchet MS" pitchFamily="34" charset="-120"/>
               </a:rPr>
-              <a:t>dead</a:t>
+              <a:t>un</a:t>
             </a:r>
             <a:endParaRPr lang="en-US" sz="1300" dirty="0"/>
           </a:p>
@@ -24882,7 +25132,7 @@
         </p:nvSpPr>
         <p:spPr>
           <a:xfrm>
-            <a:off x="2938272" y="2569464"/>
+            <a:off x="2221992" y="2569464"/>
             <a:ext cx="1828800" cy="201168"/>
           </a:xfrm>
           <a:prstGeom prst="rect">
@@ -24907,7 +25157,7 @@
                 <a:ea typeface="Calibri" pitchFamily="34" charset="-122"/>
                 <a:cs typeface="Calibri" pitchFamily="34" charset="-120"/>
               </a:rPr>
-              <a:t>completely stopped or stuck</a:t>
+              <a:t>not</a:t>
             </a:r>
             <a:endParaRPr lang="en-US" sz="850" dirty="0"/>
           </a:p>
@@ -24921,7 +25171,7 @@
         </p:nvSpPr>
         <p:spPr>
           <a:xfrm>
-            <a:off x="5803392" y="2258568"/>
+            <a:off x="4370832" y="2258568"/>
             <a:ext cx="1828800" cy="292608"/>
           </a:xfrm>
           <a:prstGeom prst="rect">
@@ -24955,7 +25205,7 @@
         </p:nvSpPr>
         <p:spPr>
           <a:xfrm>
-            <a:off x="5803392" y="2258568"/>
+            <a:off x="4370832" y="2258568"/>
             <a:ext cx="1828800" cy="292608"/>
           </a:xfrm>
           <a:prstGeom prst="rect">
@@ -24994,7 +25244,7 @@
         </p:nvSpPr>
         <p:spPr>
           <a:xfrm>
-            <a:off x="5803392" y="2569464"/>
+            <a:off x="4370832" y="2569464"/>
             <a:ext cx="1828800" cy="201168"/>
           </a:xfrm>
           <a:prstGeom prst="rect">
@@ -25019,7 +25269,7 @@
                 <a:ea typeface="Calibri" pitchFamily="34" charset="-122"/>
                 <a:cs typeface="Calibri" pitchFamily="34" charset="-120"/>
               </a:rPr>
-              <a:t>to fasten or secure shut</a:t>
+              <a:t>to fasten with a key; a fastening device</a:t>
             </a:r>
             <a:endParaRPr lang="en-US" sz="850" dirty="0"/>
           </a:p>
@@ -25028,6 +25278,118 @@
       <p:sp>
         <p:nvSpPr>
           <p:cNvPr id="22" name="Shape 20"/>
+          <p:cNvSpPr/>
+          <p:nvPr/>
+        </p:nvSpPr>
+        <p:spPr>
+          <a:xfrm>
+            <a:off x="6519672" y="2258568"/>
+            <a:ext cx="1828800" cy="292608"/>
+          </a:xfrm>
+          <a:prstGeom prst="rect">
+            <a:avLst>
+              <a:gd name="adj" fmla="val 25000"/>
+            </a:avLst>
+          </a:prstGeom>
+          <a:solidFill>
+            <a:srgbClr val="FCE7F3"/>
+          </a:solidFill>
+          <a:ln w="19050">
+            <a:solidFill>
+              <a:srgbClr val="DB2777"/>
+            </a:solidFill>
+            <a:prstDash val="solid"/>
+          </a:ln>
+          <a:effectLst>
+            <a:outerShdw sx="100000" sy="100000" kx="0" ky="0" algn="bl" rotWithShape="0" blurRad="101600" dist="38100" dir="8100000">
+              <a:srgbClr val="000000">
+                <a:alpha val="12000"/>
+              </a:srgbClr>
+            </a:outerShdw>
+          </a:effectLst>
+        </p:spPr>
+      </p:sp>
+      <p:sp>
+        <p:nvSpPr>
+          <p:cNvPr id="23" name="Text 21"/>
+          <p:cNvSpPr/>
+          <p:nvPr/>
+        </p:nvSpPr>
+        <p:spPr>
+          <a:xfrm>
+            <a:off x="6519672" y="2258568"/>
+            <a:ext cx="1828800" cy="292608"/>
+          </a:xfrm>
+          <a:prstGeom prst="rect">
+            <a:avLst/>
+          </a:prstGeom>
+          <a:noFill/>
+          <a:ln/>
+        </p:spPr>
+        <p:txBody>
+          <a:bodyPr wrap="square" lIns="0" tIns="0" rIns="0" bIns="0" rtlCol="0" anchor="ctr"/>
+          <a:lstStyle/>
+          <a:p>
+            <a:pPr algn="ctr" indent="0" marL="0">
+              <a:buNone/>
+            </a:pPr>
+            <a:r>
+              <a:rPr lang="en-US" sz="1300" b="1" dirty="0">
+                <a:solidFill>
+                  <a:srgbClr val="9D174D"/>
+                </a:solidFill>
+                <a:latin typeface="Trebuchet MS" pitchFamily="34" charset="0"/>
+                <a:ea typeface="Trebuchet MS" pitchFamily="34" charset="-122"/>
+                <a:cs typeface="Trebuchet MS" pitchFamily="34" charset="-120"/>
+              </a:rPr>
+              <a:t>ed</a:t>
+            </a:r>
+            <a:endParaRPr lang="en-US" sz="1300" dirty="0"/>
+          </a:p>
+        </p:txBody>
+      </p:sp>
+      <p:sp>
+        <p:nvSpPr>
+          <p:cNvPr id="24" name="Text 22"/>
+          <p:cNvSpPr/>
+          <p:nvPr/>
+        </p:nvSpPr>
+        <p:spPr>
+          <a:xfrm>
+            <a:off x="6519672" y="2569464"/>
+            <a:ext cx="1828800" cy="201168"/>
+          </a:xfrm>
+          <a:prstGeom prst="rect">
+            <a:avLst/>
+          </a:prstGeom>
+          <a:noFill/>
+          <a:ln/>
+        </p:spPr>
+        <p:txBody>
+          <a:bodyPr wrap="square" lIns="0" tIns="0" rIns="0" bIns="0" rtlCol="0" anchor="t"/>
+          <a:lstStyle/>
+          <a:p>
+            <a:pPr algn="ctr" indent="0" marL="0">
+              <a:buNone/>
+            </a:pPr>
+            <a:r>
+              <a:rPr lang="en-US" sz="850" dirty="0">
+                <a:solidFill>
+                  <a:srgbClr val="475569"/>
+                </a:solidFill>
+                <a:latin typeface="Calibri" pitchFamily="34" charset="0"/>
+                <a:ea typeface="Calibri" pitchFamily="34" charset="-122"/>
+                <a:cs typeface="Calibri" pitchFamily="34" charset="-120"/>
+              </a:rPr>
+              <a:t>past tense</a:t>
+            </a:r>
+            <a:endParaRPr lang="en-US" sz="850" dirty="0"/>
+          </a:p>
+        </p:txBody>
+      </p:sp>
+      <p:sp>
+        <p:nvSpPr>
+          <p:cNvPr id="25" name="Shape 23"/>
           <p:cNvSpPr/>
           <p:nvPr/>
         </p:nvSpPr>
@@ -25054,7 +25416,7 @@
       </p:sp>
       <p:sp>
         <p:nvSpPr>
-          <p:cNvPr id="23" name="Text 21"/>
+          <p:cNvPr id="26" name="Text 24"/>
           <p:cNvSpPr/>
           <p:nvPr/>
         </p:nvSpPr>
@@ -25093,7 +25455,7 @@
       </p:sp>
       <p:sp>
         <p:nvSpPr>
-          <p:cNvPr id="24" name="Shape 22"/>
+          <p:cNvPr id="27" name="Shape 25"/>
           <p:cNvSpPr/>
           <p:nvPr/>
         </p:nvSpPr>
@@ -25120,7 +25482,7 @@
       </p:sp>
       <p:sp>
         <p:nvSpPr>
-          <p:cNvPr id="25" name="Shape 23"/>
+          <p:cNvPr id="28" name="Shape 26"/>
           <p:cNvSpPr/>
           <p:nvPr/>
         </p:nvSpPr>
@@ -25147,7 +25509,7 @@
       </p:sp>
       <p:sp>
         <p:nvSpPr>
-          <p:cNvPr id="26" name="Text 24"/>
+          <p:cNvPr id="29" name="Text 27"/>
           <p:cNvSpPr/>
           <p:nvPr/>
         </p:nvSpPr>
@@ -25178,7 +25540,7 @@
                 <a:ea typeface="Trebuchet MS" pitchFamily="34" charset="-122"/>
                 <a:cs typeface="Trebuchet MS" pitchFamily="34" charset="-120"/>
               </a:rPr>
-              <a:t>dead</a:t>
+              <a:t>un</a:t>
             </a:r>
             <a:endParaRPr lang="en-US" sz="1400" dirty="0"/>
           </a:p>
@@ -25186,7 +25548,7 @@
       </p:sp>
       <p:sp>
         <p:nvSpPr>
-          <p:cNvPr id="27" name="Text 25"/>
+          <p:cNvPr id="30" name="Text 28"/>
           <p:cNvSpPr/>
           <p:nvPr/>
         </p:nvSpPr>
@@ -25225,7 +25587,7 @@
       </p:sp>
       <p:sp>
         <p:nvSpPr>
-          <p:cNvPr id="28" name="Shape 26"/>
+          <p:cNvPr id="31" name="Shape 29"/>
           <p:cNvSpPr/>
           <p:nvPr/>
         </p:nvSpPr>
@@ -25252,7 +25614,7 @@
       </p:sp>
       <p:sp>
         <p:nvSpPr>
-          <p:cNvPr id="29" name="Text 27"/>
+          <p:cNvPr id="32" name="Text 30"/>
           <p:cNvSpPr/>
           <p:nvPr/>
         </p:nvSpPr>
@@ -25283,7 +25645,7 @@
                 <a:ea typeface="Trebuchet MS" pitchFamily="34" charset="-122"/>
                 <a:cs typeface="Trebuchet MS" pitchFamily="34" charset="-120"/>
               </a:rPr>
-              <a:t>lock</a:t>
+              <a:t>locked</a:t>
             </a:r>
             <a:endParaRPr lang="en-US" sz="1400" dirty="0"/>
           </a:p>
@@ -25291,7 +25653,7 @@
       </p:sp>
       <p:sp>
         <p:nvSpPr>
-          <p:cNvPr id="30" name="Shape 28"/>
+          <p:cNvPr id="33" name="Shape 31"/>
           <p:cNvSpPr/>
           <p:nvPr/>
         </p:nvSpPr>
@@ -25318,7 +25680,7 @@
       </p:sp>
       <p:sp>
         <p:nvSpPr>
-          <p:cNvPr id="31" name="Text 29"/>
+          <p:cNvPr id="34" name="Text 32"/>
           <p:cNvSpPr/>
           <p:nvPr/>
         </p:nvSpPr>
@@ -25357,7 +25719,7 @@
       </p:sp>
       <p:sp>
         <p:nvSpPr>
-          <p:cNvPr id="32" name="Shape 30"/>
+          <p:cNvPr id="35" name="Shape 33"/>
           <p:cNvSpPr/>
           <p:nvPr/>
         </p:nvSpPr>
@@ -25384,7 +25746,7 @@
       </p:sp>
       <p:sp>
         <p:nvSpPr>
-          <p:cNvPr id="33" name="Text 31"/>
+          <p:cNvPr id="36" name="Text 34"/>
           <p:cNvSpPr/>
           <p:nvPr/>
         </p:nvSpPr>
@@ -25707,7 +26069,7 @@
                 <a:ea typeface="Calibri" pitchFamily="34" charset="-122"/>
                 <a:cs typeface="Calibri" pitchFamily="34" charset="-120"/>
               </a:rPr>
-              <a:t>Word Labs  •  wordlabs.app  •  Root: 'lock' = to fasten or secure shut</a:t>
+              <a:t>Word Labs  •  wordlabs.app  •  Root: 'lock' = to fasten with a key; a fastening device</a:t>
             </a:r>
             <a:endParaRPr lang="en-US" sz="800" dirty="0"/>
           </a:p>
@@ -25846,7 +26208,7 @@
                 <a:ea typeface="Trebuchet MS" pitchFamily="34" charset="-122"/>
                 <a:cs typeface="Trebuchet MS" pitchFamily="34" charset="-120"/>
               </a:rPr>
-              <a:t>deadlock</a:t>
+              <a:t>unlocked</a:t>
             </a:r>
             <a:endParaRPr lang="en-US" sz="2800" dirty="0"/>
           </a:p>
@@ -25926,7 +26288,7 @@
         </p:nvSpPr>
         <p:spPr>
           <a:xfrm>
-            <a:off x="2938272" y="2258568"/>
+            <a:off x="2221992" y="2258568"/>
             <a:ext cx="1828800" cy="292608"/>
           </a:xfrm>
           <a:prstGeom prst="rect">
@@ -25960,7 +26322,7 @@
         </p:nvSpPr>
         <p:spPr>
           <a:xfrm>
-            <a:off x="2938272" y="2258568"/>
+            <a:off x="2221992" y="2258568"/>
             <a:ext cx="1828800" cy="292608"/>
           </a:xfrm>
           <a:prstGeom prst="rect">
@@ -25985,7 +26347,7 @@
                 <a:ea typeface="Trebuchet MS" pitchFamily="34" charset="-122"/>
                 <a:cs typeface="Trebuchet MS" pitchFamily="34" charset="-120"/>
               </a:rPr>
-              <a:t>dead</a:t>
+              <a:t>un</a:t>
             </a:r>
             <a:endParaRPr lang="en-US" sz="1300" dirty="0"/>
           </a:p>
@@ -25999,7 +26361,7 @@
         </p:nvSpPr>
         <p:spPr>
           <a:xfrm>
-            <a:off x="2938272" y="2569464"/>
+            <a:off x="2221992" y="2569464"/>
             <a:ext cx="1828800" cy="201168"/>
           </a:xfrm>
           <a:prstGeom prst="rect">
@@ -26024,7 +26386,7 @@
                 <a:ea typeface="Calibri" pitchFamily="34" charset="-122"/>
                 <a:cs typeface="Calibri" pitchFamily="34" charset="-120"/>
               </a:rPr>
-              <a:t>completely stopped or stuck</a:t>
+              <a:t>not</a:t>
             </a:r>
             <a:endParaRPr lang="en-US" sz="850" dirty="0"/>
           </a:p>
@@ -26038,7 +26400,7 @@
         </p:nvSpPr>
         <p:spPr>
           <a:xfrm>
-            <a:off x="5803392" y="2258568"/>
+            <a:off x="4370832" y="2258568"/>
             <a:ext cx="1828800" cy="292608"/>
           </a:xfrm>
           <a:prstGeom prst="rect">
@@ -26072,7 +26434,7 @@
         </p:nvSpPr>
         <p:spPr>
           <a:xfrm>
-            <a:off x="5803392" y="2258568"/>
+            <a:off x="4370832" y="2258568"/>
             <a:ext cx="1828800" cy="292608"/>
           </a:xfrm>
           <a:prstGeom prst="rect">
@@ -26111,7 +26473,7 @@
         </p:nvSpPr>
         <p:spPr>
           <a:xfrm>
-            <a:off x="5803392" y="2569464"/>
+            <a:off x="4370832" y="2569464"/>
             <a:ext cx="1828800" cy="201168"/>
           </a:xfrm>
           <a:prstGeom prst="rect">
@@ -26136,7 +26498,7 @@
                 <a:ea typeface="Calibri" pitchFamily="34" charset="-122"/>
                 <a:cs typeface="Calibri" pitchFamily="34" charset="-120"/>
               </a:rPr>
-              <a:t>to fasten or secure shut</a:t>
+              <a:t>to fasten with a key; a fastening device</a:t>
             </a:r>
             <a:endParaRPr lang="en-US" sz="850" dirty="0"/>
           </a:p>
@@ -26145,6 +26507,118 @@
       <p:sp>
         <p:nvSpPr>
           <p:cNvPr id="22" name="Shape 20"/>
+          <p:cNvSpPr/>
+          <p:nvPr/>
+        </p:nvSpPr>
+        <p:spPr>
+          <a:xfrm>
+            <a:off x="6519672" y="2258568"/>
+            <a:ext cx="1828800" cy="292608"/>
+          </a:xfrm>
+          <a:prstGeom prst="rect">
+            <a:avLst>
+              <a:gd name="adj" fmla="val 25000"/>
+            </a:avLst>
+          </a:prstGeom>
+          <a:solidFill>
+            <a:srgbClr val="FCE7F3"/>
+          </a:solidFill>
+          <a:ln w="19050">
+            <a:solidFill>
+              <a:srgbClr val="DB2777"/>
+            </a:solidFill>
+            <a:prstDash val="solid"/>
+          </a:ln>
+          <a:effectLst>
+            <a:outerShdw sx="100000" sy="100000" kx="0" ky="0" algn="bl" rotWithShape="0" blurRad="101600" dist="38100" dir="8100000">
+              <a:srgbClr val="000000">
+                <a:alpha val="12000"/>
+              </a:srgbClr>
+            </a:outerShdw>
+          </a:effectLst>
+        </p:spPr>
+      </p:sp>
+      <p:sp>
+        <p:nvSpPr>
+          <p:cNvPr id="23" name="Text 21"/>
+          <p:cNvSpPr/>
+          <p:nvPr/>
+        </p:nvSpPr>
+        <p:spPr>
+          <a:xfrm>
+            <a:off x="6519672" y="2258568"/>
+            <a:ext cx="1828800" cy="292608"/>
+          </a:xfrm>
+          <a:prstGeom prst="rect">
+            <a:avLst/>
+          </a:prstGeom>
+          <a:noFill/>
+          <a:ln/>
+        </p:spPr>
+        <p:txBody>
+          <a:bodyPr wrap="square" lIns="0" tIns="0" rIns="0" bIns="0" rtlCol="0" anchor="ctr"/>
+          <a:lstStyle/>
+          <a:p>
+            <a:pPr algn="ctr" indent="0" marL="0">
+              <a:buNone/>
+            </a:pPr>
+            <a:r>
+              <a:rPr lang="en-US" sz="1300" b="1" dirty="0">
+                <a:solidFill>
+                  <a:srgbClr val="9D174D"/>
+                </a:solidFill>
+                <a:latin typeface="Trebuchet MS" pitchFamily="34" charset="0"/>
+                <a:ea typeface="Trebuchet MS" pitchFamily="34" charset="-122"/>
+                <a:cs typeface="Trebuchet MS" pitchFamily="34" charset="-120"/>
+              </a:rPr>
+              <a:t>ed</a:t>
+            </a:r>
+            <a:endParaRPr lang="en-US" sz="1300" dirty="0"/>
+          </a:p>
+        </p:txBody>
+      </p:sp>
+      <p:sp>
+        <p:nvSpPr>
+          <p:cNvPr id="24" name="Text 22"/>
+          <p:cNvSpPr/>
+          <p:nvPr/>
+        </p:nvSpPr>
+        <p:spPr>
+          <a:xfrm>
+            <a:off x="6519672" y="2569464"/>
+            <a:ext cx="1828800" cy="201168"/>
+          </a:xfrm>
+          <a:prstGeom prst="rect">
+            <a:avLst/>
+          </a:prstGeom>
+          <a:noFill/>
+          <a:ln/>
+        </p:spPr>
+        <p:txBody>
+          <a:bodyPr wrap="square" lIns="0" tIns="0" rIns="0" bIns="0" rtlCol="0" anchor="t"/>
+          <a:lstStyle/>
+          <a:p>
+            <a:pPr algn="ctr" indent="0" marL="0">
+              <a:buNone/>
+            </a:pPr>
+            <a:r>
+              <a:rPr lang="en-US" sz="850" dirty="0">
+                <a:solidFill>
+                  <a:srgbClr val="475569"/>
+                </a:solidFill>
+                <a:latin typeface="Calibri" pitchFamily="34" charset="0"/>
+                <a:ea typeface="Calibri" pitchFamily="34" charset="-122"/>
+                <a:cs typeface="Calibri" pitchFamily="34" charset="-120"/>
+              </a:rPr>
+              <a:t>past tense</a:t>
+            </a:r>
+            <a:endParaRPr lang="en-US" sz="850" dirty="0"/>
+          </a:p>
+        </p:txBody>
+      </p:sp>
+      <p:sp>
+        <p:nvSpPr>
+          <p:cNvPr id="25" name="Shape 23"/>
           <p:cNvSpPr/>
           <p:nvPr/>
         </p:nvSpPr>
@@ -26171,7 +26645,7 @@
       </p:sp>
       <p:sp>
         <p:nvSpPr>
-          <p:cNvPr id="23" name="Text 21"/>
+          <p:cNvPr id="26" name="Text 24"/>
           <p:cNvSpPr/>
           <p:nvPr/>
         </p:nvSpPr>
@@ -26210,7 +26684,7 @@
       </p:sp>
       <p:sp>
         <p:nvSpPr>
-          <p:cNvPr id="24" name="Shape 22"/>
+          <p:cNvPr id="27" name="Shape 25"/>
           <p:cNvSpPr/>
           <p:nvPr/>
         </p:nvSpPr>
@@ -26237,7 +26711,7 @@
       </p:sp>
       <p:sp>
         <p:nvSpPr>
-          <p:cNvPr id="25" name="Shape 23"/>
+          <p:cNvPr id="28" name="Shape 26"/>
           <p:cNvSpPr/>
           <p:nvPr/>
         </p:nvSpPr>
@@ -26264,7 +26738,7 @@
       </p:sp>
       <p:sp>
         <p:nvSpPr>
-          <p:cNvPr id="26" name="Text 24"/>
+          <p:cNvPr id="29" name="Text 27"/>
           <p:cNvSpPr/>
           <p:nvPr/>
         </p:nvSpPr>
@@ -26295,7 +26769,7 @@
                 <a:ea typeface="Trebuchet MS" pitchFamily="34" charset="-122"/>
                 <a:cs typeface="Trebuchet MS" pitchFamily="34" charset="-120"/>
               </a:rPr>
-              <a:t>dead</a:t>
+              <a:t>un</a:t>
             </a:r>
             <a:endParaRPr lang="en-US" sz="1400" dirty="0"/>
           </a:p>
@@ -26303,7 +26777,7 @@
       </p:sp>
       <p:sp>
         <p:nvSpPr>
-          <p:cNvPr id="27" name="Text 25"/>
+          <p:cNvPr id="30" name="Text 28"/>
           <p:cNvSpPr/>
           <p:nvPr/>
         </p:nvSpPr>
@@ -26342,7 +26816,7 @@
       </p:sp>
       <p:sp>
         <p:nvSpPr>
-          <p:cNvPr id="28" name="Shape 26"/>
+          <p:cNvPr id="31" name="Shape 29"/>
           <p:cNvSpPr/>
           <p:nvPr/>
         </p:nvSpPr>
@@ -26369,7 +26843,7 @@
       </p:sp>
       <p:sp>
         <p:nvSpPr>
-          <p:cNvPr id="29" name="Text 27"/>
+          <p:cNvPr id="32" name="Text 30"/>
           <p:cNvSpPr/>
           <p:nvPr/>
         </p:nvSpPr>
@@ -26400,7 +26874,7 @@
                 <a:ea typeface="Trebuchet MS" pitchFamily="34" charset="-122"/>
                 <a:cs typeface="Trebuchet MS" pitchFamily="34" charset="-120"/>
               </a:rPr>
-              <a:t>lock</a:t>
+              <a:t>locked</a:t>
             </a:r>
             <a:endParaRPr lang="en-US" sz="1400" dirty="0"/>
           </a:p>
@@ -26408,7 +26882,7 @@
       </p:sp>
       <p:sp>
         <p:nvSpPr>
-          <p:cNvPr id="30" name="Shape 28"/>
+          <p:cNvPr id="33" name="Shape 31"/>
           <p:cNvSpPr/>
           <p:nvPr/>
         </p:nvSpPr>
@@ -26435,7 +26909,7 @@
       </p:sp>
       <p:sp>
         <p:nvSpPr>
-          <p:cNvPr id="31" name="Text 29"/>
+          <p:cNvPr id="34" name="Text 32"/>
           <p:cNvSpPr/>
           <p:nvPr/>
         </p:nvSpPr>
@@ -26474,7 +26948,7 @@
       </p:sp>
       <p:sp>
         <p:nvSpPr>
-          <p:cNvPr id="32" name="Shape 30"/>
+          <p:cNvPr id="35" name="Shape 33"/>
           <p:cNvSpPr/>
           <p:nvPr/>
         </p:nvSpPr>
@@ -26501,13 +26975,13 @@
       </p:sp>
       <p:sp>
         <p:nvSpPr>
-          <p:cNvPr id="33" name="Shape 31"/>
-          <p:cNvSpPr/>
-          <p:nvPr/>
-        </p:nvSpPr>
-        <p:spPr>
-          <a:xfrm>
-            <a:off x="2254649" y="4169664"/>
+          <p:cNvPr id="36" name="Shape 34"/>
+          <p:cNvSpPr/>
+          <p:nvPr/>
+        </p:nvSpPr>
+        <p:spPr>
+          <a:xfrm>
+            <a:off x="2124837" y="4169664"/>
             <a:ext cx="685800" cy="475488"/>
           </a:xfrm>
           <a:prstGeom prst="rect">
@@ -26528,13 +27002,13 @@
       </p:sp>
       <p:sp>
         <p:nvSpPr>
-          <p:cNvPr id="34" name="Text 32"/>
-          <p:cNvSpPr/>
-          <p:nvPr/>
-        </p:nvSpPr>
-        <p:spPr>
-          <a:xfrm>
-            <a:off x="2254649" y="4169664"/>
+          <p:cNvPr id="37" name="Text 35"/>
+          <p:cNvSpPr/>
+          <p:nvPr/>
+        </p:nvSpPr>
+        <p:spPr>
+          <a:xfrm>
+            <a:off x="2124837" y="4169664"/>
             <a:ext cx="685800" cy="475488"/>
           </a:xfrm>
           <a:prstGeom prst="rect">
@@ -26559,7 +27033,7 @@
                 <a:ea typeface="Trebuchet MS" pitchFamily="34" charset="-122"/>
                 <a:cs typeface="Trebuchet MS" pitchFamily="34" charset="-120"/>
               </a:rPr>
-              <a:t>d</a:t>
+              <a:t>u</a:t>
             </a:r>
             <a:endParaRPr lang="en-US" sz="900" dirty="0"/>
           </a:p>
@@ -26567,13 +27041,13 @@
       </p:sp>
       <p:sp>
         <p:nvSpPr>
-          <p:cNvPr id="35" name="Shape 33"/>
-          <p:cNvSpPr/>
-          <p:nvPr/>
-        </p:nvSpPr>
-        <p:spPr>
-          <a:xfrm>
-            <a:off x="3293146" y="4169664"/>
+          <p:cNvPr id="38" name="Shape 36"/>
+          <p:cNvSpPr/>
+          <p:nvPr/>
+        </p:nvSpPr>
+        <p:spPr>
+          <a:xfrm>
+            <a:off x="3033522" y="4169664"/>
             <a:ext cx="685800" cy="475488"/>
           </a:xfrm>
           <a:prstGeom prst="rect">
@@ -26594,13 +27068,13 @@
       </p:sp>
       <p:sp>
         <p:nvSpPr>
-          <p:cNvPr id="36" name="Text 34"/>
-          <p:cNvSpPr/>
-          <p:nvPr/>
-        </p:nvSpPr>
-        <p:spPr>
-          <a:xfrm>
-            <a:off x="3293146" y="4169664"/>
+          <p:cNvPr id="39" name="Text 37"/>
+          <p:cNvSpPr/>
+          <p:nvPr/>
+        </p:nvSpPr>
+        <p:spPr>
+          <a:xfrm>
+            <a:off x="3033522" y="4169664"/>
             <a:ext cx="685800" cy="475488"/>
           </a:xfrm>
           <a:prstGeom prst="rect">
@@ -26625,7 +27099,7 @@
                 <a:ea typeface="Trebuchet MS" pitchFamily="34" charset="-122"/>
                 <a:cs typeface="Trebuchet MS" pitchFamily="34" charset="-120"/>
               </a:rPr>
-              <a:t>ea</a:t>
+              <a:t>n</a:t>
             </a:r>
             <a:endParaRPr lang="en-US" sz="900" dirty="0"/>
           </a:p>
@@ -26633,13 +27107,13 @@
       </p:sp>
       <p:sp>
         <p:nvSpPr>
-          <p:cNvPr id="37" name="Shape 35"/>
-          <p:cNvSpPr/>
-          <p:nvPr/>
-        </p:nvSpPr>
-        <p:spPr>
-          <a:xfrm>
-            <a:off x="4331643" y="4169664"/>
+          <p:cNvPr id="40" name="Shape 38"/>
+          <p:cNvSpPr/>
+          <p:nvPr/>
+        </p:nvSpPr>
+        <p:spPr>
+          <a:xfrm>
+            <a:off x="3942207" y="4169664"/>
             <a:ext cx="685800" cy="475488"/>
           </a:xfrm>
           <a:prstGeom prst="rect">
@@ -26660,13 +27134,13 @@
       </p:sp>
       <p:sp>
         <p:nvSpPr>
-          <p:cNvPr id="38" name="Text 36"/>
-          <p:cNvSpPr/>
-          <p:nvPr/>
-        </p:nvSpPr>
-        <p:spPr>
-          <a:xfrm>
-            <a:off x="4331643" y="4169664"/>
+          <p:cNvPr id="41" name="Text 39"/>
+          <p:cNvSpPr/>
+          <p:nvPr/>
+        </p:nvSpPr>
+        <p:spPr>
+          <a:xfrm>
+            <a:off x="3942207" y="4169664"/>
             <a:ext cx="685800" cy="475488"/>
           </a:xfrm>
           <a:prstGeom prst="rect">
@@ -26691,7 +27165,7 @@
                 <a:ea typeface="Trebuchet MS" pitchFamily="34" charset="-122"/>
                 <a:cs typeface="Trebuchet MS" pitchFamily="34" charset="-120"/>
               </a:rPr>
-              <a:t>d</a:t>
+              <a:t>l</a:t>
             </a:r>
             <a:endParaRPr lang="en-US" sz="900" dirty="0"/>
           </a:p>
@@ -26699,13 +27173,13 @@
       </p:sp>
       <p:sp>
         <p:nvSpPr>
-          <p:cNvPr id="39" name="Shape 37"/>
-          <p:cNvSpPr/>
-          <p:nvPr/>
-        </p:nvSpPr>
-        <p:spPr>
-          <a:xfrm>
-            <a:off x="5370141" y="4169664"/>
+          <p:cNvPr id="42" name="Shape 40"/>
+          <p:cNvSpPr/>
+          <p:nvPr/>
+        </p:nvSpPr>
+        <p:spPr>
+          <a:xfrm>
+            <a:off x="4850892" y="4169664"/>
             <a:ext cx="685800" cy="475488"/>
           </a:xfrm>
           <a:prstGeom prst="rect">
@@ -26726,13 +27200,13 @@
       </p:sp>
       <p:sp>
         <p:nvSpPr>
-          <p:cNvPr id="40" name="Text 38"/>
-          <p:cNvSpPr/>
-          <p:nvPr/>
-        </p:nvSpPr>
-        <p:spPr>
-          <a:xfrm>
-            <a:off x="5370141" y="4169664"/>
+          <p:cNvPr id="43" name="Text 41"/>
+          <p:cNvSpPr/>
+          <p:nvPr/>
+        </p:nvSpPr>
+        <p:spPr>
+          <a:xfrm>
+            <a:off x="4850892" y="4169664"/>
             <a:ext cx="685800" cy="475488"/>
           </a:xfrm>
           <a:prstGeom prst="rect">
@@ -26757,7 +27231,7 @@
                 <a:ea typeface="Trebuchet MS" pitchFamily="34" charset="-122"/>
                 <a:cs typeface="Trebuchet MS" pitchFamily="34" charset="-120"/>
               </a:rPr>
-              <a:t>l</a:t>
+              <a:t>o</a:t>
             </a:r>
             <a:endParaRPr lang="en-US" sz="900" dirty="0"/>
           </a:p>
@@ -26765,13 +27239,13 @@
       </p:sp>
       <p:sp>
         <p:nvSpPr>
-          <p:cNvPr id="41" name="Shape 39"/>
-          <p:cNvSpPr/>
-          <p:nvPr/>
-        </p:nvSpPr>
-        <p:spPr>
-          <a:xfrm>
-            <a:off x="6408638" y="4169664"/>
+          <p:cNvPr id="44" name="Shape 42"/>
+          <p:cNvSpPr/>
+          <p:nvPr/>
+        </p:nvSpPr>
+        <p:spPr>
+          <a:xfrm>
+            <a:off x="5759577" y="4169664"/>
             <a:ext cx="685800" cy="475488"/>
           </a:xfrm>
           <a:prstGeom prst="rect">
@@ -26792,13 +27266,13 @@
       </p:sp>
       <p:sp>
         <p:nvSpPr>
-          <p:cNvPr id="42" name="Text 40"/>
-          <p:cNvSpPr/>
-          <p:nvPr/>
-        </p:nvSpPr>
-        <p:spPr>
-          <a:xfrm>
-            <a:off x="6408638" y="4169664"/>
+          <p:cNvPr id="45" name="Text 43"/>
+          <p:cNvSpPr/>
+          <p:nvPr/>
+        </p:nvSpPr>
+        <p:spPr>
+          <a:xfrm>
+            <a:off x="5759577" y="4169664"/>
             <a:ext cx="685800" cy="475488"/>
           </a:xfrm>
           <a:prstGeom prst="rect">
@@ -26823,7 +27297,7 @@
                 <a:ea typeface="Trebuchet MS" pitchFamily="34" charset="-122"/>
                 <a:cs typeface="Trebuchet MS" pitchFamily="34" charset="-120"/>
               </a:rPr>
-              <a:t>o</a:t>
+              <a:t>ck</a:t>
             </a:r>
             <a:endParaRPr lang="en-US" sz="900" dirty="0"/>
           </a:p>
@@ -26831,13 +27305,13 @@
       </p:sp>
       <p:sp>
         <p:nvSpPr>
-          <p:cNvPr id="43" name="Shape 41"/>
-          <p:cNvSpPr/>
-          <p:nvPr/>
-        </p:nvSpPr>
-        <p:spPr>
-          <a:xfrm>
-            <a:off x="7447135" y="4169664"/>
+          <p:cNvPr id="46" name="Shape 44"/>
+          <p:cNvSpPr/>
+          <p:nvPr/>
+        </p:nvSpPr>
+        <p:spPr>
+          <a:xfrm>
+            <a:off x="6668262" y="4169664"/>
             <a:ext cx="685800" cy="475488"/>
           </a:xfrm>
           <a:prstGeom prst="rect">
@@ -26858,13 +27332,13 @@
       </p:sp>
       <p:sp>
         <p:nvSpPr>
-          <p:cNvPr id="44" name="Text 42"/>
-          <p:cNvSpPr/>
-          <p:nvPr/>
-        </p:nvSpPr>
-        <p:spPr>
-          <a:xfrm>
-            <a:off x="7447135" y="4169664"/>
+          <p:cNvPr id="47" name="Text 45"/>
+          <p:cNvSpPr/>
+          <p:nvPr/>
+        </p:nvSpPr>
+        <p:spPr>
+          <a:xfrm>
+            <a:off x="6668262" y="4169664"/>
             <a:ext cx="685800" cy="475488"/>
           </a:xfrm>
           <a:prstGeom prst="rect">
@@ -26889,7 +27363,73 @@
                 <a:ea typeface="Trebuchet MS" pitchFamily="34" charset="-122"/>
                 <a:cs typeface="Trebuchet MS" pitchFamily="34" charset="-120"/>
               </a:rPr>
-              <a:t>ck</a:t>
+              <a:t>e</a:t>
+            </a:r>
+            <a:endParaRPr lang="en-US" sz="900" dirty="0"/>
+          </a:p>
+        </p:txBody>
+      </p:sp>
+      <p:sp>
+        <p:nvSpPr>
+          <p:cNvPr id="48" name="Shape 46"/>
+          <p:cNvSpPr/>
+          <p:nvPr/>
+        </p:nvSpPr>
+        <p:spPr>
+          <a:xfrm>
+            <a:off x="7576947" y="4169664"/>
+            <a:ext cx="685800" cy="475488"/>
+          </a:xfrm>
+          <a:prstGeom prst="rect">
+            <a:avLst>
+              <a:gd name="adj" fmla="val 7692"/>
+            </a:avLst>
+          </a:prstGeom>
+          <a:solidFill>
+            <a:srgbClr val="FFFFFF"/>
+          </a:solidFill>
+          <a:ln w="12700">
+            <a:solidFill>
+              <a:srgbClr val="DB2777"/>
+            </a:solidFill>
+            <a:prstDash val="solid"/>
+          </a:ln>
+        </p:spPr>
+      </p:sp>
+      <p:sp>
+        <p:nvSpPr>
+          <p:cNvPr id="49" name="Text 47"/>
+          <p:cNvSpPr/>
+          <p:nvPr/>
+        </p:nvSpPr>
+        <p:spPr>
+          <a:xfrm>
+            <a:off x="7576947" y="4169664"/>
+            <a:ext cx="685800" cy="475488"/>
+          </a:xfrm>
+          <a:prstGeom prst="rect">
+            <a:avLst/>
+          </a:prstGeom>
+          <a:noFill/>
+          <a:ln/>
+        </p:spPr>
+        <p:txBody>
+          <a:bodyPr wrap="square" lIns="0" tIns="0" rIns="0" bIns="0" rtlCol="0" anchor="ctr"/>
+          <a:lstStyle/>
+          <a:p>
+            <a:pPr algn="ctr" indent="0" marL="0">
+              <a:buNone/>
+            </a:pPr>
+            <a:r>
+              <a:rPr lang="en-US" sz="900" b="1" dirty="0">
+                <a:solidFill>
+                  <a:srgbClr val="9D174D"/>
+                </a:solidFill>
+                <a:latin typeface="Trebuchet MS" pitchFamily="34" charset="0"/>
+                <a:ea typeface="Trebuchet MS" pitchFamily="34" charset="-122"/>
+                <a:cs typeface="Trebuchet MS" pitchFamily="34" charset="-120"/>
+              </a:rPr>
+              <a:t>d</a:t>
             </a:r>
             <a:endParaRPr lang="en-US" sz="900" dirty="0"/>
           </a:p>
@@ -27181,7 +27721,7 @@
                 <a:ea typeface="Calibri" pitchFamily="34" charset="-122"/>
                 <a:cs typeface="Calibri" pitchFamily="34" charset="-120"/>
               </a:rPr>
-              <a:t>Word Labs  •  wordlabs.app  •  Root: 'lock' = to fasten or secure shut</a:t>
+              <a:t>Word Labs  •  wordlabs.app  •  Root: 'lock' = to fasten with a key; a fastening device</a:t>
             </a:r>
             <a:endParaRPr lang="en-US" sz="800" dirty="0"/>
           </a:p>
@@ -27320,7 +27860,7 @@
                 <a:ea typeface="Trebuchet MS" pitchFamily="34" charset="-122"/>
                 <a:cs typeface="Trebuchet MS" pitchFamily="34" charset="-120"/>
               </a:rPr>
-              <a:t>locked</a:t>
+              <a:t>unlocking</a:t>
             </a:r>
             <a:endParaRPr lang="en-US" sz="2800" dirty="0"/>
           </a:p>
@@ -28008,7 +28548,7 @@
                 <a:ea typeface="Calibri" pitchFamily="34" charset="-122"/>
                 <a:cs typeface="Calibri" pitchFamily="34" charset="-120"/>
               </a:rPr>
-              <a:t>Word Labs  •  wordlabs.app  •  Root: 'lock' = to fasten or secure shut</a:t>
+              <a:t>Word Labs  •  wordlabs.app  •  Root: 'lock' = to fasten with a key; a fastening device</a:t>
             </a:r>
             <a:endParaRPr lang="en-US" sz="800" dirty="0"/>
           </a:p>
@@ -28147,7 +28687,7 @@
                 <a:ea typeface="Trebuchet MS" pitchFamily="34" charset="-122"/>
                 <a:cs typeface="Trebuchet MS" pitchFamily="34" charset="-120"/>
               </a:rPr>
-              <a:t>locked</a:t>
+              <a:t>unlocking</a:t>
             </a:r>
             <a:endParaRPr lang="en-US" sz="2800" dirty="0"/>
           </a:p>
@@ -28227,7 +28767,7 @@
         </p:nvSpPr>
         <p:spPr>
           <a:xfrm>
-            <a:off x="2938272" y="2258568"/>
+            <a:off x="2221992" y="2258568"/>
             <a:ext cx="1828800" cy="292608"/>
           </a:xfrm>
           <a:prstGeom prst="rect">
@@ -28236,11 +28776,11 @@
             </a:avLst>
           </a:prstGeom>
           <a:solidFill>
-            <a:srgbClr val="CCFBF1"/>
+            <a:srgbClr val="DDD6FE"/>
           </a:solidFill>
           <a:ln w="19050">
             <a:solidFill>
-              <a:srgbClr val="0D9488"/>
+              <a:srgbClr val="7C3AED"/>
             </a:solidFill>
             <a:prstDash val="solid"/>
           </a:ln>
@@ -28261,7 +28801,7 @@
         </p:nvSpPr>
         <p:spPr>
           <a:xfrm>
-            <a:off x="2938272" y="2258568"/>
+            <a:off x="2221992" y="2258568"/>
             <a:ext cx="1828800" cy="292608"/>
           </a:xfrm>
           <a:prstGeom prst="rect">
@@ -28280,13 +28820,13 @@
             <a:r>
               <a:rPr lang="en-US" sz="1300" b="1" dirty="0">
                 <a:solidFill>
-                  <a:srgbClr val="0F766E"/>
+                  <a:srgbClr val="4C1D95"/>
                 </a:solidFill>
                 <a:latin typeface="Trebuchet MS" pitchFamily="34" charset="0"/>
                 <a:ea typeface="Trebuchet MS" pitchFamily="34" charset="-122"/>
                 <a:cs typeface="Trebuchet MS" pitchFamily="34" charset="-120"/>
               </a:rPr>
-              <a:t>lock</a:t>
+              <a:t>un</a:t>
             </a:r>
             <a:endParaRPr lang="en-US" sz="1300" dirty="0"/>
           </a:p>
@@ -28300,7 +28840,7 @@
         </p:nvSpPr>
         <p:spPr>
           <a:xfrm>
-            <a:off x="2938272" y="2569464"/>
+            <a:off x="2221992" y="2569464"/>
             <a:ext cx="1828800" cy="201168"/>
           </a:xfrm>
           <a:prstGeom prst="rect">
@@ -28325,7 +28865,7 @@
                 <a:ea typeface="Calibri" pitchFamily="34" charset="-122"/>
                 <a:cs typeface="Calibri" pitchFamily="34" charset="-120"/>
               </a:rPr>
-              <a:t>to fasten or secure shut</a:t>
+              <a:t>not</a:t>
             </a:r>
             <a:endParaRPr lang="en-US" sz="850" dirty="0"/>
           </a:p>
@@ -28339,7 +28879,7 @@
         </p:nvSpPr>
         <p:spPr>
           <a:xfrm>
-            <a:off x="5803392" y="2258568"/>
+            <a:off x="4370832" y="2258568"/>
             <a:ext cx="1828800" cy="292608"/>
           </a:xfrm>
           <a:prstGeom prst="rect">
@@ -28348,11 +28888,11 @@
             </a:avLst>
           </a:prstGeom>
           <a:solidFill>
-            <a:srgbClr val="FCE7F3"/>
+            <a:srgbClr val="CCFBF1"/>
           </a:solidFill>
           <a:ln w="19050">
             <a:solidFill>
-              <a:srgbClr val="DB2777"/>
+              <a:srgbClr val="0D9488"/>
             </a:solidFill>
             <a:prstDash val="solid"/>
           </a:ln>
@@ -28373,7 +28913,7 @@
         </p:nvSpPr>
         <p:spPr>
           <a:xfrm>
-            <a:off x="5803392" y="2258568"/>
+            <a:off x="4370832" y="2258568"/>
             <a:ext cx="1828800" cy="292608"/>
           </a:xfrm>
           <a:prstGeom prst="rect">
@@ -28392,13 +28932,13 @@
             <a:r>
               <a:rPr lang="en-US" sz="1300" b="1" dirty="0">
                 <a:solidFill>
-                  <a:srgbClr val="9D174D"/>
+                  <a:srgbClr val="0F766E"/>
                 </a:solidFill>
                 <a:latin typeface="Trebuchet MS" pitchFamily="34" charset="0"/>
                 <a:ea typeface="Trebuchet MS" pitchFamily="34" charset="-122"/>
                 <a:cs typeface="Trebuchet MS" pitchFamily="34" charset="-120"/>
               </a:rPr>
-              <a:t>ed</a:t>
+              <a:t>lock</a:t>
             </a:r>
             <a:endParaRPr lang="en-US" sz="1300" dirty="0"/>
           </a:p>
@@ -28412,7 +28952,7 @@
         </p:nvSpPr>
         <p:spPr>
           <a:xfrm>
-            <a:off x="5803392" y="2569464"/>
+            <a:off x="4370832" y="2569464"/>
             <a:ext cx="1828800" cy="201168"/>
           </a:xfrm>
           <a:prstGeom prst="rect">
@@ -28437,7 +28977,7 @@
                 <a:ea typeface="Calibri" pitchFamily="34" charset="-122"/>
                 <a:cs typeface="Calibri" pitchFamily="34" charset="-120"/>
               </a:rPr>
-              <a:t>past tense</a:t>
+              <a:t>to fasten with a key; a fastening device</a:t>
             </a:r>
             <a:endParaRPr lang="en-US" sz="850" dirty="0"/>
           </a:p>
@@ -28446,6 +28986,118 @@
       <p:sp>
         <p:nvSpPr>
           <p:cNvPr id="22" name="Shape 20"/>
+          <p:cNvSpPr/>
+          <p:nvPr/>
+        </p:nvSpPr>
+        <p:spPr>
+          <a:xfrm>
+            <a:off x="6519672" y="2258568"/>
+            <a:ext cx="1828800" cy="292608"/>
+          </a:xfrm>
+          <a:prstGeom prst="rect">
+            <a:avLst>
+              <a:gd name="adj" fmla="val 25000"/>
+            </a:avLst>
+          </a:prstGeom>
+          <a:solidFill>
+            <a:srgbClr val="FCE7F3"/>
+          </a:solidFill>
+          <a:ln w="19050">
+            <a:solidFill>
+              <a:srgbClr val="DB2777"/>
+            </a:solidFill>
+            <a:prstDash val="solid"/>
+          </a:ln>
+          <a:effectLst>
+            <a:outerShdw sx="100000" sy="100000" kx="0" ky="0" algn="bl" rotWithShape="0" blurRad="101600" dist="38100" dir="8100000">
+              <a:srgbClr val="000000">
+                <a:alpha val="12000"/>
+              </a:srgbClr>
+            </a:outerShdw>
+          </a:effectLst>
+        </p:spPr>
+      </p:sp>
+      <p:sp>
+        <p:nvSpPr>
+          <p:cNvPr id="23" name="Text 21"/>
+          <p:cNvSpPr/>
+          <p:nvPr/>
+        </p:nvSpPr>
+        <p:spPr>
+          <a:xfrm>
+            <a:off x="6519672" y="2258568"/>
+            <a:ext cx="1828800" cy="292608"/>
+          </a:xfrm>
+          <a:prstGeom prst="rect">
+            <a:avLst/>
+          </a:prstGeom>
+          <a:noFill/>
+          <a:ln/>
+        </p:spPr>
+        <p:txBody>
+          <a:bodyPr wrap="square" lIns="0" tIns="0" rIns="0" bIns="0" rtlCol="0" anchor="ctr"/>
+          <a:lstStyle/>
+          <a:p>
+            <a:pPr algn="ctr" indent="0" marL="0">
+              <a:buNone/>
+            </a:pPr>
+            <a:r>
+              <a:rPr lang="en-US" sz="1300" b="1" dirty="0">
+                <a:solidFill>
+                  <a:srgbClr val="9D174D"/>
+                </a:solidFill>
+                <a:latin typeface="Trebuchet MS" pitchFamily="34" charset="0"/>
+                <a:ea typeface="Trebuchet MS" pitchFamily="34" charset="-122"/>
+                <a:cs typeface="Trebuchet MS" pitchFamily="34" charset="-120"/>
+              </a:rPr>
+              <a:t>ing</a:t>
+            </a:r>
+            <a:endParaRPr lang="en-US" sz="1300" dirty="0"/>
+          </a:p>
+        </p:txBody>
+      </p:sp>
+      <p:sp>
+        <p:nvSpPr>
+          <p:cNvPr id="24" name="Text 22"/>
+          <p:cNvSpPr/>
+          <p:nvPr/>
+        </p:nvSpPr>
+        <p:spPr>
+          <a:xfrm>
+            <a:off x="6519672" y="2569464"/>
+            <a:ext cx="1828800" cy="201168"/>
+          </a:xfrm>
+          <a:prstGeom prst="rect">
+            <a:avLst/>
+          </a:prstGeom>
+          <a:noFill/>
+          <a:ln/>
+        </p:spPr>
+        <p:txBody>
+          <a:bodyPr wrap="square" lIns="0" tIns="0" rIns="0" bIns="0" rtlCol="0" anchor="t"/>
+          <a:lstStyle/>
+          <a:p>
+            <a:pPr algn="ctr" indent="0" marL="0">
+              <a:buNone/>
+            </a:pPr>
+            <a:r>
+              <a:rPr lang="en-US" sz="850" dirty="0">
+                <a:solidFill>
+                  <a:srgbClr val="475569"/>
+                </a:solidFill>
+                <a:latin typeface="Calibri" pitchFamily="34" charset="0"/>
+                <a:ea typeface="Calibri" pitchFamily="34" charset="-122"/>
+                <a:cs typeface="Calibri" pitchFamily="34" charset="-120"/>
+              </a:rPr>
+              <a:t>happening now</a:t>
+            </a:r>
+            <a:endParaRPr lang="en-US" sz="850" dirty="0"/>
+          </a:p>
+        </p:txBody>
+      </p:sp>
+      <p:sp>
+        <p:nvSpPr>
+          <p:cNvPr id="25" name="Shape 23"/>
           <p:cNvSpPr/>
           <p:nvPr/>
         </p:nvSpPr>
@@ -28472,7 +29124,7 @@
       </p:sp>
       <p:sp>
         <p:nvSpPr>
-          <p:cNvPr id="23" name="Text 21"/>
+          <p:cNvPr id="26" name="Text 24"/>
           <p:cNvSpPr/>
           <p:nvPr/>
         </p:nvSpPr>
@@ -28511,7 +29163,7 @@
       </p:sp>
       <p:sp>
         <p:nvSpPr>
-          <p:cNvPr id="24" name="Shape 22"/>
+          <p:cNvPr id="27" name="Shape 25"/>
           <p:cNvSpPr/>
           <p:nvPr/>
         </p:nvSpPr>
@@ -28538,7 +29190,7 @@
       </p:sp>
       <p:sp>
         <p:nvSpPr>
-          <p:cNvPr id="25" name="Text 23"/>
+          <p:cNvPr id="28" name="Text 26"/>
           <p:cNvSpPr/>
           <p:nvPr/>
         </p:nvSpPr>
@@ -28577,7 +29229,7 @@
       </p:sp>
       <p:sp>
         <p:nvSpPr>
-          <p:cNvPr id="26" name="Shape 24"/>
+          <p:cNvPr id="29" name="Shape 27"/>
           <p:cNvSpPr/>
           <p:nvPr/>
         </p:nvSpPr>
@@ -28604,7 +29256,7 @@
       </p:sp>
       <p:sp>
         <p:nvSpPr>
-          <p:cNvPr id="27" name="Text 25"/>
+          <p:cNvPr id="30" name="Text 28"/>
           <p:cNvSpPr/>
           <p:nvPr/>
         </p:nvSpPr>
@@ -28643,7 +29295,7 @@
       </p:sp>
       <p:sp>
         <p:nvSpPr>
-          <p:cNvPr id="28" name="Shape 26"/>
+          <p:cNvPr id="31" name="Shape 29"/>
           <p:cNvSpPr/>
           <p:nvPr/>
         </p:nvSpPr>
@@ -28670,7 +29322,7 @@
       </p:sp>
       <p:sp>
         <p:nvSpPr>
-          <p:cNvPr id="29" name="Text 27"/>
+          <p:cNvPr id="32" name="Text 30"/>
           <p:cNvSpPr/>
           <p:nvPr/>
         </p:nvSpPr>
@@ -28993,7 +29645,7 @@
                 <a:ea typeface="Calibri" pitchFamily="34" charset="-122"/>
                 <a:cs typeface="Calibri" pitchFamily="34" charset="-120"/>
               </a:rPr>
-              <a:t>Word Labs  •  wordlabs.app  •  Root: 'lock' = to fasten or secure shut</a:t>
+              <a:t>Word Labs  •  wordlabs.app  •  Root: 'lock' = to fasten with a key; a fastening device</a:t>
             </a:r>
             <a:endParaRPr lang="en-US" sz="800" dirty="0"/>
           </a:p>
@@ -29132,7 +29784,7 @@
                 <a:ea typeface="Trebuchet MS" pitchFamily="34" charset="-122"/>
                 <a:cs typeface="Trebuchet MS" pitchFamily="34" charset="-120"/>
               </a:rPr>
-              <a:t>locked</a:t>
+              <a:t>unlocking</a:t>
             </a:r>
             <a:endParaRPr lang="en-US" sz="2800" dirty="0"/>
           </a:p>
@@ -29212,7 +29864,7 @@
         </p:nvSpPr>
         <p:spPr>
           <a:xfrm>
-            <a:off x="2938272" y="2258568"/>
+            <a:off x="2221992" y="2258568"/>
             <a:ext cx="1828800" cy="292608"/>
           </a:xfrm>
           <a:prstGeom prst="rect">
@@ -29221,11 +29873,11 @@
             </a:avLst>
           </a:prstGeom>
           <a:solidFill>
-            <a:srgbClr val="CCFBF1"/>
+            <a:srgbClr val="DDD6FE"/>
           </a:solidFill>
           <a:ln w="19050">
             <a:solidFill>
-              <a:srgbClr val="0D9488"/>
+              <a:srgbClr val="7C3AED"/>
             </a:solidFill>
             <a:prstDash val="solid"/>
           </a:ln>
@@ -29246,7 +29898,7 @@
         </p:nvSpPr>
         <p:spPr>
           <a:xfrm>
-            <a:off x="2938272" y="2258568"/>
+            <a:off x="2221992" y="2258568"/>
             <a:ext cx="1828800" cy="292608"/>
           </a:xfrm>
           <a:prstGeom prst="rect">
@@ -29265,13 +29917,13 @@
             <a:r>
               <a:rPr lang="en-US" sz="1300" b="1" dirty="0">
                 <a:solidFill>
-                  <a:srgbClr val="0F766E"/>
+                  <a:srgbClr val="4C1D95"/>
                 </a:solidFill>
                 <a:latin typeface="Trebuchet MS" pitchFamily="34" charset="0"/>
                 <a:ea typeface="Trebuchet MS" pitchFamily="34" charset="-122"/>
                 <a:cs typeface="Trebuchet MS" pitchFamily="34" charset="-120"/>
               </a:rPr>
-              <a:t>lock</a:t>
+              <a:t>un</a:t>
             </a:r>
             <a:endParaRPr lang="en-US" sz="1300" dirty="0"/>
           </a:p>
@@ -29285,7 +29937,7 @@
         </p:nvSpPr>
         <p:spPr>
           <a:xfrm>
-            <a:off x="2938272" y="2569464"/>
+            <a:off x="2221992" y="2569464"/>
             <a:ext cx="1828800" cy="201168"/>
           </a:xfrm>
           <a:prstGeom prst="rect">
@@ -29310,7 +29962,7 @@
                 <a:ea typeface="Calibri" pitchFamily="34" charset="-122"/>
                 <a:cs typeface="Calibri" pitchFamily="34" charset="-120"/>
               </a:rPr>
-              <a:t>to fasten or secure shut</a:t>
+              <a:t>not</a:t>
             </a:r>
             <a:endParaRPr lang="en-US" sz="850" dirty="0"/>
           </a:p>
@@ -29324,7 +29976,7 @@
         </p:nvSpPr>
         <p:spPr>
           <a:xfrm>
-            <a:off x="5803392" y="2258568"/>
+            <a:off x="4370832" y="2258568"/>
             <a:ext cx="1828800" cy="292608"/>
           </a:xfrm>
           <a:prstGeom prst="rect">
@@ -29333,11 +29985,11 @@
             </a:avLst>
           </a:prstGeom>
           <a:solidFill>
-            <a:srgbClr val="FCE7F3"/>
+            <a:srgbClr val="CCFBF1"/>
           </a:solidFill>
           <a:ln w="19050">
             <a:solidFill>
-              <a:srgbClr val="DB2777"/>
+              <a:srgbClr val="0D9488"/>
             </a:solidFill>
             <a:prstDash val="solid"/>
           </a:ln>
@@ -29358,7 +30010,7 @@
         </p:nvSpPr>
         <p:spPr>
           <a:xfrm>
-            <a:off x="5803392" y="2258568"/>
+            <a:off x="4370832" y="2258568"/>
             <a:ext cx="1828800" cy="292608"/>
           </a:xfrm>
           <a:prstGeom prst="rect">
@@ -29377,13 +30029,13 @@
             <a:r>
               <a:rPr lang="en-US" sz="1300" b="1" dirty="0">
                 <a:solidFill>
-                  <a:srgbClr val="9D174D"/>
+                  <a:srgbClr val="0F766E"/>
                 </a:solidFill>
                 <a:latin typeface="Trebuchet MS" pitchFamily="34" charset="0"/>
                 <a:ea typeface="Trebuchet MS" pitchFamily="34" charset="-122"/>
                 <a:cs typeface="Trebuchet MS" pitchFamily="34" charset="-120"/>
               </a:rPr>
-              <a:t>ed</a:t>
+              <a:t>lock</a:t>
             </a:r>
             <a:endParaRPr lang="en-US" sz="1300" dirty="0"/>
           </a:p>
@@ -29397,7 +30049,7 @@
         </p:nvSpPr>
         <p:spPr>
           <a:xfrm>
-            <a:off x="5803392" y="2569464"/>
+            <a:off x="4370832" y="2569464"/>
             <a:ext cx="1828800" cy="201168"/>
           </a:xfrm>
           <a:prstGeom prst="rect">
@@ -29422,7 +30074,7 @@
                 <a:ea typeface="Calibri" pitchFamily="34" charset="-122"/>
                 <a:cs typeface="Calibri" pitchFamily="34" charset="-120"/>
               </a:rPr>
-              <a:t>past tense</a:t>
+              <a:t>to fasten with a key; a fastening device</a:t>
             </a:r>
             <a:endParaRPr lang="en-US" sz="850" dirty="0"/>
           </a:p>
@@ -29431,6 +30083,118 @@
       <p:sp>
         <p:nvSpPr>
           <p:cNvPr id="22" name="Shape 20"/>
+          <p:cNvSpPr/>
+          <p:nvPr/>
+        </p:nvSpPr>
+        <p:spPr>
+          <a:xfrm>
+            <a:off x="6519672" y="2258568"/>
+            <a:ext cx="1828800" cy="292608"/>
+          </a:xfrm>
+          <a:prstGeom prst="rect">
+            <a:avLst>
+              <a:gd name="adj" fmla="val 25000"/>
+            </a:avLst>
+          </a:prstGeom>
+          <a:solidFill>
+            <a:srgbClr val="FCE7F3"/>
+          </a:solidFill>
+          <a:ln w="19050">
+            <a:solidFill>
+              <a:srgbClr val="DB2777"/>
+            </a:solidFill>
+            <a:prstDash val="solid"/>
+          </a:ln>
+          <a:effectLst>
+            <a:outerShdw sx="100000" sy="100000" kx="0" ky="0" algn="bl" rotWithShape="0" blurRad="101600" dist="38100" dir="8100000">
+              <a:srgbClr val="000000">
+                <a:alpha val="12000"/>
+              </a:srgbClr>
+            </a:outerShdw>
+          </a:effectLst>
+        </p:spPr>
+      </p:sp>
+      <p:sp>
+        <p:nvSpPr>
+          <p:cNvPr id="23" name="Text 21"/>
+          <p:cNvSpPr/>
+          <p:nvPr/>
+        </p:nvSpPr>
+        <p:spPr>
+          <a:xfrm>
+            <a:off x="6519672" y="2258568"/>
+            <a:ext cx="1828800" cy="292608"/>
+          </a:xfrm>
+          <a:prstGeom prst="rect">
+            <a:avLst/>
+          </a:prstGeom>
+          <a:noFill/>
+          <a:ln/>
+        </p:spPr>
+        <p:txBody>
+          <a:bodyPr wrap="square" lIns="0" tIns="0" rIns="0" bIns="0" rtlCol="0" anchor="ctr"/>
+          <a:lstStyle/>
+          <a:p>
+            <a:pPr algn="ctr" indent="0" marL="0">
+              <a:buNone/>
+            </a:pPr>
+            <a:r>
+              <a:rPr lang="en-US" sz="1300" b="1" dirty="0">
+                <a:solidFill>
+                  <a:srgbClr val="9D174D"/>
+                </a:solidFill>
+                <a:latin typeface="Trebuchet MS" pitchFamily="34" charset="0"/>
+                <a:ea typeface="Trebuchet MS" pitchFamily="34" charset="-122"/>
+                <a:cs typeface="Trebuchet MS" pitchFamily="34" charset="-120"/>
+              </a:rPr>
+              <a:t>ing</a:t>
+            </a:r>
+            <a:endParaRPr lang="en-US" sz="1300" dirty="0"/>
+          </a:p>
+        </p:txBody>
+      </p:sp>
+      <p:sp>
+        <p:nvSpPr>
+          <p:cNvPr id="24" name="Text 22"/>
+          <p:cNvSpPr/>
+          <p:nvPr/>
+        </p:nvSpPr>
+        <p:spPr>
+          <a:xfrm>
+            <a:off x="6519672" y="2569464"/>
+            <a:ext cx="1828800" cy="201168"/>
+          </a:xfrm>
+          <a:prstGeom prst="rect">
+            <a:avLst/>
+          </a:prstGeom>
+          <a:noFill/>
+          <a:ln/>
+        </p:spPr>
+        <p:txBody>
+          <a:bodyPr wrap="square" lIns="0" tIns="0" rIns="0" bIns="0" rtlCol="0" anchor="t"/>
+          <a:lstStyle/>
+          <a:p>
+            <a:pPr algn="ctr" indent="0" marL="0">
+              <a:buNone/>
+            </a:pPr>
+            <a:r>
+              <a:rPr lang="en-US" sz="850" dirty="0">
+                <a:solidFill>
+                  <a:srgbClr val="475569"/>
+                </a:solidFill>
+                <a:latin typeface="Calibri" pitchFamily="34" charset="0"/>
+                <a:ea typeface="Calibri" pitchFamily="34" charset="-122"/>
+                <a:cs typeface="Calibri" pitchFamily="34" charset="-120"/>
+              </a:rPr>
+              <a:t>happening now</a:t>
+            </a:r>
+            <a:endParaRPr lang="en-US" sz="850" dirty="0"/>
+          </a:p>
+        </p:txBody>
+      </p:sp>
+      <p:sp>
+        <p:nvSpPr>
+          <p:cNvPr id="25" name="Shape 23"/>
           <p:cNvSpPr/>
           <p:nvPr/>
         </p:nvSpPr>
@@ -29457,7 +30221,7 @@
       </p:sp>
       <p:sp>
         <p:nvSpPr>
-          <p:cNvPr id="23" name="Text 21"/>
+          <p:cNvPr id="26" name="Text 24"/>
           <p:cNvSpPr/>
           <p:nvPr/>
         </p:nvSpPr>
@@ -29496,7 +30260,7 @@
       </p:sp>
       <p:sp>
         <p:nvSpPr>
-          <p:cNvPr id="24" name="Shape 22"/>
+          <p:cNvPr id="27" name="Shape 25"/>
           <p:cNvSpPr/>
           <p:nvPr/>
         </p:nvSpPr>
@@ -29523,13 +30287,13 @@
       </p:sp>
       <p:sp>
         <p:nvSpPr>
-          <p:cNvPr id="25" name="Shape 23"/>
-          <p:cNvSpPr/>
-          <p:nvPr/>
-        </p:nvSpPr>
-        <p:spPr>
-          <a:xfrm>
-            <a:off x="4370832" y="3364992"/>
+          <p:cNvPr id="28" name="Shape 26"/>
+          <p:cNvSpPr/>
+          <p:nvPr/>
+        </p:nvSpPr>
+        <p:spPr>
+          <a:xfrm>
+            <a:off x="2313432" y="3364992"/>
             <a:ext cx="1645920" cy="475488"/>
           </a:xfrm>
           <a:prstGeom prst="rect">
@@ -29550,13 +30314,13 @@
       </p:sp>
       <p:sp>
         <p:nvSpPr>
-          <p:cNvPr id="26" name="Text 24"/>
-          <p:cNvSpPr/>
-          <p:nvPr/>
-        </p:nvSpPr>
-        <p:spPr>
-          <a:xfrm>
-            <a:off x="4370832" y="3364992"/>
+          <p:cNvPr id="29" name="Text 27"/>
+          <p:cNvSpPr/>
+          <p:nvPr/>
+        </p:nvSpPr>
+        <p:spPr>
+          <a:xfrm>
+            <a:off x="2313432" y="3364992"/>
             <a:ext cx="1645920" cy="475488"/>
           </a:xfrm>
           <a:prstGeom prst="rect">
@@ -29581,7 +30345,7 @@
                 <a:ea typeface="Trebuchet MS" pitchFamily="34" charset="-122"/>
                 <a:cs typeface="Trebuchet MS" pitchFamily="34" charset="-120"/>
               </a:rPr>
-              <a:t>locked</a:t>
+              <a:t>un</a:t>
             </a:r>
             <a:endParaRPr lang="en-US" sz="1400" dirty="0"/>
           </a:p>
@@ -29589,7 +30353,217 @@
       </p:sp>
       <p:sp>
         <p:nvSpPr>
-          <p:cNvPr id="27" name="Shape 25"/>
+          <p:cNvPr id="30" name="Text 28"/>
+          <p:cNvSpPr/>
+          <p:nvPr/>
+        </p:nvSpPr>
+        <p:spPr>
+          <a:xfrm>
+            <a:off x="3959352" y="3364992"/>
+            <a:ext cx="411480" cy="475488"/>
+          </a:xfrm>
+          <a:prstGeom prst="rect">
+            <a:avLst/>
+          </a:prstGeom>
+          <a:noFill/>
+          <a:ln/>
+        </p:spPr>
+        <p:txBody>
+          <a:bodyPr wrap="square" lIns="0" tIns="0" rIns="0" bIns="0" rtlCol="0" anchor="ctr"/>
+          <a:lstStyle/>
+          <a:p>
+            <a:pPr algn="ctr" indent="0" marL="0">
+              <a:buNone/>
+            </a:pPr>
+            <a:r>
+              <a:rPr lang="en-US" sz="1600" b="1" dirty="0">
+                <a:solidFill>
+                  <a:srgbClr val="0D9488"/>
+                </a:solidFill>
+                <a:latin typeface="Trebuchet MS" pitchFamily="34" charset="0"/>
+                <a:ea typeface="Trebuchet MS" pitchFamily="34" charset="-122"/>
+                <a:cs typeface="Trebuchet MS" pitchFamily="34" charset="-120"/>
+              </a:rPr>
+              <a:t>·</a:t>
+            </a:r>
+            <a:endParaRPr lang="en-US" sz="1600" dirty="0"/>
+          </a:p>
+        </p:txBody>
+      </p:sp>
+      <p:sp>
+        <p:nvSpPr>
+          <p:cNvPr id="31" name="Shape 29"/>
+          <p:cNvSpPr/>
+          <p:nvPr/>
+        </p:nvSpPr>
+        <p:spPr>
+          <a:xfrm>
+            <a:off x="4370832" y="3364992"/>
+            <a:ext cx="1645920" cy="475488"/>
+          </a:xfrm>
+          <a:prstGeom prst="rect">
+            <a:avLst>
+              <a:gd name="adj" fmla="val 9615"/>
+            </a:avLst>
+          </a:prstGeom>
+          <a:solidFill>
+            <a:srgbClr val="FFFFFF"/>
+          </a:solidFill>
+          <a:ln w="12700">
+            <a:solidFill>
+              <a:srgbClr val="0D9488"/>
+            </a:solidFill>
+            <a:prstDash val="solid"/>
+          </a:ln>
+        </p:spPr>
+      </p:sp>
+      <p:sp>
+        <p:nvSpPr>
+          <p:cNvPr id="32" name="Text 30"/>
+          <p:cNvSpPr/>
+          <p:nvPr/>
+        </p:nvSpPr>
+        <p:spPr>
+          <a:xfrm>
+            <a:off x="4370832" y="3364992"/>
+            <a:ext cx="1645920" cy="475488"/>
+          </a:xfrm>
+          <a:prstGeom prst="rect">
+            <a:avLst/>
+          </a:prstGeom>
+          <a:noFill/>
+          <a:ln/>
+        </p:spPr>
+        <p:txBody>
+          <a:bodyPr wrap="square" lIns="0" tIns="0" rIns="0" bIns="0" rtlCol="0" anchor="ctr"/>
+          <a:lstStyle/>
+          <a:p>
+            <a:pPr algn="ctr" indent="0" marL="0">
+              <a:buNone/>
+            </a:pPr>
+            <a:r>
+              <a:rPr lang="en-US" sz="1400" b="1" dirty="0">
+                <a:solidFill>
+                  <a:srgbClr val="0D9488"/>
+                </a:solidFill>
+                <a:latin typeface="Trebuchet MS" pitchFamily="34" charset="0"/>
+                <a:ea typeface="Trebuchet MS" pitchFamily="34" charset="-122"/>
+                <a:cs typeface="Trebuchet MS" pitchFamily="34" charset="-120"/>
+              </a:rPr>
+              <a:t>lock</a:t>
+            </a:r>
+            <a:endParaRPr lang="en-US" sz="1400" dirty="0"/>
+          </a:p>
+        </p:txBody>
+      </p:sp>
+      <p:sp>
+        <p:nvSpPr>
+          <p:cNvPr id="33" name="Text 31"/>
+          <p:cNvSpPr/>
+          <p:nvPr/>
+        </p:nvSpPr>
+        <p:spPr>
+          <a:xfrm>
+            <a:off x="6016752" y="3364992"/>
+            <a:ext cx="411480" cy="475488"/>
+          </a:xfrm>
+          <a:prstGeom prst="rect">
+            <a:avLst/>
+          </a:prstGeom>
+          <a:noFill/>
+          <a:ln/>
+        </p:spPr>
+        <p:txBody>
+          <a:bodyPr wrap="square" lIns="0" tIns="0" rIns="0" bIns="0" rtlCol="0" anchor="ctr"/>
+          <a:lstStyle/>
+          <a:p>
+            <a:pPr algn="ctr" indent="0" marL="0">
+              <a:buNone/>
+            </a:pPr>
+            <a:r>
+              <a:rPr lang="en-US" sz="1600" b="1" dirty="0">
+                <a:solidFill>
+                  <a:srgbClr val="0D9488"/>
+                </a:solidFill>
+                <a:latin typeface="Trebuchet MS" pitchFamily="34" charset="0"/>
+                <a:ea typeface="Trebuchet MS" pitchFamily="34" charset="-122"/>
+                <a:cs typeface="Trebuchet MS" pitchFamily="34" charset="-120"/>
+              </a:rPr>
+              <a:t>·</a:t>
+            </a:r>
+            <a:endParaRPr lang="en-US" sz="1600" dirty="0"/>
+          </a:p>
+        </p:txBody>
+      </p:sp>
+      <p:sp>
+        <p:nvSpPr>
+          <p:cNvPr id="34" name="Shape 32"/>
+          <p:cNvSpPr/>
+          <p:nvPr/>
+        </p:nvSpPr>
+        <p:spPr>
+          <a:xfrm>
+            <a:off x="6428232" y="3364992"/>
+            <a:ext cx="1645920" cy="475488"/>
+          </a:xfrm>
+          <a:prstGeom prst="rect">
+            <a:avLst>
+              <a:gd name="adj" fmla="val 9615"/>
+            </a:avLst>
+          </a:prstGeom>
+          <a:solidFill>
+            <a:srgbClr val="FFFFFF"/>
+          </a:solidFill>
+          <a:ln w="12700">
+            <a:solidFill>
+              <a:srgbClr val="0D9488"/>
+            </a:solidFill>
+            <a:prstDash val="solid"/>
+          </a:ln>
+        </p:spPr>
+      </p:sp>
+      <p:sp>
+        <p:nvSpPr>
+          <p:cNvPr id="35" name="Text 33"/>
+          <p:cNvSpPr/>
+          <p:nvPr/>
+        </p:nvSpPr>
+        <p:spPr>
+          <a:xfrm>
+            <a:off x="6428232" y="3364992"/>
+            <a:ext cx="1645920" cy="475488"/>
+          </a:xfrm>
+          <a:prstGeom prst="rect">
+            <a:avLst/>
+          </a:prstGeom>
+          <a:noFill/>
+          <a:ln/>
+        </p:spPr>
+        <p:txBody>
+          <a:bodyPr wrap="square" lIns="0" tIns="0" rIns="0" bIns="0" rtlCol="0" anchor="ctr"/>
+          <a:lstStyle/>
+          <a:p>
+            <a:pPr algn="ctr" indent="0" marL="0">
+              <a:buNone/>
+            </a:pPr>
+            <a:r>
+              <a:rPr lang="en-US" sz="1400" b="1" dirty="0">
+                <a:solidFill>
+                  <a:srgbClr val="0D9488"/>
+                </a:solidFill>
+                <a:latin typeface="Trebuchet MS" pitchFamily="34" charset="0"/>
+                <a:ea typeface="Trebuchet MS" pitchFamily="34" charset="-122"/>
+                <a:cs typeface="Trebuchet MS" pitchFamily="34" charset="-120"/>
+              </a:rPr>
+              <a:t>ing</a:t>
+            </a:r>
+            <a:endParaRPr lang="en-US" sz="1400" dirty="0"/>
+          </a:p>
+        </p:txBody>
+      </p:sp>
+      <p:sp>
+        <p:nvSpPr>
+          <p:cNvPr id="36" name="Shape 34"/>
           <p:cNvSpPr/>
           <p:nvPr/>
         </p:nvSpPr>
@@ -29616,7 +30590,7 @@
       </p:sp>
       <p:sp>
         <p:nvSpPr>
-          <p:cNvPr id="28" name="Text 26"/>
+          <p:cNvPr id="37" name="Text 35"/>
           <p:cNvSpPr/>
           <p:nvPr/>
         </p:nvSpPr>
@@ -29655,7 +30629,7 @@
       </p:sp>
       <p:sp>
         <p:nvSpPr>
-          <p:cNvPr id="29" name="Shape 27"/>
+          <p:cNvPr id="38" name="Shape 36"/>
           <p:cNvSpPr/>
           <p:nvPr/>
         </p:nvSpPr>
@@ -29682,7 +30656,7 @@
       </p:sp>
       <p:sp>
         <p:nvSpPr>
-          <p:cNvPr id="30" name="Text 28"/>
+          <p:cNvPr id="39" name="Text 37"/>
           <p:cNvSpPr/>
           <p:nvPr/>
         </p:nvSpPr>
@@ -30005,7 +30979,7 @@
                 <a:ea typeface="Calibri" pitchFamily="34" charset="-122"/>
                 <a:cs typeface="Calibri" pitchFamily="34" charset="-120"/>
               </a:rPr>
-              <a:t>Word Labs  •  wordlabs.app  •  Root: 'lock' = to fasten or secure shut</a:t>
+              <a:t>Word Labs  •  wordlabs.app  •  Root: 'lock' = to fasten with a key; a fastening device</a:t>
             </a:r>
             <a:endParaRPr lang="en-US" sz="800" dirty="0"/>
           </a:p>
@@ -30144,7 +31118,7 @@
                 <a:ea typeface="Trebuchet MS" pitchFamily="34" charset="-122"/>
                 <a:cs typeface="Trebuchet MS" pitchFamily="34" charset="-120"/>
               </a:rPr>
-              <a:t>locked</a:t>
+              <a:t>unlocking</a:t>
             </a:r>
             <a:endParaRPr lang="en-US" sz="2800" dirty="0"/>
           </a:p>
@@ -30224,7 +31198,7 @@
         </p:nvSpPr>
         <p:spPr>
           <a:xfrm>
-            <a:off x="2938272" y="2258568"/>
+            <a:off x="2221992" y="2258568"/>
             <a:ext cx="1828800" cy="292608"/>
           </a:xfrm>
           <a:prstGeom prst="rect">
@@ -30233,11 +31207,11 @@
             </a:avLst>
           </a:prstGeom>
           <a:solidFill>
-            <a:srgbClr val="CCFBF1"/>
+            <a:srgbClr val="DDD6FE"/>
           </a:solidFill>
           <a:ln w="19050">
             <a:solidFill>
-              <a:srgbClr val="0D9488"/>
+              <a:srgbClr val="7C3AED"/>
             </a:solidFill>
             <a:prstDash val="solid"/>
           </a:ln>
@@ -30258,7 +31232,7 @@
         </p:nvSpPr>
         <p:spPr>
           <a:xfrm>
-            <a:off x="2938272" y="2258568"/>
+            <a:off x="2221992" y="2258568"/>
             <a:ext cx="1828800" cy="292608"/>
           </a:xfrm>
           <a:prstGeom prst="rect">
@@ -30277,13 +31251,13 @@
             <a:r>
               <a:rPr lang="en-US" sz="1300" b="1" dirty="0">
                 <a:solidFill>
-                  <a:srgbClr val="0F766E"/>
+                  <a:srgbClr val="4C1D95"/>
                 </a:solidFill>
                 <a:latin typeface="Trebuchet MS" pitchFamily="34" charset="0"/>
                 <a:ea typeface="Trebuchet MS" pitchFamily="34" charset="-122"/>
                 <a:cs typeface="Trebuchet MS" pitchFamily="34" charset="-120"/>
               </a:rPr>
-              <a:t>lock</a:t>
+              <a:t>un</a:t>
             </a:r>
             <a:endParaRPr lang="en-US" sz="1300" dirty="0"/>
           </a:p>
@@ -30297,7 +31271,7 @@
         </p:nvSpPr>
         <p:spPr>
           <a:xfrm>
-            <a:off x="2938272" y="2569464"/>
+            <a:off x="2221992" y="2569464"/>
             <a:ext cx="1828800" cy="201168"/>
           </a:xfrm>
           <a:prstGeom prst="rect">
@@ -30322,7 +31296,7 @@
                 <a:ea typeface="Calibri" pitchFamily="34" charset="-122"/>
                 <a:cs typeface="Calibri" pitchFamily="34" charset="-120"/>
               </a:rPr>
-              <a:t>to fasten or secure shut</a:t>
+              <a:t>not</a:t>
             </a:r>
             <a:endParaRPr lang="en-US" sz="850" dirty="0"/>
           </a:p>
@@ -30336,7 +31310,7 @@
         </p:nvSpPr>
         <p:spPr>
           <a:xfrm>
-            <a:off x="5803392" y="2258568"/>
+            <a:off x="4370832" y="2258568"/>
             <a:ext cx="1828800" cy="292608"/>
           </a:xfrm>
           <a:prstGeom prst="rect">
@@ -30345,11 +31319,11 @@
             </a:avLst>
           </a:prstGeom>
           <a:solidFill>
-            <a:srgbClr val="FCE7F3"/>
+            <a:srgbClr val="CCFBF1"/>
           </a:solidFill>
           <a:ln w="19050">
             <a:solidFill>
-              <a:srgbClr val="DB2777"/>
+              <a:srgbClr val="0D9488"/>
             </a:solidFill>
             <a:prstDash val="solid"/>
           </a:ln>
@@ -30370,7 +31344,7 @@
         </p:nvSpPr>
         <p:spPr>
           <a:xfrm>
-            <a:off x="5803392" y="2258568"/>
+            <a:off x="4370832" y="2258568"/>
             <a:ext cx="1828800" cy="292608"/>
           </a:xfrm>
           <a:prstGeom prst="rect">
@@ -30389,13 +31363,13 @@
             <a:r>
               <a:rPr lang="en-US" sz="1300" b="1" dirty="0">
                 <a:solidFill>
-                  <a:srgbClr val="9D174D"/>
+                  <a:srgbClr val="0F766E"/>
                 </a:solidFill>
                 <a:latin typeface="Trebuchet MS" pitchFamily="34" charset="0"/>
                 <a:ea typeface="Trebuchet MS" pitchFamily="34" charset="-122"/>
                 <a:cs typeface="Trebuchet MS" pitchFamily="34" charset="-120"/>
               </a:rPr>
-              <a:t>ed</a:t>
+              <a:t>lock</a:t>
             </a:r>
             <a:endParaRPr lang="en-US" sz="1300" dirty="0"/>
           </a:p>
@@ -30409,7 +31383,7 @@
         </p:nvSpPr>
         <p:spPr>
           <a:xfrm>
-            <a:off x="5803392" y="2569464"/>
+            <a:off x="4370832" y="2569464"/>
             <a:ext cx="1828800" cy="201168"/>
           </a:xfrm>
           <a:prstGeom prst="rect">
@@ -30434,7 +31408,7 @@
                 <a:ea typeface="Calibri" pitchFamily="34" charset="-122"/>
                 <a:cs typeface="Calibri" pitchFamily="34" charset="-120"/>
               </a:rPr>
-              <a:t>past tense</a:t>
+              <a:t>to fasten with a key; a fastening device</a:t>
             </a:r>
             <a:endParaRPr lang="en-US" sz="850" dirty="0"/>
           </a:p>
@@ -30443,6 +31417,118 @@
       <p:sp>
         <p:nvSpPr>
           <p:cNvPr id="22" name="Shape 20"/>
+          <p:cNvSpPr/>
+          <p:nvPr/>
+        </p:nvSpPr>
+        <p:spPr>
+          <a:xfrm>
+            <a:off x="6519672" y="2258568"/>
+            <a:ext cx="1828800" cy="292608"/>
+          </a:xfrm>
+          <a:prstGeom prst="rect">
+            <a:avLst>
+              <a:gd name="adj" fmla="val 25000"/>
+            </a:avLst>
+          </a:prstGeom>
+          <a:solidFill>
+            <a:srgbClr val="FCE7F3"/>
+          </a:solidFill>
+          <a:ln w="19050">
+            <a:solidFill>
+              <a:srgbClr val="DB2777"/>
+            </a:solidFill>
+            <a:prstDash val="solid"/>
+          </a:ln>
+          <a:effectLst>
+            <a:outerShdw sx="100000" sy="100000" kx="0" ky="0" algn="bl" rotWithShape="0" blurRad="101600" dist="38100" dir="8100000">
+              <a:srgbClr val="000000">
+                <a:alpha val="12000"/>
+              </a:srgbClr>
+            </a:outerShdw>
+          </a:effectLst>
+        </p:spPr>
+      </p:sp>
+      <p:sp>
+        <p:nvSpPr>
+          <p:cNvPr id="23" name="Text 21"/>
+          <p:cNvSpPr/>
+          <p:nvPr/>
+        </p:nvSpPr>
+        <p:spPr>
+          <a:xfrm>
+            <a:off x="6519672" y="2258568"/>
+            <a:ext cx="1828800" cy="292608"/>
+          </a:xfrm>
+          <a:prstGeom prst="rect">
+            <a:avLst/>
+          </a:prstGeom>
+          <a:noFill/>
+          <a:ln/>
+        </p:spPr>
+        <p:txBody>
+          <a:bodyPr wrap="square" lIns="0" tIns="0" rIns="0" bIns="0" rtlCol="0" anchor="ctr"/>
+          <a:lstStyle/>
+          <a:p>
+            <a:pPr algn="ctr" indent="0" marL="0">
+              <a:buNone/>
+            </a:pPr>
+            <a:r>
+              <a:rPr lang="en-US" sz="1300" b="1" dirty="0">
+                <a:solidFill>
+                  <a:srgbClr val="9D174D"/>
+                </a:solidFill>
+                <a:latin typeface="Trebuchet MS" pitchFamily="34" charset="0"/>
+                <a:ea typeface="Trebuchet MS" pitchFamily="34" charset="-122"/>
+                <a:cs typeface="Trebuchet MS" pitchFamily="34" charset="-120"/>
+              </a:rPr>
+              <a:t>ing</a:t>
+            </a:r>
+            <a:endParaRPr lang="en-US" sz="1300" dirty="0"/>
+          </a:p>
+        </p:txBody>
+      </p:sp>
+      <p:sp>
+        <p:nvSpPr>
+          <p:cNvPr id="24" name="Text 22"/>
+          <p:cNvSpPr/>
+          <p:nvPr/>
+        </p:nvSpPr>
+        <p:spPr>
+          <a:xfrm>
+            <a:off x="6519672" y="2569464"/>
+            <a:ext cx="1828800" cy="201168"/>
+          </a:xfrm>
+          <a:prstGeom prst="rect">
+            <a:avLst/>
+          </a:prstGeom>
+          <a:noFill/>
+          <a:ln/>
+        </p:spPr>
+        <p:txBody>
+          <a:bodyPr wrap="square" lIns="0" tIns="0" rIns="0" bIns="0" rtlCol="0" anchor="t"/>
+          <a:lstStyle/>
+          <a:p>
+            <a:pPr algn="ctr" indent="0" marL="0">
+              <a:buNone/>
+            </a:pPr>
+            <a:r>
+              <a:rPr lang="en-US" sz="850" dirty="0">
+                <a:solidFill>
+                  <a:srgbClr val="475569"/>
+                </a:solidFill>
+                <a:latin typeface="Calibri" pitchFamily="34" charset="0"/>
+                <a:ea typeface="Calibri" pitchFamily="34" charset="-122"/>
+                <a:cs typeface="Calibri" pitchFamily="34" charset="-120"/>
+              </a:rPr>
+              <a:t>happening now</a:t>
+            </a:r>
+            <a:endParaRPr lang="en-US" sz="850" dirty="0"/>
+          </a:p>
+        </p:txBody>
+      </p:sp>
+      <p:sp>
+        <p:nvSpPr>
+          <p:cNvPr id="25" name="Shape 23"/>
           <p:cNvSpPr/>
           <p:nvPr/>
         </p:nvSpPr>
@@ -30469,7 +31555,7 @@
       </p:sp>
       <p:sp>
         <p:nvSpPr>
-          <p:cNvPr id="23" name="Text 21"/>
+          <p:cNvPr id="26" name="Text 24"/>
           <p:cNvSpPr/>
           <p:nvPr/>
         </p:nvSpPr>
@@ -30508,7 +31594,7 @@
       </p:sp>
       <p:sp>
         <p:nvSpPr>
-          <p:cNvPr id="24" name="Shape 22"/>
+          <p:cNvPr id="27" name="Shape 25"/>
           <p:cNvSpPr/>
           <p:nvPr/>
         </p:nvSpPr>
@@ -30535,13 +31621,13 @@
       </p:sp>
       <p:sp>
         <p:nvSpPr>
-          <p:cNvPr id="25" name="Shape 23"/>
-          <p:cNvSpPr/>
-          <p:nvPr/>
-        </p:nvSpPr>
-        <p:spPr>
-          <a:xfrm>
-            <a:off x="4370832" y="3364992"/>
+          <p:cNvPr id="28" name="Shape 26"/>
+          <p:cNvSpPr/>
+          <p:nvPr/>
+        </p:nvSpPr>
+        <p:spPr>
+          <a:xfrm>
+            <a:off x="2313432" y="3364992"/>
             <a:ext cx="1645920" cy="475488"/>
           </a:xfrm>
           <a:prstGeom prst="rect">
@@ -30562,13 +31648,13 @@
       </p:sp>
       <p:sp>
         <p:nvSpPr>
-          <p:cNvPr id="26" name="Text 24"/>
-          <p:cNvSpPr/>
-          <p:nvPr/>
-        </p:nvSpPr>
-        <p:spPr>
-          <a:xfrm>
-            <a:off x="4370832" y="3364992"/>
+          <p:cNvPr id="29" name="Text 27"/>
+          <p:cNvSpPr/>
+          <p:nvPr/>
+        </p:nvSpPr>
+        <p:spPr>
+          <a:xfrm>
+            <a:off x="2313432" y="3364992"/>
             <a:ext cx="1645920" cy="475488"/>
           </a:xfrm>
           <a:prstGeom prst="rect">
@@ -30593,7 +31679,7 @@
                 <a:ea typeface="Trebuchet MS" pitchFamily="34" charset="-122"/>
                 <a:cs typeface="Trebuchet MS" pitchFamily="34" charset="-120"/>
               </a:rPr>
-              <a:t>locked</a:t>
+              <a:t>un</a:t>
             </a:r>
             <a:endParaRPr lang="en-US" sz="1400" dirty="0"/>
           </a:p>
@@ -30601,7 +31687,217 @@
       </p:sp>
       <p:sp>
         <p:nvSpPr>
-          <p:cNvPr id="27" name="Shape 25"/>
+          <p:cNvPr id="30" name="Text 28"/>
+          <p:cNvSpPr/>
+          <p:nvPr/>
+        </p:nvSpPr>
+        <p:spPr>
+          <a:xfrm>
+            <a:off x="3959352" y="3364992"/>
+            <a:ext cx="411480" cy="475488"/>
+          </a:xfrm>
+          <a:prstGeom prst="rect">
+            <a:avLst/>
+          </a:prstGeom>
+          <a:noFill/>
+          <a:ln/>
+        </p:spPr>
+        <p:txBody>
+          <a:bodyPr wrap="square" lIns="0" tIns="0" rIns="0" bIns="0" rtlCol="0" anchor="ctr"/>
+          <a:lstStyle/>
+          <a:p>
+            <a:pPr algn="ctr" indent="0" marL="0">
+              <a:buNone/>
+            </a:pPr>
+            <a:r>
+              <a:rPr lang="en-US" sz="1600" b="1" dirty="0">
+                <a:solidFill>
+                  <a:srgbClr val="0D9488"/>
+                </a:solidFill>
+                <a:latin typeface="Trebuchet MS" pitchFamily="34" charset="0"/>
+                <a:ea typeface="Trebuchet MS" pitchFamily="34" charset="-122"/>
+                <a:cs typeface="Trebuchet MS" pitchFamily="34" charset="-120"/>
+              </a:rPr>
+              <a:t>·</a:t>
+            </a:r>
+            <a:endParaRPr lang="en-US" sz="1600" dirty="0"/>
+          </a:p>
+        </p:txBody>
+      </p:sp>
+      <p:sp>
+        <p:nvSpPr>
+          <p:cNvPr id="31" name="Shape 29"/>
+          <p:cNvSpPr/>
+          <p:nvPr/>
+        </p:nvSpPr>
+        <p:spPr>
+          <a:xfrm>
+            <a:off x="4370832" y="3364992"/>
+            <a:ext cx="1645920" cy="475488"/>
+          </a:xfrm>
+          <a:prstGeom prst="rect">
+            <a:avLst>
+              <a:gd name="adj" fmla="val 9615"/>
+            </a:avLst>
+          </a:prstGeom>
+          <a:solidFill>
+            <a:srgbClr val="FFFFFF"/>
+          </a:solidFill>
+          <a:ln w="12700">
+            <a:solidFill>
+              <a:srgbClr val="0D9488"/>
+            </a:solidFill>
+            <a:prstDash val="solid"/>
+          </a:ln>
+        </p:spPr>
+      </p:sp>
+      <p:sp>
+        <p:nvSpPr>
+          <p:cNvPr id="32" name="Text 30"/>
+          <p:cNvSpPr/>
+          <p:nvPr/>
+        </p:nvSpPr>
+        <p:spPr>
+          <a:xfrm>
+            <a:off x="4370832" y="3364992"/>
+            <a:ext cx="1645920" cy="475488"/>
+          </a:xfrm>
+          <a:prstGeom prst="rect">
+            <a:avLst/>
+          </a:prstGeom>
+          <a:noFill/>
+          <a:ln/>
+        </p:spPr>
+        <p:txBody>
+          <a:bodyPr wrap="square" lIns="0" tIns="0" rIns="0" bIns="0" rtlCol="0" anchor="ctr"/>
+          <a:lstStyle/>
+          <a:p>
+            <a:pPr algn="ctr" indent="0" marL="0">
+              <a:buNone/>
+            </a:pPr>
+            <a:r>
+              <a:rPr lang="en-US" sz="1400" b="1" dirty="0">
+                <a:solidFill>
+                  <a:srgbClr val="0D9488"/>
+                </a:solidFill>
+                <a:latin typeface="Trebuchet MS" pitchFamily="34" charset="0"/>
+                <a:ea typeface="Trebuchet MS" pitchFamily="34" charset="-122"/>
+                <a:cs typeface="Trebuchet MS" pitchFamily="34" charset="-120"/>
+              </a:rPr>
+              <a:t>lock</a:t>
+            </a:r>
+            <a:endParaRPr lang="en-US" sz="1400" dirty="0"/>
+          </a:p>
+        </p:txBody>
+      </p:sp>
+      <p:sp>
+        <p:nvSpPr>
+          <p:cNvPr id="33" name="Text 31"/>
+          <p:cNvSpPr/>
+          <p:nvPr/>
+        </p:nvSpPr>
+        <p:spPr>
+          <a:xfrm>
+            <a:off x="6016752" y="3364992"/>
+            <a:ext cx="411480" cy="475488"/>
+          </a:xfrm>
+          <a:prstGeom prst="rect">
+            <a:avLst/>
+          </a:prstGeom>
+          <a:noFill/>
+          <a:ln/>
+        </p:spPr>
+        <p:txBody>
+          <a:bodyPr wrap="square" lIns="0" tIns="0" rIns="0" bIns="0" rtlCol="0" anchor="ctr"/>
+          <a:lstStyle/>
+          <a:p>
+            <a:pPr algn="ctr" indent="0" marL="0">
+              <a:buNone/>
+            </a:pPr>
+            <a:r>
+              <a:rPr lang="en-US" sz="1600" b="1" dirty="0">
+                <a:solidFill>
+                  <a:srgbClr val="0D9488"/>
+                </a:solidFill>
+                <a:latin typeface="Trebuchet MS" pitchFamily="34" charset="0"/>
+                <a:ea typeface="Trebuchet MS" pitchFamily="34" charset="-122"/>
+                <a:cs typeface="Trebuchet MS" pitchFamily="34" charset="-120"/>
+              </a:rPr>
+              <a:t>·</a:t>
+            </a:r>
+            <a:endParaRPr lang="en-US" sz="1600" dirty="0"/>
+          </a:p>
+        </p:txBody>
+      </p:sp>
+      <p:sp>
+        <p:nvSpPr>
+          <p:cNvPr id="34" name="Shape 32"/>
+          <p:cNvSpPr/>
+          <p:nvPr/>
+        </p:nvSpPr>
+        <p:spPr>
+          <a:xfrm>
+            <a:off x="6428232" y="3364992"/>
+            <a:ext cx="1645920" cy="475488"/>
+          </a:xfrm>
+          <a:prstGeom prst="rect">
+            <a:avLst>
+              <a:gd name="adj" fmla="val 9615"/>
+            </a:avLst>
+          </a:prstGeom>
+          <a:solidFill>
+            <a:srgbClr val="FFFFFF"/>
+          </a:solidFill>
+          <a:ln w="12700">
+            <a:solidFill>
+              <a:srgbClr val="0D9488"/>
+            </a:solidFill>
+            <a:prstDash val="solid"/>
+          </a:ln>
+        </p:spPr>
+      </p:sp>
+      <p:sp>
+        <p:nvSpPr>
+          <p:cNvPr id="35" name="Text 33"/>
+          <p:cNvSpPr/>
+          <p:nvPr/>
+        </p:nvSpPr>
+        <p:spPr>
+          <a:xfrm>
+            <a:off x="6428232" y="3364992"/>
+            <a:ext cx="1645920" cy="475488"/>
+          </a:xfrm>
+          <a:prstGeom prst="rect">
+            <a:avLst/>
+          </a:prstGeom>
+          <a:noFill/>
+          <a:ln/>
+        </p:spPr>
+        <p:txBody>
+          <a:bodyPr wrap="square" lIns="0" tIns="0" rIns="0" bIns="0" rtlCol="0" anchor="ctr"/>
+          <a:lstStyle/>
+          <a:p>
+            <a:pPr algn="ctr" indent="0" marL="0">
+              <a:buNone/>
+            </a:pPr>
+            <a:r>
+              <a:rPr lang="en-US" sz="1400" b="1" dirty="0">
+                <a:solidFill>
+                  <a:srgbClr val="0D9488"/>
+                </a:solidFill>
+                <a:latin typeface="Trebuchet MS" pitchFamily="34" charset="0"/>
+                <a:ea typeface="Trebuchet MS" pitchFamily="34" charset="-122"/>
+                <a:cs typeface="Trebuchet MS" pitchFamily="34" charset="-120"/>
+              </a:rPr>
+              <a:t>ing</a:t>
+            </a:r>
+            <a:endParaRPr lang="en-US" sz="1400" dirty="0"/>
+          </a:p>
+        </p:txBody>
+      </p:sp>
+      <p:sp>
+        <p:nvSpPr>
+          <p:cNvPr id="36" name="Shape 34"/>
           <p:cNvSpPr/>
           <p:nvPr/>
         </p:nvSpPr>
@@ -30628,7 +31924,7 @@
       </p:sp>
       <p:sp>
         <p:nvSpPr>
-          <p:cNvPr id="28" name="Text 26"/>
+          <p:cNvPr id="37" name="Text 35"/>
           <p:cNvSpPr/>
           <p:nvPr/>
         </p:nvSpPr>
@@ -30667,18 +31963,18 @@
       </p:sp>
       <p:sp>
         <p:nvSpPr>
-          <p:cNvPr id="29" name="Shape 27"/>
+          <p:cNvPr id="38" name="Shape 36"/>
           <p:cNvSpPr/>
           <p:nvPr/>
         </p:nvSpPr>
         <p:spPr>
           <a:xfrm>
             <a:off x="1874520" y="4096512"/>
-            <a:ext cx="6903720" cy="804672"/>
+            <a:ext cx="6903720" cy="658368"/>
           </a:xfrm>
           <a:prstGeom prst="rect">
             <a:avLst>
-              <a:gd name="adj" fmla="val 6818"/>
+              <a:gd name="adj" fmla="val 8333"/>
             </a:avLst>
           </a:prstGeom>
           <a:solidFill>
@@ -30694,18 +31990,18 @@
       </p:sp>
       <p:sp>
         <p:nvSpPr>
-          <p:cNvPr id="30" name="Shape 28"/>
-          <p:cNvSpPr/>
-          <p:nvPr/>
-        </p:nvSpPr>
-        <p:spPr>
-          <a:xfrm>
-            <a:off x="2670048" y="4169664"/>
-            <a:ext cx="685800" cy="384048"/>
+          <p:cNvPr id="39" name="Shape 37"/>
+          <p:cNvSpPr/>
+          <p:nvPr/>
+        </p:nvSpPr>
+        <p:spPr>
+          <a:xfrm>
+            <a:off x="2124837" y="4169664"/>
+            <a:ext cx="685800" cy="475488"/>
           </a:xfrm>
           <a:prstGeom prst="rect">
             <a:avLst>
-              <a:gd name="adj" fmla="val 9524"/>
+              <a:gd name="adj" fmla="val 7692"/>
             </a:avLst>
           </a:prstGeom>
           <a:solidFill>
@@ -30721,14 +32017,14 @@
       </p:sp>
       <p:sp>
         <p:nvSpPr>
-          <p:cNvPr id="31" name="Text 29"/>
-          <p:cNvSpPr/>
-          <p:nvPr/>
-        </p:nvSpPr>
-        <p:spPr>
-          <a:xfrm>
-            <a:off x="2670048" y="4169664"/>
-            <a:ext cx="685800" cy="384048"/>
+          <p:cNvPr id="40" name="Text 38"/>
+          <p:cNvSpPr/>
+          <p:nvPr/>
+        </p:nvSpPr>
+        <p:spPr>
+          <a:xfrm>
+            <a:off x="2124837" y="4169664"/>
+            <a:ext cx="685800" cy="475488"/>
           </a:xfrm>
           <a:prstGeom prst="rect">
             <a:avLst/>
@@ -30752,7 +32048,7 @@
                 <a:ea typeface="Trebuchet MS" pitchFamily="34" charset="-122"/>
                 <a:cs typeface="Trebuchet MS" pitchFamily="34" charset="-120"/>
               </a:rPr>
-              <a:t>l</a:t>
+              <a:t>u</a:t>
             </a:r>
             <a:endParaRPr lang="en-US" sz="900" dirty="0"/>
           </a:p>
@@ -30760,18 +32056,18 @@
       </p:sp>
       <p:sp>
         <p:nvSpPr>
-          <p:cNvPr id="32" name="Shape 30"/>
-          <p:cNvSpPr/>
-          <p:nvPr/>
-        </p:nvSpPr>
-        <p:spPr>
-          <a:xfrm>
-            <a:off x="4123944" y="4169664"/>
-            <a:ext cx="685800" cy="384048"/>
+          <p:cNvPr id="41" name="Shape 39"/>
+          <p:cNvSpPr/>
+          <p:nvPr/>
+        </p:nvSpPr>
+        <p:spPr>
+          <a:xfrm>
+            <a:off x="3033522" y="4169664"/>
+            <a:ext cx="685800" cy="475488"/>
           </a:xfrm>
           <a:prstGeom prst="rect">
             <a:avLst>
-              <a:gd name="adj" fmla="val 9524"/>
+              <a:gd name="adj" fmla="val 7692"/>
             </a:avLst>
           </a:prstGeom>
           <a:solidFill>
@@ -30787,14 +32083,14 @@
       </p:sp>
       <p:sp>
         <p:nvSpPr>
-          <p:cNvPr id="33" name="Text 31"/>
-          <p:cNvSpPr/>
-          <p:nvPr/>
-        </p:nvSpPr>
-        <p:spPr>
-          <a:xfrm>
-            <a:off x="4123944" y="4169664"/>
-            <a:ext cx="685800" cy="384048"/>
+          <p:cNvPr id="42" name="Text 40"/>
+          <p:cNvSpPr/>
+          <p:nvPr/>
+        </p:nvSpPr>
+        <p:spPr>
+          <a:xfrm>
+            <a:off x="3033522" y="4169664"/>
+            <a:ext cx="685800" cy="475488"/>
           </a:xfrm>
           <a:prstGeom prst="rect">
             <a:avLst/>
@@ -30818,7 +32114,7 @@
                 <a:ea typeface="Trebuchet MS" pitchFamily="34" charset="-122"/>
                 <a:cs typeface="Trebuchet MS" pitchFamily="34" charset="-120"/>
               </a:rPr>
-              <a:t>o</a:t>
+              <a:t>n</a:t>
             </a:r>
             <a:endParaRPr lang="en-US" sz="900" dirty="0"/>
           </a:p>
@@ -30826,18 +32122,18 @@
       </p:sp>
       <p:sp>
         <p:nvSpPr>
-          <p:cNvPr id="34" name="Shape 32"/>
-          <p:cNvSpPr/>
-          <p:nvPr/>
-        </p:nvSpPr>
-        <p:spPr>
-          <a:xfrm>
-            <a:off x="5577840" y="4169664"/>
-            <a:ext cx="685800" cy="384048"/>
+          <p:cNvPr id="43" name="Shape 41"/>
+          <p:cNvSpPr/>
+          <p:nvPr/>
+        </p:nvSpPr>
+        <p:spPr>
+          <a:xfrm>
+            <a:off x="3942207" y="4169664"/>
+            <a:ext cx="685800" cy="475488"/>
           </a:xfrm>
           <a:prstGeom prst="rect">
             <a:avLst>
-              <a:gd name="adj" fmla="val 9524"/>
+              <a:gd name="adj" fmla="val 7692"/>
             </a:avLst>
           </a:prstGeom>
           <a:solidFill>
@@ -30853,14 +32149,14 @@
       </p:sp>
       <p:sp>
         <p:nvSpPr>
-          <p:cNvPr id="35" name="Text 33"/>
-          <p:cNvSpPr/>
-          <p:nvPr/>
-        </p:nvSpPr>
-        <p:spPr>
-          <a:xfrm>
-            <a:off x="5577840" y="4169664"/>
-            <a:ext cx="685800" cy="384048"/>
+          <p:cNvPr id="44" name="Text 42"/>
+          <p:cNvSpPr/>
+          <p:nvPr/>
+        </p:nvSpPr>
+        <p:spPr>
+          <a:xfrm>
+            <a:off x="3942207" y="4169664"/>
+            <a:ext cx="685800" cy="475488"/>
           </a:xfrm>
           <a:prstGeom prst="rect">
             <a:avLst/>
@@ -30884,7 +32180,7 @@
                 <a:ea typeface="Trebuchet MS" pitchFamily="34" charset="-122"/>
                 <a:cs typeface="Trebuchet MS" pitchFamily="34" charset="-120"/>
               </a:rPr>
-              <a:t>ck</a:t>
+              <a:t>l</a:t>
             </a:r>
             <a:endParaRPr lang="en-US" sz="900" dirty="0"/>
           </a:p>
@@ -30892,18 +32188,18 @@
       </p:sp>
       <p:sp>
         <p:nvSpPr>
-          <p:cNvPr id="36" name="Shape 34"/>
-          <p:cNvSpPr/>
-          <p:nvPr/>
-        </p:nvSpPr>
-        <p:spPr>
-          <a:xfrm>
-            <a:off x="7031736" y="4169664"/>
-            <a:ext cx="685800" cy="384048"/>
+          <p:cNvPr id="45" name="Shape 43"/>
+          <p:cNvSpPr/>
+          <p:nvPr/>
+        </p:nvSpPr>
+        <p:spPr>
+          <a:xfrm>
+            <a:off x="4850892" y="4169664"/>
+            <a:ext cx="685800" cy="475488"/>
           </a:xfrm>
           <a:prstGeom prst="rect">
             <a:avLst>
-              <a:gd name="adj" fmla="val 9524"/>
+              <a:gd name="adj" fmla="val 7692"/>
             </a:avLst>
           </a:prstGeom>
           <a:solidFill>
@@ -30919,14 +32215,14 @@
       </p:sp>
       <p:sp>
         <p:nvSpPr>
-          <p:cNvPr id="37" name="Text 35"/>
-          <p:cNvSpPr/>
-          <p:nvPr/>
-        </p:nvSpPr>
-        <p:spPr>
-          <a:xfrm>
-            <a:off x="7031736" y="4169664"/>
-            <a:ext cx="685800" cy="384048"/>
+          <p:cNvPr id="46" name="Text 44"/>
+          <p:cNvSpPr/>
+          <p:nvPr/>
+        </p:nvSpPr>
+        <p:spPr>
+          <a:xfrm>
+            <a:off x="4850892" y="4169664"/>
+            <a:ext cx="685800" cy="475488"/>
           </a:xfrm>
           <a:prstGeom prst="rect">
             <a:avLst/>
@@ -30950,7 +32246,7 @@
                 <a:ea typeface="Trebuchet MS" pitchFamily="34" charset="-122"/>
                 <a:cs typeface="Trebuchet MS" pitchFamily="34" charset="-120"/>
               </a:rPr>
-              <a:t>ed</a:t>
+              <a:t>o</a:t>
             </a:r>
             <a:endParaRPr lang="en-US" sz="900" dirty="0"/>
           </a:p>
@@ -30958,40 +32254,199 @@
       </p:sp>
       <p:sp>
         <p:nvSpPr>
-          <p:cNvPr id="38" name="Text 36"/>
-          <p:cNvSpPr/>
-          <p:nvPr/>
-        </p:nvSpPr>
-        <p:spPr>
-          <a:xfrm>
-            <a:off x="7031736" y="4572000"/>
-            <a:ext cx="685800" cy="219456"/>
-          </a:xfrm>
-          <a:prstGeom prst="rect">
-            <a:avLst/>
-          </a:prstGeom>
-          <a:noFill/>
-          <a:ln/>
-        </p:spPr>
-        <p:txBody>
-          <a:bodyPr wrap="square" lIns="0" tIns="0" rIns="0" bIns="0" rtlCol="0" anchor="t"/>
-          <a:lstStyle/>
-          <a:p>
-            <a:pPr algn="ctr" indent="0" marL="0">
-              <a:buNone/>
-            </a:pPr>
-            <a:r>
-              <a:rPr lang="en-US" sz="750" i="1" dirty="0">
-                <a:solidFill>
-                  <a:srgbClr val="94A3B8"/>
-                </a:solidFill>
-                <a:latin typeface="Calibri" pitchFamily="34" charset="0"/>
-                <a:ea typeface="Calibri" pitchFamily="34" charset="-122"/>
-                <a:cs typeface="Calibri" pitchFamily="34" charset="-120"/>
-              </a:rPr>
-              <a:t>/t/</a:t>
-            </a:r>
-            <a:endParaRPr lang="en-US" sz="750" dirty="0"/>
+          <p:cNvPr id="47" name="Shape 45"/>
+          <p:cNvSpPr/>
+          <p:nvPr/>
+        </p:nvSpPr>
+        <p:spPr>
+          <a:xfrm>
+            <a:off x="5759577" y="4169664"/>
+            <a:ext cx="685800" cy="475488"/>
+          </a:xfrm>
+          <a:prstGeom prst="rect">
+            <a:avLst>
+              <a:gd name="adj" fmla="val 7692"/>
+            </a:avLst>
+          </a:prstGeom>
+          <a:solidFill>
+            <a:srgbClr val="FFFFFF"/>
+          </a:solidFill>
+          <a:ln w="12700">
+            <a:solidFill>
+              <a:srgbClr val="DB2777"/>
+            </a:solidFill>
+            <a:prstDash val="solid"/>
+          </a:ln>
+        </p:spPr>
+      </p:sp>
+      <p:sp>
+        <p:nvSpPr>
+          <p:cNvPr id="48" name="Text 46"/>
+          <p:cNvSpPr/>
+          <p:nvPr/>
+        </p:nvSpPr>
+        <p:spPr>
+          <a:xfrm>
+            <a:off x="5759577" y="4169664"/>
+            <a:ext cx="685800" cy="475488"/>
+          </a:xfrm>
+          <a:prstGeom prst="rect">
+            <a:avLst/>
+          </a:prstGeom>
+          <a:noFill/>
+          <a:ln/>
+        </p:spPr>
+        <p:txBody>
+          <a:bodyPr wrap="square" lIns="0" tIns="0" rIns="0" bIns="0" rtlCol="0" anchor="ctr"/>
+          <a:lstStyle/>
+          <a:p>
+            <a:pPr algn="ctr" indent="0" marL="0">
+              <a:buNone/>
+            </a:pPr>
+            <a:r>
+              <a:rPr lang="en-US" sz="900" b="1" dirty="0">
+                <a:solidFill>
+                  <a:srgbClr val="9D174D"/>
+                </a:solidFill>
+                <a:latin typeface="Trebuchet MS" pitchFamily="34" charset="0"/>
+                <a:ea typeface="Trebuchet MS" pitchFamily="34" charset="-122"/>
+                <a:cs typeface="Trebuchet MS" pitchFamily="34" charset="-120"/>
+              </a:rPr>
+              <a:t>ck</a:t>
+            </a:r>
+            <a:endParaRPr lang="en-US" sz="900" dirty="0"/>
+          </a:p>
+        </p:txBody>
+      </p:sp>
+      <p:sp>
+        <p:nvSpPr>
+          <p:cNvPr id="49" name="Shape 47"/>
+          <p:cNvSpPr/>
+          <p:nvPr/>
+        </p:nvSpPr>
+        <p:spPr>
+          <a:xfrm>
+            <a:off x="6668262" y="4169664"/>
+            <a:ext cx="685800" cy="475488"/>
+          </a:xfrm>
+          <a:prstGeom prst="rect">
+            <a:avLst>
+              <a:gd name="adj" fmla="val 7692"/>
+            </a:avLst>
+          </a:prstGeom>
+          <a:solidFill>
+            <a:srgbClr val="FFFFFF"/>
+          </a:solidFill>
+          <a:ln w="12700">
+            <a:solidFill>
+              <a:srgbClr val="DB2777"/>
+            </a:solidFill>
+            <a:prstDash val="solid"/>
+          </a:ln>
+        </p:spPr>
+      </p:sp>
+      <p:sp>
+        <p:nvSpPr>
+          <p:cNvPr id="50" name="Text 48"/>
+          <p:cNvSpPr/>
+          <p:nvPr/>
+        </p:nvSpPr>
+        <p:spPr>
+          <a:xfrm>
+            <a:off x="6668262" y="4169664"/>
+            <a:ext cx="685800" cy="475488"/>
+          </a:xfrm>
+          <a:prstGeom prst="rect">
+            <a:avLst/>
+          </a:prstGeom>
+          <a:noFill/>
+          <a:ln/>
+        </p:spPr>
+        <p:txBody>
+          <a:bodyPr wrap="square" lIns="0" tIns="0" rIns="0" bIns="0" rtlCol="0" anchor="ctr"/>
+          <a:lstStyle/>
+          <a:p>
+            <a:pPr algn="ctr" indent="0" marL="0">
+              <a:buNone/>
+            </a:pPr>
+            <a:r>
+              <a:rPr lang="en-US" sz="900" b="1" dirty="0">
+                <a:solidFill>
+                  <a:srgbClr val="9D174D"/>
+                </a:solidFill>
+                <a:latin typeface="Trebuchet MS" pitchFamily="34" charset="0"/>
+                <a:ea typeface="Trebuchet MS" pitchFamily="34" charset="-122"/>
+                <a:cs typeface="Trebuchet MS" pitchFamily="34" charset="-120"/>
+              </a:rPr>
+              <a:t>i</a:t>
+            </a:r>
+            <a:endParaRPr lang="en-US" sz="900" dirty="0"/>
+          </a:p>
+        </p:txBody>
+      </p:sp>
+      <p:sp>
+        <p:nvSpPr>
+          <p:cNvPr id="51" name="Shape 49"/>
+          <p:cNvSpPr/>
+          <p:nvPr/>
+        </p:nvSpPr>
+        <p:spPr>
+          <a:xfrm>
+            <a:off x="7576947" y="4169664"/>
+            <a:ext cx="685800" cy="475488"/>
+          </a:xfrm>
+          <a:prstGeom prst="rect">
+            <a:avLst>
+              <a:gd name="adj" fmla="val 7692"/>
+            </a:avLst>
+          </a:prstGeom>
+          <a:solidFill>
+            <a:srgbClr val="FFFFFF"/>
+          </a:solidFill>
+          <a:ln w="12700">
+            <a:solidFill>
+              <a:srgbClr val="DB2777"/>
+            </a:solidFill>
+            <a:prstDash val="solid"/>
+          </a:ln>
+        </p:spPr>
+      </p:sp>
+      <p:sp>
+        <p:nvSpPr>
+          <p:cNvPr id="52" name="Text 50"/>
+          <p:cNvSpPr/>
+          <p:nvPr/>
+        </p:nvSpPr>
+        <p:spPr>
+          <a:xfrm>
+            <a:off x="7576947" y="4169664"/>
+            <a:ext cx="685800" cy="475488"/>
+          </a:xfrm>
+          <a:prstGeom prst="rect">
+            <a:avLst/>
+          </a:prstGeom>
+          <a:noFill/>
+          <a:ln/>
+        </p:spPr>
+        <p:txBody>
+          <a:bodyPr wrap="square" lIns="0" tIns="0" rIns="0" bIns="0" rtlCol="0" anchor="ctr"/>
+          <a:lstStyle/>
+          <a:p>
+            <a:pPr algn="ctr" indent="0" marL="0">
+              <a:buNone/>
+            </a:pPr>
+            <a:r>
+              <a:rPr lang="en-US" sz="900" b="1" dirty="0">
+                <a:solidFill>
+                  <a:srgbClr val="9D174D"/>
+                </a:solidFill>
+                <a:latin typeface="Trebuchet MS" pitchFamily="34" charset="0"/>
+                <a:ea typeface="Trebuchet MS" pitchFamily="34" charset="-122"/>
+                <a:cs typeface="Trebuchet MS" pitchFamily="34" charset="-120"/>
+              </a:rPr>
+              <a:t>ng</a:t>
+            </a:r>
+            <a:endParaRPr lang="en-US" sz="900" dirty="0"/>
           </a:p>
         </p:txBody>
       </p:sp>
@@ -31281,7 +32736,7 @@
                 <a:ea typeface="Calibri" pitchFamily="34" charset="-122"/>
                 <a:cs typeface="Calibri" pitchFamily="34" charset="-120"/>
               </a:rPr>
-              <a:t>Word Labs  •  wordlabs.app  •  Root: 'lock' = to fasten or secure shut</a:t>
+              <a:t>Word Labs  •  wordlabs.app  •  Root: 'lock' = to fasten with a key; a fastening device</a:t>
             </a:r>
             <a:endParaRPr lang="en-US" sz="800" dirty="0"/>
           </a:p>
@@ -32450,7 +33905,7 @@
                 <a:ea typeface="Calibri" pitchFamily="34" charset="-122"/>
                 <a:cs typeface="Calibri" pitchFamily="34" charset="-120"/>
               </a:rPr>
-              <a:t>Word Labs  •  wordlabs.app  •  Root: 'lock' = to fasten or secure shut</a:t>
+              <a:t>Word Labs  •  wordlabs.app  •  Root: 'lock' = to fasten with a key; a fastening device</a:t>
             </a:r>
             <a:endParaRPr lang="en-US" sz="800" dirty="0"/>
           </a:p>
@@ -32900,7 +34355,7 @@
             <a:avLst/>
           </a:prstGeom>
           <a:solidFill>
-            <a:srgbClr val="DDD6FE"/>
+            <a:srgbClr val="F1F5F9"/>
           </a:solidFill>
           <a:ln w="12700">
             <a:solidFill>
@@ -32912,14 +34367,64 @@
       </p:sp>
       <p:sp>
         <p:nvSpPr>
-          <p:cNvPr id="24" name="Text 22"/>
-          <p:cNvSpPr/>
-          <p:nvPr/>
-        </p:nvSpPr>
-        <p:spPr>
-          <a:xfrm>
-            <a:off x="365760" y="1984248"/>
-            <a:ext cx="2468880" cy="402336"/>
+          <p:cNvPr id="24" name="Shape 22"/>
+          <p:cNvSpPr/>
+          <p:nvPr/>
+        </p:nvSpPr>
+        <p:spPr>
+          <a:xfrm>
+            <a:off x="2971800" y="1984248"/>
+            <a:ext cx="2834640" cy="402336"/>
+          </a:xfrm>
+          <a:prstGeom prst="rect">
+            <a:avLst/>
+          </a:prstGeom>
+          <a:solidFill>
+            <a:srgbClr val="F1F5F9"/>
+          </a:solidFill>
+          <a:ln w="12700">
+            <a:solidFill>
+              <a:srgbClr val="E2E8F0"/>
+            </a:solidFill>
+            <a:prstDash val="solid"/>
+          </a:ln>
+        </p:spPr>
+      </p:sp>
+      <p:sp>
+        <p:nvSpPr>
+          <p:cNvPr id="25" name="Shape 23"/>
+          <p:cNvSpPr/>
+          <p:nvPr/>
+        </p:nvSpPr>
+        <p:spPr>
+          <a:xfrm>
+            <a:off x="5943600" y="1984248"/>
+            <a:ext cx="2834640" cy="402336"/>
+          </a:xfrm>
+          <a:prstGeom prst="rect">
+            <a:avLst/>
+          </a:prstGeom>
+          <a:solidFill>
+            <a:srgbClr val="FCE7F3"/>
+          </a:solidFill>
+          <a:ln w="12700">
+            <a:solidFill>
+              <a:srgbClr val="E2E8F0"/>
+            </a:solidFill>
+            <a:prstDash val="solid"/>
+          </a:ln>
+        </p:spPr>
+      </p:sp>
+      <p:sp>
+        <p:nvSpPr>
+          <p:cNvPr id="26" name="Text 24"/>
+          <p:cNvSpPr/>
+          <p:nvPr/>
+        </p:nvSpPr>
+        <p:spPr>
+          <a:xfrm>
+            <a:off x="5943600" y="1984248"/>
+            <a:ext cx="2834640" cy="402336"/>
           </a:xfrm>
           <a:prstGeom prst="rect">
             <a:avLst/>
@@ -32937,13 +34442,13 @@
             <a:r>
               <a:rPr lang="en-US" sz="1300" b="1" dirty="0">
                 <a:solidFill>
-                  <a:srgbClr val="4C1D95"/>
+                  <a:srgbClr val="9D174D"/>
                 </a:solidFill>
                 <a:latin typeface="Trebuchet MS" pitchFamily="34" charset="0"/>
                 <a:ea typeface="Trebuchet MS" pitchFamily="34" charset="-122"/>
                 <a:cs typeface="Trebuchet MS" pitchFamily="34" charset="-120"/>
               </a:rPr>
-              <a:t>dead-</a:t>
+              <a:t>-er</a:t>
             </a:r>
             <a:endParaRPr lang="en-US" sz="1300" dirty="0"/>
           </a:p>
@@ -32951,20 +34456,45 @@
       </p:sp>
       <p:sp>
         <p:nvSpPr>
-          <p:cNvPr id="25" name="Shape 23"/>
-          <p:cNvSpPr/>
-          <p:nvPr/>
-        </p:nvSpPr>
-        <p:spPr>
-          <a:xfrm>
-            <a:off x="2971800" y="1984248"/>
+          <p:cNvPr id="27" name="Shape 25"/>
+          <p:cNvSpPr/>
+          <p:nvPr/>
+        </p:nvSpPr>
+        <p:spPr>
+          <a:xfrm>
+            <a:off x="365760" y="2404872"/>
+            <a:ext cx="2468880" cy="402336"/>
+          </a:xfrm>
+          <a:prstGeom prst="rect">
+            <a:avLst/>
+          </a:prstGeom>
+          <a:solidFill>
+            <a:srgbClr val="F8FAFC"/>
+          </a:solidFill>
+          <a:ln w="12700">
+            <a:solidFill>
+              <a:srgbClr val="E2E8F0"/>
+            </a:solidFill>
+            <a:prstDash val="solid"/>
+          </a:ln>
+        </p:spPr>
+      </p:sp>
+      <p:sp>
+        <p:nvSpPr>
+          <p:cNvPr id="28" name="Shape 26"/>
+          <p:cNvSpPr/>
+          <p:nvPr/>
+        </p:nvSpPr>
+        <p:spPr>
+          <a:xfrm>
+            <a:off x="2971800" y="2404872"/>
             <a:ext cx="2834640" cy="402336"/>
           </a:xfrm>
           <a:prstGeom prst="rect">
             <a:avLst/>
           </a:prstGeom>
           <a:solidFill>
-            <a:srgbClr val="F1F5F9"/>
+            <a:srgbClr val="F8FAFC"/>
           </a:solidFill>
           <a:ln w="12700">
             <a:solidFill>
@@ -32976,13 +34506,13 @@
       </p:sp>
       <p:sp>
         <p:nvSpPr>
-          <p:cNvPr id="26" name="Shape 24"/>
-          <p:cNvSpPr/>
-          <p:nvPr/>
-        </p:nvSpPr>
-        <p:spPr>
-          <a:xfrm>
-            <a:off x="5943600" y="1984248"/>
+          <p:cNvPr id="29" name="Shape 27"/>
+          <p:cNvSpPr/>
+          <p:nvPr/>
+        </p:nvSpPr>
+        <p:spPr>
+          <a:xfrm>
+            <a:off x="5943600" y="2404872"/>
             <a:ext cx="2834640" cy="402336"/>
           </a:xfrm>
           <a:prstGeom prst="rect">
@@ -33001,13 +34531,13 @@
       </p:sp>
       <p:sp>
         <p:nvSpPr>
-          <p:cNvPr id="27" name="Text 25"/>
-          <p:cNvSpPr/>
-          <p:nvPr/>
-        </p:nvSpPr>
-        <p:spPr>
-          <a:xfrm>
-            <a:off x="5943600" y="1984248"/>
+          <p:cNvPr id="30" name="Text 28"/>
+          <p:cNvSpPr/>
+          <p:nvPr/>
+        </p:nvSpPr>
+        <p:spPr>
+          <a:xfrm>
+            <a:off x="5943600" y="2404872"/>
             <a:ext cx="2834640" cy="402336"/>
           </a:xfrm>
           <a:prstGeom prst="rect">
@@ -33040,20 +34570,20 @@
       </p:sp>
       <p:sp>
         <p:nvSpPr>
-          <p:cNvPr id="28" name="Shape 26"/>
-          <p:cNvSpPr/>
-          <p:nvPr/>
-        </p:nvSpPr>
-        <p:spPr>
-          <a:xfrm>
-            <a:off x="365760" y="2404872"/>
+          <p:cNvPr id="31" name="Shape 29"/>
+          <p:cNvSpPr/>
+          <p:nvPr/>
+        </p:nvSpPr>
+        <p:spPr>
+          <a:xfrm>
+            <a:off x="365760" y="2825496"/>
             <a:ext cx="2468880" cy="402336"/>
           </a:xfrm>
           <a:prstGeom prst="rect">
             <a:avLst/>
           </a:prstGeom>
           <a:solidFill>
-            <a:srgbClr val="DDD6FE"/>
+            <a:srgbClr val="F1F5F9"/>
           </a:solidFill>
           <a:ln w="12700">
             <a:solidFill>
@@ -33065,14 +34595,64 @@
       </p:sp>
       <p:sp>
         <p:nvSpPr>
-          <p:cNvPr id="29" name="Text 27"/>
-          <p:cNvSpPr/>
-          <p:nvPr/>
-        </p:nvSpPr>
-        <p:spPr>
-          <a:xfrm>
-            <a:off x="365760" y="2404872"/>
-            <a:ext cx="2468880" cy="402336"/>
+          <p:cNvPr id="32" name="Shape 30"/>
+          <p:cNvSpPr/>
+          <p:nvPr/>
+        </p:nvSpPr>
+        <p:spPr>
+          <a:xfrm>
+            <a:off x="2971800" y="2825496"/>
+            <a:ext cx="2834640" cy="402336"/>
+          </a:xfrm>
+          <a:prstGeom prst="rect">
+            <a:avLst/>
+          </a:prstGeom>
+          <a:solidFill>
+            <a:srgbClr val="F1F5F9"/>
+          </a:solidFill>
+          <a:ln w="12700">
+            <a:solidFill>
+              <a:srgbClr val="E2E8F0"/>
+            </a:solidFill>
+            <a:prstDash val="solid"/>
+          </a:ln>
+        </p:spPr>
+      </p:sp>
+      <p:sp>
+        <p:nvSpPr>
+          <p:cNvPr id="33" name="Shape 31"/>
+          <p:cNvSpPr/>
+          <p:nvPr/>
+        </p:nvSpPr>
+        <p:spPr>
+          <a:xfrm>
+            <a:off x="5943600" y="2825496"/>
+            <a:ext cx="2834640" cy="402336"/>
+          </a:xfrm>
+          <a:prstGeom prst="rect">
+            <a:avLst/>
+          </a:prstGeom>
+          <a:solidFill>
+            <a:srgbClr val="FCE7F3"/>
+          </a:solidFill>
+          <a:ln w="12700">
+            <a:solidFill>
+              <a:srgbClr val="E2E8F0"/>
+            </a:solidFill>
+            <a:prstDash val="solid"/>
+          </a:ln>
+        </p:spPr>
+      </p:sp>
+      <p:sp>
+        <p:nvSpPr>
+          <p:cNvPr id="34" name="Text 32"/>
+          <p:cNvSpPr/>
+          <p:nvPr/>
+        </p:nvSpPr>
+        <p:spPr>
+          <a:xfrm>
+            <a:off x="5943600" y="2825496"/>
+            <a:ext cx="2834640" cy="402336"/>
           </a:xfrm>
           <a:prstGeom prst="rect">
             <a:avLst/>
@@ -33090,13 +34670,13 @@
             <a:r>
               <a:rPr lang="en-US" sz="1300" b="1" dirty="0">
                 <a:solidFill>
-                  <a:srgbClr val="4C1D95"/>
+                  <a:srgbClr val="9D174D"/>
                 </a:solidFill>
                 <a:latin typeface="Trebuchet MS" pitchFamily="34" charset="0"/>
                 <a:ea typeface="Trebuchet MS" pitchFamily="34" charset="-122"/>
                 <a:cs typeface="Trebuchet MS" pitchFamily="34" charset="-120"/>
               </a:rPr>
-              <a:t>pad-</a:t>
+              <a:t>-s</a:t>
             </a:r>
             <a:endParaRPr lang="en-US" sz="1300" dirty="0"/>
           </a:p>
@@ -33104,64 +34684,14 @@
       </p:sp>
       <p:sp>
         <p:nvSpPr>
-          <p:cNvPr id="30" name="Shape 28"/>
-          <p:cNvSpPr/>
-          <p:nvPr/>
-        </p:nvSpPr>
-        <p:spPr>
-          <a:xfrm>
-            <a:off x="2971800" y="2404872"/>
-            <a:ext cx="2834640" cy="402336"/>
-          </a:xfrm>
-          <a:prstGeom prst="rect">
-            <a:avLst/>
-          </a:prstGeom>
-          <a:solidFill>
-            <a:srgbClr val="F8FAFC"/>
-          </a:solidFill>
-          <a:ln w="12700">
-            <a:solidFill>
-              <a:srgbClr val="E2E8F0"/>
-            </a:solidFill>
-            <a:prstDash val="solid"/>
-          </a:ln>
-        </p:spPr>
-      </p:sp>
-      <p:sp>
-        <p:nvSpPr>
-          <p:cNvPr id="31" name="Shape 29"/>
-          <p:cNvSpPr/>
-          <p:nvPr/>
-        </p:nvSpPr>
-        <p:spPr>
-          <a:xfrm>
-            <a:off x="5943600" y="2404872"/>
-            <a:ext cx="2834640" cy="402336"/>
-          </a:xfrm>
-          <a:prstGeom prst="rect">
-            <a:avLst/>
-          </a:prstGeom>
-          <a:solidFill>
-            <a:srgbClr val="FCE7F3"/>
-          </a:solidFill>
-          <a:ln w="12700">
-            <a:solidFill>
-              <a:srgbClr val="E2E8F0"/>
-            </a:solidFill>
-            <a:prstDash val="solid"/>
-          </a:ln>
-        </p:spPr>
-      </p:sp>
-      <p:sp>
-        <p:nvSpPr>
-          <p:cNvPr id="32" name="Text 30"/>
-          <p:cNvSpPr/>
-          <p:nvPr/>
-        </p:nvSpPr>
-        <p:spPr>
-          <a:xfrm>
-            <a:off x="5943600" y="2404872"/>
-            <a:ext cx="2834640" cy="402336"/>
+          <p:cNvPr id="35" name="Text 33"/>
+          <p:cNvSpPr/>
+          <p:nvPr/>
+        </p:nvSpPr>
+        <p:spPr>
+          <a:xfrm>
+            <a:off x="365760" y="3611880"/>
+            <a:ext cx="1828800" cy="347472"/>
           </a:xfrm>
           <a:prstGeom prst="rect">
             <a:avLst/>
@@ -33173,59 +34703,61 @@
           <a:bodyPr wrap="square" lIns="0" tIns="0" rIns="0" bIns="0" rtlCol="0" anchor="ctr"/>
           <a:lstStyle/>
           <a:p>
-            <a:pPr algn="ctr" indent="0" marL="0">
-              <a:buNone/>
-            </a:pPr>
-            <a:r>
-              <a:rPr lang="en-US" sz="1300" b="1" dirty="0">
-                <a:solidFill>
-                  <a:srgbClr val="9D174D"/>
+            <a:pPr algn="l" indent="0" marL="0">
+              <a:buNone/>
+            </a:pPr>
+            <a:r>
+              <a:rPr lang="en-US" sz="1200" b="1" dirty="0">
+                <a:solidFill>
+                  <a:srgbClr val="0F172A"/>
                 </a:solidFill>
                 <a:latin typeface="Trebuchet MS" pitchFamily="34" charset="0"/>
                 <a:ea typeface="Trebuchet MS" pitchFamily="34" charset="-122"/>
                 <a:cs typeface="Trebuchet MS" pitchFamily="34" charset="-120"/>
               </a:rPr>
-              <a:t>-s</a:t>
-            </a:r>
-            <a:endParaRPr lang="en-US" sz="1300" dirty="0"/>
-          </a:p>
-        </p:txBody>
-      </p:sp>
-      <p:sp>
-        <p:nvSpPr>
-          <p:cNvPr id="33" name="Shape 31"/>
-          <p:cNvSpPr/>
-          <p:nvPr/>
-        </p:nvSpPr>
-        <p:spPr>
-          <a:xfrm>
-            <a:off x="365760" y="2825496"/>
-            <a:ext cx="2468880" cy="402336"/>
-          </a:xfrm>
-          <a:prstGeom prst="rect">
-            <a:avLst/>
-          </a:prstGeom>
-          <a:solidFill>
-            <a:srgbClr val="DDD6FE"/>
-          </a:solidFill>
-          <a:ln w="12700">
-            <a:solidFill>
-              <a:srgbClr val="E2E8F0"/>
-            </a:solidFill>
-            <a:prstDash val="solid"/>
-          </a:ln>
-        </p:spPr>
-      </p:sp>
-      <p:sp>
-        <p:nvSpPr>
-          <p:cNvPr id="34" name="Text 32"/>
-          <p:cNvSpPr/>
-          <p:nvPr/>
-        </p:nvSpPr>
-        <p:spPr>
-          <a:xfrm>
-            <a:off x="365760" y="2825496"/>
-            <a:ext cx="2468880" cy="402336"/>
+              <a:t>Sample words:</a:t>
+            </a:r>
+            <a:endParaRPr lang="en-US" sz="1200" dirty="0"/>
+          </a:p>
+        </p:txBody>
+      </p:sp>
+      <p:sp>
+        <p:nvSpPr>
+          <p:cNvPr id="36" name="Shape 34"/>
+          <p:cNvSpPr/>
+          <p:nvPr/>
+        </p:nvSpPr>
+        <p:spPr>
+          <a:xfrm>
+            <a:off x="365760" y="4023360"/>
+            <a:ext cx="2011680" cy="402336"/>
+          </a:xfrm>
+          <a:prstGeom prst="rect">
+            <a:avLst>
+              <a:gd name="adj" fmla="val 13636"/>
+            </a:avLst>
+          </a:prstGeom>
+          <a:solidFill>
+            <a:srgbClr val="EEF2FF"/>
+          </a:solidFill>
+          <a:ln w="12700">
+            <a:solidFill>
+              <a:srgbClr val="6366F1"/>
+            </a:solidFill>
+            <a:prstDash val="solid"/>
+          </a:ln>
+        </p:spPr>
+      </p:sp>
+      <p:sp>
+        <p:nvSpPr>
+          <p:cNvPr id="37" name="Text 35"/>
+          <p:cNvSpPr/>
+          <p:nvPr/>
+        </p:nvSpPr>
+        <p:spPr>
+          <a:xfrm>
+            <a:off x="365760" y="4023360"/>
+            <a:ext cx="2011680" cy="402336"/>
           </a:xfrm>
           <a:prstGeom prst="rect">
             <a:avLst/>
@@ -33241,80 +34773,57 @@
               <a:buNone/>
             </a:pPr>
             <a:r>
-              <a:rPr lang="en-US" sz="1300" b="1" dirty="0">
-                <a:solidFill>
-                  <a:srgbClr val="4C1D95"/>
+              <a:rPr lang="en-US" sz="1200" b="1" dirty="0">
+                <a:solidFill>
+                  <a:srgbClr val="4338CA"/>
                 </a:solidFill>
                 <a:latin typeface="Trebuchet MS" pitchFamily="34" charset="0"/>
                 <a:ea typeface="Trebuchet MS" pitchFamily="34" charset="-122"/>
                 <a:cs typeface="Trebuchet MS" pitchFamily="34" charset="-120"/>
               </a:rPr>
-              <a:t>grid-</a:t>
-            </a:r>
-            <a:endParaRPr lang="en-US" sz="1300" dirty="0"/>
-          </a:p>
-        </p:txBody>
-      </p:sp>
-      <p:sp>
-        <p:nvSpPr>
-          <p:cNvPr id="35" name="Shape 33"/>
-          <p:cNvSpPr/>
-          <p:nvPr/>
-        </p:nvSpPr>
-        <p:spPr>
-          <a:xfrm>
-            <a:off x="2971800" y="2825496"/>
-            <a:ext cx="2834640" cy="402336"/>
-          </a:xfrm>
-          <a:prstGeom prst="rect">
-            <a:avLst/>
-          </a:prstGeom>
-          <a:solidFill>
-            <a:srgbClr val="F1F5F9"/>
-          </a:solidFill>
-          <a:ln w="12700">
-            <a:solidFill>
-              <a:srgbClr val="E2E8F0"/>
-            </a:solidFill>
-            <a:prstDash val="solid"/>
-          </a:ln>
-        </p:spPr>
-      </p:sp>
-      <p:sp>
-        <p:nvSpPr>
-          <p:cNvPr id="36" name="Shape 34"/>
-          <p:cNvSpPr/>
-          <p:nvPr/>
-        </p:nvSpPr>
-        <p:spPr>
-          <a:xfrm>
-            <a:off x="5943600" y="2825496"/>
-            <a:ext cx="2834640" cy="402336"/>
-          </a:xfrm>
-          <a:prstGeom prst="rect">
-            <a:avLst/>
-          </a:prstGeom>
-          <a:solidFill>
-            <a:srgbClr val="FCE7F3"/>
-          </a:solidFill>
-          <a:ln w="12700">
-            <a:solidFill>
-              <a:srgbClr val="E2E8F0"/>
-            </a:solidFill>
-            <a:prstDash val="solid"/>
-          </a:ln>
-        </p:spPr>
-      </p:sp>
-      <p:sp>
-        <p:nvSpPr>
-          <p:cNvPr id="37" name="Text 35"/>
-          <p:cNvSpPr/>
-          <p:nvPr/>
-        </p:nvSpPr>
-        <p:spPr>
-          <a:xfrm>
-            <a:off x="5943600" y="2825496"/>
-            <a:ext cx="2834640" cy="402336"/>
+              <a:t>lock</a:t>
+            </a:r>
+            <a:endParaRPr lang="en-US" sz="1200" dirty="0"/>
+          </a:p>
+        </p:txBody>
+      </p:sp>
+      <p:sp>
+        <p:nvSpPr>
+          <p:cNvPr id="38" name="Shape 36"/>
+          <p:cNvSpPr/>
+          <p:nvPr/>
+        </p:nvSpPr>
+        <p:spPr>
+          <a:xfrm>
+            <a:off x="2542032" y="4023360"/>
+            <a:ext cx="2011680" cy="402336"/>
+          </a:xfrm>
+          <a:prstGeom prst="rect">
+            <a:avLst>
+              <a:gd name="adj" fmla="val 13636"/>
+            </a:avLst>
+          </a:prstGeom>
+          <a:solidFill>
+            <a:srgbClr val="EEF2FF"/>
+          </a:solidFill>
+          <a:ln w="12700">
+            <a:solidFill>
+              <a:srgbClr val="6366F1"/>
+            </a:solidFill>
+            <a:prstDash val="solid"/>
+          </a:ln>
+        </p:spPr>
+      </p:sp>
+      <p:sp>
+        <p:nvSpPr>
+          <p:cNvPr id="39" name="Text 37"/>
+          <p:cNvSpPr/>
+          <p:nvPr/>
+        </p:nvSpPr>
+        <p:spPr>
+          <a:xfrm>
+            <a:off x="2542032" y="4023360"/>
+            <a:ext cx="2011680" cy="402336"/>
           </a:xfrm>
           <a:prstGeom prst="rect">
             <a:avLst/>
@@ -33330,55 +34839,57 @@
               <a:buNone/>
             </a:pPr>
             <a:r>
-              <a:rPr lang="en-US" sz="1300" b="1" dirty="0">
-                <a:solidFill>
-                  <a:srgbClr val="9D174D"/>
+              <a:rPr lang="en-US" sz="1200" b="1" dirty="0">
+                <a:solidFill>
+                  <a:srgbClr val="4338CA"/>
                 </a:solidFill>
                 <a:latin typeface="Trebuchet MS" pitchFamily="34" charset="0"/>
                 <a:ea typeface="Trebuchet MS" pitchFamily="34" charset="-122"/>
                 <a:cs typeface="Trebuchet MS" pitchFamily="34" charset="-120"/>
               </a:rPr>
-              <a:t>-er</a:t>
-            </a:r>
-            <a:endParaRPr lang="en-US" sz="1300" dirty="0"/>
-          </a:p>
-        </p:txBody>
-      </p:sp>
-      <p:sp>
-        <p:nvSpPr>
-          <p:cNvPr id="38" name="Shape 36"/>
-          <p:cNvSpPr/>
-          <p:nvPr/>
-        </p:nvSpPr>
-        <p:spPr>
-          <a:xfrm>
-            <a:off x="365760" y="3246120"/>
-            <a:ext cx="2468880" cy="402336"/>
-          </a:xfrm>
-          <a:prstGeom prst="rect">
-            <a:avLst/>
-          </a:prstGeom>
-          <a:solidFill>
-            <a:srgbClr val="DDD6FE"/>
-          </a:solidFill>
-          <a:ln w="12700">
-            <a:solidFill>
-              <a:srgbClr val="E2E8F0"/>
-            </a:solidFill>
-            <a:prstDash val="solid"/>
-          </a:ln>
-        </p:spPr>
-      </p:sp>
-      <p:sp>
-        <p:nvSpPr>
-          <p:cNvPr id="39" name="Text 37"/>
-          <p:cNvSpPr/>
-          <p:nvPr/>
-        </p:nvSpPr>
-        <p:spPr>
-          <a:xfrm>
-            <a:off x="365760" y="3246120"/>
-            <a:ext cx="2468880" cy="402336"/>
+              <a:t>locks</a:t>
+            </a:r>
+            <a:endParaRPr lang="en-US" sz="1200" dirty="0"/>
+          </a:p>
+        </p:txBody>
+      </p:sp>
+      <p:sp>
+        <p:nvSpPr>
+          <p:cNvPr id="40" name="Shape 38"/>
+          <p:cNvSpPr/>
+          <p:nvPr/>
+        </p:nvSpPr>
+        <p:spPr>
+          <a:xfrm>
+            <a:off x="4718304" y="4023360"/>
+            <a:ext cx="2011680" cy="402336"/>
+          </a:xfrm>
+          <a:prstGeom prst="rect">
+            <a:avLst>
+              <a:gd name="adj" fmla="val 13636"/>
+            </a:avLst>
+          </a:prstGeom>
+          <a:solidFill>
+            <a:srgbClr val="EEF2FF"/>
+          </a:solidFill>
+          <a:ln w="12700">
+            <a:solidFill>
+              <a:srgbClr val="6366F1"/>
+            </a:solidFill>
+            <a:prstDash val="solid"/>
+          </a:ln>
+        </p:spPr>
+      </p:sp>
+      <p:sp>
+        <p:nvSpPr>
+          <p:cNvPr id="41" name="Text 39"/>
+          <p:cNvSpPr/>
+          <p:nvPr/>
+        </p:nvSpPr>
+        <p:spPr>
+          <a:xfrm>
+            <a:off x="4718304" y="4023360"/>
+            <a:ext cx="2011680" cy="402336"/>
           </a:xfrm>
           <a:prstGeom prst="rect">
             <a:avLst/>
@@ -33394,143 +34905,15 @@
               <a:buNone/>
             </a:pPr>
             <a:r>
-              <a:rPr lang="en-US" sz="1300" b="1" dirty="0">
-                <a:solidFill>
-                  <a:srgbClr val="4C1D95"/>
+              <a:rPr lang="en-US" sz="1200" b="1" dirty="0">
+                <a:solidFill>
+                  <a:srgbClr val="4338CA"/>
                 </a:solidFill>
                 <a:latin typeface="Trebuchet MS" pitchFamily="34" charset="0"/>
                 <a:ea typeface="Trebuchet MS" pitchFamily="34" charset="-122"/>
                 <a:cs typeface="Trebuchet MS" pitchFamily="34" charset="-120"/>
               </a:rPr>
-              <a:t>hem-</a:t>
-            </a:r>
-            <a:endParaRPr lang="en-US" sz="1300" dirty="0"/>
-          </a:p>
-        </p:txBody>
-      </p:sp>
-      <p:sp>
-        <p:nvSpPr>
-          <p:cNvPr id="40" name="Shape 38"/>
-          <p:cNvSpPr/>
-          <p:nvPr/>
-        </p:nvSpPr>
-        <p:spPr>
-          <a:xfrm>
-            <a:off x="2971800" y="3246120"/>
-            <a:ext cx="2834640" cy="402336"/>
-          </a:xfrm>
-          <a:prstGeom prst="rect">
-            <a:avLst/>
-          </a:prstGeom>
-          <a:solidFill>
-            <a:srgbClr val="F8FAFC"/>
-          </a:solidFill>
-          <a:ln w="12700">
-            <a:solidFill>
-              <a:srgbClr val="E2E8F0"/>
-            </a:solidFill>
-            <a:prstDash val="solid"/>
-          </a:ln>
-        </p:spPr>
-      </p:sp>
-      <p:sp>
-        <p:nvSpPr>
-          <p:cNvPr id="41" name="Shape 39"/>
-          <p:cNvSpPr/>
-          <p:nvPr/>
-        </p:nvSpPr>
-        <p:spPr>
-          <a:xfrm>
-            <a:off x="5943600" y="3246120"/>
-            <a:ext cx="2834640" cy="402336"/>
-          </a:xfrm>
-          <a:prstGeom prst="rect">
-            <a:avLst/>
-          </a:prstGeom>
-          <a:solidFill>
-            <a:srgbClr val="FCE7F3"/>
-          </a:solidFill>
-          <a:ln w="12700">
-            <a:solidFill>
-              <a:srgbClr val="E2E8F0"/>
-            </a:solidFill>
-            <a:prstDash val="solid"/>
-          </a:ln>
-        </p:spPr>
-      </p:sp>
-      <p:sp>
-        <p:nvSpPr>
-          <p:cNvPr id="42" name="Text 40"/>
-          <p:cNvSpPr/>
-          <p:nvPr/>
-        </p:nvSpPr>
-        <p:spPr>
-          <a:xfrm>
-            <a:off x="5943600" y="3246120"/>
-            <a:ext cx="2834640" cy="402336"/>
-          </a:xfrm>
-          <a:prstGeom prst="rect">
-            <a:avLst/>
-          </a:prstGeom>
-          <a:noFill/>
-          <a:ln/>
-        </p:spPr>
-        <p:txBody>
-          <a:bodyPr wrap="square" lIns="0" tIns="0" rIns="0" bIns="0" rtlCol="0" anchor="ctr"/>
-          <a:lstStyle/>
-          <a:p>
-            <a:pPr algn="ctr" indent="0" marL="0">
-              <a:buNone/>
-            </a:pPr>
-            <a:r>
-              <a:rPr lang="en-US" sz="1300" b="1" dirty="0">
-                <a:solidFill>
-                  <a:srgbClr val="9D174D"/>
-                </a:solidFill>
-                <a:latin typeface="Trebuchet MS" pitchFamily="34" charset="0"/>
-                <a:ea typeface="Trebuchet MS" pitchFamily="34" charset="-122"/>
-                <a:cs typeface="Trebuchet MS" pitchFamily="34" charset="-120"/>
-              </a:rPr>
-              <a:t>-out</a:t>
-            </a:r>
-            <a:endParaRPr lang="en-US" sz="1300" dirty="0"/>
-          </a:p>
-        </p:txBody>
-      </p:sp>
-      <p:sp>
-        <p:nvSpPr>
-          <p:cNvPr id="43" name="Text 41"/>
-          <p:cNvSpPr/>
-          <p:nvPr/>
-        </p:nvSpPr>
-        <p:spPr>
-          <a:xfrm>
-            <a:off x="365760" y="3611880"/>
-            <a:ext cx="1828800" cy="347472"/>
-          </a:xfrm>
-          <a:prstGeom prst="rect">
-            <a:avLst/>
-          </a:prstGeom>
-          <a:noFill/>
-          <a:ln/>
-        </p:spPr>
-        <p:txBody>
-          <a:bodyPr wrap="square" lIns="0" tIns="0" rIns="0" bIns="0" rtlCol="0" anchor="ctr"/>
-          <a:lstStyle/>
-          <a:p>
-            <a:pPr algn="l" indent="0" marL="0">
-              <a:buNone/>
-            </a:pPr>
-            <a:r>
-              <a:rPr lang="en-US" sz="1200" b="1" dirty="0">
-                <a:solidFill>
-                  <a:srgbClr val="0F172A"/>
-                </a:solidFill>
-                <a:latin typeface="Trebuchet MS" pitchFamily="34" charset="0"/>
-                <a:ea typeface="Trebuchet MS" pitchFamily="34" charset="-122"/>
-                <a:cs typeface="Trebuchet MS" pitchFamily="34" charset="-120"/>
-              </a:rPr>
-              <a:t>Sample words:</a:t>
+              <a:t>locked</a:t>
             </a:r>
             <a:endParaRPr lang="en-US" sz="1200" dirty="0"/>
           </a:p>
@@ -33538,13 +34921,13 @@
       </p:sp>
       <p:sp>
         <p:nvSpPr>
-          <p:cNvPr id="44" name="Shape 42"/>
-          <p:cNvSpPr/>
-          <p:nvPr/>
-        </p:nvSpPr>
-        <p:spPr>
-          <a:xfrm>
-            <a:off x="365760" y="4023360"/>
+          <p:cNvPr id="42" name="Shape 40"/>
+          <p:cNvSpPr/>
+          <p:nvPr/>
+        </p:nvSpPr>
+        <p:spPr>
+          <a:xfrm>
+            <a:off x="6894576" y="4023360"/>
             <a:ext cx="2011680" cy="402336"/>
           </a:xfrm>
           <a:prstGeom prst="rect">
@@ -33565,475 +34948,13 @@
       </p:sp>
       <p:sp>
         <p:nvSpPr>
-          <p:cNvPr id="45" name="Text 43"/>
-          <p:cNvSpPr/>
-          <p:nvPr/>
-        </p:nvSpPr>
-        <p:spPr>
-          <a:xfrm>
-            <a:off x="365760" y="4023360"/>
-            <a:ext cx="2011680" cy="402336"/>
-          </a:xfrm>
-          <a:prstGeom prst="rect">
-            <a:avLst/>
-          </a:prstGeom>
-          <a:noFill/>
-          <a:ln/>
-        </p:spPr>
-        <p:txBody>
-          <a:bodyPr wrap="square" lIns="0" tIns="0" rIns="0" bIns="0" rtlCol="0" anchor="ctr"/>
-          <a:lstStyle/>
-          <a:p>
-            <a:pPr algn="ctr" indent="0" marL="0">
-              <a:buNone/>
-            </a:pPr>
-            <a:r>
-              <a:rPr lang="en-US" sz="1200" b="1" dirty="0">
-                <a:solidFill>
-                  <a:srgbClr val="4338CA"/>
-                </a:solidFill>
-                <a:latin typeface="Trebuchet MS" pitchFamily="34" charset="0"/>
-                <a:ea typeface="Trebuchet MS" pitchFamily="34" charset="-122"/>
-                <a:cs typeface="Trebuchet MS" pitchFamily="34" charset="-120"/>
-              </a:rPr>
-              <a:t>unlock</a:t>
-            </a:r>
-            <a:endParaRPr lang="en-US" sz="1200" dirty="0"/>
-          </a:p>
-        </p:txBody>
-      </p:sp>
-      <p:sp>
-        <p:nvSpPr>
-          <p:cNvPr id="46" name="Shape 44"/>
-          <p:cNvSpPr/>
-          <p:nvPr/>
-        </p:nvSpPr>
-        <p:spPr>
-          <a:xfrm>
-            <a:off x="2542032" y="4023360"/>
-            <a:ext cx="2011680" cy="402336"/>
-          </a:xfrm>
-          <a:prstGeom prst="rect">
-            <a:avLst>
-              <a:gd name="adj" fmla="val 13636"/>
-            </a:avLst>
-          </a:prstGeom>
-          <a:solidFill>
-            <a:srgbClr val="EEF2FF"/>
-          </a:solidFill>
-          <a:ln w="12700">
-            <a:solidFill>
-              <a:srgbClr val="6366F1"/>
-            </a:solidFill>
-            <a:prstDash val="solid"/>
-          </a:ln>
-        </p:spPr>
-      </p:sp>
-      <p:sp>
-        <p:nvSpPr>
-          <p:cNvPr id="47" name="Text 45"/>
-          <p:cNvSpPr/>
-          <p:nvPr/>
-        </p:nvSpPr>
-        <p:spPr>
-          <a:xfrm>
-            <a:off x="2542032" y="4023360"/>
-            <a:ext cx="2011680" cy="402336"/>
-          </a:xfrm>
-          <a:prstGeom prst="rect">
-            <a:avLst/>
-          </a:prstGeom>
-          <a:noFill/>
-          <a:ln/>
-        </p:spPr>
-        <p:txBody>
-          <a:bodyPr wrap="square" lIns="0" tIns="0" rIns="0" bIns="0" rtlCol="0" anchor="ctr"/>
-          <a:lstStyle/>
-          <a:p>
-            <a:pPr algn="ctr" indent="0" marL="0">
-              <a:buNone/>
-            </a:pPr>
-            <a:r>
-              <a:rPr lang="en-US" sz="1200" b="1" dirty="0">
-                <a:solidFill>
-                  <a:srgbClr val="4338CA"/>
-                </a:solidFill>
-                <a:latin typeface="Trebuchet MS" pitchFamily="34" charset="0"/>
-                <a:ea typeface="Trebuchet MS" pitchFamily="34" charset="-122"/>
-                <a:cs typeface="Trebuchet MS" pitchFamily="34" charset="-120"/>
-              </a:rPr>
-              <a:t>locked</a:t>
-            </a:r>
-            <a:endParaRPr lang="en-US" sz="1200" dirty="0"/>
-          </a:p>
-        </p:txBody>
-      </p:sp>
-      <p:sp>
-        <p:nvSpPr>
-          <p:cNvPr id="48" name="Shape 46"/>
-          <p:cNvSpPr/>
-          <p:nvPr/>
-        </p:nvSpPr>
-        <p:spPr>
-          <a:xfrm>
-            <a:off x="4718304" y="4023360"/>
-            <a:ext cx="2011680" cy="402336"/>
-          </a:xfrm>
-          <a:prstGeom prst="rect">
-            <a:avLst>
-              <a:gd name="adj" fmla="val 13636"/>
-            </a:avLst>
-          </a:prstGeom>
-          <a:solidFill>
-            <a:srgbClr val="EEF2FF"/>
-          </a:solidFill>
-          <a:ln w="12700">
-            <a:solidFill>
-              <a:srgbClr val="6366F1"/>
-            </a:solidFill>
-            <a:prstDash val="solid"/>
-          </a:ln>
-        </p:spPr>
-      </p:sp>
-      <p:sp>
-        <p:nvSpPr>
-          <p:cNvPr id="49" name="Text 47"/>
-          <p:cNvSpPr/>
-          <p:nvPr/>
-        </p:nvSpPr>
-        <p:spPr>
-          <a:xfrm>
-            <a:off x="4718304" y="4023360"/>
-            <a:ext cx="2011680" cy="402336"/>
-          </a:xfrm>
-          <a:prstGeom prst="rect">
-            <a:avLst/>
-          </a:prstGeom>
-          <a:noFill/>
-          <a:ln/>
-        </p:spPr>
-        <p:txBody>
-          <a:bodyPr wrap="square" lIns="0" tIns="0" rIns="0" bIns="0" rtlCol="0" anchor="ctr"/>
-          <a:lstStyle/>
-          <a:p>
-            <a:pPr algn="ctr" indent="0" marL="0">
-              <a:buNone/>
-            </a:pPr>
-            <a:r>
-              <a:rPr lang="en-US" sz="1200" b="1" dirty="0">
-                <a:solidFill>
-                  <a:srgbClr val="4338CA"/>
-                </a:solidFill>
-                <a:latin typeface="Trebuchet MS" pitchFamily="34" charset="0"/>
-                <a:ea typeface="Trebuchet MS" pitchFamily="34" charset="-122"/>
-                <a:cs typeface="Trebuchet MS" pitchFamily="34" charset="-120"/>
-              </a:rPr>
-              <a:t>locking</a:t>
-            </a:r>
-            <a:endParaRPr lang="en-US" sz="1200" dirty="0"/>
-          </a:p>
-        </p:txBody>
-      </p:sp>
-      <p:sp>
-        <p:nvSpPr>
-          <p:cNvPr id="50" name="Shape 48"/>
+          <p:cNvPr id="43" name="Text 41"/>
           <p:cNvSpPr/>
           <p:nvPr/>
         </p:nvSpPr>
         <p:spPr>
           <a:xfrm>
             <a:off x="6894576" y="4023360"/>
-            <a:ext cx="2011680" cy="402336"/>
-          </a:xfrm>
-          <a:prstGeom prst="rect">
-            <a:avLst>
-              <a:gd name="adj" fmla="val 13636"/>
-            </a:avLst>
-          </a:prstGeom>
-          <a:solidFill>
-            <a:srgbClr val="EEF2FF"/>
-          </a:solidFill>
-          <a:ln w="12700">
-            <a:solidFill>
-              <a:srgbClr val="6366F1"/>
-            </a:solidFill>
-            <a:prstDash val="solid"/>
-          </a:ln>
-        </p:spPr>
-      </p:sp>
-      <p:sp>
-        <p:nvSpPr>
-          <p:cNvPr id="51" name="Text 49"/>
-          <p:cNvSpPr/>
-          <p:nvPr/>
-        </p:nvSpPr>
-        <p:spPr>
-          <a:xfrm>
-            <a:off x="6894576" y="4023360"/>
-            <a:ext cx="2011680" cy="402336"/>
-          </a:xfrm>
-          <a:prstGeom prst="rect">
-            <a:avLst/>
-          </a:prstGeom>
-          <a:noFill/>
-          <a:ln/>
-        </p:spPr>
-        <p:txBody>
-          <a:bodyPr wrap="square" lIns="0" tIns="0" rIns="0" bIns="0" rtlCol="0" anchor="ctr"/>
-          <a:lstStyle/>
-          <a:p>
-            <a:pPr algn="ctr" indent="0" marL="0">
-              <a:buNone/>
-            </a:pPr>
-            <a:r>
-              <a:rPr lang="en-US" sz="1200" b="1" dirty="0">
-                <a:solidFill>
-                  <a:srgbClr val="4338CA"/>
-                </a:solidFill>
-                <a:latin typeface="Trebuchet MS" pitchFamily="34" charset="0"/>
-                <a:ea typeface="Trebuchet MS" pitchFamily="34" charset="-122"/>
-                <a:cs typeface="Trebuchet MS" pitchFamily="34" charset="-120"/>
-              </a:rPr>
-              <a:t>lockout</a:t>
-            </a:r>
-            <a:endParaRPr lang="en-US" sz="1200" dirty="0"/>
-          </a:p>
-        </p:txBody>
-      </p:sp>
-      <p:sp>
-        <p:nvSpPr>
-          <p:cNvPr id="52" name="Shape 50"/>
-          <p:cNvSpPr/>
-          <p:nvPr/>
-        </p:nvSpPr>
-        <p:spPr>
-          <a:xfrm>
-            <a:off x="365760" y="4498848"/>
-            <a:ext cx="2011680" cy="402336"/>
-          </a:xfrm>
-          <a:prstGeom prst="rect">
-            <a:avLst>
-              <a:gd name="adj" fmla="val 13636"/>
-            </a:avLst>
-          </a:prstGeom>
-          <a:solidFill>
-            <a:srgbClr val="EEF2FF"/>
-          </a:solidFill>
-          <a:ln w="12700">
-            <a:solidFill>
-              <a:srgbClr val="6366F1"/>
-            </a:solidFill>
-            <a:prstDash val="solid"/>
-          </a:ln>
-        </p:spPr>
-      </p:sp>
-      <p:sp>
-        <p:nvSpPr>
-          <p:cNvPr id="53" name="Text 51"/>
-          <p:cNvSpPr/>
-          <p:nvPr/>
-        </p:nvSpPr>
-        <p:spPr>
-          <a:xfrm>
-            <a:off x="365760" y="4498848"/>
-            <a:ext cx="2011680" cy="402336"/>
-          </a:xfrm>
-          <a:prstGeom prst="rect">
-            <a:avLst/>
-          </a:prstGeom>
-          <a:noFill/>
-          <a:ln/>
-        </p:spPr>
-        <p:txBody>
-          <a:bodyPr wrap="square" lIns="0" tIns="0" rIns="0" bIns="0" rtlCol="0" anchor="ctr"/>
-          <a:lstStyle/>
-          <a:p>
-            <a:pPr algn="ctr" indent="0" marL="0">
-              <a:buNone/>
-            </a:pPr>
-            <a:r>
-              <a:rPr lang="en-US" sz="1200" b="1" dirty="0">
-                <a:solidFill>
-                  <a:srgbClr val="4338CA"/>
-                </a:solidFill>
-                <a:latin typeface="Trebuchet MS" pitchFamily="34" charset="0"/>
-                <a:ea typeface="Trebuchet MS" pitchFamily="34" charset="-122"/>
-                <a:cs typeface="Trebuchet MS" pitchFamily="34" charset="-120"/>
-              </a:rPr>
-              <a:t>deadlock</a:t>
-            </a:r>
-            <a:endParaRPr lang="en-US" sz="1200" dirty="0"/>
-          </a:p>
-        </p:txBody>
-      </p:sp>
-      <p:sp>
-        <p:nvSpPr>
-          <p:cNvPr id="54" name="Shape 52"/>
-          <p:cNvSpPr/>
-          <p:nvPr/>
-        </p:nvSpPr>
-        <p:spPr>
-          <a:xfrm>
-            <a:off x="2542032" y="4498848"/>
-            <a:ext cx="2011680" cy="402336"/>
-          </a:xfrm>
-          <a:prstGeom prst="rect">
-            <a:avLst>
-              <a:gd name="adj" fmla="val 13636"/>
-            </a:avLst>
-          </a:prstGeom>
-          <a:solidFill>
-            <a:srgbClr val="EEF2FF"/>
-          </a:solidFill>
-          <a:ln w="12700">
-            <a:solidFill>
-              <a:srgbClr val="6366F1"/>
-            </a:solidFill>
-            <a:prstDash val="solid"/>
-          </a:ln>
-        </p:spPr>
-      </p:sp>
-      <p:sp>
-        <p:nvSpPr>
-          <p:cNvPr id="55" name="Text 53"/>
-          <p:cNvSpPr/>
-          <p:nvPr/>
-        </p:nvSpPr>
-        <p:spPr>
-          <a:xfrm>
-            <a:off x="2542032" y="4498848"/>
-            <a:ext cx="2011680" cy="402336"/>
-          </a:xfrm>
-          <a:prstGeom prst="rect">
-            <a:avLst/>
-          </a:prstGeom>
-          <a:noFill/>
-          <a:ln/>
-        </p:spPr>
-        <p:txBody>
-          <a:bodyPr wrap="square" lIns="0" tIns="0" rIns="0" bIns="0" rtlCol="0" anchor="ctr"/>
-          <a:lstStyle/>
-          <a:p>
-            <a:pPr algn="ctr" indent="0" marL="0">
-              <a:buNone/>
-            </a:pPr>
-            <a:r>
-              <a:rPr lang="en-US" sz="1200" b="1" dirty="0">
-                <a:solidFill>
-                  <a:srgbClr val="4338CA"/>
-                </a:solidFill>
-                <a:latin typeface="Trebuchet MS" pitchFamily="34" charset="0"/>
-                <a:ea typeface="Trebuchet MS" pitchFamily="34" charset="-122"/>
-                <a:cs typeface="Trebuchet MS" pitchFamily="34" charset="-120"/>
-              </a:rPr>
-              <a:t>padlock</a:t>
-            </a:r>
-            <a:endParaRPr lang="en-US" sz="1200" dirty="0"/>
-          </a:p>
-        </p:txBody>
-      </p:sp>
-      <p:sp>
-        <p:nvSpPr>
-          <p:cNvPr id="56" name="Shape 54"/>
-          <p:cNvSpPr/>
-          <p:nvPr/>
-        </p:nvSpPr>
-        <p:spPr>
-          <a:xfrm>
-            <a:off x="4718304" y="4498848"/>
-            <a:ext cx="2011680" cy="402336"/>
-          </a:xfrm>
-          <a:prstGeom prst="rect">
-            <a:avLst>
-              <a:gd name="adj" fmla="val 13636"/>
-            </a:avLst>
-          </a:prstGeom>
-          <a:solidFill>
-            <a:srgbClr val="EEF2FF"/>
-          </a:solidFill>
-          <a:ln w="12700">
-            <a:solidFill>
-              <a:srgbClr val="6366F1"/>
-            </a:solidFill>
-            <a:prstDash val="solid"/>
-          </a:ln>
-        </p:spPr>
-      </p:sp>
-      <p:sp>
-        <p:nvSpPr>
-          <p:cNvPr id="57" name="Text 55"/>
-          <p:cNvSpPr/>
-          <p:nvPr/>
-        </p:nvSpPr>
-        <p:spPr>
-          <a:xfrm>
-            <a:off x="4718304" y="4498848"/>
-            <a:ext cx="2011680" cy="402336"/>
-          </a:xfrm>
-          <a:prstGeom prst="rect">
-            <a:avLst/>
-          </a:prstGeom>
-          <a:noFill/>
-          <a:ln/>
-        </p:spPr>
-        <p:txBody>
-          <a:bodyPr wrap="square" lIns="0" tIns="0" rIns="0" bIns="0" rtlCol="0" anchor="ctr"/>
-          <a:lstStyle/>
-          <a:p>
-            <a:pPr algn="ctr" indent="0" marL="0">
-              <a:buNone/>
-            </a:pPr>
-            <a:r>
-              <a:rPr lang="en-US" sz="1200" b="1" dirty="0">
-                <a:solidFill>
-                  <a:srgbClr val="4338CA"/>
-                </a:solidFill>
-                <a:latin typeface="Trebuchet MS" pitchFamily="34" charset="0"/>
-                <a:ea typeface="Trebuchet MS" pitchFamily="34" charset="-122"/>
-                <a:cs typeface="Trebuchet MS" pitchFamily="34" charset="-120"/>
-              </a:rPr>
-              <a:t>gridlock</a:t>
-            </a:r>
-            <a:endParaRPr lang="en-US" sz="1200" dirty="0"/>
-          </a:p>
-        </p:txBody>
-      </p:sp>
-      <p:sp>
-        <p:nvSpPr>
-          <p:cNvPr id="58" name="Shape 56"/>
-          <p:cNvSpPr/>
-          <p:nvPr/>
-        </p:nvSpPr>
-        <p:spPr>
-          <a:xfrm>
-            <a:off x="6894576" y="4498848"/>
-            <a:ext cx="2011680" cy="402336"/>
-          </a:xfrm>
-          <a:prstGeom prst="rect">
-            <a:avLst>
-              <a:gd name="adj" fmla="val 13636"/>
-            </a:avLst>
-          </a:prstGeom>
-          <a:solidFill>
-            <a:srgbClr val="EEF2FF"/>
-          </a:solidFill>
-          <a:ln w="12700">
-            <a:solidFill>
-              <a:srgbClr val="6366F1"/>
-            </a:solidFill>
-            <a:prstDash val="solid"/>
-          </a:ln>
-        </p:spPr>
-      </p:sp>
-      <p:sp>
-        <p:nvSpPr>
-          <p:cNvPr id="59" name="Text 57"/>
-          <p:cNvSpPr/>
-          <p:nvPr/>
-        </p:nvSpPr>
-        <p:spPr>
-          <a:xfrm>
-            <a:off x="6894576" y="4498848"/>
             <a:ext cx="2011680" cy="402336"/>
           </a:xfrm>
           <a:prstGeom prst="rect">
@@ -34350,7 +35271,7 @@
                 <a:ea typeface="Calibri" pitchFamily="34" charset="-122"/>
                 <a:cs typeface="Calibri" pitchFamily="34" charset="-120"/>
               </a:rPr>
-              <a:t>Word Labs  •  wordlabs.app  •  Root: 'lock' = to fasten or secure shut</a:t>
+              <a:t>Word Labs  •  wordlabs.app  •  Root: 'lock' = to fasten with a key; a fastening device</a:t>
             </a:r>
             <a:endParaRPr lang="en-US" sz="800" dirty="0"/>
           </a:p>
@@ -34514,7 +35435,7 @@
                 <a:ea typeface="Calibri" pitchFamily="34" charset="-122"/>
                 <a:cs typeface="Calibri" pitchFamily="34" charset="-120"/>
               </a:rPr>
-              <a:t>The core part of a word carrying its basic meaning. For example, 'lock' means 'to fasten or secure shut'.</a:t>
+              <a:t>The core part of a word carrying its basic meaning. For example, 'lock' means 'to fasten with a key; a fastening device'.</a:t>
             </a:r>
             <a:endParaRPr lang="en-US" sz="1350" dirty="0"/>
           </a:p>
@@ -35134,7 +36055,7 @@
                 <a:ea typeface="Calibri" pitchFamily="34" charset="-122"/>
                 <a:cs typeface="Calibri" pitchFamily="34" charset="-120"/>
               </a:rPr>
-              <a:t>Word Labs  •  wordlabs.app  •  Root: 'lock' = to fasten or secure shut</a:t>
+              <a:t>Word Labs  •  wordlabs.app  •  Root: 'lock' = to fasten with a key; a fastening device</a:t>
             </a:r>
             <a:endParaRPr lang="en-US" sz="800" dirty="0"/>
           </a:p>
@@ -35246,7 +36167,7 @@
                 <a:ea typeface="Calibri" pitchFamily="34" charset="-122"/>
                 <a:cs typeface="Calibri" pitchFamily="34" charset="-120"/>
               </a:rPr>
-              <a:t>1.  The word 'unlock' uses the prefix 'un-' to mean the opposite of locking.</a:t>
+              <a:t>1.  'lock' means 'a device that fastens something shut, needing a key or code to open'.</a:t>
             </a:r>
             <a:endParaRPr lang="en-US" sz="1300" dirty="0"/>
           </a:p>
@@ -35385,7 +36306,7 @@
                 <a:ea typeface="Calibri" pitchFamily="34" charset="-122"/>
                 <a:cs typeface="Calibri" pitchFamily="34" charset="-120"/>
               </a:rPr>
-              <a:t>2.  A 'padlock' is a real English word that contains the root 'lock'.</a:t>
+              <a:t>2.  'lock' means 'to fasten with a key; a fastening device'.</a:t>
             </a:r>
             <a:endParaRPr lang="en-US" sz="1300" dirty="0"/>
           </a:p>
@@ -35524,7 +36445,7 @@
                 <a:ea typeface="Calibri" pitchFamily="34" charset="-122"/>
                 <a:cs typeface="Calibri" pitchFamily="34" charset="-120"/>
               </a:rPr>
-              <a:t>3.  Adding '-ing' to 'lock' changes the word so it no longer contains the root 'lock'.</a:t>
+              <a:t>3.  'locks' means 'fastens shut, or devices that fasten things shut'.</a:t>
             </a:r>
             <a:endParaRPr lang="en-US" sz="1300" dirty="0"/>
           </a:p>
@@ -35547,11 +36468,11 @@
             </a:avLst>
           </a:prstGeom>
           <a:solidFill>
-            <a:srgbClr val="FEE2E2"/>
-          </a:solidFill>
-          <a:ln w="12700">
-            <a:solidFill>
-              <a:srgbClr val="DC2626"/>
+            <a:srgbClr val="DCFCE7"/>
+          </a:solidFill>
+          <a:ln w="12700">
+            <a:solidFill>
+              <a:srgbClr val="16A34A"/>
             </a:solidFill>
             <a:prstDash val="solid"/>
           </a:ln>
@@ -35584,13 +36505,13 @@
             <a:r>
               <a:rPr lang="en-US" sz="1100" b="1" dirty="0">
                 <a:solidFill>
-                  <a:srgbClr val="DC2626"/>
+                  <a:srgbClr val="16A34A"/>
                 </a:solidFill>
                 <a:latin typeface="Trebuchet MS" pitchFamily="34" charset="0"/>
                 <a:ea typeface="Trebuchet MS" pitchFamily="34" charset="-122"/>
                 <a:cs typeface="Trebuchet MS" pitchFamily="34" charset="-120"/>
               </a:rPr>
-              <a:t>FALSE</a:t>
+              <a:t>TRUE</a:t>
             </a:r>
             <a:endParaRPr lang="en-US" sz="1100" dirty="0"/>
           </a:p>
@@ -35663,7 +36584,7 @@
                 <a:ea typeface="Calibri" pitchFamily="34" charset="-122"/>
                 <a:cs typeface="Calibri" pitchFamily="34" charset="-120"/>
               </a:rPr>
-              <a:t>4.  The root 'lock' comes from a Greek word meaning 'to open'.</a:t>
+              <a:t>4.  'lock' means 'a soft cushion for sitting on'.</a:t>
             </a:r>
             <a:endParaRPr lang="en-US" sz="1300" dirty="0"/>
           </a:p>
@@ -35802,7 +36723,7 @@
                 <a:ea typeface="Calibri" pitchFamily="34" charset="-122"/>
                 <a:cs typeface="Calibri" pitchFamily="34" charset="-120"/>
               </a:rPr>
-              <a:t>5.  The word 'gridlock' contains the root 'lock' and describes being completely stuck.</a:t>
+              <a:t>5.  'locks' means 'cooks food quickly'.</a:t>
             </a:r>
             <a:endParaRPr lang="en-US" sz="1300" dirty="0"/>
           </a:p>
@@ -35825,11 +36746,11 @@
             </a:avLst>
           </a:prstGeom>
           <a:solidFill>
-            <a:srgbClr val="DCFCE7"/>
-          </a:solidFill>
-          <a:ln w="12700">
-            <a:solidFill>
-              <a:srgbClr val="16A34A"/>
+            <a:srgbClr val="FEE2E2"/>
+          </a:solidFill>
+          <a:ln w="12700">
+            <a:solidFill>
+              <a:srgbClr val="DC2626"/>
             </a:solidFill>
             <a:prstDash val="solid"/>
           </a:ln>
@@ -35862,13 +36783,13 @@
             <a:r>
               <a:rPr lang="en-US" sz="1100" b="1" dirty="0">
                 <a:solidFill>
-                  <a:srgbClr val="16A34A"/>
+                  <a:srgbClr val="DC2626"/>
                 </a:solidFill>
                 <a:latin typeface="Trebuchet MS" pitchFamily="34" charset="0"/>
                 <a:ea typeface="Trebuchet MS" pitchFamily="34" charset="-122"/>
                 <a:cs typeface="Trebuchet MS" pitchFamily="34" charset="-120"/>
               </a:rPr>
-              <a:t>TRUE</a:t>
+              <a:t>FALSE</a:t>
             </a:r>
             <a:endParaRPr lang="en-US" sz="1100" dirty="0"/>
           </a:p>
@@ -36160,7 +37081,7 @@
                 <a:ea typeface="Calibri" pitchFamily="34" charset="-122"/>
                 <a:cs typeface="Calibri" pitchFamily="34" charset="-120"/>
               </a:rPr>
-              <a:t>Word Labs  •  wordlabs.app  •  Root: 'lock' = to fasten or secure shut</a:t>
+              <a:t>Word Labs  •  wordlabs.app  •  Root: 'lock' = to fasten with a key; a fastening device</a:t>
             </a:r>
             <a:endParaRPr lang="en-US" sz="800" dirty="0"/>
           </a:p>
@@ -36297,7 +37218,7 @@
                 <a:ea typeface="Trebuchet MS" pitchFamily="34" charset="-122"/>
                 <a:cs typeface="Trebuchet MS" pitchFamily="34" charset="-120"/>
               </a:rPr>
-              <a:t>to fasten or secure shut</a:t>
+              <a:t>to fasten with a key; a fastening device</a:t>
             </a:r>
             <a:endParaRPr lang="en-US" sz="2000" dirty="0"/>
           </a:p>
@@ -36336,7 +37257,7 @@
                 <a:ea typeface="Calibri" pitchFamily="34" charset="-122"/>
                 <a:cs typeface="Calibri" pitchFamily="34" charset="-120"/>
               </a:rPr>
-              <a:t>Origin: Latin: locare</a:t>
+              <a:t>Origin: Anglo-Saxon (Old English) root</a:t>
             </a:r>
             <a:endParaRPr lang="en-US" sz="1100" dirty="0"/>
           </a:p>
@@ -36441,7 +37362,7 @@
                 <a:ea typeface="Trebuchet MS" pitchFamily="34" charset="-122"/>
                 <a:cs typeface="Trebuchet MS" pitchFamily="34" charset="-120"/>
               </a:rPr>
-              <a:t>unlock</a:t>
+              <a:t>lock</a:t>
             </a:r>
             <a:endParaRPr lang="en-US" sz="1300" dirty="0"/>
           </a:p>
@@ -36507,7 +37428,7 @@
                 <a:ea typeface="Trebuchet MS" pitchFamily="34" charset="-122"/>
                 <a:cs typeface="Trebuchet MS" pitchFamily="34" charset="-120"/>
               </a:rPr>
-              <a:t>locked</a:t>
+              <a:t>locks</a:t>
             </a:r>
             <a:endParaRPr lang="en-US" sz="1300" dirty="0"/>
           </a:p>
@@ -36573,7 +37494,7 @@
                 <a:ea typeface="Trebuchet MS" pitchFamily="34" charset="-122"/>
                 <a:cs typeface="Trebuchet MS" pitchFamily="34" charset="-120"/>
               </a:rPr>
-              <a:t>locking</a:t>
+              <a:t>locked</a:t>
             </a:r>
             <a:endParaRPr lang="en-US" sz="1300" dirty="0"/>
           </a:p>
@@ -36639,205 +37560,7 @@
                 <a:ea typeface="Trebuchet MS" pitchFamily="34" charset="-122"/>
                 <a:cs typeface="Trebuchet MS" pitchFamily="34" charset="-120"/>
               </a:rPr>
-              <a:t>lockout</a:t>
-            </a:r>
-            <a:endParaRPr lang="en-US" sz="1300" dirty="0"/>
-          </a:p>
-        </p:txBody>
-      </p:sp>
-      <p:sp>
-        <p:nvSpPr>
-          <p:cNvPr id="24" name="Shape 22"/>
-          <p:cNvSpPr/>
-          <p:nvPr/>
-        </p:nvSpPr>
-        <p:spPr>
-          <a:xfrm>
-            <a:off x="365760" y="3401568"/>
-            <a:ext cx="2011680" cy="502920"/>
-          </a:xfrm>
-          <a:prstGeom prst="rect">
-            <a:avLst>
-              <a:gd name="adj" fmla="val 14545"/>
-            </a:avLst>
-          </a:prstGeom>
-          <a:solidFill>
-            <a:srgbClr val="EEF2FF"/>
-          </a:solidFill>
-          <a:ln w="12700">
-            <a:solidFill>
-              <a:srgbClr val="6366F1"/>
-            </a:solidFill>
-            <a:prstDash val="solid"/>
-          </a:ln>
-        </p:spPr>
-      </p:sp>
-      <p:sp>
-        <p:nvSpPr>
-          <p:cNvPr id="25" name="Text 23"/>
-          <p:cNvSpPr/>
-          <p:nvPr/>
-        </p:nvSpPr>
-        <p:spPr>
-          <a:xfrm>
-            <a:off x="365760" y="3401568"/>
-            <a:ext cx="2011680" cy="502920"/>
-          </a:xfrm>
-          <a:prstGeom prst="rect">
-            <a:avLst/>
-          </a:prstGeom>
-          <a:noFill/>
-          <a:ln/>
-        </p:spPr>
-        <p:txBody>
-          <a:bodyPr wrap="square" lIns="0" tIns="0" rIns="0" bIns="0" rtlCol="0" anchor="ctr"/>
-          <a:lstStyle/>
-          <a:p>
-            <a:pPr algn="ctr" indent="0" marL="0">
-              <a:buNone/>
-            </a:pPr>
-            <a:r>
-              <a:rPr lang="en-US" sz="1300" b="1" dirty="0">
-                <a:solidFill>
-                  <a:srgbClr val="4338CA"/>
-                </a:solidFill>
-                <a:latin typeface="Trebuchet MS" pitchFamily="34" charset="0"/>
-                <a:ea typeface="Trebuchet MS" pitchFamily="34" charset="-122"/>
-                <a:cs typeface="Trebuchet MS" pitchFamily="34" charset="-120"/>
-              </a:rPr>
-              <a:t>deadlock</a:t>
-            </a:r>
-            <a:endParaRPr lang="en-US" sz="1300" dirty="0"/>
-          </a:p>
-        </p:txBody>
-      </p:sp>
-      <p:sp>
-        <p:nvSpPr>
-          <p:cNvPr id="26" name="Shape 24"/>
-          <p:cNvSpPr/>
-          <p:nvPr/>
-        </p:nvSpPr>
-        <p:spPr>
-          <a:xfrm>
-            <a:off x="2514600" y="3401568"/>
-            <a:ext cx="2011680" cy="502920"/>
-          </a:xfrm>
-          <a:prstGeom prst="rect">
-            <a:avLst>
-              <a:gd name="adj" fmla="val 14545"/>
-            </a:avLst>
-          </a:prstGeom>
-          <a:solidFill>
-            <a:srgbClr val="EEF2FF"/>
-          </a:solidFill>
-          <a:ln w="12700">
-            <a:solidFill>
-              <a:srgbClr val="6366F1"/>
-            </a:solidFill>
-            <a:prstDash val="solid"/>
-          </a:ln>
-        </p:spPr>
-      </p:sp>
-      <p:sp>
-        <p:nvSpPr>
-          <p:cNvPr id="27" name="Text 25"/>
-          <p:cNvSpPr/>
-          <p:nvPr/>
-        </p:nvSpPr>
-        <p:spPr>
-          <a:xfrm>
-            <a:off x="2514600" y="3401568"/>
-            <a:ext cx="2011680" cy="502920"/>
-          </a:xfrm>
-          <a:prstGeom prst="rect">
-            <a:avLst/>
-          </a:prstGeom>
-          <a:noFill/>
-          <a:ln/>
-        </p:spPr>
-        <p:txBody>
-          <a:bodyPr wrap="square" lIns="0" tIns="0" rIns="0" bIns="0" rtlCol="0" anchor="ctr"/>
-          <a:lstStyle/>
-          <a:p>
-            <a:pPr algn="ctr" indent="0" marL="0">
-              <a:buNone/>
-            </a:pPr>
-            <a:r>
-              <a:rPr lang="en-US" sz="1300" b="1" dirty="0">
-                <a:solidFill>
-                  <a:srgbClr val="4338CA"/>
-                </a:solidFill>
-                <a:latin typeface="Trebuchet MS" pitchFamily="34" charset="0"/>
-                <a:ea typeface="Trebuchet MS" pitchFamily="34" charset="-122"/>
-                <a:cs typeface="Trebuchet MS" pitchFamily="34" charset="-120"/>
-              </a:rPr>
-              <a:t>padlock</a:t>
-            </a:r>
-            <a:endParaRPr lang="en-US" sz="1300" dirty="0"/>
-          </a:p>
-        </p:txBody>
-      </p:sp>
-      <p:sp>
-        <p:nvSpPr>
-          <p:cNvPr id="28" name="Shape 26"/>
-          <p:cNvSpPr/>
-          <p:nvPr/>
-        </p:nvSpPr>
-        <p:spPr>
-          <a:xfrm>
-            <a:off x="4663440" y="3401568"/>
-            <a:ext cx="2011680" cy="502920"/>
-          </a:xfrm>
-          <a:prstGeom prst="rect">
-            <a:avLst>
-              <a:gd name="adj" fmla="val 14545"/>
-            </a:avLst>
-          </a:prstGeom>
-          <a:solidFill>
-            <a:srgbClr val="EEF2FF"/>
-          </a:solidFill>
-          <a:ln w="12700">
-            <a:solidFill>
-              <a:srgbClr val="6366F1"/>
-            </a:solidFill>
-            <a:prstDash val="solid"/>
-          </a:ln>
-        </p:spPr>
-      </p:sp>
-      <p:sp>
-        <p:nvSpPr>
-          <p:cNvPr id="29" name="Text 27"/>
-          <p:cNvSpPr/>
-          <p:nvPr/>
-        </p:nvSpPr>
-        <p:spPr>
-          <a:xfrm>
-            <a:off x="4663440" y="3401568"/>
-            <a:ext cx="2011680" cy="502920"/>
-          </a:xfrm>
-          <a:prstGeom prst="rect">
-            <a:avLst/>
-          </a:prstGeom>
-          <a:noFill/>
-          <a:ln/>
-        </p:spPr>
-        <p:txBody>
-          <a:bodyPr wrap="square" lIns="0" tIns="0" rIns="0" bIns="0" rtlCol="0" anchor="ctr"/>
-          <a:lstStyle/>
-          <a:p>
-            <a:pPr algn="ctr" indent="0" marL="0">
-              <a:buNone/>
-            </a:pPr>
-            <a:r>
-              <a:rPr lang="en-US" sz="1300" b="1" dirty="0">
-                <a:solidFill>
-                  <a:srgbClr val="4338CA"/>
-                </a:solidFill>
-                <a:latin typeface="Trebuchet MS" pitchFamily="34" charset="0"/>
-                <a:ea typeface="Trebuchet MS" pitchFamily="34" charset="-122"/>
-                <a:cs typeface="Trebuchet MS" pitchFamily="34" charset="-120"/>
-              </a:rPr>
-              <a:t>gridlock</a:t>
+              <a:t>locker</a:t>
             </a:r>
             <a:endParaRPr lang="en-US" sz="1300" dirty="0"/>
           </a:p>
@@ -37129,7 +37852,7 @@
                 <a:ea typeface="Calibri" pitchFamily="34" charset="-122"/>
                 <a:cs typeface="Calibri" pitchFamily="34" charset="-120"/>
               </a:rPr>
-              <a:t>Word Labs  •  wordlabs.app  •  Root: 'lock' = to fasten or secure shut</a:t>
+              <a:t>Word Labs  •  wordlabs.app  •  Root: 'lock' = to fasten with a key; a fastening device</a:t>
             </a:r>
             <a:endParaRPr lang="en-US" sz="800" dirty="0"/>
           </a:p>
@@ -37579,7 +38302,7 @@
             <a:avLst/>
           </a:prstGeom>
           <a:solidFill>
-            <a:srgbClr val="DDD6FE"/>
+            <a:srgbClr val="F1F5F9"/>
           </a:solidFill>
           <a:ln w="12700">
             <a:solidFill>
@@ -37591,18 +38314,68 @@
       </p:sp>
       <p:sp>
         <p:nvSpPr>
-          <p:cNvPr id="24" name="Text 22"/>
-          <p:cNvSpPr/>
-          <p:nvPr/>
-        </p:nvSpPr>
-        <p:spPr>
-          <a:xfrm>
-            <a:off x="640080" y="2212848"/>
+          <p:cNvPr id="24" name="Shape 22"/>
+          <p:cNvSpPr/>
+          <p:nvPr/>
+        </p:nvSpPr>
+        <p:spPr>
+          <a:xfrm>
+            <a:off x="3291840" y="2212848"/>
+            <a:ext cx="1645920" cy="420624"/>
+          </a:xfrm>
+          <a:prstGeom prst="rect">
+            <a:avLst/>
+          </a:prstGeom>
+          <a:solidFill>
+            <a:srgbClr val="F1F5F9"/>
+          </a:solidFill>
+          <a:ln w="12700">
+            <a:solidFill>
+              <a:srgbClr val="E5E7EB"/>
+            </a:solidFill>
+            <a:prstDash val="solid"/>
+          </a:ln>
+        </p:spPr>
+      </p:sp>
+      <p:sp>
+        <p:nvSpPr>
+          <p:cNvPr id="25" name="Shape 23"/>
+          <p:cNvSpPr/>
+          <p:nvPr/>
+        </p:nvSpPr>
+        <p:spPr>
+          <a:xfrm>
+            <a:off x="5943600" y="2212848"/>
             <a:ext cx="1463040" cy="420624"/>
           </a:xfrm>
           <a:prstGeom prst="rect">
             <a:avLst/>
           </a:prstGeom>
+          <a:solidFill>
+            <a:srgbClr val="FCE7F3"/>
+          </a:solidFill>
+          <a:ln w="12700">
+            <a:solidFill>
+              <a:srgbClr val="E5E7EB"/>
+            </a:solidFill>
+            <a:prstDash val="solid"/>
+          </a:ln>
+        </p:spPr>
+      </p:sp>
+      <p:sp>
+        <p:nvSpPr>
+          <p:cNvPr id="26" name="Text 24"/>
+          <p:cNvSpPr/>
+          <p:nvPr/>
+        </p:nvSpPr>
+        <p:spPr>
+          <a:xfrm>
+            <a:off x="5943600" y="2212848"/>
+            <a:ext cx="1463040" cy="420624"/>
+          </a:xfrm>
+          <a:prstGeom prst="rect">
+            <a:avLst/>
+          </a:prstGeom>
           <a:noFill/>
           <a:ln/>
         </p:spPr>
@@ -37616,13 +38389,13 @@
             <a:r>
               <a:rPr lang="en-US" sz="1300" b="1" dirty="0">
                 <a:solidFill>
-                  <a:srgbClr val="4C1D95"/>
+                  <a:srgbClr val="9D174D"/>
                 </a:solidFill>
                 <a:latin typeface="Trebuchet MS" pitchFamily="34" charset="0"/>
                 <a:ea typeface="Trebuchet MS" pitchFamily="34" charset="-122"/>
                 <a:cs typeface="Trebuchet MS" pitchFamily="34" charset="-120"/>
               </a:rPr>
-              <a:t>dead-</a:t>
+              <a:t>-er</a:t>
             </a:r>
             <a:endParaRPr lang="en-US" sz="1300" dirty="0"/>
           </a:p>
@@ -37630,20 +38403,45 @@
       </p:sp>
       <p:sp>
         <p:nvSpPr>
-          <p:cNvPr id="25" name="Shape 23"/>
-          <p:cNvSpPr/>
-          <p:nvPr/>
-        </p:nvSpPr>
-        <p:spPr>
-          <a:xfrm>
-            <a:off x="3291840" y="2212848"/>
+          <p:cNvPr id="27" name="Shape 25"/>
+          <p:cNvSpPr/>
+          <p:nvPr/>
+        </p:nvSpPr>
+        <p:spPr>
+          <a:xfrm>
+            <a:off x="640080" y="2670048"/>
+            <a:ext cx="1463040" cy="420624"/>
+          </a:xfrm>
+          <a:prstGeom prst="rect">
+            <a:avLst/>
+          </a:prstGeom>
+          <a:solidFill>
+            <a:srgbClr val="F8FAFC"/>
+          </a:solidFill>
+          <a:ln w="12700">
+            <a:solidFill>
+              <a:srgbClr val="E5E7EB"/>
+            </a:solidFill>
+            <a:prstDash val="solid"/>
+          </a:ln>
+        </p:spPr>
+      </p:sp>
+      <p:sp>
+        <p:nvSpPr>
+          <p:cNvPr id="28" name="Shape 26"/>
+          <p:cNvSpPr/>
+          <p:nvPr/>
+        </p:nvSpPr>
+        <p:spPr>
+          <a:xfrm>
+            <a:off x="3291840" y="2670048"/>
             <a:ext cx="1645920" cy="420624"/>
           </a:xfrm>
           <a:prstGeom prst="rect">
             <a:avLst/>
           </a:prstGeom>
           <a:solidFill>
-            <a:srgbClr val="F1F5F9"/>
+            <a:srgbClr val="F8FAFC"/>
           </a:solidFill>
           <a:ln w="12700">
             <a:solidFill>
@@ -37655,13 +38453,13 @@
       </p:sp>
       <p:sp>
         <p:nvSpPr>
-          <p:cNvPr id="26" name="Shape 24"/>
-          <p:cNvSpPr/>
-          <p:nvPr/>
-        </p:nvSpPr>
-        <p:spPr>
-          <a:xfrm>
-            <a:off x="5943600" y="2212848"/>
+          <p:cNvPr id="29" name="Shape 27"/>
+          <p:cNvSpPr/>
+          <p:nvPr/>
+        </p:nvSpPr>
+        <p:spPr>
+          <a:xfrm>
+            <a:off x="5943600" y="2670048"/>
             <a:ext cx="1463040" cy="420624"/>
           </a:xfrm>
           <a:prstGeom prst="rect">
@@ -37680,13 +38478,13 @@
       </p:sp>
       <p:sp>
         <p:nvSpPr>
-          <p:cNvPr id="27" name="Text 25"/>
-          <p:cNvSpPr/>
-          <p:nvPr/>
-        </p:nvSpPr>
-        <p:spPr>
-          <a:xfrm>
-            <a:off x="5943600" y="2212848"/>
+          <p:cNvPr id="30" name="Text 28"/>
+          <p:cNvSpPr/>
+          <p:nvPr/>
+        </p:nvSpPr>
+        <p:spPr>
+          <a:xfrm>
+            <a:off x="5943600" y="2670048"/>
             <a:ext cx="1463040" cy="420624"/>
           </a:xfrm>
           <a:prstGeom prst="rect">
@@ -37719,20 +38517,20 @@
       </p:sp>
       <p:sp>
         <p:nvSpPr>
-          <p:cNvPr id="28" name="Shape 26"/>
-          <p:cNvSpPr/>
-          <p:nvPr/>
-        </p:nvSpPr>
-        <p:spPr>
-          <a:xfrm>
-            <a:off x="640080" y="2670048"/>
+          <p:cNvPr id="31" name="Shape 29"/>
+          <p:cNvSpPr/>
+          <p:nvPr/>
+        </p:nvSpPr>
+        <p:spPr>
+          <a:xfrm>
+            <a:off x="640080" y="3127248"/>
             <a:ext cx="1463040" cy="420624"/>
           </a:xfrm>
           <a:prstGeom prst="rect">
             <a:avLst/>
           </a:prstGeom>
           <a:solidFill>
-            <a:srgbClr val="DDD6FE"/>
+            <a:srgbClr val="F1F5F9"/>
           </a:solidFill>
           <a:ln w="12700">
             <a:solidFill>
@@ -37744,18 +38542,68 @@
       </p:sp>
       <p:sp>
         <p:nvSpPr>
-          <p:cNvPr id="29" name="Text 27"/>
-          <p:cNvSpPr/>
-          <p:nvPr/>
-        </p:nvSpPr>
-        <p:spPr>
-          <a:xfrm>
-            <a:off x="640080" y="2670048"/>
+          <p:cNvPr id="32" name="Shape 30"/>
+          <p:cNvSpPr/>
+          <p:nvPr/>
+        </p:nvSpPr>
+        <p:spPr>
+          <a:xfrm>
+            <a:off x="3291840" y="3127248"/>
+            <a:ext cx="1645920" cy="420624"/>
+          </a:xfrm>
+          <a:prstGeom prst="rect">
+            <a:avLst/>
+          </a:prstGeom>
+          <a:solidFill>
+            <a:srgbClr val="F1F5F9"/>
+          </a:solidFill>
+          <a:ln w="12700">
+            <a:solidFill>
+              <a:srgbClr val="E5E7EB"/>
+            </a:solidFill>
+            <a:prstDash val="solid"/>
+          </a:ln>
+        </p:spPr>
+      </p:sp>
+      <p:sp>
+        <p:nvSpPr>
+          <p:cNvPr id="33" name="Shape 31"/>
+          <p:cNvSpPr/>
+          <p:nvPr/>
+        </p:nvSpPr>
+        <p:spPr>
+          <a:xfrm>
+            <a:off x="5943600" y="3127248"/>
             <a:ext cx="1463040" cy="420624"/>
           </a:xfrm>
           <a:prstGeom prst="rect">
             <a:avLst/>
           </a:prstGeom>
+          <a:solidFill>
+            <a:srgbClr val="FCE7F3"/>
+          </a:solidFill>
+          <a:ln w="12700">
+            <a:solidFill>
+              <a:srgbClr val="E5E7EB"/>
+            </a:solidFill>
+            <a:prstDash val="solid"/>
+          </a:ln>
+        </p:spPr>
+      </p:sp>
+      <p:sp>
+        <p:nvSpPr>
+          <p:cNvPr id="34" name="Text 32"/>
+          <p:cNvSpPr/>
+          <p:nvPr/>
+        </p:nvSpPr>
+        <p:spPr>
+          <a:xfrm>
+            <a:off x="5943600" y="3127248"/>
+            <a:ext cx="1463040" cy="420624"/>
+          </a:xfrm>
+          <a:prstGeom prst="rect">
+            <a:avLst/>
+          </a:prstGeom>
           <a:noFill/>
           <a:ln/>
         </p:spPr>
@@ -37769,13 +38617,13 @@
             <a:r>
               <a:rPr lang="en-US" sz="1300" b="1" dirty="0">
                 <a:solidFill>
-                  <a:srgbClr val="4C1D95"/>
+                  <a:srgbClr val="9D174D"/>
                 </a:solidFill>
                 <a:latin typeface="Trebuchet MS" pitchFamily="34" charset="0"/>
                 <a:ea typeface="Trebuchet MS" pitchFamily="34" charset="-122"/>
                 <a:cs typeface="Trebuchet MS" pitchFamily="34" charset="-120"/>
               </a:rPr>
-              <a:t>pad-</a:t>
+              <a:t>-s</a:t>
             </a:r>
             <a:endParaRPr lang="en-US" sz="1300" dirty="0"/>
           </a:p>
@@ -37783,408 +38631,13 @@
       </p:sp>
       <p:sp>
         <p:nvSpPr>
-          <p:cNvPr id="30" name="Shape 28"/>
-          <p:cNvSpPr/>
-          <p:nvPr/>
-        </p:nvSpPr>
-        <p:spPr>
-          <a:xfrm>
-            <a:off x="3291840" y="2670048"/>
-            <a:ext cx="1645920" cy="420624"/>
-          </a:xfrm>
-          <a:prstGeom prst="rect">
-            <a:avLst/>
-          </a:prstGeom>
-          <a:solidFill>
-            <a:srgbClr val="F8FAFC"/>
-          </a:solidFill>
-          <a:ln w="12700">
-            <a:solidFill>
-              <a:srgbClr val="E5E7EB"/>
-            </a:solidFill>
-            <a:prstDash val="solid"/>
-          </a:ln>
-        </p:spPr>
-      </p:sp>
-      <p:sp>
-        <p:nvSpPr>
-          <p:cNvPr id="31" name="Shape 29"/>
-          <p:cNvSpPr/>
-          <p:nvPr/>
-        </p:nvSpPr>
-        <p:spPr>
-          <a:xfrm>
-            <a:off x="5943600" y="2670048"/>
-            <a:ext cx="1463040" cy="420624"/>
-          </a:xfrm>
-          <a:prstGeom prst="rect">
-            <a:avLst/>
-          </a:prstGeom>
-          <a:solidFill>
-            <a:srgbClr val="FCE7F3"/>
-          </a:solidFill>
-          <a:ln w="12700">
-            <a:solidFill>
-              <a:srgbClr val="E5E7EB"/>
-            </a:solidFill>
-            <a:prstDash val="solid"/>
-          </a:ln>
-        </p:spPr>
-      </p:sp>
-      <p:sp>
-        <p:nvSpPr>
-          <p:cNvPr id="32" name="Text 30"/>
-          <p:cNvSpPr/>
-          <p:nvPr/>
-        </p:nvSpPr>
-        <p:spPr>
-          <a:xfrm>
-            <a:off x="5943600" y="2670048"/>
-            <a:ext cx="1463040" cy="420624"/>
-          </a:xfrm>
-          <a:prstGeom prst="rect">
-            <a:avLst/>
-          </a:prstGeom>
-          <a:noFill/>
-          <a:ln/>
-        </p:spPr>
-        <p:txBody>
-          <a:bodyPr wrap="square" lIns="0" tIns="0" rIns="0" bIns="0" rtlCol="0" anchor="ctr"/>
-          <a:lstStyle/>
-          <a:p>
-            <a:pPr algn="ctr" indent="0" marL="0">
-              <a:buNone/>
-            </a:pPr>
-            <a:r>
-              <a:rPr lang="en-US" sz="1300" b="1" dirty="0">
-                <a:solidFill>
-                  <a:srgbClr val="9D174D"/>
-                </a:solidFill>
-                <a:latin typeface="Trebuchet MS" pitchFamily="34" charset="0"/>
-                <a:ea typeface="Trebuchet MS" pitchFamily="34" charset="-122"/>
-                <a:cs typeface="Trebuchet MS" pitchFamily="34" charset="-120"/>
-              </a:rPr>
-              <a:t>-s</a:t>
-            </a:r>
-            <a:endParaRPr lang="en-US" sz="1300" dirty="0"/>
-          </a:p>
-        </p:txBody>
-      </p:sp>
-      <p:sp>
-        <p:nvSpPr>
-          <p:cNvPr id="33" name="Shape 31"/>
-          <p:cNvSpPr/>
-          <p:nvPr/>
-        </p:nvSpPr>
-        <p:spPr>
-          <a:xfrm>
-            <a:off x="640080" y="3127248"/>
-            <a:ext cx="1463040" cy="420624"/>
-          </a:xfrm>
-          <a:prstGeom prst="rect">
-            <a:avLst/>
-          </a:prstGeom>
-          <a:solidFill>
-            <a:srgbClr val="DDD6FE"/>
-          </a:solidFill>
-          <a:ln w="12700">
-            <a:solidFill>
-              <a:srgbClr val="E5E7EB"/>
-            </a:solidFill>
-            <a:prstDash val="solid"/>
-          </a:ln>
-        </p:spPr>
-      </p:sp>
-      <p:sp>
-        <p:nvSpPr>
-          <p:cNvPr id="34" name="Text 32"/>
-          <p:cNvSpPr/>
-          <p:nvPr/>
-        </p:nvSpPr>
-        <p:spPr>
-          <a:xfrm>
-            <a:off x="640080" y="3127248"/>
-            <a:ext cx="1463040" cy="420624"/>
-          </a:xfrm>
-          <a:prstGeom prst="rect">
-            <a:avLst/>
-          </a:prstGeom>
-          <a:noFill/>
-          <a:ln/>
-        </p:spPr>
-        <p:txBody>
-          <a:bodyPr wrap="square" lIns="0" tIns="0" rIns="0" bIns="0" rtlCol="0" anchor="ctr"/>
-          <a:lstStyle/>
-          <a:p>
-            <a:pPr algn="ctr" indent="0" marL="0">
-              <a:buNone/>
-            </a:pPr>
-            <a:r>
-              <a:rPr lang="en-US" sz="1300" b="1" dirty="0">
-                <a:solidFill>
-                  <a:srgbClr val="4C1D95"/>
-                </a:solidFill>
-                <a:latin typeface="Trebuchet MS" pitchFamily="34" charset="0"/>
-                <a:ea typeface="Trebuchet MS" pitchFamily="34" charset="-122"/>
-                <a:cs typeface="Trebuchet MS" pitchFamily="34" charset="-120"/>
-              </a:rPr>
-              <a:t>grid-</a:t>
-            </a:r>
-            <a:endParaRPr lang="en-US" sz="1300" dirty="0"/>
-          </a:p>
-        </p:txBody>
-      </p:sp>
-      <p:sp>
-        <p:nvSpPr>
-          <p:cNvPr id="35" name="Shape 33"/>
-          <p:cNvSpPr/>
-          <p:nvPr/>
-        </p:nvSpPr>
-        <p:spPr>
-          <a:xfrm>
-            <a:off x="3291840" y="3127248"/>
-            <a:ext cx="1645920" cy="420624"/>
-          </a:xfrm>
-          <a:prstGeom prst="rect">
-            <a:avLst/>
-          </a:prstGeom>
-          <a:solidFill>
-            <a:srgbClr val="F1F5F9"/>
-          </a:solidFill>
-          <a:ln w="12700">
-            <a:solidFill>
-              <a:srgbClr val="E5E7EB"/>
-            </a:solidFill>
-            <a:prstDash val="solid"/>
-          </a:ln>
-        </p:spPr>
-      </p:sp>
-      <p:sp>
-        <p:nvSpPr>
-          <p:cNvPr id="36" name="Shape 34"/>
-          <p:cNvSpPr/>
-          <p:nvPr/>
-        </p:nvSpPr>
-        <p:spPr>
-          <a:xfrm>
-            <a:off x="5943600" y="3127248"/>
-            <a:ext cx="1463040" cy="420624"/>
-          </a:xfrm>
-          <a:prstGeom prst="rect">
-            <a:avLst/>
-          </a:prstGeom>
-          <a:solidFill>
-            <a:srgbClr val="FCE7F3"/>
-          </a:solidFill>
-          <a:ln w="12700">
-            <a:solidFill>
-              <a:srgbClr val="E5E7EB"/>
-            </a:solidFill>
-            <a:prstDash val="solid"/>
-          </a:ln>
-        </p:spPr>
-      </p:sp>
-      <p:sp>
-        <p:nvSpPr>
-          <p:cNvPr id="37" name="Text 35"/>
-          <p:cNvSpPr/>
-          <p:nvPr/>
-        </p:nvSpPr>
-        <p:spPr>
-          <a:xfrm>
-            <a:off x="5943600" y="3127248"/>
-            <a:ext cx="1463040" cy="420624"/>
-          </a:xfrm>
-          <a:prstGeom prst="rect">
-            <a:avLst/>
-          </a:prstGeom>
-          <a:noFill/>
-          <a:ln/>
-        </p:spPr>
-        <p:txBody>
-          <a:bodyPr wrap="square" lIns="0" tIns="0" rIns="0" bIns="0" rtlCol="0" anchor="ctr"/>
-          <a:lstStyle/>
-          <a:p>
-            <a:pPr algn="ctr" indent="0" marL="0">
-              <a:buNone/>
-            </a:pPr>
-            <a:r>
-              <a:rPr lang="en-US" sz="1300" b="1" dirty="0">
-                <a:solidFill>
-                  <a:srgbClr val="9D174D"/>
-                </a:solidFill>
-                <a:latin typeface="Trebuchet MS" pitchFamily="34" charset="0"/>
-                <a:ea typeface="Trebuchet MS" pitchFamily="34" charset="-122"/>
-                <a:cs typeface="Trebuchet MS" pitchFamily="34" charset="-120"/>
-              </a:rPr>
-              <a:t>-er</a:t>
-            </a:r>
-            <a:endParaRPr lang="en-US" sz="1300" dirty="0"/>
-          </a:p>
-        </p:txBody>
-      </p:sp>
-      <p:sp>
-        <p:nvSpPr>
-          <p:cNvPr id="38" name="Shape 36"/>
-          <p:cNvSpPr/>
-          <p:nvPr/>
-        </p:nvSpPr>
-        <p:spPr>
-          <a:xfrm>
-            <a:off x="640080" y="3584448"/>
-            <a:ext cx="1463040" cy="420624"/>
-          </a:xfrm>
-          <a:prstGeom prst="rect">
-            <a:avLst/>
-          </a:prstGeom>
-          <a:solidFill>
-            <a:srgbClr val="DDD6FE"/>
-          </a:solidFill>
-          <a:ln w="12700">
-            <a:solidFill>
-              <a:srgbClr val="E5E7EB"/>
-            </a:solidFill>
-            <a:prstDash val="solid"/>
-          </a:ln>
-        </p:spPr>
-      </p:sp>
-      <p:sp>
-        <p:nvSpPr>
-          <p:cNvPr id="39" name="Text 37"/>
-          <p:cNvSpPr/>
-          <p:nvPr/>
-        </p:nvSpPr>
-        <p:spPr>
-          <a:xfrm>
-            <a:off x="640080" y="3584448"/>
-            <a:ext cx="1463040" cy="420624"/>
-          </a:xfrm>
-          <a:prstGeom prst="rect">
-            <a:avLst/>
-          </a:prstGeom>
-          <a:noFill/>
-          <a:ln/>
-        </p:spPr>
-        <p:txBody>
-          <a:bodyPr wrap="square" lIns="0" tIns="0" rIns="0" bIns="0" rtlCol="0" anchor="ctr"/>
-          <a:lstStyle/>
-          <a:p>
-            <a:pPr algn="ctr" indent="0" marL="0">
-              <a:buNone/>
-            </a:pPr>
-            <a:r>
-              <a:rPr lang="en-US" sz="1300" b="1" dirty="0">
-                <a:solidFill>
-                  <a:srgbClr val="4C1D95"/>
-                </a:solidFill>
-                <a:latin typeface="Trebuchet MS" pitchFamily="34" charset="0"/>
-                <a:ea typeface="Trebuchet MS" pitchFamily="34" charset="-122"/>
-                <a:cs typeface="Trebuchet MS" pitchFamily="34" charset="-120"/>
-              </a:rPr>
-              <a:t>hem-</a:t>
-            </a:r>
-            <a:endParaRPr lang="en-US" sz="1300" dirty="0"/>
-          </a:p>
-        </p:txBody>
-      </p:sp>
-      <p:sp>
-        <p:nvSpPr>
-          <p:cNvPr id="40" name="Shape 38"/>
-          <p:cNvSpPr/>
-          <p:nvPr/>
-        </p:nvSpPr>
-        <p:spPr>
-          <a:xfrm>
-            <a:off x="3291840" y="3584448"/>
-            <a:ext cx="1645920" cy="420624"/>
-          </a:xfrm>
-          <a:prstGeom prst="rect">
-            <a:avLst/>
-          </a:prstGeom>
-          <a:solidFill>
-            <a:srgbClr val="F8FAFC"/>
-          </a:solidFill>
-          <a:ln w="12700">
-            <a:solidFill>
-              <a:srgbClr val="E5E7EB"/>
-            </a:solidFill>
-            <a:prstDash val="solid"/>
-          </a:ln>
-        </p:spPr>
-      </p:sp>
-      <p:sp>
-        <p:nvSpPr>
-          <p:cNvPr id="41" name="Shape 39"/>
-          <p:cNvSpPr/>
-          <p:nvPr/>
-        </p:nvSpPr>
-        <p:spPr>
-          <a:xfrm>
-            <a:off x="5943600" y="3584448"/>
-            <a:ext cx="1463040" cy="420624"/>
-          </a:xfrm>
-          <a:prstGeom prst="rect">
-            <a:avLst/>
-          </a:prstGeom>
-          <a:solidFill>
-            <a:srgbClr val="FCE7F3"/>
-          </a:solidFill>
-          <a:ln w="12700">
-            <a:solidFill>
-              <a:srgbClr val="E5E7EB"/>
-            </a:solidFill>
-            <a:prstDash val="solid"/>
-          </a:ln>
-        </p:spPr>
-      </p:sp>
-      <p:sp>
-        <p:nvSpPr>
-          <p:cNvPr id="42" name="Text 40"/>
-          <p:cNvSpPr/>
-          <p:nvPr/>
-        </p:nvSpPr>
-        <p:spPr>
-          <a:xfrm>
-            <a:off x="5943600" y="3584448"/>
-            <a:ext cx="1463040" cy="420624"/>
-          </a:xfrm>
-          <a:prstGeom prst="rect">
-            <a:avLst/>
-          </a:prstGeom>
-          <a:noFill/>
-          <a:ln/>
-        </p:spPr>
-        <p:txBody>
-          <a:bodyPr wrap="square" lIns="0" tIns="0" rIns="0" bIns="0" rtlCol="0" anchor="ctr"/>
-          <a:lstStyle/>
-          <a:p>
-            <a:pPr algn="ctr" indent="0" marL="0">
-              <a:buNone/>
-            </a:pPr>
-            <a:r>
-              <a:rPr lang="en-US" sz="1300" b="1" dirty="0">
-                <a:solidFill>
-                  <a:srgbClr val="9D174D"/>
-                </a:solidFill>
-                <a:latin typeface="Trebuchet MS" pitchFamily="34" charset="0"/>
-                <a:ea typeface="Trebuchet MS" pitchFamily="34" charset="-122"/>
-                <a:cs typeface="Trebuchet MS" pitchFamily="34" charset="-120"/>
-              </a:rPr>
-              <a:t>-out</a:t>
-            </a:r>
-            <a:endParaRPr lang="en-US" sz="1300" dirty="0"/>
-          </a:p>
-        </p:txBody>
-      </p:sp>
-      <p:sp>
-        <p:nvSpPr>
-          <p:cNvPr id="43" name="Text 41"/>
-          <p:cNvSpPr/>
-          <p:nvPr/>
-        </p:nvSpPr>
-        <p:spPr>
-          <a:xfrm>
-            <a:off x="365760" y="4178808"/>
+          <p:cNvPr id="35" name="Text 33"/>
+          <p:cNvSpPr/>
+          <p:nvPr/>
+        </p:nvSpPr>
+        <p:spPr>
+          <a:xfrm>
+            <a:off x="365760" y="3721608"/>
             <a:ext cx="1097280" cy="420624"/>
           </a:xfrm>
           <a:prstGeom prst="rect">
@@ -38217,13 +38670,13 @@
       </p:sp>
       <p:sp>
         <p:nvSpPr>
-          <p:cNvPr id="44" name="Shape 42"/>
-          <p:cNvSpPr/>
-          <p:nvPr/>
-        </p:nvSpPr>
-        <p:spPr>
-          <a:xfrm>
-            <a:off x="1508760" y="4178808"/>
+          <p:cNvPr id="36" name="Shape 34"/>
+          <p:cNvSpPr/>
+          <p:nvPr/>
+        </p:nvSpPr>
+        <p:spPr>
+          <a:xfrm>
+            <a:off x="1508760" y="3721608"/>
             <a:ext cx="822960" cy="420624"/>
           </a:xfrm>
           <a:prstGeom prst="rect">
@@ -38251,13 +38704,13 @@
       </p:sp>
       <p:sp>
         <p:nvSpPr>
-          <p:cNvPr id="45" name="Text 43"/>
-          <p:cNvSpPr/>
-          <p:nvPr/>
-        </p:nvSpPr>
-        <p:spPr>
-          <a:xfrm>
-            <a:off x="1508760" y="4178808"/>
+          <p:cNvPr id="37" name="Text 35"/>
+          <p:cNvSpPr/>
+          <p:nvPr/>
+        </p:nvSpPr>
+        <p:spPr>
+          <a:xfrm>
+            <a:off x="1508760" y="3721608"/>
             <a:ext cx="822960" cy="420624"/>
           </a:xfrm>
           <a:prstGeom prst="rect">
@@ -38290,13 +38743,13 @@
       </p:sp>
       <p:sp>
         <p:nvSpPr>
-          <p:cNvPr id="46" name="Text 44"/>
-          <p:cNvSpPr/>
-          <p:nvPr/>
-        </p:nvSpPr>
-        <p:spPr>
-          <a:xfrm>
-            <a:off x="2359152" y="4178808"/>
+          <p:cNvPr id="38" name="Text 36"/>
+          <p:cNvSpPr/>
+          <p:nvPr/>
+        </p:nvSpPr>
+        <p:spPr>
+          <a:xfrm>
+            <a:off x="2359152" y="3721608"/>
             <a:ext cx="320040" cy="420624"/>
           </a:xfrm>
           <a:prstGeom prst="rect">
@@ -38329,13 +38782,13 @@
       </p:sp>
       <p:sp>
         <p:nvSpPr>
-          <p:cNvPr id="47" name="Shape 45"/>
-          <p:cNvSpPr/>
-          <p:nvPr/>
-        </p:nvSpPr>
-        <p:spPr>
-          <a:xfrm>
-            <a:off x="2706624" y="4178808"/>
+          <p:cNvPr id="39" name="Shape 37"/>
+          <p:cNvSpPr/>
+          <p:nvPr/>
+        </p:nvSpPr>
+        <p:spPr>
+          <a:xfrm>
+            <a:off x="2706624" y="3721608"/>
             <a:ext cx="1243584" cy="420624"/>
           </a:xfrm>
           <a:prstGeom prst="rect">
@@ -38363,13 +38816,13 @@
       </p:sp>
       <p:sp>
         <p:nvSpPr>
-          <p:cNvPr id="48" name="Text 46"/>
-          <p:cNvSpPr/>
-          <p:nvPr/>
-        </p:nvSpPr>
-        <p:spPr>
-          <a:xfrm>
-            <a:off x="2706624" y="4178808"/>
+          <p:cNvPr id="40" name="Text 38"/>
+          <p:cNvSpPr/>
+          <p:nvPr/>
+        </p:nvSpPr>
+        <p:spPr>
+          <a:xfrm>
+            <a:off x="2706624" y="3721608"/>
             <a:ext cx="1243584" cy="420624"/>
           </a:xfrm>
           <a:prstGeom prst="rect">
@@ -38402,13 +38855,13 @@
       </p:sp>
       <p:sp>
         <p:nvSpPr>
-          <p:cNvPr id="49" name="Text 47"/>
-          <p:cNvSpPr/>
-          <p:nvPr/>
-        </p:nvSpPr>
-        <p:spPr>
-          <a:xfrm>
-            <a:off x="3977640" y="4178808"/>
+          <p:cNvPr id="41" name="Text 39"/>
+          <p:cNvSpPr/>
+          <p:nvPr/>
+        </p:nvSpPr>
+        <p:spPr>
+          <a:xfrm>
+            <a:off x="3977640" y="3721608"/>
             <a:ext cx="320040" cy="420624"/>
           </a:xfrm>
           <a:prstGeom prst="rect">
@@ -38441,13 +38894,13 @@
       </p:sp>
       <p:sp>
         <p:nvSpPr>
-          <p:cNvPr id="50" name="Shape 48"/>
-          <p:cNvSpPr/>
-          <p:nvPr/>
-        </p:nvSpPr>
-        <p:spPr>
-          <a:xfrm>
-            <a:off x="4325112" y="4178808"/>
+          <p:cNvPr id="42" name="Shape 40"/>
+          <p:cNvSpPr/>
+          <p:nvPr/>
+        </p:nvSpPr>
+        <p:spPr>
+          <a:xfrm>
+            <a:off x="4325112" y="3721608"/>
             <a:ext cx="822960" cy="420624"/>
           </a:xfrm>
           <a:prstGeom prst="rect">
@@ -38475,13 +38928,13 @@
       </p:sp>
       <p:sp>
         <p:nvSpPr>
-          <p:cNvPr id="51" name="Text 49"/>
-          <p:cNvSpPr/>
-          <p:nvPr/>
-        </p:nvSpPr>
-        <p:spPr>
-          <a:xfrm>
-            <a:off x="4325112" y="4178808"/>
+          <p:cNvPr id="43" name="Text 41"/>
+          <p:cNvSpPr/>
+          <p:nvPr/>
+        </p:nvSpPr>
+        <p:spPr>
+          <a:xfrm>
+            <a:off x="4325112" y="3721608"/>
             <a:ext cx="822960" cy="420624"/>
           </a:xfrm>
           <a:prstGeom prst="rect">
@@ -38514,13 +38967,13 @@
       </p:sp>
       <p:sp>
         <p:nvSpPr>
-          <p:cNvPr id="52" name="Text 50"/>
-          <p:cNvSpPr/>
-          <p:nvPr/>
-        </p:nvSpPr>
-        <p:spPr>
-          <a:xfrm>
-            <a:off x="5221224" y="4178808"/>
+          <p:cNvPr id="44" name="Text 42"/>
+          <p:cNvSpPr/>
+          <p:nvPr/>
+        </p:nvSpPr>
+        <p:spPr>
+          <a:xfrm>
+            <a:off x="5221224" y="3721608"/>
             <a:ext cx="365760" cy="420624"/>
           </a:xfrm>
           <a:prstGeom prst="rect">
@@ -38553,13 +39006,13 @@
       </p:sp>
       <p:sp>
         <p:nvSpPr>
-          <p:cNvPr id="53" name="Shape 51"/>
-          <p:cNvSpPr/>
-          <p:nvPr/>
-        </p:nvSpPr>
-        <p:spPr>
-          <a:xfrm>
-            <a:off x="5632704" y="4178808"/>
+          <p:cNvPr id="45" name="Shape 43"/>
+          <p:cNvSpPr/>
+          <p:nvPr/>
+        </p:nvSpPr>
+        <p:spPr>
+          <a:xfrm>
+            <a:off x="5632704" y="3721608"/>
             <a:ext cx="2194560" cy="420624"/>
           </a:xfrm>
           <a:prstGeom prst="rect">
@@ -38580,13 +39033,13 @@
       </p:sp>
       <p:sp>
         <p:nvSpPr>
-          <p:cNvPr id="54" name="Text 52"/>
-          <p:cNvSpPr/>
-          <p:nvPr/>
-        </p:nvSpPr>
-        <p:spPr>
-          <a:xfrm>
-            <a:off x="5632704" y="4178808"/>
+          <p:cNvPr id="46" name="Text 44"/>
+          <p:cNvSpPr/>
+          <p:nvPr/>
+        </p:nvSpPr>
+        <p:spPr>
+          <a:xfrm>
+            <a:off x="5632704" y="3721608"/>
             <a:ext cx="2194560" cy="420624"/>
           </a:xfrm>
           <a:prstGeom prst="rect">
@@ -38611,7 +39064,7 @@
                 <a:ea typeface="Trebuchet MS" pitchFamily="34" charset="-122"/>
                 <a:cs typeface="Trebuchet MS" pitchFamily="34" charset="-120"/>
               </a:rPr>
-              <a:t>unlock</a:t>
+              <a:t>lock</a:t>
             </a:r>
             <a:endParaRPr lang="en-US" sz="1400" dirty="0"/>
           </a:p>
@@ -38903,7 +39356,7 @@
                 <a:ea typeface="Calibri" pitchFamily="34" charset="-122"/>
                 <a:cs typeface="Calibri" pitchFamily="34" charset="-120"/>
               </a:rPr>
-              <a:t>Word Labs  •  wordlabs.app  •  Root: 'lock' = to fasten or secure shut</a:t>
+              <a:t>Word Labs  •  wordlabs.app  •  Root: 'lock' = to fasten with a key; a fastening device</a:t>
             </a:r>
             <a:endParaRPr lang="en-US" sz="800" dirty="0"/>
           </a:p>
@@ -39015,7 +39468,7 @@
                 <a:ea typeface="Trebuchet MS" pitchFamily="34" charset="-122"/>
                 <a:cs typeface="Trebuchet MS" pitchFamily="34" charset="-120"/>
               </a:rPr>
-              <a:t>unlock</a:t>
+              <a:t>lock</a:t>
             </a:r>
             <a:endParaRPr lang="en-US" sz="1200" dirty="0"/>
           </a:p>
@@ -39081,7 +39534,7 @@
                 <a:ea typeface="Calibri" pitchFamily="34" charset="-122"/>
                 <a:cs typeface="Calibri" pitchFamily="34" charset="-120"/>
               </a:rPr>
-              <a:t>To open something that was locked, like a door with a key.</a:t>
+              <a:t>a device that fastens something shut, needing a key or code to open</a:t>
             </a:r>
             <a:endParaRPr lang="en-US" sz="1200" dirty="0"/>
           </a:p>
@@ -39154,7 +39607,7 @@
                 <a:ea typeface="Trebuchet MS" pitchFamily="34" charset="-122"/>
                 <a:cs typeface="Trebuchet MS" pitchFamily="34" charset="-120"/>
               </a:rPr>
-              <a:t>locked</a:t>
+              <a:t>locks</a:t>
             </a:r>
             <a:endParaRPr lang="en-US" sz="1200" dirty="0"/>
           </a:p>
@@ -39220,7 +39673,7 @@
                 <a:ea typeface="Calibri" pitchFamily="34" charset="-122"/>
                 <a:cs typeface="Calibri" pitchFamily="34" charset="-120"/>
               </a:rPr>
-              <a:t>When traffic is completely stuck and cannot move in any direction.</a:t>
+              <a:t>fastens shut, or devices that fasten things shut</a:t>
             </a:r>
             <a:endParaRPr lang="en-US" sz="1200" dirty="0"/>
           </a:p>
@@ -39293,7 +39746,7 @@
                 <a:ea typeface="Trebuchet MS" pitchFamily="34" charset="-122"/>
                 <a:cs typeface="Trebuchet MS" pitchFamily="34" charset="-120"/>
               </a:rPr>
-              <a:t>locking</a:t>
+              <a:t>locked</a:t>
             </a:r>
             <a:endParaRPr lang="en-US" sz="1200" dirty="0"/>
           </a:p>
@@ -39359,7 +39812,7 @@
                 <a:ea typeface="Calibri" pitchFamily="34" charset="-122"/>
                 <a:cs typeface="Calibri" pitchFamily="34" charset="-120"/>
               </a:rPr>
-              <a:t>The action of fastening something shut with a lock.</a:t>
+              <a:t>fastened shut with a lock</a:t>
             </a:r>
             <a:endParaRPr lang="en-US" sz="1200" dirty="0"/>
           </a:p>
@@ -39432,7 +39885,7 @@
                 <a:ea typeface="Trebuchet MS" pitchFamily="34" charset="-122"/>
                 <a:cs typeface="Trebuchet MS" pitchFamily="34" charset="-120"/>
               </a:rPr>
-              <a:t>lockout</a:t>
+              <a:t>locker</a:t>
             </a:r>
             <a:endParaRPr lang="en-US" sz="1200" dirty="0"/>
           </a:p>
@@ -39498,424 +39951,7 @@
                 <a:ea typeface="Calibri" pitchFamily="34" charset="-122"/>
                 <a:cs typeface="Calibri" pitchFamily="34" charset="-120"/>
               </a:rPr>
-              <a:t>A situation where nobody can move forward or agree, like a tie with no winner.</a:t>
-            </a:r>
-            <a:endParaRPr lang="en-US" sz="1200" dirty="0"/>
-          </a:p>
-        </p:txBody>
-      </p:sp>
-      <p:sp>
-        <p:nvSpPr>
-          <p:cNvPr id="27" name="Shape 25"/>
-          <p:cNvSpPr/>
-          <p:nvPr/>
-        </p:nvSpPr>
-        <p:spPr>
-          <a:xfrm>
-            <a:off x="365760" y="3310128"/>
-            <a:ext cx="2011680" cy="457200"/>
-          </a:xfrm>
-          <a:prstGeom prst="rect">
-            <a:avLst>
-              <a:gd name="adj" fmla="val 12000"/>
-            </a:avLst>
-          </a:prstGeom>
-          <a:solidFill>
-            <a:srgbClr val="EEF2FF"/>
-          </a:solidFill>
-          <a:ln w="12700">
-            <a:solidFill>
-              <a:srgbClr val="6366F1"/>
-            </a:solidFill>
-            <a:prstDash val="solid"/>
-          </a:ln>
-          <a:effectLst>
-            <a:outerShdw sx="100000" sy="100000" kx="0" ky="0" algn="bl" rotWithShape="0" blurRad="101600" dist="38100" dir="8100000">
-              <a:srgbClr val="000000">
-                <a:alpha val="12000"/>
-              </a:srgbClr>
-            </a:outerShdw>
-          </a:effectLst>
-        </p:spPr>
-      </p:sp>
-      <p:sp>
-        <p:nvSpPr>
-          <p:cNvPr id="28" name="Text 26"/>
-          <p:cNvSpPr/>
-          <p:nvPr/>
-        </p:nvSpPr>
-        <p:spPr>
-          <a:xfrm>
-            <a:off x="365760" y="3310128"/>
-            <a:ext cx="2011680" cy="457200"/>
-          </a:xfrm>
-          <a:prstGeom prst="rect">
-            <a:avLst/>
-          </a:prstGeom>
-          <a:noFill/>
-          <a:ln/>
-        </p:spPr>
-        <p:txBody>
-          <a:bodyPr wrap="square" lIns="0" tIns="0" rIns="0" bIns="0" rtlCol="0" anchor="ctr"/>
-          <a:lstStyle/>
-          <a:p>
-            <a:pPr algn="ctr" indent="0" marL="0">
-              <a:buNone/>
-            </a:pPr>
-            <a:r>
-              <a:rPr lang="en-US" sz="1200" b="1" dirty="0">
-                <a:solidFill>
-                  <a:srgbClr val="4338CA"/>
-                </a:solidFill>
-                <a:latin typeface="Trebuchet MS" pitchFamily="34" charset="0"/>
-                <a:ea typeface="Trebuchet MS" pitchFamily="34" charset="-122"/>
-                <a:cs typeface="Trebuchet MS" pitchFamily="34" charset="-120"/>
-              </a:rPr>
-              <a:t>deadlock</a:t>
-            </a:r>
-            <a:endParaRPr lang="en-US" sz="1200" dirty="0"/>
-          </a:p>
-        </p:txBody>
-      </p:sp>
-      <p:sp>
-        <p:nvSpPr>
-          <p:cNvPr id="29" name="Shape 27"/>
-          <p:cNvSpPr/>
-          <p:nvPr/>
-        </p:nvSpPr>
-        <p:spPr>
-          <a:xfrm>
-            <a:off x="2514600" y="3310128"/>
-            <a:ext cx="6263640" cy="457200"/>
-          </a:xfrm>
-          <a:prstGeom prst="rect">
-            <a:avLst>
-              <a:gd name="adj" fmla="val 12000"/>
-            </a:avLst>
-          </a:prstGeom>
-          <a:solidFill>
-            <a:srgbClr val="F8FAFC"/>
-          </a:solidFill>
-          <a:ln w="12700">
-            <a:solidFill>
-              <a:srgbClr val="E2E8F0"/>
-            </a:solidFill>
-            <a:prstDash val="solid"/>
-          </a:ln>
-        </p:spPr>
-      </p:sp>
-      <p:sp>
-        <p:nvSpPr>
-          <p:cNvPr id="30" name="Text 28"/>
-          <p:cNvSpPr/>
-          <p:nvPr/>
-        </p:nvSpPr>
-        <p:spPr>
-          <a:xfrm>
-            <a:off x="2651760" y="3310128"/>
-            <a:ext cx="6035040" cy="457200"/>
-          </a:xfrm>
-          <a:prstGeom prst="rect">
-            <a:avLst/>
-          </a:prstGeom>
-          <a:noFill/>
-          <a:ln/>
-        </p:spPr>
-        <p:txBody>
-          <a:bodyPr wrap="square" rtlCol="0" anchor="ctr"/>
-          <a:lstStyle/>
-          <a:p>
-            <a:pPr algn="l" indent="0" marL="0">
-              <a:buNone/>
-            </a:pPr>
-            <a:r>
-              <a:rPr lang="en-US" sz="1200" dirty="0">
-                <a:solidFill>
-                  <a:srgbClr val="0F172A"/>
-                </a:solidFill>
-                <a:latin typeface="Calibri" pitchFamily="34" charset="0"/>
-                <a:ea typeface="Calibri" pitchFamily="34" charset="-122"/>
-                <a:cs typeface="Calibri" pitchFamily="34" charset="-120"/>
-              </a:rPr>
-              <a:t>When someone is prevented from getting into a place because it is locked.</a:t>
-            </a:r>
-            <a:endParaRPr lang="en-US" sz="1200" dirty="0"/>
-          </a:p>
-        </p:txBody>
-      </p:sp>
-      <p:sp>
-        <p:nvSpPr>
-          <p:cNvPr id="31" name="Shape 29"/>
-          <p:cNvSpPr/>
-          <p:nvPr/>
-        </p:nvSpPr>
-        <p:spPr>
-          <a:xfrm>
-            <a:off x="365760" y="3840480"/>
-            <a:ext cx="2011680" cy="457200"/>
-          </a:xfrm>
-          <a:prstGeom prst="rect">
-            <a:avLst>
-              <a:gd name="adj" fmla="val 12000"/>
-            </a:avLst>
-          </a:prstGeom>
-          <a:solidFill>
-            <a:srgbClr val="EEF2FF"/>
-          </a:solidFill>
-          <a:ln w="12700">
-            <a:solidFill>
-              <a:srgbClr val="6366F1"/>
-            </a:solidFill>
-            <a:prstDash val="solid"/>
-          </a:ln>
-          <a:effectLst>
-            <a:outerShdw sx="100000" sy="100000" kx="0" ky="0" algn="bl" rotWithShape="0" blurRad="101600" dist="38100" dir="8100000">
-              <a:srgbClr val="000000">
-                <a:alpha val="12000"/>
-              </a:srgbClr>
-            </a:outerShdw>
-          </a:effectLst>
-        </p:spPr>
-      </p:sp>
-      <p:sp>
-        <p:nvSpPr>
-          <p:cNvPr id="32" name="Text 30"/>
-          <p:cNvSpPr/>
-          <p:nvPr/>
-        </p:nvSpPr>
-        <p:spPr>
-          <a:xfrm>
-            <a:off x="365760" y="3840480"/>
-            <a:ext cx="2011680" cy="457200"/>
-          </a:xfrm>
-          <a:prstGeom prst="rect">
-            <a:avLst/>
-          </a:prstGeom>
-          <a:noFill/>
-          <a:ln/>
-        </p:spPr>
-        <p:txBody>
-          <a:bodyPr wrap="square" lIns="0" tIns="0" rIns="0" bIns="0" rtlCol="0" anchor="ctr"/>
-          <a:lstStyle/>
-          <a:p>
-            <a:pPr algn="ctr" indent="0" marL="0">
-              <a:buNone/>
-            </a:pPr>
-            <a:r>
-              <a:rPr lang="en-US" sz="1200" b="1" dirty="0">
-                <a:solidFill>
-                  <a:srgbClr val="4338CA"/>
-                </a:solidFill>
-                <a:latin typeface="Trebuchet MS" pitchFamily="34" charset="0"/>
-                <a:ea typeface="Trebuchet MS" pitchFamily="34" charset="-122"/>
-                <a:cs typeface="Trebuchet MS" pitchFamily="34" charset="-120"/>
-              </a:rPr>
-              <a:t>padlock</a:t>
-            </a:r>
-            <a:endParaRPr lang="en-US" sz="1200" dirty="0"/>
-          </a:p>
-        </p:txBody>
-      </p:sp>
-      <p:sp>
-        <p:nvSpPr>
-          <p:cNvPr id="33" name="Shape 31"/>
-          <p:cNvSpPr/>
-          <p:nvPr/>
-        </p:nvSpPr>
-        <p:spPr>
-          <a:xfrm>
-            <a:off x="2514600" y="3840480"/>
-            <a:ext cx="6263640" cy="457200"/>
-          </a:xfrm>
-          <a:prstGeom prst="rect">
-            <a:avLst>
-              <a:gd name="adj" fmla="val 12000"/>
-            </a:avLst>
-          </a:prstGeom>
-          <a:solidFill>
-            <a:srgbClr val="F8FAFC"/>
-          </a:solidFill>
-          <a:ln w="12700">
-            <a:solidFill>
-              <a:srgbClr val="E2E8F0"/>
-            </a:solidFill>
-            <a:prstDash val="solid"/>
-          </a:ln>
-        </p:spPr>
-      </p:sp>
-      <p:sp>
-        <p:nvSpPr>
-          <p:cNvPr id="34" name="Text 32"/>
-          <p:cNvSpPr/>
-          <p:nvPr/>
-        </p:nvSpPr>
-        <p:spPr>
-          <a:xfrm>
-            <a:off x="2651760" y="3840480"/>
-            <a:ext cx="6035040" cy="457200"/>
-          </a:xfrm>
-          <a:prstGeom prst="rect">
-            <a:avLst/>
-          </a:prstGeom>
-          <a:noFill/>
-          <a:ln/>
-        </p:spPr>
-        <p:txBody>
-          <a:bodyPr wrap="square" rtlCol="0" anchor="ctr"/>
-          <a:lstStyle/>
-          <a:p>
-            <a:pPr algn="l" indent="0" marL="0">
-              <a:buNone/>
-            </a:pPr>
-            <a:r>
-              <a:rPr lang="en-US" sz="1200" dirty="0">
-                <a:solidFill>
-                  <a:srgbClr val="0F172A"/>
-                </a:solidFill>
-                <a:latin typeface="Calibri" pitchFamily="34" charset="0"/>
-                <a:ea typeface="Calibri" pitchFamily="34" charset="-122"/>
-                <a:cs typeface="Calibri" pitchFamily="34" charset="-120"/>
-              </a:rPr>
-              <a:t>A small portable lock that you can clip onto a gate, locker, or chain.</a:t>
-            </a:r>
-            <a:endParaRPr lang="en-US" sz="1200" dirty="0"/>
-          </a:p>
-        </p:txBody>
-      </p:sp>
-      <p:sp>
-        <p:nvSpPr>
-          <p:cNvPr id="35" name="Shape 33"/>
-          <p:cNvSpPr/>
-          <p:nvPr/>
-        </p:nvSpPr>
-        <p:spPr>
-          <a:xfrm>
-            <a:off x="365760" y="4370832"/>
-            <a:ext cx="2011680" cy="457200"/>
-          </a:xfrm>
-          <a:prstGeom prst="rect">
-            <a:avLst>
-              <a:gd name="adj" fmla="val 12000"/>
-            </a:avLst>
-          </a:prstGeom>
-          <a:solidFill>
-            <a:srgbClr val="EEF2FF"/>
-          </a:solidFill>
-          <a:ln w="12700">
-            <a:solidFill>
-              <a:srgbClr val="6366F1"/>
-            </a:solidFill>
-            <a:prstDash val="solid"/>
-          </a:ln>
-          <a:effectLst>
-            <a:outerShdw sx="100000" sy="100000" kx="0" ky="0" algn="bl" rotWithShape="0" blurRad="101600" dist="38100" dir="8100000">
-              <a:srgbClr val="000000">
-                <a:alpha val="12000"/>
-              </a:srgbClr>
-            </a:outerShdw>
-          </a:effectLst>
-        </p:spPr>
-      </p:sp>
-      <p:sp>
-        <p:nvSpPr>
-          <p:cNvPr id="36" name="Text 34"/>
-          <p:cNvSpPr/>
-          <p:nvPr/>
-        </p:nvSpPr>
-        <p:spPr>
-          <a:xfrm>
-            <a:off x="365760" y="4370832"/>
-            <a:ext cx="2011680" cy="457200"/>
-          </a:xfrm>
-          <a:prstGeom prst="rect">
-            <a:avLst/>
-          </a:prstGeom>
-          <a:noFill/>
-          <a:ln/>
-        </p:spPr>
-        <p:txBody>
-          <a:bodyPr wrap="square" lIns="0" tIns="0" rIns="0" bIns="0" rtlCol="0" anchor="ctr"/>
-          <a:lstStyle/>
-          <a:p>
-            <a:pPr algn="ctr" indent="0" marL="0">
-              <a:buNone/>
-            </a:pPr>
-            <a:r>
-              <a:rPr lang="en-US" sz="1200" b="1" dirty="0">
-                <a:solidFill>
-                  <a:srgbClr val="4338CA"/>
-                </a:solidFill>
-                <a:latin typeface="Trebuchet MS" pitchFamily="34" charset="0"/>
-                <a:ea typeface="Trebuchet MS" pitchFamily="34" charset="-122"/>
-                <a:cs typeface="Trebuchet MS" pitchFamily="34" charset="-120"/>
-              </a:rPr>
-              <a:t>gridlock</a:t>
-            </a:r>
-            <a:endParaRPr lang="en-US" sz="1200" dirty="0"/>
-          </a:p>
-        </p:txBody>
-      </p:sp>
-      <p:sp>
-        <p:nvSpPr>
-          <p:cNvPr id="37" name="Shape 35"/>
-          <p:cNvSpPr/>
-          <p:nvPr/>
-        </p:nvSpPr>
-        <p:spPr>
-          <a:xfrm>
-            <a:off x="2514600" y="4370832"/>
-            <a:ext cx="6263640" cy="457200"/>
-          </a:xfrm>
-          <a:prstGeom prst="rect">
-            <a:avLst>
-              <a:gd name="adj" fmla="val 12000"/>
-            </a:avLst>
-          </a:prstGeom>
-          <a:solidFill>
-            <a:srgbClr val="F8FAFC"/>
-          </a:solidFill>
-          <a:ln w="12700">
-            <a:solidFill>
-              <a:srgbClr val="E2E8F0"/>
-            </a:solidFill>
-            <a:prstDash val="solid"/>
-          </a:ln>
-        </p:spPr>
-      </p:sp>
-      <p:sp>
-        <p:nvSpPr>
-          <p:cNvPr id="38" name="Text 36"/>
-          <p:cNvSpPr/>
-          <p:nvPr/>
-        </p:nvSpPr>
-        <p:spPr>
-          <a:xfrm>
-            <a:off x="2651760" y="4370832"/>
-            <a:ext cx="6035040" cy="457200"/>
-          </a:xfrm>
-          <a:prstGeom prst="rect">
-            <a:avLst/>
-          </a:prstGeom>
-          <a:noFill/>
-          <a:ln/>
-        </p:spPr>
-        <p:txBody>
-          <a:bodyPr wrap="square" rtlCol="0" anchor="ctr"/>
-          <a:lstStyle/>
-          <a:p>
-            <a:pPr algn="l" indent="0" marL="0">
-              <a:buNone/>
-            </a:pPr>
-            <a:r>
-              <a:rPr lang="en-US" sz="1200" dirty="0">
-                <a:solidFill>
-                  <a:srgbClr val="0F172A"/>
-                </a:solidFill>
-                <a:latin typeface="Calibri" pitchFamily="34" charset="0"/>
-                <a:ea typeface="Calibri" pitchFamily="34" charset="-122"/>
-                <a:cs typeface="Calibri" pitchFamily="34" charset="-120"/>
-              </a:rPr>
-              <a:t>Fastened shut so it cannot be opened without a key.</a:t>
+              <a:t>a small lockable cupboard for storing personal belongings</a:t>
             </a:r>
             <a:endParaRPr lang="en-US" sz="1200" dirty="0"/>
           </a:p>
@@ -40207,7 +40243,7 @@
                 <a:ea typeface="Calibri" pitchFamily="34" charset="-122"/>
                 <a:cs typeface="Calibri" pitchFamily="34" charset="-120"/>
               </a:rPr>
-              <a:t>Word Labs  •  wordlabs.app  •  Root: 'lock' = to fasten or secure shut</a:t>
+              <a:t>Word Labs  •  wordlabs.app  •  Root: 'lock' = to fasten with a key; a fastening device</a:t>
             </a:r>
             <a:endParaRPr lang="en-US" sz="800" dirty="0"/>
           </a:p>
@@ -40410,7 +40446,7 @@
                 <a:ea typeface="Calibri" pitchFamily="34" charset="-122"/>
                 <a:cs typeface="Calibri" pitchFamily="34" charset="-120"/>
               </a:rPr>
-              <a:t>Remember to lock your locker before you go to the oval so none of your things go missing.</a:t>
+              <a:t>Please put a lock on the shed door.</a:t>
             </a:r>
             <a:endParaRPr lang="en-US" sz="1500" dirty="0"/>
           </a:p>
@@ -40574,7 +40610,7 @@
                 <a:ea typeface="Calibri" pitchFamily="34" charset="-122"/>
                 <a:cs typeface="Calibri" pitchFamily="34" charset="-120"/>
               </a:rPr>
-              <a:t>The heavy traffic caused a gridlock on the main road, and no cars could move for over an hour.</a:t>
+              <a:t>This door automatically locks at night.</a:t>
             </a:r>
             <a:endParaRPr lang="en-US" sz="1500" dirty="0"/>
           </a:p>
@@ -40738,7 +40774,7 @@
                 <a:ea typeface="Calibri" pitchFamily="34" charset="-122"/>
                 <a:cs typeface="Calibri" pitchFamily="34" charset="-120"/>
               </a:rPr>
-              <a:t>Mia used her key to unlock the gate and let everyone into the backyard for the party.</a:t>
+              <a:t>The door was locked, so we couldn't get in.</a:t>
             </a:r>
             <a:endParaRPr lang="en-US" sz="1500" dirty="0"/>
           </a:p>
